--- a/soutenance_copilote_financier.pptx
+++ b/soutenance_copilote_financier.pptx
@@ -2236,7 +2236,7 @@
         <p:spPr>
           <a:xfrm>
             <a:off x="548640" y="384048"/>
-            <a:ext cx="7315200" cy="320040"/>
+            <a:ext cx="8229600" cy="320040"/>
           </a:xfrm>
           <a:prstGeom prst="rect">
             <a:avLst/>
@@ -2254,13 +2254,13 @@
             <a:r>
               <a:rPr lang="en-US" sz="1200" b="1" spc="200" kern="0" dirty="0">
                 <a:solidFill>
-                  <a:srgbClr val="4A3AA7"/>
+                  <a:srgbClr val="EDA100"/>
                 </a:solidFill>
                 <a:latin typeface="Calibri" pitchFamily="34" charset="0"/>
                 <a:ea typeface="Calibri" pitchFamily="34" charset="-122"/>
                 <a:cs typeface="Calibri" pitchFamily="34" charset="-120"/>
               </a:rPr>
-              <a:t>COPILOTE FINANCIER — AXE C</a:t>
+              <a:t>COPILOTE FINANCIER — AXE TRANSVERSE</a:t>
             </a:r>
             <a:endParaRPr lang="en-US" sz="1200" dirty="0"/>
           </a:p>
@@ -2275,7 +2275,7 @@
         <p:spPr>
           <a:xfrm>
             <a:off x="548640" y="658368"/>
-            <a:ext cx="10058400" cy="822960"/>
+            <a:ext cx="10515600" cy="822960"/>
           </a:xfrm>
           <a:prstGeom prst="rect">
             <a:avLst/>
@@ -2291,7 +2291,7 @@
               <a:buNone/>
             </a:pPr>
             <a:r>
-              <a:rPr lang="en-US" sz="3000" b="1" dirty="0">
+              <a:rPr lang="en-US" sz="2800" b="1" dirty="0">
                 <a:solidFill>
                   <a:srgbClr val="1A1A19"/>
                 </a:solidFill>
@@ -2299,9 +2299,9 @@
                 <a:ea typeface="Cambria" pitchFamily="34" charset="-122"/>
                 <a:cs typeface="Cambria" pitchFamily="34" charset="-120"/>
               </a:rPr>
-              <a:t>L'optimisation des prix</a:t>
-            </a:r>
-            <a:endParaRPr lang="en-US" sz="3000" dirty="0"/>
+              <a:t>Signaux faibles : texte et réseau de vente</a:t>
+            </a:r>
+            <a:endParaRPr lang="en-US" sz="2800" dirty="0"/>
           </a:p>
         </p:txBody>
       </p:sp>
@@ -2313,8 +2313,8 @@
         </p:nvSpPr>
         <p:spPr>
           <a:xfrm>
-            <a:off x="548640" y="1691640"/>
-            <a:ext cx="6492240" cy="4572000"/>
+            <a:off x="548640" y="1600200"/>
+            <a:ext cx="6583680" cy="4663440"/>
           </a:xfrm>
           <a:prstGeom prst="rect">
             <a:avLst/>
@@ -2326,9 +2326,9 @@
           <a:bodyPr wrap="square" lIns="0" tIns="0" rIns="0" bIns="0" rtlCol="0" anchor="t"/>
           <a:lstStyle/>
           <a:p>
-            <a:pPr marL="228600" indent="-228600">
+            <a:pPr marL="203200" indent="-203200">
               <a:lnSpc>
-                <a:spcPct val="108000"/>
+                <a:spcPct val="106000"/>
               </a:lnSpc>
               <a:spcAft>
                 <a:spcPts val="1400"/>
@@ -2337,7 +2337,7 @@
               <a:buChar char="•"/>
             </a:pPr>
             <a:r>
-              <a:rPr lang="en-US" sz="1450" dirty="0">
+              <a:rPr lang="en-US" sz="1370" dirty="0">
                 <a:solidFill>
                   <a:srgbClr val="1A1A19"/>
                 </a:solidFill>
@@ -2345,14 +2345,14 @@
                 <a:ea typeface="Calibri" pitchFamily="34" charset="-122"/>
                 <a:cs typeface="Calibri" pitchFamily="34" charset="-120"/>
               </a:rPr>
-              <a:t>Modèle hédonique (prix = somme de caractéristiques valorisées séparément) sur 5 064 appartements vendus depuis 2016</a:t>
-            </a:r>
-            <a:endParaRPr lang="en-US" sz="1450" dirty="0"/>
-          </a:p>
-          <a:p>
-            <a:pPr marL="228600" indent="-228600">
+              <a:t>9 688 commentaires libres de vente : moteur de recherche par similarité (TF-IDF + cosinus)</a:t>
+            </a:r>
+            <a:endParaRPr lang="en-US" sz="1370" dirty="0"/>
+          </a:p>
+          <a:p>
+            <a:pPr marL="203200" indent="-203200">
               <a:lnSpc>
-                <a:spcPct val="108000"/>
+                <a:spcPct val="106000"/>
               </a:lnSpc>
               <a:spcAft>
                 <a:spcPts val="1400"/>
@@ -2361,7 +2361,7 @@
               <a:buChar char="•"/>
             </a:pPr>
             <a:r>
-              <a:rPr lang="en-US" sz="1450" dirty="0">
+              <a:rPr lang="en-US" sz="1370" dirty="0">
                 <a:solidFill>
                   <a:srgbClr val="1A1A19"/>
                 </a:solidFill>
@@ -2369,14 +2369,14 @@
                 <a:ea typeface="Calibri" pitchFamily="34" charset="-122"/>
                 <a:cs typeface="Calibri" pitchFamily="34" charset="-120"/>
               </a:rPr>
-              <a:t>Appliqué au stock : 24 lots sur 127 hors marché (16 sous-cotés, 8 surcotés)</a:t>
-            </a:r>
-            <a:endParaRPr lang="en-US" sz="1450" dirty="0"/>
-          </a:p>
-          <a:p>
-            <a:pPr marL="228600" indent="-228600">
+              <a:t>Prédiction du désistement par le texte, fuite contrôlée (314 commentaires écartés) : Naive Bayes F1 = 0,343, préféré à une régression logistique quasi muette</a:t>
+            </a:r>
+            <a:endParaRPr lang="en-US" sz="1370" dirty="0"/>
+          </a:p>
+          <a:p>
+            <a:pPr marL="203200" indent="-203200">
               <a:lnSpc>
-                <a:spcPct val="108000"/>
+                <a:spcPct val="106000"/>
               </a:lnSpc>
               <a:spcAft>
                 <a:spcPts val="1400"/>
@@ -2385,7 +2385,7 @@
               <a:buChar char="•"/>
             </a:pPr>
             <a:r>
-              <a:rPr lang="en-US" sz="1450" dirty="0">
+              <a:rPr lang="en-US" sz="1370" dirty="0">
                 <a:solidFill>
                   <a:srgbClr val="1A1A19"/>
                 </a:solidFill>
@@ -2393,14 +2393,14 @@
                 <a:ea typeface="Calibri" pitchFamily="34" charset="-122"/>
                 <a:cs typeface="Calibri" pitchFamily="34" charset="-120"/>
               </a:rPr>
-              <a:t>Élasticité prix-demande non significative en interne (p = 0,57, n = 95) → fixée prudemment à −1, valeur documentée, pas mesurée avec précision</a:t>
-            </a:r>
-            <a:endParaRPr lang="en-US" sz="1450" dirty="0"/>
-          </a:p>
-          <a:p>
-            <a:pPr marL="228600" indent="-228600">
+              <a:t>Divergence de Kullback-Leibler (écart entre distributions) : révèle un défaut de saisie sur une agence (90 % de motifs « autres »), pas un profil client</a:t>
+            </a:r>
+            <a:endParaRPr lang="en-US" sz="1370" dirty="0"/>
+          </a:p>
+          <a:p>
+            <a:pPr marL="203200" indent="-203200">
               <a:lnSpc>
-                <a:spcPct val="108000"/>
+                <a:spcPct val="106000"/>
               </a:lnSpc>
               <a:spcAft>
                 <a:spcPts val="1400"/>
@@ -2409,7 +2409,7 @@
               <a:buChar char="•"/>
             </a:pPr>
             <a:r>
-              <a:rPr lang="en-US" sz="1450" dirty="0">
+              <a:rPr lang="en-US" sz="1370" dirty="0">
                 <a:solidFill>
                   <a:srgbClr val="1A1A19"/>
                 </a:solidFill>
@@ -2417,9 +2417,9 @@
                 <a:ea typeface="Calibri" pitchFamily="34" charset="-122"/>
                 <a:cs typeface="Calibri" pitchFamily="34" charset="-120"/>
               </a:rPr>
-              <a:t>Résultat contre-intuitif : la remise optimale est un montant identique en euros sur tous les lots — donc un pourcentage plus fort sur les petits lots, à l'inverse de la pratique actuelle</a:t>
-            </a:r>
-            <a:endParaRPr lang="en-US" sz="1450" dirty="0"/>
+              <a:t>Réseau biparti vendeurs-opérations (209 vendeurs, 711 arêtes) : deux pivots concentrent 51,6 % des dossiers, désistement très contrasté (9,0 % vs 29,6 %)</a:t>
+            </a:r>
+            <a:endParaRPr lang="en-US" sz="1370" dirty="0"/>
           </a:p>
         </p:txBody>
       </p:sp>
@@ -2431,12 +2431,12 @@
         </p:nvSpPr>
         <p:spPr>
           <a:xfrm>
-            <a:off x="7315200" y="1691640"/>
-            <a:ext cx="4297680" cy="1417320"/>
+            <a:off x="7360920" y="1691640"/>
+            <a:ext cx="4251960" cy="1371600"/>
           </a:xfrm>
           <a:prstGeom prst="roundRect">
             <a:avLst>
-              <a:gd name="adj" fmla="val 5161"/>
+              <a:gd name="adj" fmla="val 5333"/>
             </a:avLst>
           </a:prstGeom>
           <a:solidFill>
@@ -2465,8 +2465,8 @@
         </p:nvSpPr>
         <p:spPr>
           <a:xfrm>
-            <a:off x="7424928" y="1783080"/>
-            <a:ext cx="4078224" cy="850392"/>
+            <a:off x="7470648" y="1764792"/>
+            <a:ext cx="4032504" cy="822960"/>
           </a:xfrm>
           <a:prstGeom prst="rect">
             <a:avLst/>
@@ -2482,17 +2482,17 @@
               <a:buNone/>
             </a:pPr>
             <a:r>
-              <a:rPr lang="en-US" sz="3000" b="1" dirty="0">
-                <a:solidFill>
-                  <a:srgbClr val="4A3AA7"/>
+              <a:rPr lang="en-US" sz="2800" b="1" dirty="0">
+                <a:solidFill>
+                  <a:srgbClr val="EDA100"/>
                 </a:solidFill>
                 <a:latin typeface="Cambria" pitchFamily="34" charset="0"/>
                 <a:ea typeface="Cambria" pitchFamily="34" charset="-122"/>
                 <a:cs typeface="Cambria" pitchFamily="34" charset="-120"/>
               </a:rPr>
-              <a:t>R² = 0,886</a:t>
-            </a:r>
-            <a:endParaRPr lang="en-US" sz="3000" dirty="0"/>
+              <a:t>F1 = 0,343</a:t>
+            </a:r>
+            <a:endParaRPr lang="en-US" sz="2800" dirty="0"/>
           </a:p>
         </p:txBody>
       </p:sp>
@@ -2504,8 +2504,8 @@
         </p:nvSpPr>
         <p:spPr>
           <a:xfrm>
-            <a:off x="7424928" y="2651760"/>
-            <a:ext cx="4078224" cy="384048"/>
+            <a:off x="7470648" y="2624328"/>
+            <a:ext cx="4032504" cy="384048"/>
           </a:xfrm>
           <a:prstGeom prst="rect">
             <a:avLst/>
@@ -2521,7 +2521,7 @@
               <a:buNone/>
             </a:pPr>
             <a:r>
-              <a:rPr lang="en-US" sz="1100" dirty="0">
+              <a:rPr lang="en-US" sz="1050" dirty="0">
                 <a:solidFill>
                   <a:srgbClr val="52514E"/>
                 </a:solidFill>
@@ -2529,9 +2529,9 @@
                 <a:ea typeface="Calibri" pitchFamily="34" charset="-122"/>
                 <a:cs typeface="Calibri" pitchFamily="34" charset="-120"/>
               </a:rPr>
-              <a:t>variance du prix expliquée, erreur type ≈ 11 %</a:t>
-            </a:r>
-            <a:endParaRPr lang="en-US" sz="1100" dirty="0"/>
+              <a:t>Naive Bayes, désistement prédit par le texte</a:t>
+            </a:r>
+            <a:endParaRPr lang="en-US" sz="1050" dirty="0"/>
           </a:p>
         </p:txBody>
       </p:sp>
@@ -2543,12 +2543,12 @@
         </p:nvSpPr>
         <p:spPr>
           <a:xfrm>
-            <a:off x="7315200" y="3291840"/>
-            <a:ext cx="4297680" cy="1417320"/>
+            <a:off x="7360920" y="3246120"/>
+            <a:ext cx="4251960" cy="1371600"/>
           </a:xfrm>
           <a:prstGeom prst="roundRect">
             <a:avLst>
-              <a:gd name="adj" fmla="val 5161"/>
+              <a:gd name="adj" fmla="val 5333"/>
             </a:avLst>
           </a:prstGeom>
           <a:solidFill>
@@ -2577,8 +2577,8 @@
         </p:nvSpPr>
         <p:spPr>
           <a:xfrm>
-            <a:off x="7424928" y="3383280"/>
-            <a:ext cx="4078224" cy="850392"/>
+            <a:off x="7470648" y="3319272"/>
+            <a:ext cx="4032504" cy="822960"/>
           </a:xfrm>
           <a:prstGeom prst="rect">
             <a:avLst/>
@@ -2594,17 +2594,17 @@
               <a:buNone/>
             </a:pPr>
             <a:r>
-              <a:rPr lang="en-US" sz="3000" b="1" dirty="0">
-                <a:solidFill>
-                  <a:srgbClr val="EDA100"/>
+              <a:rPr lang="en-US" sz="2800" b="1" dirty="0">
+                <a:solidFill>
+                  <a:srgbClr val="4A3AA7"/>
                 </a:solidFill>
                 <a:latin typeface="Cambria" pitchFamily="34" charset="0"/>
                 <a:ea typeface="Cambria" pitchFamily="34" charset="-122"/>
                 <a:cs typeface="Cambria" pitchFamily="34" charset="-120"/>
               </a:rPr>
-              <a:t>24 / 127</a:t>
-            </a:r>
-            <a:endParaRPr lang="en-US" sz="3000" dirty="0"/>
+              <a:t>51,6 %</a:t>
+            </a:r>
+            <a:endParaRPr lang="en-US" sz="2800" dirty="0"/>
           </a:p>
         </p:txBody>
       </p:sp>
@@ -2616,8 +2616,8 @@
         </p:nvSpPr>
         <p:spPr>
           <a:xfrm>
-            <a:off x="7424928" y="4251960"/>
-            <a:ext cx="4078224" cy="384048"/>
+            <a:off x="7470648" y="4178808"/>
+            <a:ext cx="4032504" cy="384048"/>
           </a:xfrm>
           <a:prstGeom prst="rect">
             <a:avLst/>
@@ -2633,7 +2633,7 @@
               <a:buNone/>
             </a:pPr>
             <a:r>
-              <a:rPr lang="en-US" sz="1100" dirty="0">
+              <a:rPr lang="en-US" sz="1050" dirty="0">
                 <a:solidFill>
                   <a:srgbClr val="52514E"/>
                 </a:solidFill>
@@ -2641,9 +2641,9 @@
                 <a:ea typeface="Calibri" pitchFamily="34" charset="-122"/>
                 <a:cs typeface="Calibri" pitchFamily="34" charset="-120"/>
               </a:rPr>
-              <a:t>lots du stock signalés hors marché</a:t>
-            </a:r>
-            <a:endParaRPr lang="en-US" sz="1100" dirty="0"/>
+              <a:t>des dossiers concentrés sur 2 vendeurs pivots</a:t>
+            </a:r>
+            <a:endParaRPr lang="en-US" sz="1050" dirty="0"/>
           </a:p>
         </p:txBody>
       </p:sp>
@@ -2655,12 +2655,12 @@
         </p:nvSpPr>
         <p:spPr>
           <a:xfrm>
-            <a:off x="7315200" y="4892040"/>
-            <a:ext cx="4297680" cy="1417320"/>
+            <a:off x="7360920" y="4800600"/>
+            <a:ext cx="4251960" cy="1371600"/>
           </a:xfrm>
           <a:prstGeom prst="roundRect">
             <a:avLst>
-              <a:gd name="adj" fmla="val 5161"/>
+              <a:gd name="adj" fmla="val 5333"/>
             </a:avLst>
           </a:prstGeom>
           <a:solidFill>
@@ -2689,8 +2689,8 @@
         </p:nvSpPr>
         <p:spPr>
           <a:xfrm>
-            <a:off x="7424928" y="4983480"/>
-            <a:ext cx="4078224" cy="850392"/>
+            <a:off x="7470648" y="4873752"/>
+            <a:ext cx="4032504" cy="822960"/>
           </a:xfrm>
           <a:prstGeom prst="rect">
             <a:avLst/>
@@ -2706,17 +2706,17 @@
               <a:buNone/>
             </a:pPr>
             <a:r>
-              <a:rPr lang="en-US" sz="3000" b="1" dirty="0">
-                <a:solidFill>
-                  <a:srgbClr val="2A78D6"/>
+              <a:rPr lang="en-US" sz="2000" b="1" dirty="0">
+                <a:solidFill>
+                  <a:srgbClr val="E34948"/>
                 </a:solidFill>
                 <a:latin typeface="Cambria" pitchFamily="34" charset="0"/>
                 <a:ea typeface="Cambria" pitchFamily="34" charset="-122"/>
                 <a:cs typeface="Cambria" pitchFamily="34" charset="-120"/>
               </a:rPr>
-              <a:t>≈ 23 k€</a:t>
-            </a:r>
-            <a:endParaRPr lang="en-US" sz="3000" dirty="0"/>
+              <a:t>9,0 % / 29,6 %</a:t>
+            </a:r>
+            <a:endParaRPr lang="en-US" sz="2000" dirty="0"/>
           </a:p>
         </p:txBody>
       </p:sp>
@@ -2728,8 +2728,8 @@
         </p:nvSpPr>
         <p:spPr>
           <a:xfrm>
-            <a:off x="7424928" y="5852160"/>
-            <a:ext cx="4078224" cy="384048"/>
+            <a:off x="7470648" y="5733288"/>
+            <a:ext cx="4032504" cy="384048"/>
           </a:xfrm>
           <a:prstGeom prst="rect">
             <a:avLst/>
@@ -2745,7 +2745,7 @@
               <a:buNone/>
             </a:pPr>
             <a:r>
-              <a:rPr lang="en-US" sz="1100" dirty="0">
+              <a:rPr lang="en-US" sz="1050" dirty="0">
                 <a:solidFill>
                   <a:srgbClr val="52514E"/>
                 </a:solidFill>
@@ -2753,9 +2753,9 @@
                 <a:ea typeface="Calibri" pitchFamily="34" charset="-122"/>
                 <a:cs typeface="Calibri" pitchFamily="34" charset="-120"/>
               </a:rPr>
-              <a:t>remise optimale, identique en euros par lot</a:t>
-            </a:r>
-            <a:endParaRPr lang="en-US" sz="1100" dirty="0"/>
+              <a:t>désistement : pivot interne vs prescripteur externe</a:t>
+            </a:r>
+            <a:endParaRPr lang="en-US" sz="1050" dirty="0"/>
           </a:p>
         </p:txBody>
       </p:sp>
@@ -2878,7 +2878,7 @@
         <p:spPr>
           <a:xfrm>
             <a:off x="548640" y="384048"/>
-            <a:ext cx="7315200" cy="320040"/>
+            <a:ext cx="8229600" cy="320040"/>
           </a:xfrm>
           <a:prstGeom prst="rect">
             <a:avLst/>
@@ -2933,7 +2933,7 @@
               <a:buNone/>
             </a:pPr>
             <a:r>
-              <a:rPr lang="en-US" sz="3000" b="1" dirty="0">
+              <a:rPr lang="en-US" sz="2800" b="1" dirty="0">
                 <a:solidFill>
                   <a:srgbClr val="1A1A19"/>
                 </a:solidFill>
@@ -2943,7 +2943,7 @@
               </a:rPr>
               <a:t>La plateforme : cinq pages pour la direction financière</a:t>
             </a:r>
-            <a:endParaRPr lang="en-US" sz="3000" dirty="0"/>
+            <a:endParaRPr lang="en-US" sz="2800" dirty="0"/>
           </a:p>
         </p:txBody>
       </p:sp>
@@ -2968,9 +2968,9 @@
           <a:bodyPr wrap="square" lIns="0" tIns="0" rIns="0" bIns="0" rtlCol="0" anchor="t"/>
           <a:lstStyle/>
           <a:p>
-            <a:pPr marL="228600" indent="-228600">
+            <a:pPr marL="203200" indent="-203200">
               <a:lnSpc>
-                <a:spcPct val="108000"/>
+                <a:spcPct val="106000"/>
               </a:lnSpc>
               <a:spcAft>
                 <a:spcPts val="1100"/>
@@ -2979,7 +2979,7 @@
               <a:buChar char="•"/>
             </a:pPr>
             <a:r>
-              <a:rPr lang="en-US" sz="1270" dirty="0">
+              <a:rPr lang="en-US" sz="1250" dirty="0">
                 <a:solidFill>
                   <a:srgbClr val="1A1A19"/>
                 </a:solidFill>
@@ -2987,14 +2987,14 @@
                 <a:ea typeface="Calibri" pitchFamily="34" charset="-122"/>
                 <a:cs typeface="Calibri" pitchFamily="34" charset="-120"/>
               </a:rPr>
-              <a:t>Vue d'ensemble : 147 opérations suivies, 421 lots en stock, rythme récent</a:t>
-            </a:r>
-            <a:endParaRPr lang="en-US" sz="1270" dirty="0"/>
-          </a:p>
-          <a:p>
-            <a:pPr marL="228600" indent="-228600">
+              <a:t>Vue d'ensemble : 147 opérations, 421 lots en stock</a:t>
+            </a:r>
+            <a:endParaRPr lang="en-US" sz="1250" dirty="0"/>
+          </a:p>
+          <a:p>
+            <a:pPr marL="203200" indent="-203200">
               <a:lnSpc>
-                <a:spcPct val="108000"/>
+                <a:spcPct val="106000"/>
               </a:lnSpc>
               <a:spcAft>
                 <a:spcPts val="1100"/>
@@ -3003,7 +3003,7 @@
               <a:buChar char="•"/>
             </a:pPr>
             <a:r>
-              <a:rPr lang="en-US" sz="1270" dirty="0">
+              <a:rPr lang="en-US" sz="1250" dirty="0">
                 <a:solidFill>
                   <a:srgbClr val="1A1A19"/>
                 </a:solidFill>
@@ -3011,14 +3011,14 @@
                 <a:ea typeface="Calibri" pitchFamily="34" charset="-122"/>
                 <a:cs typeface="Calibri" pitchFamily="34" charset="-120"/>
               </a:rPr>
-              <a:t>Alertes marge : 10 opérations en alerte sur 68 suffisamment engagées</a:t>
-            </a:r>
-            <a:endParaRPr lang="en-US" sz="1270" dirty="0"/>
-          </a:p>
-          <a:p>
-            <a:pPr marL="228600" indent="-228600">
+              <a:t>Alertes marge : 10 en alerte sur 68 suffisamment engagées</a:t>
+            </a:r>
+            <a:endParaRPr lang="en-US" sz="1250" dirty="0"/>
+          </a:p>
+          <a:p>
+            <a:pPr marL="203200" indent="-203200">
               <a:lnSpc>
-                <a:spcPct val="108000"/>
+                <a:spcPct val="106000"/>
               </a:lnSpc>
               <a:spcAft>
                 <a:spcPts val="1100"/>
@@ -3027,7 +3027,7 @@
               <a:buChar char="•"/>
             </a:pPr>
             <a:r>
-              <a:rPr lang="en-US" sz="1270" dirty="0">
+              <a:rPr lang="en-US" sz="1250" dirty="0">
                 <a:solidFill>
                   <a:srgbClr val="1A1A19"/>
                 </a:solidFill>
@@ -3035,14 +3035,14 @@
                 <a:ea typeface="Calibri" pitchFamily="34" charset="-122"/>
                 <a:cs typeface="Calibri" pitchFamily="34" charset="-120"/>
               </a:rPr>
-              <a:t>Rythme de vente : simulateur — un curseur de taux 2026 donne le rythme attendu</a:t>
-            </a:r>
-            <a:endParaRPr lang="en-US" sz="1270" dirty="0"/>
-          </a:p>
-          <a:p>
-            <a:pPr marL="228600" indent="-228600">
+              <a:t>Rythme de vente : simulateur de taux 2026</a:t>
+            </a:r>
+            <a:endParaRPr lang="en-US" sz="1250" dirty="0"/>
+          </a:p>
+          <a:p>
+            <a:pPr marL="203200" indent="-203200">
               <a:lnSpc>
-                <a:spcPct val="108000"/>
+                <a:spcPct val="106000"/>
               </a:lnSpc>
               <a:spcAft>
                 <a:spcPts val="1100"/>
@@ -3051,7 +3051,7 @@
               <a:buChar char="•"/>
             </a:pPr>
             <a:r>
-              <a:rPr lang="en-US" sz="1270" dirty="0">
+              <a:rPr lang="en-US" sz="1250" dirty="0">
                 <a:solidFill>
                   <a:srgbClr val="1A1A19"/>
                 </a:solidFill>
@@ -3059,14 +3059,14 @@
                 <a:ea typeface="Calibri" pitchFamily="34" charset="-122"/>
                 <a:cs typeface="Calibri" pitchFamily="34" charset="-120"/>
               </a:rPr>
-              <a:t>Pilotage des prix : lots hors marché + grille ajustée recommandée</a:t>
-            </a:r>
-            <a:endParaRPr lang="en-US" sz="1270" dirty="0"/>
-          </a:p>
-          <a:p>
-            <a:pPr marL="228600" indent="-228600">
+              <a:t>Pilotage des prix : lots hors marché + grille ajustée</a:t>
+            </a:r>
+            <a:endParaRPr lang="en-US" sz="1250" dirty="0"/>
+          </a:p>
+          <a:p>
+            <a:pPr marL="203200" indent="-203200">
               <a:lnSpc>
-                <a:spcPct val="108000"/>
+                <a:spcPct val="106000"/>
               </a:lnSpc>
               <a:spcAft>
                 <a:spcPts val="1100"/>
@@ -3075,7 +3075,7 @@
               <a:buChar char="•"/>
             </a:pPr>
             <a:r>
-              <a:rPr lang="en-US" sz="1270" dirty="0">
+              <a:rPr lang="en-US" sz="1250" dirty="0">
                 <a:solidFill>
                   <a:srgbClr val="1A1A19"/>
                 </a:solidFill>
@@ -3083,9 +3083,9 @@
                 <a:ea typeface="Calibri" pitchFamily="34" charset="-122"/>
                 <a:cs typeface="Calibri" pitchFamily="34" charset="-120"/>
               </a:rPr>
-              <a:t>Qualité commerciale : alerte de saisie par agence + recherche de dossiers similaires</a:t>
-            </a:r>
-            <a:endParaRPr lang="en-US" sz="1270" dirty="0"/>
+              <a:t>Qualité commerciale : alerte de saisie + recherche de dossiers</a:t>
+            </a:r>
+            <a:endParaRPr lang="en-US" sz="1250" dirty="0"/>
           </a:p>
         </p:txBody>
       </p:sp>
@@ -3341,7 +3341,7 @@
                 <a:ea typeface="Calibri" pitchFamily="34" charset="-122"/>
                 <a:cs typeface="Calibri" pitchFamily="34" charset="-120"/>
               </a:rPr>
-              <a:t>Leçon de conduite de projet : la première version parlait le langage des notebooks (F1, R²) — trop technique pour ses utilisateurs. Reconstruite en langage métier, sans jargon statistique à l'écran.</a:t>
+              <a:t>Leçon de conduite de projet : la première version parlait le vocabulaire des statistiques (F1, R²) — trop technique pour ses utilisateurs. Reconstruite en langage métier.</a:t>
             </a:r>
             <a:endParaRPr lang="en-US" sz="1300" dirty="0"/>
           </a:p>
@@ -3466,7 +3466,7 @@
         <p:spPr>
           <a:xfrm>
             <a:off x="548640" y="384048"/>
-            <a:ext cx="7315200" cy="320040"/>
+            <a:ext cx="8229600" cy="320040"/>
           </a:xfrm>
           <a:prstGeom prst="rect">
             <a:avLst/>
@@ -3521,7 +3521,7 @@
               <a:buNone/>
             </a:pPr>
             <a:r>
-              <a:rPr lang="en-US" sz="3000" b="1" dirty="0">
+              <a:rPr lang="en-US" sz="2800" b="1" dirty="0">
                 <a:solidFill>
                   <a:srgbClr val="1A1A19"/>
                 </a:solidFill>
@@ -3531,7 +3531,7 @@
               </a:rPr>
               <a:t>Un traducteur avant d'être un modélisateur</a:t>
             </a:r>
-            <a:endParaRPr lang="en-US" sz="3000" dirty="0"/>
+            <a:endParaRPr lang="en-US" sz="2800" dirty="0"/>
           </a:p>
         </p:txBody>
       </p:sp>
@@ -3750,7 +3750,7 @@
         <p:spPr>
           <a:xfrm>
             <a:off x="548640" y="384048"/>
-            <a:ext cx="7315200" cy="320040"/>
+            <a:ext cx="8229600" cy="320040"/>
           </a:xfrm>
           <a:prstGeom prst="rect">
             <a:avLst/>
@@ -3805,7 +3805,7 @@
               <a:buNone/>
             </a:pPr>
             <a:r>
-              <a:rPr lang="en-US" sz="3000" b="1" dirty="0">
+              <a:rPr lang="en-US" sz="2800" b="1" dirty="0">
                 <a:solidFill>
                   <a:srgbClr val="1A1A19"/>
                 </a:solidFill>
@@ -3815,7 +3815,7 @@
               </a:rPr>
               <a:t>Projet professionnel</a:t>
             </a:r>
-            <a:endParaRPr lang="en-US" sz="3000" dirty="0"/>
+            <a:endParaRPr lang="en-US" sz="2800" dirty="0"/>
           </a:p>
         </p:txBody>
       </p:sp>
@@ -3828,11 +3828,11 @@
         <p:spPr>
           <a:xfrm>
             <a:off x="548640" y="1691640"/>
-            <a:ext cx="3520440" cy="2834640"/>
+            <a:ext cx="3520440" cy="2743200"/>
           </a:xfrm>
           <a:prstGeom prst="roundRect">
             <a:avLst>
-              <a:gd name="adj" fmla="val 2581"/>
+              <a:gd name="adj" fmla="val 2667"/>
             </a:avLst>
           </a:prstGeom>
           <a:solidFill>
@@ -3960,7 +3960,7 @@
         <p:spPr>
           <a:xfrm>
             <a:off x="777240" y="3154680"/>
-            <a:ext cx="3063240" cy="1234440"/>
+            <a:ext cx="3063240" cy="1143000"/>
           </a:xfrm>
           <a:prstGeom prst="rect">
             <a:avLst/>
@@ -3987,7 +3987,7 @@
                 <a:ea typeface="Calibri" pitchFamily="34" charset="-122"/>
                 <a:cs typeface="Calibri" pitchFamily="34" charset="-120"/>
               </a:rPr>
-              <a:t>Reprises, migrations, interfaces de programmation, déduplication — la compétence sur laquelle j'ai le plus progressé.</a:t>
+              <a:t>Reprises, migrations, interfaces de programmation — la compétence sur laquelle j'ai le plus progressé.</a:t>
             </a:r>
             <a:endParaRPr lang="en-US" sz="1250" dirty="0"/>
           </a:p>
@@ -4002,11 +4002,11 @@
         <p:spPr>
           <a:xfrm>
             <a:off x="4297680" y="1691640"/>
-            <a:ext cx="3520440" cy="2834640"/>
+            <a:ext cx="3520440" cy="2743200"/>
           </a:xfrm>
           <a:prstGeom prst="roundRect">
             <a:avLst>
-              <a:gd name="adj" fmla="val 2581"/>
+              <a:gd name="adj" fmla="val 2667"/>
             </a:avLst>
           </a:prstGeom>
           <a:solidFill>
@@ -4134,7 +4134,7 @@
         <p:spPr>
           <a:xfrm>
             <a:off x="4526280" y="3154680"/>
-            <a:ext cx="3063240" cy="1234440"/>
+            <a:ext cx="3063240" cy="1143000"/>
           </a:xfrm>
           <a:prstGeom prst="rect">
             <a:avLst/>
@@ -4176,11 +4176,11 @@
         <p:spPr>
           <a:xfrm>
             <a:off x="8046720" y="1691640"/>
-            <a:ext cx="3520440" cy="2834640"/>
+            <a:ext cx="3520440" cy="2743200"/>
           </a:xfrm>
           <a:prstGeom prst="roundRect">
             <a:avLst>
-              <a:gd name="adj" fmla="val 2581"/>
+              <a:gd name="adj" fmla="val 2667"/>
             </a:avLst>
           </a:prstGeom>
           <a:solidFill>
@@ -4308,7 +4308,7 @@
         <p:spPr>
           <a:xfrm>
             <a:off x="8275320" y="3154680"/>
-            <a:ext cx="3063240" cy="1234440"/>
+            <a:ext cx="3063240" cy="1143000"/>
           </a:xfrm>
           <a:prstGeom prst="rect">
             <a:avLst/>
@@ -4335,7 +4335,7 @@
                 <a:ea typeface="Calibri" pitchFamily="34" charset="-122"/>
                 <a:cs typeface="Calibri" pitchFamily="34" charset="-120"/>
               </a:rPr>
-              <a:t>Traduire un besoin en spécification, puis un résultat en écran — ce qui décide si un livrable sert vraiment.</a:t>
+              <a:t>Traduire un besoin en spécification, puis un résultat en écran.</a:t>
             </a:r>
             <a:endParaRPr lang="en-US" sz="1250" dirty="0"/>
           </a:p>
@@ -4349,8 +4349,8 @@
         </p:nvSpPr>
         <p:spPr>
           <a:xfrm>
-            <a:off x="548640" y="4892040"/>
-            <a:ext cx="11064240" cy="822960"/>
+            <a:off x="548640" y="4709160"/>
+            <a:ext cx="11064240" cy="640080"/>
           </a:xfrm>
           <a:prstGeom prst="rect">
             <a:avLst/>
@@ -4374,7 +4374,7 @@
                 <a:ea typeface="Calibri" pitchFamily="34" charset="-122"/>
                 <a:cs typeface="Calibri" pitchFamily="34" charset="-120"/>
               </a:rPr>
-              <a:t>Cible à court terme : ingénieure données orientée aide à la décision — ou une direction data structurée, pour travailler enfin à plusieurs sur un même chantier.</a:t>
+              <a:t>Cible à court terme : ingénieure données orientée aide à la décision — ou une direction data structurée.</a:t>
             </a:r>
             <a:endParaRPr lang="en-US" sz="1450" dirty="0"/>
           </a:p>
@@ -4687,7 +4687,7 @@
         <p:spPr>
           <a:xfrm>
             <a:off x="548640" y="384048"/>
-            <a:ext cx="7315200" cy="320040"/>
+            <a:ext cx="8229600" cy="320040"/>
           </a:xfrm>
           <a:prstGeom prst="rect">
             <a:avLst/>
@@ -4711,7 +4711,7 @@
                 <a:ea typeface="Calibri" pitchFamily="34" charset="-122"/>
                 <a:cs typeface="Calibri" pitchFamily="34" charset="-120"/>
               </a:rPr>
-              <a:t>CONTEXTE</a:t>
+              <a:t>MISSION 1 — REPRISE DE DONNÉES (≈30 % DU TEMPS)</a:t>
             </a:r>
             <a:endParaRPr lang="en-US" sz="1200" dirty="0"/>
           </a:p>
@@ -4726,7 +4726,7 @@
         <p:spPr>
           <a:xfrm>
             <a:off x="548640" y="658368"/>
-            <a:ext cx="6126480" cy="822960"/>
+            <a:ext cx="10515600" cy="822960"/>
           </a:xfrm>
           <a:prstGeom prst="rect">
             <a:avLst/>
@@ -4742,7 +4742,7 @@
               <a:buNone/>
             </a:pPr>
             <a:r>
-              <a:rPr lang="en-US" sz="3000" b="1" dirty="0">
+              <a:rPr lang="en-US" sz="2500" b="1" dirty="0">
                 <a:solidFill>
                   <a:srgbClr val="1A1A19"/>
                 </a:solidFill>
@@ -4750,9 +4750,9 @@
                 <a:ea typeface="Cambria" pitchFamily="34" charset="-122"/>
                 <a:cs typeface="Cambria" pitchFamily="34" charset="-120"/>
               </a:rPr>
-              <a:t>Groupe Angelotti et l'enjeu de l'année</a:t>
-            </a:r>
-            <a:endParaRPr lang="en-US" sz="3000" dirty="0"/>
+              <a:t>Groupe Angelotti et la migration des opérations</a:t>
+            </a:r>
+            <a:endParaRPr lang="en-US" sz="2500" dirty="0"/>
           </a:p>
         </p:txBody>
       </p:sp>
@@ -4765,7 +4765,7 @@
         <p:spPr>
           <a:xfrm>
             <a:off x="548640" y="1600200"/>
-            <a:ext cx="5943600" cy="4572000"/>
+            <a:ext cx="6583680" cy="3108960"/>
           </a:xfrm>
           <a:prstGeom prst="rect">
             <a:avLst/>
@@ -4777,9 +4777,9 @@
           <a:bodyPr wrap="square" lIns="0" tIns="0" rIns="0" bIns="0" rtlCol="0" anchor="t"/>
           <a:lstStyle/>
           <a:p>
-            <a:pPr marL="228600" indent="-228600">
+            <a:pPr marL="203200" indent="-203200">
               <a:lnSpc>
-                <a:spcPct val="108000"/>
+                <a:spcPct val="106000"/>
               </a:lnSpc>
               <a:spcAft>
                 <a:spcPts val="1600"/>
@@ -4796,14 +4796,14 @@
                 <a:ea typeface="Calibri" pitchFamily="34" charset="-122"/>
                 <a:cs typeface="Calibri" pitchFamily="34" charset="-120"/>
               </a:rPr>
-              <a:t>Promoteur-aménageur immobilier, Occitanie et PACA, filiale de Nexity</a:t>
+              <a:t>Promoteur-aménageur, filiale Nexity — deux métiers, promotion et aménagement</a:t>
             </a:r>
             <a:endParaRPr lang="en-US" sz="1500" dirty="0"/>
           </a:p>
           <a:p>
-            <a:pPr marL="228600" indent="-228600">
+            <a:pPr marL="203200" indent="-203200">
               <a:lnSpc>
-                <a:spcPct val="108000"/>
+                <a:spcPct val="106000"/>
               </a:lnSpc>
               <a:spcAft>
                 <a:spcPts val="1600"/>
@@ -4820,14 +4820,14 @@
                 <a:ea typeface="Calibri" pitchFamily="34" charset="-122"/>
                 <a:cs typeface="Calibri" pitchFamily="34" charset="-120"/>
               </a:rPr>
-              <a:t>Deux métiers : promotion (construire, vendre) et aménagement (viabiliser du foncier)</a:t>
+              <a:t>Événement de l'année : l'ERP Grimmo remplacé par SPO — un changement de modèle de données</a:t>
             </a:r>
             <a:endParaRPr lang="en-US" sz="1500" dirty="0"/>
           </a:p>
           <a:p>
-            <a:pPr marL="228600" indent="-228600">
+            <a:pPr marL="203200" indent="-203200">
               <a:lnSpc>
-                <a:spcPct val="108000"/>
+                <a:spcPct val="106000"/>
               </a:lnSpc>
               <a:spcAft>
                 <a:spcPts val="1600"/>
@@ -4844,34 +4844,10 @@
                 <a:ea typeface="Calibri" pitchFamily="34" charset="-122"/>
                 <a:cs typeface="Calibri" pitchFamily="34" charset="-120"/>
               </a:rPr>
-              <a:t>Chaque opération = une société dédiée ; un budget posé à l'engagement, qui dérive ensuite</a:t>
+              <a:t>283 opérations à recréer : automatisation par API, validation par paliers (3 pilotes → 12 → masse), déploiement en « coquilles vides »</a:t>
             </a:r>
             <a:endParaRPr lang="en-US" sz="1500" dirty="0"/>
           </a:p>
-          <a:p>
-            <a:pPr marL="228600" indent="-228600">
-              <a:lnSpc>
-                <a:spcPct val="108000"/>
-              </a:lnSpc>
-              <a:spcAft>
-                <a:spcPts val="1600"/>
-              </a:spcAft>
-              <a:buSzPct val="100000"/>
-              <a:buChar char="•"/>
-            </a:pPr>
-            <a:r>
-              <a:rPr lang="en-US" sz="1500" dirty="0">
-                <a:solidFill>
-                  <a:srgbClr val="1A1A19"/>
-                </a:solidFill>
-                <a:latin typeface="Calibri" pitchFamily="34" charset="0"/>
-                <a:ea typeface="Calibri" pitchFamily="34" charset="-122"/>
-                <a:cs typeface="Calibri" pitchFamily="34" charset="-120"/>
-              </a:rPr>
-              <a:t>L'événement de l'année : le remplacement de l'ERP Grimmo par SPO — un changement de modèle de données, pas seulement d'outil</a:t>
-            </a:r>
-            <a:endParaRPr lang="en-US" sz="1500" dirty="0"/>
-          </a:p>
         </p:txBody>
       </p:sp>
       <p:sp>
@@ -4882,12 +4858,12 @@
         </p:nvSpPr>
         <p:spPr>
           <a:xfrm>
-            <a:off x="6830568" y="1618488"/>
-            <a:ext cx="4855464" cy="3008376"/>
+            <a:off x="7287768" y="1664208"/>
+            <a:ext cx="4398264" cy="1737360"/>
           </a:xfrm>
           <a:prstGeom prst="roundRect">
             <a:avLst>
-              <a:gd name="adj" fmla="val 1824"/>
+              <a:gd name="adj" fmla="val 3158"/>
             </a:avLst>
           </a:prstGeom>
           <a:solidFill>
@@ -4910,7 +4886,7 @@
       </p:sp>
       <p:pic>
         <p:nvPicPr>
-          <p:cNvPr id="6" name="Image 0" descr="/tmp/claude-0/-home-user-MemoireM2S2/bac073a6-7c4e-552a-9627-815aeb6fe82a/scratchpad/figs/p12-000.png">    </p:cNvPr>
+          <p:cNvPr id="6" name="Image 0" descr="/tmp/claude-0/-home-user-MemoireM2S2/bac073a6-7c4e-552a-9627-815aeb6fe82a/scratchpad/figs/p13-000.png">    </p:cNvPr>
           <p:cNvPicPr>
             <a:picLocks noChangeAspect="1"/>
           </p:cNvPicPr>
@@ -4923,8 +4899,8 @@
         </p:blipFill>
         <p:spPr>
           <a:xfrm>
-            <a:off x="6903720" y="1691640"/>
-            <a:ext cx="4709160" cy="2862072"/>
+            <a:off x="7360920" y="1737360"/>
+            <a:ext cx="4251960" cy="1591056"/>
           </a:xfrm>
           <a:prstGeom prst="rect">
             <a:avLst/>
@@ -4939,8 +4915,8 @@
         </p:nvSpPr>
         <p:spPr>
           <a:xfrm>
-            <a:off x="6903720" y="4645152"/>
-            <a:ext cx="4709160" cy="457200"/>
+            <a:off x="7360920" y="3364992"/>
+            <a:ext cx="4251960" cy="457200"/>
           </a:xfrm>
           <a:prstGeom prst="rect">
             <a:avLst/>
@@ -4956,7 +4932,7 @@
               <a:buNone/>
             </a:pPr>
             <a:r>
-              <a:rPr lang="en-US" sz="1000" i="1" dirty="0">
+              <a:rPr lang="en-US" sz="950" i="1" dirty="0">
                 <a:solidFill>
                   <a:srgbClr val="52514E"/>
                 </a:solidFill>
@@ -4964,45 +4940,157 @@
                 <a:ea typeface="Calibri" pitchFamily="34" charset="-122"/>
                 <a:cs typeface="Calibri" pitchFamily="34" charset="-120"/>
               </a:rPr>
-              <a:t>Fig. — Les outils du système d'information et la circulation de la donnée</a:t>
-            </a:r>
-            <a:endParaRPr lang="en-US" sz="1000" dirty="0"/>
-          </a:p>
-        </p:txBody>
-      </p:sp>
-      <p:sp>
-        <p:nvSpPr>
-          <p:cNvPr id="8" name="Text 5"/>
-          <p:cNvSpPr/>
-          <p:nvPr/>
-        </p:nvSpPr>
-        <p:spPr>
-          <a:xfrm>
-            <a:off x="548640" y="6510528"/>
-            <a:ext cx="5486400" cy="274320"/>
-          </a:xfrm>
-          <a:prstGeom prst="rect">
-            <a:avLst/>
-          </a:prstGeom>
-          <a:noFill/>
-          <a:ln/>
-        </p:spPr>
-        <p:txBody>
-          <a:bodyPr wrap="square" lIns="0" tIns="0" rIns="0" bIns="0" rtlCol="0" anchor="ctr"/>
-          <a:lstStyle/>
-          <a:p>
-            <a:pPr indent="0" marL="0">
-              <a:buNone/>
-            </a:pPr>
-            <a:r>
-              <a:rPr lang="en-US" sz="900" dirty="0">
-                <a:solidFill>
-                  <a:srgbClr val="9A9A95"/>
+              <a:t>Fig. — La séquence d'injection imposée par l'intégrité référentielle de l'ERP</a:t>
+            </a:r>
+            <a:endParaRPr lang="en-US" sz="950" dirty="0"/>
+          </a:p>
+        </p:txBody>
+      </p:sp>
+      <p:sp>
+        <p:nvSpPr>
+          <p:cNvPr id="8" name="Shape 5"/>
+          <p:cNvSpPr/>
+          <p:nvPr/>
+        </p:nvSpPr>
+        <p:spPr>
+          <a:xfrm>
+            <a:off x="548640" y="4892040"/>
+            <a:ext cx="3566160" cy="1234440"/>
+          </a:xfrm>
+          <a:prstGeom prst="roundRect">
+            <a:avLst>
+              <a:gd name="adj" fmla="val 5926"/>
+            </a:avLst>
+          </a:prstGeom>
+          <a:solidFill>
+            <a:srgbClr val="FFFFFF"/>
+          </a:solidFill>
+          <a:ln w="12700">
+            <a:solidFill>
+              <a:srgbClr val="E3E7EE"/>
+            </a:solidFill>
+            <a:prstDash val="solid"/>
+          </a:ln>
+          <a:effectLst>
+            <a:outerShdw sx="100000" sy="100000" kx="0" ky="0" algn="bl" rotWithShape="0" blurRad="76200" dist="25400" dir="5400000">
+              <a:srgbClr val="1A1A19">
+                <a:alpha val="12000"/>
+              </a:srgbClr>
+            </a:outerShdw>
+          </a:effectLst>
+        </p:spPr>
+      </p:sp>
+      <p:sp>
+        <p:nvSpPr>
+          <p:cNvPr id="9" name="Text 6"/>
+          <p:cNvSpPr/>
+          <p:nvPr/>
+        </p:nvSpPr>
+        <p:spPr>
+          <a:xfrm>
+            <a:off x="658368" y="4965192"/>
+            <a:ext cx="3346704" cy="685800"/>
+          </a:xfrm>
+          <a:prstGeom prst="rect">
+            <a:avLst/>
+          </a:prstGeom>
+          <a:noFill/>
+          <a:ln/>
+        </p:spPr>
+        <p:txBody>
+          <a:bodyPr wrap="square" lIns="0" tIns="0" rIns="0" bIns="0" rtlCol="0" anchor="b"/>
+          <a:lstStyle/>
+          <a:p>
+            <a:pPr algn="l" indent="0" marL="0">
+              <a:buNone/>
+            </a:pPr>
+            <a:r>
+              <a:rPr lang="en-US" sz="2800" b="1" dirty="0">
+                <a:solidFill>
+                  <a:srgbClr val="2A78D6"/>
+                </a:solidFill>
+                <a:latin typeface="Cambria" pitchFamily="34" charset="0"/>
+                <a:ea typeface="Cambria" pitchFamily="34" charset="-122"/>
+                <a:cs typeface="Cambria" pitchFamily="34" charset="-120"/>
+              </a:rPr>
+              <a:t>283</a:t>
+            </a:r>
+            <a:endParaRPr lang="en-US" sz="2800" dirty="0"/>
+          </a:p>
+        </p:txBody>
+      </p:sp>
+      <p:sp>
+        <p:nvSpPr>
+          <p:cNvPr id="10" name="Text 7"/>
+          <p:cNvSpPr/>
+          <p:nvPr/>
+        </p:nvSpPr>
+        <p:spPr>
+          <a:xfrm>
+            <a:off x="658368" y="5687568"/>
+            <a:ext cx="3346704" cy="384048"/>
+          </a:xfrm>
+          <a:prstGeom prst="rect">
+            <a:avLst/>
+          </a:prstGeom>
+          <a:noFill/>
+          <a:ln/>
+        </p:spPr>
+        <p:txBody>
+          <a:bodyPr wrap="square" lIns="0" tIns="0" rIns="0" bIns="0" rtlCol="0" anchor="t"/>
+          <a:lstStyle/>
+          <a:p>
+            <a:pPr algn="l" indent="0" marL="0">
+              <a:buNone/>
+            </a:pPr>
+            <a:r>
+              <a:rPr lang="en-US" sz="1050" dirty="0">
+                <a:solidFill>
+                  <a:srgbClr val="52514E"/>
                 </a:solidFill>
                 <a:latin typeface="Calibri" pitchFamily="34" charset="0"/>
                 <a:ea typeface="Calibri" pitchFamily="34" charset="-122"/>
                 <a:cs typeface="Calibri" pitchFamily="34" charset="-120"/>
               </a:rPr>
+              <a:t>opérations créées dans SPO</a:t>
+            </a:r>
+            <a:endParaRPr lang="en-US" sz="1050" dirty="0"/>
+          </a:p>
+        </p:txBody>
+      </p:sp>
+      <p:sp>
+        <p:nvSpPr>
+          <p:cNvPr id="11" name="Text 8"/>
+          <p:cNvSpPr/>
+          <p:nvPr/>
+        </p:nvSpPr>
+        <p:spPr>
+          <a:xfrm>
+            <a:off x="548640" y="6510528"/>
+            <a:ext cx="5486400" cy="274320"/>
+          </a:xfrm>
+          <a:prstGeom prst="rect">
+            <a:avLst/>
+          </a:prstGeom>
+          <a:noFill/>
+          <a:ln/>
+        </p:spPr>
+        <p:txBody>
+          <a:bodyPr wrap="square" lIns="0" tIns="0" rIns="0" bIns="0" rtlCol="0" anchor="ctr"/>
+          <a:lstStyle/>
+          <a:p>
+            <a:pPr indent="0" marL="0">
+              <a:buNone/>
+            </a:pPr>
+            <a:r>
+              <a:rPr lang="en-US" sz="900" dirty="0">
+                <a:solidFill>
+                  <a:srgbClr val="9A9A95"/>
+                </a:solidFill>
+                <a:latin typeface="Calibri" pitchFamily="34" charset="0"/>
+                <a:ea typeface="Calibri" pitchFamily="34" charset="-122"/>
+                <a:cs typeface="Calibri" pitchFamily="34" charset="-120"/>
+              </a:rPr>
               <a:t>Copilote Financier — Groupe Angelotti</a:t>
             </a:r>
             <a:endParaRPr lang="en-US" sz="900" dirty="0"/>
@@ -5011,7 +5099,7 @@
       </p:sp>
       <p:sp>
         <p:nvSpPr>
-          <p:cNvPr id="9" name="Text 6"/>
+          <p:cNvPr id="12" name="Text 9"/>
           <p:cNvSpPr/>
           <p:nvPr/>
         </p:nvSpPr>
@@ -5089,7 +5177,7 @@
         <p:spPr>
           <a:xfrm>
             <a:off x="548640" y="384048"/>
-            <a:ext cx="7315200" cy="320040"/>
+            <a:ext cx="8229600" cy="320040"/>
           </a:xfrm>
           <a:prstGeom prst="rect">
             <a:avLst/>
@@ -5113,7 +5201,7 @@
                 <a:ea typeface="Calibri" pitchFamily="34" charset="-122"/>
                 <a:cs typeface="Calibri" pitchFamily="34" charset="-120"/>
               </a:rPr>
-              <a:t>CHAPITRE 1 — REPRISE DE DONNÉES</a:t>
+              <a:t>MISSION 1 — REPRISE DE DONNÉES (≈30 % DU TEMPS)</a:t>
             </a:r>
             <a:endParaRPr lang="en-US" sz="1200" dirty="0"/>
           </a:p>
@@ -5128,7 +5216,7 @@
         <p:spPr>
           <a:xfrm>
             <a:off x="548640" y="658368"/>
-            <a:ext cx="6400800" cy="822960"/>
+            <a:ext cx="7315200" cy="822960"/>
           </a:xfrm>
           <a:prstGeom prst="rect">
             <a:avLst/>
@@ -5144,7 +5232,7 @@
               <a:buNone/>
             </a:pPr>
             <a:r>
-              <a:rPr lang="en-US" sz="3000" b="1" dirty="0">
+              <a:rPr lang="en-US" sz="2800" b="1" dirty="0">
                 <a:solidFill>
                   <a:srgbClr val="1A1A19"/>
                 </a:solidFill>
@@ -5152,9 +5240,9 @@
                 <a:ea typeface="Cambria" pitchFamily="34" charset="-122"/>
                 <a:cs typeface="Cambria" pitchFamily="34" charset="-120"/>
               </a:rPr>
-              <a:t>La migration des opérations</a:t>
-            </a:r>
-            <a:endParaRPr lang="en-US" sz="3000" dirty="0"/>
+              <a:t>La reprise des tiers</a:t>
+            </a:r>
+            <a:endParaRPr lang="en-US" sz="2800" dirty="0"/>
           </a:p>
         </p:txBody>
       </p:sp>
@@ -5167,7 +5255,7 @@
         <p:spPr>
           <a:xfrm>
             <a:off x="548640" y="1600200"/>
-            <a:ext cx="6400800" cy="4572000"/>
+            <a:ext cx="6309360" cy="3017520"/>
           </a:xfrm>
           <a:prstGeom prst="rect">
             <a:avLst/>
@@ -5179,9 +5267,9 @@
           <a:bodyPr wrap="square" lIns="0" tIns="0" rIns="0" bIns="0" rtlCol="0" anchor="t"/>
           <a:lstStyle/>
           <a:p>
-            <a:pPr marL="228600" indent="-228600">
+            <a:pPr marL="203200" indent="-203200">
               <a:lnSpc>
-                <a:spcPct val="108000"/>
+                <a:spcPct val="106000"/>
               </a:lnSpc>
               <a:spcAft>
                 <a:spcPts val="1400"/>
@@ -5190,7 +5278,7 @@
               <a:buChar char="•"/>
             </a:pPr>
             <a:r>
-              <a:rPr lang="en-US" sz="1500" dirty="0">
+              <a:rPr lang="en-US" sz="1450" dirty="0">
                 <a:solidFill>
                   <a:srgbClr val="1A1A19"/>
                 </a:solidFill>
@@ -5198,14 +5286,14 @@
                 <a:ea typeface="Calibri" pitchFamily="34" charset="-122"/>
                 <a:cs typeface="Calibri" pitchFamily="34" charset="-120"/>
               </a:rPr>
-              <a:t>283 opérations immobilières à recréer dans SPO — saisie manuelle exclue à cette échelle</a:t>
-            </a:r>
-            <a:endParaRPr lang="en-US" sz="1500" dirty="0"/>
-          </a:p>
-          <a:p>
-            <a:pPr marL="228600" indent="-228600">
+              <a:t>1 602 lignes de coordonnées (CRM) à confronter à ~13 000 tiers déjà présents dans SPO</a:t>
+            </a:r>
+            <a:endParaRPr lang="en-US" sz="1450" dirty="0"/>
+          </a:p>
+          <a:p>
+            <a:pPr marL="203200" indent="-203200">
               <a:lnSpc>
-                <a:spcPct val="108000"/>
+                <a:spcPct val="106000"/>
               </a:lnSpc>
               <a:spcAft>
                 <a:spcPts val="1400"/>
@@ -5214,7 +5302,7 @@
               <a:buChar char="•"/>
             </a:pPr>
             <a:r>
-              <a:rPr lang="en-US" sz="1500" dirty="0">
+              <a:rPr lang="en-US" sz="1450" dirty="0">
                 <a:solidFill>
                   <a:srgbClr val="1A1A19"/>
                 </a:solidFill>
@@ -5222,14 +5310,14 @@
                 <a:ea typeface="Calibri" pitchFamily="34" charset="-122"/>
                 <a:cs typeface="Calibri" pitchFamily="34" charset="-120"/>
               </a:rPr>
-              <a:t>Automatisation via API pour le volume ; traitement manuel pour les cas hors gabarit</a:t>
-            </a:r>
-            <a:endParaRPr lang="en-US" sz="1500" dirty="0"/>
-          </a:p>
-          <a:p>
-            <a:pPr marL="228600" indent="-228600">
+              <a:t>Cœur du dispositif : trois clés d'unicité différenciées (couple / personne physique / personne morale)</a:t>
+            </a:r>
+            <a:endParaRPr lang="en-US" sz="1450" dirty="0"/>
+          </a:p>
+          <a:p>
+            <a:pPr marL="203200" indent="-203200">
               <a:lnSpc>
-                <a:spcPct val="108000"/>
+                <a:spcPct val="106000"/>
               </a:lnSpc>
               <a:spcAft>
                 <a:spcPts val="1400"/>
@@ -5238,7 +5326,7 @@
               <a:buChar char="•"/>
             </a:pPr>
             <a:r>
-              <a:rPr lang="en-US" sz="1500" dirty="0">
+              <a:rPr lang="en-US" sz="1450" dirty="0">
                 <a:solidFill>
                   <a:srgbClr val="1A1A19"/>
                 </a:solidFill>
@@ -5246,33 +5334,9 @@
                 <a:ea typeface="Calibri" pitchFamily="34" charset="-122"/>
                 <a:cs typeface="Calibri" pitchFamily="34" charset="-120"/>
               </a:rPr>
-              <a:t>Deux règles ERP non documentées, découvertes en creusant les erreurs : ordre d'injection strict, identifiants jamais stables</a:t>
-            </a:r>
-            <a:endParaRPr lang="en-US" sz="1500" dirty="0"/>
-          </a:p>
-          <a:p>
-            <a:pPr marL="228600" indent="-228600">
-              <a:lnSpc>
-                <a:spcPct val="108000"/>
-              </a:lnSpc>
-              <a:spcAft>
-                <a:spcPts val="1400"/>
-              </a:spcAft>
-              <a:buSzPct val="100000"/>
-              <a:buChar char="•"/>
-            </a:pPr>
-            <a:r>
-              <a:rPr lang="en-US" sz="1500" dirty="0">
-                <a:solidFill>
-                  <a:srgbClr val="1A1A19"/>
-                </a:solidFill>
-                <a:latin typeface="Calibri" pitchFamily="34" charset="0"/>
-                <a:ea typeface="Calibri" pitchFamily="34" charset="-122"/>
-                <a:cs typeface="Calibri" pitchFamily="34" charset="-120"/>
-              </a:rPr>
-              <a:t>Déploiement en « coquilles vides » : la structure d'abord, le détail budgétaire ensuite, pour ne pas interrompre la facturation</a:t>
-            </a:r>
-            <a:endParaRPr lang="en-US" sz="1500" dirty="0"/>
+              <a:t>872 requêtes API pour les coordonnées des couples — toutes passées sans erreur</a:t>
+            </a:r>
+            <a:endParaRPr lang="en-US" sz="1450" dirty="0"/>
           </a:p>
         </p:txBody>
       </p:sp>
@@ -5284,12 +5348,12 @@
         </p:nvSpPr>
         <p:spPr>
           <a:xfrm>
-            <a:off x="7242048" y="2029968"/>
-            <a:ext cx="4443984" cy="1764792"/>
+            <a:off x="7013448" y="1664208"/>
+            <a:ext cx="4672584" cy="1856232"/>
           </a:xfrm>
           <a:prstGeom prst="roundRect">
             <a:avLst>
-              <a:gd name="adj" fmla="val 3109"/>
+              <a:gd name="adj" fmla="val 2956"/>
             </a:avLst>
           </a:prstGeom>
           <a:solidFill>
@@ -5312,7 +5376,7 @@
       </p:sp>
       <p:pic>
         <p:nvPicPr>
-          <p:cNvPr id="6" name="Image 0" descr="/tmp/claude-0/-home-user-MemoireM2S2/bac073a6-7c4e-552a-9627-815aeb6fe82a/scratchpad/figs/p13-000.png">    </p:cNvPr>
+          <p:cNvPr id="6" name="Image 0" descr="/tmp/claude-0/-home-user-MemoireM2S2/bac073a6-7c4e-552a-9627-815aeb6fe82a/scratchpad/figs/p18-000.png">    </p:cNvPr>
           <p:cNvPicPr>
             <a:picLocks noChangeAspect="1"/>
           </p:cNvPicPr>
@@ -5325,8 +5389,8 @@
         </p:blipFill>
         <p:spPr>
           <a:xfrm>
-            <a:off x="7315200" y="2103120"/>
-            <a:ext cx="4297680" cy="1618488"/>
+            <a:off x="7086600" y="1737360"/>
+            <a:ext cx="4526280" cy="1709928"/>
           </a:xfrm>
           <a:prstGeom prst="rect">
             <a:avLst/>
@@ -5335,57 +5399,18 @@
       </p:pic>
       <p:sp>
         <p:nvSpPr>
-          <p:cNvPr id="7" name="Text 4"/>
-          <p:cNvSpPr/>
-          <p:nvPr/>
-        </p:nvSpPr>
-        <p:spPr>
-          <a:xfrm>
-            <a:off x="7315200" y="3767328"/>
-            <a:ext cx="4297680" cy="457200"/>
-          </a:xfrm>
-          <a:prstGeom prst="rect">
-            <a:avLst/>
-          </a:prstGeom>
-          <a:noFill/>
-          <a:ln/>
-        </p:spPr>
-        <p:txBody>
-          <a:bodyPr wrap="square" lIns="0" tIns="0" rIns="0" bIns="0" rtlCol="0" anchor="ctr"/>
-          <a:lstStyle/>
-          <a:p>
-            <a:pPr indent="0" marL="0">
-              <a:buNone/>
-            </a:pPr>
-            <a:r>
-              <a:rPr lang="en-US" sz="1000" i="1" dirty="0">
-                <a:solidFill>
-                  <a:srgbClr val="52514E"/>
-                </a:solidFill>
-                <a:latin typeface="Calibri" pitchFamily="34" charset="0"/>
-                <a:ea typeface="Calibri" pitchFamily="34" charset="-122"/>
-                <a:cs typeface="Calibri" pitchFamily="34" charset="-120"/>
-              </a:rPr>
-              <a:t>Fig. — La séquence d'injection imposée par l'intégrité référentielle de l'ERP</a:t>
-            </a:r>
-            <a:endParaRPr lang="en-US" sz="1000" dirty="0"/>
-          </a:p>
-        </p:txBody>
-      </p:sp>
-      <p:sp>
-        <p:nvSpPr>
-          <p:cNvPr id="8" name="Shape 5"/>
-          <p:cNvSpPr/>
-          <p:nvPr/>
-        </p:nvSpPr>
-        <p:spPr>
-          <a:xfrm>
-            <a:off x="7315200" y="4434840"/>
-            <a:ext cx="4297680" cy="1234440"/>
+          <p:cNvPr id="7" name="Shape 4"/>
+          <p:cNvSpPr/>
+          <p:nvPr/>
+        </p:nvSpPr>
+        <p:spPr>
+          <a:xfrm>
+            <a:off x="548640" y="4709160"/>
+            <a:ext cx="3520440" cy="1417320"/>
           </a:xfrm>
           <a:prstGeom prst="roundRect">
             <a:avLst>
-              <a:gd name="adj" fmla="val 5926"/>
+              <a:gd name="adj" fmla="val 5161"/>
             </a:avLst>
           </a:prstGeom>
           <a:solidFill>
@@ -5408,14 +5433,14 @@
       </p:sp>
       <p:sp>
         <p:nvSpPr>
-          <p:cNvPr id="9" name="Text 6"/>
-          <p:cNvSpPr/>
-          <p:nvPr/>
-        </p:nvSpPr>
-        <p:spPr>
-          <a:xfrm>
-            <a:off x="7424928" y="4526280"/>
-            <a:ext cx="4078224" cy="667512"/>
+          <p:cNvPr id="8" name="Text 5"/>
+          <p:cNvSpPr/>
+          <p:nvPr/>
+        </p:nvSpPr>
+        <p:spPr>
+          <a:xfrm>
+            <a:off x="658368" y="4782312"/>
+            <a:ext cx="3300984" cy="868680"/>
           </a:xfrm>
           <a:prstGeom prst="rect">
             <a:avLst/>
@@ -5431,30 +5456,30 @@
               <a:buNone/>
             </a:pPr>
             <a:r>
-              <a:rPr lang="en-US" sz="3000" b="1" dirty="0">
-                <a:solidFill>
-                  <a:srgbClr val="2A78D6"/>
+              <a:rPr lang="en-US" sz="2800" b="1" dirty="0">
+                <a:solidFill>
+                  <a:srgbClr val="1BAF7A"/>
                 </a:solidFill>
                 <a:latin typeface="Cambria" pitchFamily="34" charset="0"/>
                 <a:ea typeface="Cambria" pitchFamily="34" charset="-122"/>
                 <a:cs typeface="Cambria" pitchFamily="34" charset="-120"/>
               </a:rPr>
-              <a:t>283</a:t>
-            </a:r>
-            <a:endParaRPr lang="en-US" sz="3000" dirty="0"/>
-          </a:p>
-        </p:txBody>
-      </p:sp>
-      <p:sp>
-        <p:nvSpPr>
-          <p:cNvPr id="10" name="Text 7"/>
-          <p:cNvSpPr/>
-          <p:nvPr/>
-        </p:nvSpPr>
-        <p:spPr>
-          <a:xfrm>
-            <a:off x="7424928" y="5212080"/>
-            <a:ext cx="4078224" cy="384048"/>
+              <a:t>1 434</a:t>
+            </a:r>
+            <a:endParaRPr lang="en-US" sz="2800" dirty="0"/>
+          </a:p>
+        </p:txBody>
+      </p:sp>
+      <p:sp>
+        <p:nvSpPr>
+          <p:cNvPr id="9" name="Text 6"/>
+          <p:cNvSpPr/>
+          <p:nvPr/>
+        </p:nvSpPr>
+        <p:spPr>
+          <a:xfrm>
+            <a:off x="658368" y="5687568"/>
+            <a:ext cx="3300984" cy="384048"/>
           </a:xfrm>
           <a:prstGeom prst="rect">
             <a:avLst/>
@@ -5470,7 +5495,7 @@
               <a:buNone/>
             </a:pPr>
             <a:r>
-              <a:rPr lang="en-US" sz="1100" dirty="0">
+              <a:rPr lang="en-US" sz="1050" dirty="0">
                 <a:solidFill>
                   <a:srgbClr val="52514E"/>
                 </a:solidFill>
@@ -5478,11 +5503,45 @@
                 <a:ea typeface="Calibri" pitchFamily="34" charset="-122"/>
                 <a:cs typeface="Calibri" pitchFamily="34" charset="-120"/>
               </a:rPr>
-              <a:t>opérations créées dans SPO à la fin du semestre</a:t>
-            </a:r>
-            <a:endParaRPr lang="en-US" sz="1100" dirty="0"/>
-          </a:p>
-        </p:txBody>
+              <a:t>tiers créés, zéro doublon détecté</a:t>
+            </a:r>
+            <a:endParaRPr lang="en-US" sz="1050" dirty="0"/>
+          </a:p>
+        </p:txBody>
+      </p:sp>
+      <p:sp>
+        <p:nvSpPr>
+          <p:cNvPr id="10" name="Shape 7"/>
+          <p:cNvSpPr/>
+          <p:nvPr/>
+        </p:nvSpPr>
+        <p:spPr>
+          <a:xfrm>
+            <a:off x="4251960" y="4709160"/>
+            <a:ext cx="3520440" cy="1417320"/>
+          </a:xfrm>
+          <a:prstGeom prst="roundRect">
+            <a:avLst>
+              <a:gd name="adj" fmla="val 5161"/>
+            </a:avLst>
+          </a:prstGeom>
+          <a:solidFill>
+            <a:srgbClr val="FFFFFF"/>
+          </a:solidFill>
+          <a:ln w="12700">
+            <a:solidFill>
+              <a:srgbClr val="E3E7EE"/>
+            </a:solidFill>
+            <a:prstDash val="solid"/>
+          </a:ln>
+          <a:effectLst>
+            <a:outerShdw sx="100000" sy="100000" kx="0" ky="0" algn="bl" rotWithShape="0" blurRad="76200" dist="25400" dir="5400000">
+              <a:srgbClr val="1A1A19">
+                <a:alpha val="12000"/>
+              </a:srgbClr>
+            </a:outerShdw>
+          </a:effectLst>
+        </p:spPr>
       </p:sp>
       <p:sp>
         <p:nvSpPr>
@@ -5492,31 +5551,221 @@
         </p:nvSpPr>
         <p:spPr>
           <a:xfrm>
-            <a:off x="548640" y="6510528"/>
-            <a:ext cx="5486400" cy="274320"/>
-          </a:xfrm>
-          <a:prstGeom prst="rect">
-            <a:avLst/>
-          </a:prstGeom>
-          <a:noFill/>
-          <a:ln/>
-        </p:spPr>
-        <p:txBody>
-          <a:bodyPr wrap="square" lIns="0" tIns="0" rIns="0" bIns="0" rtlCol="0" anchor="ctr"/>
-          <a:lstStyle/>
-          <a:p>
-            <a:pPr indent="0" marL="0">
-              <a:buNone/>
-            </a:pPr>
-            <a:r>
-              <a:rPr lang="en-US" sz="900" dirty="0">
-                <a:solidFill>
-                  <a:srgbClr val="9A9A95"/>
+            <a:off x="4361688" y="4782312"/>
+            <a:ext cx="3300984" cy="868680"/>
+          </a:xfrm>
+          <a:prstGeom prst="rect">
+            <a:avLst/>
+          </a:prstGeom>
+          <a:noFill/>
+          <a:ln/>
+        </p:spPr>
+        <p:txBody>
+          <a:bodyPr wrap="square" lIns="0" tIns="0" rIns="0" bIns="0" rtlCol="0" anchor="b"/>
+          <a:lstStyle/>
+          <a:p>
+            <a:pPr algn="l" indent="0" marL="0">
+              <a:buNone/>
+            </a:pPr>
+            <a:r>
+              <a:rPr lang="en-US" sz="2000" b="1" dirty="0">
+                <a:solidFill>
+                  <a:srgbClr val="2A78D6"/>
+                </a:solidFill>
+                <a:latin typeface="Cambria" pitchFamily="34" charset="0"/>
+                <a:ea typeface="Cambria" pitchFamily="34" charset="-122"/>
+                <a:cs typeface="Cambria" pitchFamily="34" charset="-120"/>
+              </a:rPr>
+              <a:t>881 / 462 / 91</a:t>
+            </a:r>
+            <a:endParaRPr lang="en-US" sz="2000" dirty="0"/>
+          </a:p>
+        </p:txBody>
+      </p:sp>
+      <p:sp>
+        <p:nvSpPr>
+          <p:cNvPr id="12" name="Text 9"/>
+          <p:cNvSpPr/>
+          <p:nvPr/>
+        </p:nvSpPr>
+        <p:spPr>
+          <a:xfrm>
+            <a:off x="4361688" y="5687568"/>
+            <a:ext cx="3300984" cy="384048"/>
+          </a:xfrm>
+          <a:prstGeom prst="rect">
+            <a:avLst/>
+          </a:prstGeom>
+          <a:noFill/>
+          <a:ln/>
+        </p:spPr>
+        <p:txBody>
+          <a:bodyPr wrap="square" lIns="0" tIns="0" rIns="0" bIns="0" rtlCol="0" anchor="t"/>
+          <a:lstStyle/>
+          <a:p>
+            <a:pPr algn="l" indent="0" marL="0">
+              <a:buNone/>
+            </a:pPr>
+            <a:r>
+              <a:rPr lang="en-US" sz="1050" dirty="0">
+                <a:solidFill>
+                  <a:srgbClr val="52514E"/>
                 </a:solidFill>
                 <a:latin typeface="Calibri" pitchFamily="34" charset="0"/>
                 <a:ea typeface="Calibri" pitchFamily="34" charset="-122"/>
                 <a:cs typeface="Calibri" pitchFamily="34" charset="-120"/>
               </a:rPr>
+              <a:t>couples / personnes physiques / sociétés</a:t>
+            </a:r>
+            <a:endParaRPr lang="en-US" sz="1050" dirty="0"/>
+          </a:p>
+        </p:txBody>
+      </p:sp>
+      <p:sp>
+        <p:nvSpPr>
+          <p:cNvPr id="13" name="Shape 10"/>
+          <p:cNvSpPr/>
+          <p:nvPr/>
+        </p:nvSpPr>
+        <p:spPr>
+          <a:xfrm>
+            <a:off x="7955280" y="4709160"/>
+            <a:ext cx="3611880" cy="1417320"/>
+          </a:xfrm>
+          <a:prstGeom prst="roundRect">
+            <a:avLst>
+              <a:gd name="adj" fmla="val 5161"/>
+            </a:avLst>
+          </a:prstGeom>
+          <a:solidFill>
+            <a:srgbClr val="FFFFFF"/>
+          </a:solidFill>
+          <a:ln w="12700">
+            <a:solidFill>
+              <a:srgbClr val="E3E7EE"/>
+            </a:solidFill>
+            <a:prstDash val="solid"/>
+          </a:ln>
+          <a:effectLst>
+            <a:outerShdw sx="100000" sy="100000" kx="0" ky="0" algn="bl" rotWithShape="0" blurRad="76200" dist="25400" dir="5400000">
+              <a:srgbClr val="1A1A19">
+                <a:alpha val="12000"/>
+              </a:srgbClr>
+            </a:outerShdw>
+          </a:effectLst>
+        </p:spPr>
+      </p:sp>
+      <p:sp>
+        <p:nvSpPr>
+          <p:cNvPr id="14" name="Text 11"/>
+          <p:cNvSpPr/>
+          <p:nvPr/>
+        </p:nvSpPr>
+        <p:spPr>
+          <a:xfrm>
+            <a:off x="8065008" y="4782312"/>
+            <a:ext cx="3392424" cy="868680"/>
+          </a:xfrm>
+          <a:prstGeom prst="rect">
+            <a:avLst/>
+          </a:prstGeom>
+          <a:noFill/>
+          <a:ln/>
+        </p:spPr>
+        <p:txBody>
+          <a:bodyPr wrap="square" lIns="0" tIns="0" rIns="0" bIns="0" rtlCol="0" anchor="b"/>
+          <a:lstStyle/>
+          <a:p>
+            <a:pPr algn="l" indent="0" marL="0">
+              <a:buNone/>
+            </a:pPr>
+            <a:r>
+              <a:rPr lang="en-US" sz="2800" b="1" dirty="0">
+                <a:solidFill>
+                  <a:srgbClr val="4A3AA7"/>
+                </a:solidFill>
+                <a:latin typeface="Cambria" pitchFamily="34" charset="0"/>
+                <a:ea typeface="Cambria" pitchFamily="34" charset="-122"/>
+                <a:cs typeface="Cambria" pitchFamily="34" charset="-120"/>
+              </a:rPr>
+              <a:t>872</a:t>
+            </a:r>
+            <a:endParaRPr lang="en-US" sz="2800" dirty="0"/>
+          </a:p>
+        </p:txBody>
+      </p:sp>
+      <p:sp>
+        <p:nvSpPr>
+          <p:cNvPr id="15" name="Text 12"/>
+          <p:cNvSpPr/>
+          <p:nvPr/>
+        </p:nvSpPr>
+        <p:spPr>
+          <a:xfrm>
+            <a:off x="8065008" y="5687568"/>
+            <a:ext cx="3392424" cy="384048"/>
+          </a:xfrm>
+          <a:prstGeom prst="rect">
+            <a:avLst/>
+          </a:prstGeom>
+          <a:noFill/>
+          <a:ln/>
+        </p:spPr>
+        <p:txBody>
+          <a:bodyPr wrap="square" lIns="0" tIns="0" rIns="0" bIns="0" rtlCol="0" anchor="t"/>
+          <a:lstStyle/>
+          <a:p>
+            <a:pPr algn="l" indent="0" marL="0">
+              <a:buNone/>
+            </a:pPr>
+            <a:r>
+              <a:rPr lang="en-US" sz="1050" dirty="0">
+                <a:solidFill>
+                  <a:srgbClr val="52514E"/>
+                </a:solidFill>
+                <a:latin typeface="Calibri" pitchFamily="34" charset="0"/>
+                <a:ea typeface="Calibri" pitchFamily="34" charset="-122"/>
+                <a:cs typeface="Calibri" pitchFamily="34" charset="-120"/>
+              </a:rPr>
+              <a:t>requêtes API, toutes passées sans erreur</a:t>
+            </a:r>
+            <a:endParaRPr lang="en-US" sz="1050" dirty="0"/>
+          </a:p>
+        </p:txBody>
+      </p:sp>
+      <p:sp>
+        <p:nvSpPr>
+          <p:cNvPr id="16" name="Text 13"/>
+          <p:cNvSpPr/>
+          <p:nvPr/>
+        </p:nvSpPr>
+        <p:spPr>
+          <a:xfrm>
+            <a:off x="548640" y="6510528"/>
+            <a:ext cx="5486400" cy="274320"/>
+          </a:xfrm>
+          <a:prstGeom prst="rect">
+            <a:avLst/>
+          </a:prstGeom>
+          <a:noFill/>
+          <a:ln/>
+        </p:spPr>
+        <p:txBody>
+          <a:bodyPr wrap="square" lIns="0" tIns="0" rIns="0" bIns="0" rtlCol="0" anchor="ctr"/>
+          <a:lstStyle/>
+          <a:p>
+            <a:pPr indent="0" marL="0">
+              <a:buNone/>
+            </a:pPr>
+            <a:r>
+              <a:rPr lang="en-US" sz="900" dirty="0">
+                <a:solidFill>
+                  <a:srgbClr val="9A9A95"/>
+                </a:solidFill>
+                <a:latin typeface="Calibri" pitchFamily="34" charset="0"/>
+                <a:ea typeface="Calibri" pitchFamily="34" charset="-122"/>
+                <a:cs typeface="Calibri" pitchFamily="34" charset="-120"/>
+              </a:rPr>
               <a:t>Copilote Financier — Groupe Angelotti</a:t>
             </a:r>
             <a:endParaRPr lang="en-US" sz="900" dirty="0"/>
@@ -5525,7 +5774,7 @@
       </p:sp>
       <p:sp>
         <p:nvSpPr>
-          <p:cNvPr id="12" name="Text 9"/>
+          <p:cNvPr id="17" name="Text 14"/>
           <p:cNvSpPr/>
           <p:nvPr/>
         </p:nvSpPr>
@@ -5576,7 +5825,7 @@
     <p:bg>
       <p:bgPr>
         <a:solidFill>
-          <a:srgbClr val="FFFFFF"/>
+          <a:srgbClr val="17223B"/>
         </a:solidFill>
       </p:bgPr>
     </p:bg>
@@ -5602,8 +5851,8 @@
         </p:nvSpPr>
         <p:spPr>
           <a:xfrm>
-            <a:off x="548640" y="384048"/>
-            <a:ext cx="7315200" cy="320040"/>
+            <a:off x="1097280" y="2286000"/>
+            <a:ext cx="9966960" cy="1371600"/>
           </a:xfrm>
           <a:prstGeom prst="rect">
             <a:avLst/>
@@ -5615,11 +5864,135 @@
           <a:bodyPr wrap="square" lIns="0" tIns="0" rIns="0" bIns="0" rtlCol="0" anchor="ctr"/>
           <a:lstStyle/>
           <a:p>
-            <a:pPr indent="0" marL="0">
-              <a:buNone/>
-            </a:pPr>
-            <a:r>
-              <a:rPr lang="en-US" sz="1200" b="1" spc="200" kern="0" dirty="0">
+            <a:pPr algn="ctr" indent="0" marL="0">
+              <a:lnSpc>
+                <a:spcPct val="115000"/>
+              </a:lnSpc>
+              <a:buNone/>
+            </a:pPr>
+            <a:r>
+              <a:rPr lang="en-US" sz="2600" dirty="0">
+                <a:solidFill>
+                  <a:srgbClr val="CADCFC"/>
+                </a:solidFill>
+                <a:latin typeface="Cambria" pitchFamily="34" charset="0"/>
+                <a:ea typeface="Cambria" pitchFamily="34" charset="-122"/>
+                <a:cs typeface="Cambria" pitchFamily="34" charset="-120"/>
+              </a:rPr>
+              <a:t>Les deux reprises répondent à une question :</a:t>
+            </a:r>
+            <a:endParaRPr lang="en-US" sz="2600" dirty="0"/>
+          </a:p>
+          <a:p>
+            <a:pPr algn="ctr" indent="0" marL="0">
+              <a:lnSpc>
+                <a:spcPct val="115000"/>
+              </a:lnSpc>
+              <a:buNone/>
+            </a:pPr>
+            <a:r>
+              <a:rPr lang="en-US" sz="2600" dirty="0">
+                <a:solidFill>
+                  <a:srgbClr val="CADCFC"/>
+                </a:solidFill>
+                <a:latin typeface="Cambria" pitchFamily="34" charset="0"/>
+                <a:ea typeface="Cambria" pitchFamily="34" charset="-122"/>
+                <a:cs typeface="Cambria" pitchFamily="34" charset="-120"/>
+              </a:rPr>
+              <a:t>la donnée est-elle bien arrivée ?</a:t>
+            </a:r>
+            <a:endParaRPr lang="en-US" sz="2600" dirty="0"/>
+          </a:p>
+        </p:txBody>
+      </p:sp>
+      <p:sp>
+        <p:nvSpPr>
+          <p:cNvPr id="3" name="Text 1"/>
+          <p:cNvSpPr/>
+          <p:nvPr/>
+        </p:nvSpPr>
+        <p:spPr>
+          <a:xfrm>
+            <a:off x="1097280" y="3749040"/>
+            <a:ext cx="9966960" cy="1371600"/>
+          </a:xfrm>
+          <a:prstGeom prst="rect">
+            <a:avLst/>
+          </a:prstGeom>
+          <a:noFill/>
+          <a:ln/>
+        </p:spPr>
+        <p:txBody>
+          <a:bodyPr wrap="square" lIns="0" tIns="0" rIns="0" bIns="0" rtlCol="0" anchor="ctr"/>
+          <a:lstStyle/>
+          <a:p>
+            <a:pPr algn="ctr" indent="0" marL="0">
+              <a:lnSpc>
+                <a:spcPct val="115000"/>
+              </a:lnSpc>
+              <a:buNone/>
+            </a:pPr>
+            <a:r>
+              <a:rPr lang="en-US" sz="2600" b="1" dirty="0">
+                <a:solidFill>
+                  <a:srgbClr val="FFFFFF"/>
+                </a:solidFill>
+                <a:latin typeface="Cambria" pitchFamily="34" charset="0"/>
+                <a:ea typeface="Cambria" pitchFamily="34" charset="-122"/>
+                <a:cs typeface="Cambria" pitchFamily="34" charset="-120"/>
+              </a:rPr>
+              <a:t>Le socle reconstitué permet de se poser une question différente :</a:t>
+            </a:r>
+            <a:endParaRPr lang="en-US" sz="2600" dirty="0"/>
+          </a:p>
+          <a:p>
+            <a:pPr algn="ctr" indent="0" marL="0">
+              <a:lnSpc>
+                <a:spcPct val="115000"/>
+              </a:lnSpc>
+              <a:buNone/>
+            </a:pPr>
+            <a:r>
+              <a:rPr lang="en-US" sz="2600" b="1" dirty="0">
+                <a:solidFill>
+                  <a:srgbClr val="FFFFFF"/>
+                </a:solidFill>
+                <a:latin typeface="Cambria" pitchFamily="34" charset="0"/>
+                <a:ea typeface="Cambria" pitchFamily="34" charset="-122"/>
+                <a:cs typeface="Cambria" pitchFamily="34" charset="-120"/>
+              </a:rPr>
+              <a:t>que peut-on en tirer pour la décision ?</a:t>
+            </a:r>
+            <a:endParaRPr lang="en-US" sz="2600" dirty="0"/>
+          </a:p>
+        </p:txBody>
+      </p:sp>
+      <p:sp>
+        <p:nvSpPr>
+          <p:cNvPr id="4" name="Text 2"/>
+          <p:cNvSpPr/>
+          <p:nvPr/>
+        </p:nvSpPr>
+        <p:spPr>
+          <a:xfrm>
+            <a:off x="1097280" y="5257800"/>
+            <a:ext cx="9966960" cy="457200"/>
+          </a:xfrm>
+          <a:prstGeom prst="rect">
+            <a:avLst/>
+          </a:prstGeom>
+          <a:noFill/>
+          <a:ln/>
+        </p:spPr>
+        <p:txBody>
+          <a:bodyPr wrap="square" lIns="0" tIns="0" rIns="0" bIns="0" rtlCol="0" anchor="ctr"/>
+          <a:lstStyle/>
+          <a:p>
+            <a:pPr algn="ctr" indent="0" marL="0">
+              <a:buNone/>
+            </a:pPr>
+            <a:r>
+              <a:rPr lang="en-US" sz="1400" b="1" spc="200" kern="0" dirty="0">
                 <a:solidFill>
                   <a:srgbClr val="2A78D6"/>
                 </a:solidFill>
@@ -5627,534 +6000,9 @@
                 <a:ea typeface="Calibri" pitchFamily="34" charset="-122"/>
                 <a:cs typeface="Calibri" pitchFamily="34" charset="-120"/>
               </a:rPr>
-              <a:t>CHAPITRE 1 — REPRISE DE DONNÉES</a:t>
-            </a:r>
-            <a:endParaRPr lang="en-US" sz="1200" dirty="0"/>
-          </a:p>
-        </p:txBody>
-      </p:sp>
-      <p:sp>
-        <p:nvSpPr>
-          <p:cNvPr id="3" name="Text 1"/>
-          <p:cNvSpPr/>
-          <p:nvPr/>
-        </p:nvSpPr>
-        <p:spPr>
-          <a:xfrm>
-            <a:off x="548640" y="658368"/>
-            <a:ext cx="10058400" cy="822960"/>
-          </a:xfrm>
-          <a:prstGeom prst="rect">
-            <a:avLst/>
-          </a:prstGeom>
-          <a:noFill/>
-          <a:ln/>
-        </p:spPr>
-        <p:txBody>
-          <a:bodyPr wrap="square" lIns="0" tIns="0" rIns="0" bIns="0" rtlCol="0" anchor="ctr"/>
-          <a:lstStyle/>
-          <a:p>
-            <a:pPr indent="0" marL="0">
-              <a:buNone/>
-            </a:pPr>
-            <a:r>
-              <a:rPr lang="en-US" sz="3000" b="1" dirty="0">
-                <a:solidFill>
-                  <a:srgbClr val="1A1A19"/>
-                </a:solidFill>
-                <a:latin typeface="Cambria" pitchFamily="34" charset="0"/>
-                <a:ea typeface="Cambria" pitchFamily="34" charset="-122"/>
-                <a:cs typeface="Cambria" pitchFamily="34" charset="-120"/>
-              </a:rPr>
-              <a:t>La reprise des tiers : le problème du doublon</a:t>
-            </a:r>
-            <a:endParaRPr lang="en-US" sz="3000" dirty="0"/>
-          </a:p>
-        </p:txBody>
-      </p:sp>
-      <p:sp>
-        <p:nvSpPr>
-          <p:cNvPr id="4" name="Text 2"/>
-          <p:cNvSpPr/>
-          <p:nvPr/>
-        </p:nvSpPr>
-        <p:spPr>
-          <a:xfrm>
-            <a:off x="548640" y="1691640"/>
-            <a:ext cx="6675120" cy="3291840"/>
-          </a:xfrm>
-          <a:prstGeom prst="rect">
-            <a:avLst/>
-          </a:prstGeom>
-          <a:noFill/>
-          <a:ln/>
-        </p:spPr>
-        <p:txBody>
-          <a:bodyPr wrap="square" lIns="0" tIns="0" rIns="0" bIns="0" rtlCol="0" anchor="t"/>
-          <a:lstStyle/>
-          <a:p>
-            <a:pPr marL="228600" indent="-228600">
-              <a:lnSpc>
-                <a:spcPct val="108000"/>
-              </a:lnSpc>
-              <a:spcAft>
-                <a:spcPts val="1600"/>
-              </a:spcAft>
-              <a:buSzPct val="100000"/>
-              <a:buChar char="•"/>
-            </a:pPr>
-            <a:r>
-              <a:rPr lang="en-US" sz="1600" dirty="0">
-                <a:solidFill>
-                  <a:srgbClr val="1A1A19"/>
-                </a:solidFill>
-                <a:latin typeface="Calibri" pitchFamily="34" charset="0"/>
-                <a:ea typeface="Calibri" pitchFamily="34" charset="-122"/>
-                <a:cs typeface="Calibri" pitchFamily="34" charset="-120"/>
-              </a:rPr>
-              <a:t>Second semestre : reconstituer le référentiel client (« tiers » dans SPO)</a:t>
-            </a:r>
-            <a:endParaRPr lang="en-US" sz="1600" dirty="0"/>
-          </a:p>
-          <a:p>
-            <a:pPr marL="228600" indent="-228600">
-              <a:lnSpc>
-                <a:spcPct val="108000"/>
-              </a:lnSpc>
-              <a:spcAft>
-                <a:spcPts val="1600"/>
-              </a:spcAft>
-              <a:buSzPct val="100000"/>
-              <a:buChar char="•"/>
-            </a:pPr>
-            <a:r>
-              <a:rPr lang="en-US" sz="1600" dirty="0">
-                <a:solidFill>
-                  <a:srgbClr val="1A1A19"/>
-                </a:solidFill>
-                <a:latin typeface="Calibri" pitchFamily="34" charset="0"/>
-                <a:ea typeface="Calibri" pitchFamily="34" charset="-122"/>
-                <a:cs typeface="Calibri" pitchFamily="34" charset="-120"/>
-              </a:rPr>
-              <a:t>Matière première : 1 557 lignes de ventes + 1 602 lignes de coordonnées, issues du CRM Vadimm</a:t>
-            </a:r>
-            <a:endParaRPr lang="en-US" sz="1600" dirty="0"/>
-          </a:p>
-          <a:p>
-            <a:pPr marL="228600" indent="-228600">
-              <a:lnSpc>
-                <a:spcPct val="108000"/>
-              </a:lnSpc>
-              <a:spcAft>
-                <a:spcPts val="1600"/>
-              </a:spcAft>
-              <a:buSzPct val="100000"/>
-              <a:buChar char="•"/>
-            </a:pPr>
-            <a:r>
-              <a:rPr lang="en-US" sz="1600" dirty="0">
-                <a:solidFill>
-                  <a:srgbClr val="1A1A19"/>
-                </a:solidFill>
-                <a:latin typeface="Calibri" pitchFamily="34" charset="0"/>
-                <a:ea typeface="Calibri" pitchFamily="34" charset="-122"/>
-                <a:cs typeface="Calibri" pitchFamily="34" charset="-120"/>
-              </a:rPr>
-              <a:t>Le piège : une ligne décrit un achat, pas un client — un client fidèle apparaît plusieurs fois</a:t>
-            </a:r>
-            <a:endParaRPr lang="en-US" sz="1600" dirty="0"/>
-          </a:p>
-          <a:p>
-            <a:pPr marL="228600" indent="-228600">
-              <a:lnSpc>
-                <a:spcPct val="108000"/>
-              </a:lnSpc>
-              <a:spcAft>
-                <a:spcPts val="1600"/>
-              </a:spcAft>
-              <a:buSzPct val="100000"/>
-              <a:buChar char="•"/>
-            </a:pPr>
-            <a:r>
-              <a:rPr lang="en-US" sz="1600" dirty="0">
-                <a:solidFill>
-                  <a:srgbClr val="1A1A19"/>
-                </a:solidFill>
-                <a:latin typeface="Calibri" pitchFamily="34" charset="0"/>
-                <a:ea typeface="Calibri" pitchFamily="34" charset="-122"/>
-                <a:cs typeface="Calibri" pitchFamily="34" charset="-120"/>
-              </a:rPr>
-              <a:t>SPO n'était pas vide : environ 13 000 tiers déjà présents</a:t>
-            </a:r>
-            <a:endParaRPr lang="en-US" sz="1600" dirty="0"/>
-          </a:p>
-        </p:txBody>
-      </p:sp>
-      <p:sp>
-        <p:nvSpPr>
-          <p:cNvPr id="5" name="Shape 3"/>
-          <p:cNvSpPr/>
-          <p:nvPr/>
-        </p:nvSpPr>
-        <p:spPr>
-          <a:xfrm>
-            <a:off x="7498080" y="1691640"/>
-            <a:ext cx="4114800" cy="1371600"/>
-          </a:xfrm>
-          <a:prstGeom prst="roundRect">
-            <a:avLst>
-              <a:gd name="adj" fmla="val 5333"/>
-            </a:avLst>
-          </a:prstGeom>
-          <a:solidFill>
-            <a:srgbClr val="FFFFFF"/>
-          </a:solidFill>
-          <a:ln w="12700">
-            <a:solidFill>
-              <a:srgbClr val="E3E7EE"/>
-            </a:solidFill>
-            <a:prstDash val="solid"/>
-          </a:ln>
-          <a:effectLst>
-            <a:outerShdw sx="100000" sy="100000" kx="0" ky="0" algn="bl" rotWithShape="0" blurRad="76200" dist="25400" dir="5400000">
-              <a:srgbClr val="1A1A19">
-                <a:alpha val="12000"/>
-              </a:srgbClr>
-            </a:outerShdw>
-          </a:effectLst>
-        </p:spPr>
-      </p:sp>
-      <p:sp>
-        <p:nvSpPr>
-          <p:cNvPr id="6" name="Text 4"/>
-          <p:cNvSpPr/>
-          <p:nvPr/>
-        </p:nvSpPr>
-        <p:spPr>
-          <a:xfrm>
-            <a:off x="7607808" y="1783080"/>
-            <a:ext cx="3895344" cy="804672"/>
-          </a:xfrm>
-          <a:prstGeom prst="rect">
-            <a:avLst/>
-          </a:prstGeom>
-          <a:noFill/>
-          <a:ln/>
-        </p:spPr>
-        <p:txBody>
-          <a:bodyPr wrap="square" lIns="0" tIns="0" rIns="0" bIns="0" rtlCol="0" anchor="b"/>
-          <a:lstStyle/>
-          <a:p>
-            <a:pPr algn="l" indent="0" marL="0">
-              <a:buNone/>
-            </a:pPr>
-            <a:r>
-              <a:rPr lang="en-US" sz="3000" b="1" dirty="0">
-                <a:solidFill>
-                  <a:srgbClr val="4A3AA7"/>
-                </a:solidFill>
-                <a:latin typeface="Cambria" pitchFamily="34" charset="0"/>
-                <a:ea typeface="Cambria" pitchFamily="34" charset="-122"/>
-                <a:cs typeface="Cambria" pitchFamily="34" charset="-120"/>
-              </a:rPr>
-              <a:t>1 602</a:t>
-            </a:r>
-            <a:endParaRPr lang="en-US" sz="3000" dirty="0"/>
-          </a:p>
-        </p:txBody>
-      </p:sp>
-      <p:sp>
-        <p:nvSpPr>
-          <p:cNvPr id="7" name="Text 5"/>
-          <p:cNvSpPr/>
-          <p:nvPr/>
-        </p:nvSpPr>
-        <p:spPr>
-          <a:xfrm>
-            <a:off x="7607808" y="2606040"/>
-            <a:ext cx="3895344" cy="384048"/>
-          </a:xfrm>
-          <a:prstGeom prst="rect">
-            <a:avLst/>
-          </a:prstGeom>
-          <a:noFill/>
-          <a:ln/>
-        </p:spPr>
-        <p:txBody>
-          <a:bodyPr wrap="square" lIns="0" tIns="0" rIns="0" bIns="0" rtlCol="0" anchor="t"/>
-          <a:lstStyle/>
-          <a:p>
-            <a:pPr algn="l" indent="0" marL="0">
-              <a:buNone/>
-            </a:pPr>
-            <a:r>
-              <a:rPr lang="en-US" sz="1100" dirty="0">
-                <a:solidFill>
-                  <a:srgbClr val="52514E"/>
-                </a:solidFill>
-                <a:latin typeface="Calibri" pitchFamily="34" charset="0"/>
-                <a:ea typeface="Calibri" pitchFamily="34" charset="-122"/>
-                <a:cs typeface="Calibri" pitchFamily="34" charset="-120"/>
-              </a:rPr>
-              <a:t>lignes de coordonnées, brutes, à trier</a:t>
-            </a:r>
-            <a:endParaRPr lang="en-US" sz="1100" dirty="0"/>
-          </a:p>
-        </p:txBody>
-      </p:sp>
-      <p:sp>
-        <p:nvSpPr>
-          <p:cNvPr id="8" name="Shape 6"/>
-          <p:cNvSpPr/>
-          <p:nvPr/>
-        </p:nvSpPr>
-        <p:spPr>
-          <a:xfrm>
-            <a:off x="7498080" y="3246120"/>
-            <a:ext cx="4114800" cy="1371600"/>
-          </a:xfrm>
-          <a:prstGeom prst="roundRect">
-            <a:avLst>
-              <a:gd name="adj" fmla="val 5333"/>
-            </a:avLst>
-          </a:prstGeom>
-          <a:solidFill>
-            <a:srgbClr val="FFFFFF"/>
-          </a:solidFill>
-          <a:ln w="12700">
-            <a:solidFill>
-              <a:srgbClr val="E3E7EE"/>
-            </a:solidFill>
-            <a:prstDash val="solid"/>
-          </a:ln>
-          <a:effectLst>
-            <a:outerShdw sx="100000" sy="100000" kx="0" ky="0" algn="bl" rotWithShape="0" blurRad="76200" dist="25400" dir="5400000">
-              <a:srgbClr val="1A1A19">
-                <a:alpha val="12000"/>
-              </a:srgbClr>
-            </a:outerShdw>
-          </a:effectLst>
-        </p:spPr>
-      </p:sp>
-      <p:sp>
-        <p:nvSpPr>
-          <p:cNvPr id="9" name="Text 7"/>
-          <p:cNvSpPr/>
-          <p:nvPr/>
-        </p:nvSpPr>
-        <p:spPr>
-          <a:xfrm>
-            <a:off x="7607808" y="3337560"/>
-            <a:ext cx="3895344" cy="804672"/>
-          </a:xfrm>
-          <a:prstGeom prst="rect">
-            <a:avLst/>
-          </a:prstGeom>
-          <a:noFill/>
-          <a:ln/>
-        </p:spPr>
-        <p:txBody>
-          <a:bodyPr wrap="square" lIns="0" tIns="0" rIns="0" bIns="0" rtlCol="0" anchor="b"/>
-          <a:lstStyle/>
-          <a:p>
-            <a:pPr algn="l" indent="0" marL="0">
-              <a:buNone/>
-            </a:pPr>
-            <a:r>
-              <a:rPr lang="en-US" sz="3000" b="1" dirty="0">
-                <a:solidFill>
-                  <a:srgbClr val="EDA100"/>
-                </a:solidFill>
-                <a:latin typeface="Cambria" pitchFamily="34" charset="0"/>
-                <a:ea typeface="Cambria" pitchFamily="34" charset="-122"/>
-                <a:cs typeface="Cambria" pitchFamily="34" charset="-120"/>
-              </a:rPr>
-              <a:t>≈ 13 000</a:t>
-            </a:r>
-            <a:endParaRPr lang="en-US" sz="3000" dirty="0"/>
-          </a:p>
-        </p:txBody>
-      </p:sp>
-      <p:sp>
-        <p:nvSpPr>
-          <p:cNvPr id="10" name="Text 8"/>
-          <p:cNvSpPr/>
-          <p:nvPr/>
-        </p:nvSpPr>
-        <p:spPr>
-          <a:xfrm>
-            <a:off x="7607808" y="4160520"/>
-            <a:ext cx="3895344" cy="384048"/>
-          </a:xfrm>
-          <a:prstGeom prst="rect">
-            <a:avLst/>
-          </a:prstGeom>
-          <a:noFill/>
-          <a:ln/>
-        </p:spPr>
-        <p:txBody>
-          <a:bodyPr wrap="square" lIns="0" tIns="0" rIns="0" bIns="0" rtlCol="0" anchor="t"/>
-          <a:lstStyle/>
-          <a:p>
-            <a:pPr algn="l" indent="0" marL="0">
-              <a:buNone/>
-            </a:pPr>
-            <a:r>
-              <a:rPr lang="en-US" sz="1100" dirty="0">
-                <a:solidFill>
-                  <a:srgbClr val="52514E"/>
-                </a:solidFill>
-                <a:latin typeface="Calibri" pitchFamily="34" charset="0"/>
-                <a:ea typeface="Calibri" pitchFamily="34" charset="-122"/>
-                <a:cs typeface="Calibri" pitchFamily="34" charset="-120"/>
-              </a:rPr>
-              <a:t>tiers déjà créés dans SPO avant l'import</a:t>
-            </a:r>
-            <a:endParaRPr lang="en-US" sz="1100" dirty="0"/>
-          </a:p>
-        </p:txBody>
-      </p:sp>
-      <p:sp>
-        <p:nvSpPr>
-          <p:cNvPr id="11" name="Shape 9"/>
-          <p:cNvSpPr/>
-          <p:nvPr/>
-        </p:nvSpPr>
-        <p:spPr>
-          <a:xfrm>
-            <a:off x="548640" y="5120640"/>
-            <a:ext cx="11064240" cy="960120"/>
-          </a:xfrm>
-          <a:prstGeom prst="roundRect">
-            <a:avLst>
-              <a:gd name="adj" fmla="val 7619"/>
-            </a:avLst>
-          </a:prstGeom>
-          <a:solidFill>
-            <a:srgbClr val="F6F8FB"/>
-          </a:solidFill>
-          <a:ln w="12700">
-            <a:solidFill>
-              <a:srgbClr val="2A78D6"/>
-            </a:solidFill>
-            <a:prstDash val="solid"/>
-          </a:ln>
-        </p:spPr>
-      </p:sp>
-      <p:sp>
-        <p:nvSpPr>
-          <p:cNvPr id="12" name="Text 10"/>
-          <p:cNvSpPr/>
-          <p:nvPr/>
-        </p:nvSpPr>
-        <p:spPr>
-          <a:xfrm>
-            <a:off x="822960" y="5120640"/>
-            <a:ext cx="10515600" cy="960120"/>
-          </a:xfrm>
-          <a:prstGeom prst="rect">
-            <a:avLst/>
-          </a:prstGeom>
-          <a:noFill/>
-          <a:ln/>
-        </p:spPr>
-        <p:txBody>
-          <a:bodyPr wrap="square" lIns="0" tIns="0" rIns="0" bIns="0" rtlCol="0" anchor="ctr"/>
-          <a:lstStyle/>
-          <a:p>
-            <a:pPr indent="0" marL="0">
-              <a:buNone/>
-            </a:pPr>
-            <a:r>
-              <a:rPr lang="en-US" sz="1600" i="1" dirty="0">
-                <a:solidFill>
-                  <a:srgbClr val="1A1A19"/>
-                </a:solidFill>
-                <a:latin typeface="Calibri" pitchFamily="34" charset="0"/>
-                <a:ea typeface="Calibri" pitchFamily="34" charset="-122"/>
-                <a:cs typeface="Calibri" pitchFamily="34" charset="-120"/>
-              </a:rPr>
-              <a:t>Enjeu : créer chaque client une fois, et une seule — sans vérification manuelle ligne à ligne.</a:t>
-            </a:r>
-            <a:endParaRPr lang="en-US" sz="1600" dirty="0"/>
-          </a:p>
-        </p:txBody>
-      </p:sp>
-      <p:sp>
-        <p:nvSpPr>
-          <p:cNvPr id="13" name="Text 11"/>
-          <p:cNvSpPr/>
-          <p:nvPr/>
-        </p:nvSpPr>
-        <p:spPr>
-          <a:xfrm>
-            <a:off x="548640" y="6510528"/>
-            <a:ext cx="5486400" cy="274320"/>
-          </a:xfrm>
-          <a:prstGeom prst="rect">
-            <a:avLst/>
-          </a:prstGeom>
-          <a:noFill/>
-          <a:ln/>
-        </p:spPr>
-        <p:txBody>
-          <a:bodyPr wrap="square" lIns="0" tIns="0" rIns="0" bIns="0" rtlCol="0" anchor="ctr"/>
-          <a:lstStyle/>
-          <a:p>
-            <a:pPr indent="0" marL="0">
-              <a:buNone/>
-            </a:pPr>
-            <a:r>
-              <a:rPr lang="en-US" sz="900" dirty="0">
-                <a:solidFill>
-                  <a:srgbClr val="9A9A95"/>
-                </a:solidFill>
-                <a:latin typeface="Calibri" pitchFamily="34" charset="0"/>
-                <a:ea typeface="Calibri" pitchFamily="34" charset="-122"/>
-                <a:cs typeface="Calibri" pitchFamily="34" charset="-120"/>
-              </a:rPr>
-              <a:t>Copilote Financier — Groupe Angelotti</a:t>
-            </a:r>
-            <a:endParaRPr lang="en-US" sz="900" dirty="0"/>
-          </a:p>
-        </p:txBody>
-      </p:sp>
-      <p:sp>
-        <p:nvSpPr>
-          <p:cNvPr id="14" name="Text 12"/>
-          <p:cNvSpPr/>
-          <p:nvPr/>
-        </p:nvSpPr>
-        <p:spPr>
-          <a:xfrm>
-            <a:off x="11430000" y="6510528"/>
-            <a:ext cx="365760" cy="274320"/>
-          </a:xfrm>
-          <a:prstGeom prst="rect">
-            <a:avLst/>
-          </a:prstGeom>
-          <a:noFill/>
-          <a:ln/>
-        </p:spPr>
-        <p:txBody>
-          <a:bodyPr wrap="square" lIns="0" tIns="0" rIns="0" bIns="0" rtlCol="0" anchor="ctr"/>
-          <a:lstStyle/>
-          <a:p>
-            <a:pPr algn="r" indent="0" marL="0">
-              <a:buNone/>
-            </a:pPr>
-            <a:r>
-              <a:rPr lang="en-US" sz="900" dirty="0">
-                <a:solidFill>
-                  <a:srgbClr val="9A9A95"/>
-                </a:solidFill>
-                <a:latin typeface="Calibri" pitchFamily="34" charset="0"/>
-                <a:ea typeface="Calibri" pitchFamily="34" charset="-122"/>
-                <a:cs typeface="Calibri" pitchFamily="34" charset="-120"/>
-              </a:rPr>
-              <a:t>4</a:t>
-            </a:r>
-            <a:endParaRPr lang="en-US" sz="900" dirty="0"/>
+              <a:t>LE COPILOTE FINANCIER  —  70 % DE CETTE SOUTENANCE</a:t>
+            </a:r>
+            <a:endParaRPr lang="en-US" sz="1400" dirty="0"/>
           </a:p>
         </p:txBody>
       </p:sp>
@@ -6199,7 +6047,7 @@
         <p:spPr>
           <a:xfrm>
             <a:off x="548640" y="384048"/>
-            <a:ext cx="7315200" cy="320040"/>
+            <a:ext cx="8229600" cy="320040"/>
           </a:xfrm>
           <a:prstGeom prst="rect">
             <a:avLst/>
@@ -6217,13 +6065,13 @@
             <a:r>
               <a:rPr lang="en-US" sz="1200" b="1" spc="200" kern="0" dirty="0">
                 <a:solidFill>
-                  <a:srgbClr val="2A78D6"/>
+                  <a:srgbClr val="1BAF7A"/>
                 </a:solidFill>
                 <a:latin typeface="Calibri" pitchFamily="34" charset="0"/>
                 <a:ea typeface="Calibri" pitchFamily="34" charset="-122"/>
                 <a:cs typeface="Calibri" pitchFamily="34" charset="-120"/>
               </a:rPr>
-              <a:t>CHAPITRE 1 — REPRISE DE DONNÉES</a:t>
+              <a:t>MISSION 2 — LE COPILOTE FINANCIER (≈70 % DU TEMPS)</a:t>
             </a:r>
             <a:endParaRPr lang="en-US" sz="1200" dirty="0"/>
           </a:p>
@@ -6238,7 +6086,7 @@
         <p:spPr>
           <a:xfrm>
             <a:off x="548640" y="658368"/>
-            <a:ext cx="10515600" cy="822960"/>
+            <a:ext cx="9144000" cy="822960"/>
           </a:xfrm>
           <a:prstGeom prst="rect">
             <a:avLst/>
@@ -6254,7 +6102,7 @@
               <a:buNone/>
             </a:pPr>
             <a:r>
-              <a:rPr lang="en-US" sz="3000" b="1" dirty="0">
+              <a:rPr lang="en-US" sz="2800" b="1" dirty="0">
                 <a:solidFill>
                   <a:srgbClr val="1A1A19"/>
                 </a:solidFill>
@@ -6262,9 +6110,9 @@
                 <a:ea typeface="Cambria" pitchFamily="34" charset="-122"/>
                 <a:cs typeface="Cambria" pitchFamily="34" charset="-120"/>
               </a:rPr>
-              <a:t>La reprise des tiers : la solution et les résultats</a:t>
-            </a:r>
-            <a:endParaRPr lang="en-US" sz="3000" dirty="0"/>
+              <a:t>Contexte, données et méthode</a:t>
+            </a:r>
+            <a:endParaRPr lang="en-US" sz="2800" dirty="0"/>
           </a:p>
         </p:txBody>
       </p:sp>
@@ -6276,743 +6124,40 @@
         </p:nvSpPr>
         <p:spPr>
           <a:xfrm>
-            <a:off x="548640" y="1600200"/>
-            <a:ext cx="5394960" cy="2377440"/>
-          </a:xfrm>
-          <a:prstGeom prst="rect">
-            <a:avLst/>
-          </a:prstGeom>
-          <a:noFill/>
-          <a:ln/>
-        </p:spPr>
-        <p:txBody>
-          <a:bodyPr wrap="square" lIns="0" tIns="0" rIns="0" bIns="0" rtlCol="0" anchor="t"/>
-          <a:lstStyle/>
-          <a:p>
-            <a:pPr marL="228600" indent="-228600">
-              <a:lnSpc>
-                <a:spcPct val="108000"/>
-              </a:lnSpc>
-              <a:spcAft>
-                <a:spcPts val="1300"/>
-              </a:spcAft>
-              <a:buSzPct val="100000"/>
-              <a:buChar char="•"/>
-            </a:pPr>
-            <a:r>
-              <a:rPr lang="en-US" sz="1450" dirty="0">
-                <a:solidFill>
-                  <a:srgbClr val="1A1A19"/>
+            <a:off x="548640" y="1517904"/>
+            <a:ext cx="11064240" cy="411480"/>
+          </a:xfrm>
+          <a:prstGeom prst="rect">
+            <a:avLst/>
+          </a:prstGeom>
+          <a:noFill/>
+          <a:ln/>
+        </p:spPr>
+        <p:txBody>
+          <a:bodyPr wrap="square" lIns="0" tIns="0" rIns="0" bIns="0" rtlCol="0" anchor="ctr"/>
+          <a:lstStyle/>
+          <a:p>
+            <a:pPr indent="0" marL="0">
+              <a:buNone/>
+            </a:pPr>
+            <a:r>
+              <a:rPr lang="en-US" sz="1400" i="1" dirty="0">
+                <a:solidFill>
+                  <a:srgbClr val="52514E"/>
                 </a:solidFill>
                 <a:latin typeface="Calibri" pitchFamily="34" charset="0"/>
                 <a:ea typeface="Calibri" pitchFamily="34" charset="-122"/>
                 <a:cs typeface="Calibri" pitchFamily="34" charset="-120"/>
               </a:rPr>
-              <a:t>Fichier de travail piloté par formules : la décision d'importer une ligne est calculée</a:t>
-            </a:r>
-            <a:endParaRPr lang="en-US" sz="1450" dirty="0"/>
-          </a:p>
-          <a:p>
-            <a:pPr marL="228600" indent="-228600">
-              <a:lnSpc>
-                <a:spcPct val="108000"/>
-              </a:lnSpc>
-              <a:spcAft>
-                <a:spcPts val="1300"/>
-              </a:spcAft>
-              <a:buSzPct val="100000"/>
-              <a:buChar char="•"/>
-            </a:pPr>
-            <a:r>
-              <a:rPr lang="en-US" sz="1450" dirty="0">
-                <a:solidFill>
-                  <a:srgbClr val="1A1A19"/>
-                </a:solidFill>
-                <a:latin typeface="Calibri" pitchFamily="34" charset="0"/>
-                <a:ea typeface="Calibri" pitchFamily="34" charset="-122"/>
-                <a:cs typeface="Calibri" pitchFamily="34" charset="-120"/>
-              </a:rPr>
-              <a:t>Trois clés d'unicité différenciées selon la nature du tiers (couple / personne physique / personne morale)</a:t>
-            </a:r>
-            <a:endParaRPr lang="en-US" sz="1450" dirty="0"/>
-          </a:p>
-          <a:p>
-            <a:pPr marL="228600" indent="-228600">
-              <a:lnSpc>
-                <a:spcPct val="108000"/>
-              </a:lnSpc>
-              <a:spcAft>
-                <a:spcPts val="1300"/>
-              </a:spcAft>
-              <a:buSzPct val="100000"/>
-              <a:buChar char="•"/>
-            </a:pPr>
-            <a:r>
-              <a:rPr lang="en-US" sz="1450" dirty="0">
-                <a:solidFill>
-                  <a:srgbClr val="1A1A19"/>
-                </a:solidFill>
-                <a:latin typeface="Calibri" pitchFamily="34" charset="0"/>
-                <a:ea typeface="Calibri" pitchFamily="34" charset="-122"/>
-                <a:cs typeface="Calibri" pitchFamily="34" charset="-120"/>
-              </a:rPr>
-              <a:t>872 requêtes API (JSON Patch) pour les coordonnées des couples — toutes passées sans erreur</a:t>
-            </a:r>
-            <a:endParaRPr lang="en-US" sz="1450" dirty="0"/>
-          </a:p>
-        </p:txBody>
-      </p:sp>
-      <p:sp>
-        <p:nvSpPr>
-          <p:cNvPr id="5" name="Shape 3"/>
-          <p:cNvSpPr/>
-          <p:nvPr/>
-        </p:nvSpPr>
-        <p:spPr>
-          <a:xfrm>
-            <a:off x="6099048" y="1527048"/>
-            <a:ext cx="5586984" cy="2194560"/>
-          </a:xfrm>
-          <a:prstGeom prst="roundRect">
-            <a:avLst>
-              <a:gd name="adj" fmla="val 2500"/>
-            </a:avLst>
-          </a:prstGeom>
-          <a:solidFill>
-            <a:srgbClr val="FFFFFF"/>
-          </a:solidFill>
-          <a:ln w="12700">
-            <a:solidFill>
-              <a:srgbClr val="E3E7EE"/>
-            </a:solidFill>
-            <a:prstDash val="solid"/>
-          </a:ln>
-          <a:effectLst>
-            <a:outerShdw sx="100000" sy="100000" kx="0" ky="0" algn="bl" rotWithShape="0" blurRad="101600" dist="25400" dir="5400000">
-              <a:srgbClr val="1A1A19">
-                <a:alpha val="15000"/>
-              </a:srgbClr>
-            </a:outerShdw>
-          </a:effectLst>
-        </p:spPr>
-      </p:sp>
-      <p:pic>
-        <p:nvPicPr>
-          <p:cNvPr id="6" name="Image 0" descr="/tmp/claude-0/-home-user-MemoireM2S2/bac073a6-7c4e-552a-9627-815aeb6fe82a/scratchpad/figs/p18-000.png">    </p:cNvPr>
-          <p:cNvPicPr>
-            <a:picLocks noChangeAspect="1"/>
-          </p:cNvPicPr>
-          <p:nvPr/>
-        </p:nvPicPr>
-        <p:blipFill>
-          <a:blip r:embed="rId1"/>
-          <a:srcRect l="0" r="0" t="0" b="0"/>
-          <a:stretch/>
-        </p:blipFill>
-        <p:spPr>
-          <a:xfrm>
-            <a:off x="6172200" y="1600200"/>
-            <a:ext cx="5440680" cy="2048256"/>
-          </a:xfrm>
-          <a:prstGeom prst="rect">
-            <a:avLst/>
-          </a:prstGeom>
-        </p:spPr>
-      </p:pic>
-      <p:sp>
-        <p:nvSpPr>
-          <p:cNvPr id="7" name="Shape 4"/>
-          <p:cNvSpPr/>
-          <p:nvPr/>
-        </p:nvSpPr>
-        <p:spPr>
-          <a:xfrm>
-            <a:off x="548640" y="4160520"/>
-            <a:ext cx="3474720" cy="1737360"/>
-          </a:xfrm>
-          <a:prstGeom prst="roundRect">
-            <a:avLst>
-              <a:gd name="adj" fmla="val 4211"/>
-            </a:avLst>
-          </a:prstGeom>
-          <a:solidFill>
-            <a:srgbClr val="FFFFFF"/>
-          </a:solidFill>
-          <a:ln w="12700">
-            <a:solidFill>
-              <a:srgbClr val="E3E7EE"/>
-            </a:solidFill>
-            <a:prstDash val="solid"/>
-          </a:ln>
-          <a:effectLst>
-            <a:outerShdw sx="100000" sy="100000" kx="0" ky="0" algn="bl" rotWithShape="0" blurRad="76200" dist="25400" dir="5400000">
-              <a:srgbClr val="1A1A19">
-                <a:alpha val="12000"/>
-              </a:srgbClr>
-            </a:outerShdw>
-          </a:effectLst>
-        </p:spPr>
-      </p:sp>
-      <p:sp>
-        <p:nvSpPr>
-          <p:cNvPr id="8" name="Text 5"/>
-          <p:cNvSpPr/>
-          <p:nvPr/>
-        </p:nvSpPr>
-        <p:spPr>
-          <a:xfrm>
-            <a:off x="658368" y="4251960"/>
-            <a:ext cx="3255264" cy="1170432"/>
-          </a:xfrm>
-          <a:prstGeom prst="rect">
-            <a:avLst/>
-          </a:prstGeom>
-          <a:noFill/>
-          <a:ln/>
-        </p:spPr>
-        <p:txBody>
-          <a:bodyPr wrap="square" lIns="0" tIns="0" rIns="0" bIns="0" rtlCol="0" anchor="b"/>
-          <a:lstStyle/>
-          <a:p>
-            <a:pPr algn="l" indent="0" marL="0">
-              <a:buNone/>
-            </a:pPr>
-            <a:r>
-              <a:rPr lang="en-US" sz="3000" b="1" dirty="0">
-                <a:solidFill>
-                  <a:srgbClr val="1BAF7A"/>
-                </a:solidFill>
-                <a:latin typeface="Cambria" pitchFamily="34" charset="0"/>
-                <a:ea typeface="Cambria" pitchFamily="34" charset="-122"/>
-                <a:cs typeface="Cambria" pitchFamily="34" charset="-120"/>
-              </a:rPr>
-              <a:t>1 434</a:t>
-            </a:r>
-            <a:endParaRPr lang="en-US" sz="3000" dirty="0"/>
-          </a:p>
-        </p:txBody>
-      </p:sp>
-      <p:sp>
-        <p:nvSpPr>
-          <p:cNvPr id="9" name="Text 6"/>
-          <p:cNvSpPr/>
-          <p:nvPr/>
-        </p:nvSpPr>
-        <p:spPr>
-          <a:xfrm>
-            <a:off x="658368" y="5440680"/>
-            <a:ext cx="3255264" cy="384048"/>
-          </a:xfrm>
-          <a:prstGeom prst="rect">
-            <a:avLst/>
-          </a:prstGeom>
-          <a:noFill/>
-          <a:ln/>
-        </p:spPr>
-        <p:txBody>
-          <a:bodyPr wrap="square" lIns="0" tIns="0" rIns="0" bIns="0" rtlCol="0" anchor="t"/>
-          <a:lstStyle/>
-          <a:p>
-            <a:pPr algn="l" indent="0" marL="0">
-              <a:buNone/>
-            </a:pPr>
-            <a:r>
-              <a:rPr lang="en-US" sz="1100" dirty="0">
-                <a:solidFill>
-                  <a:srgbClr val="52514E"/>
-                </a:solidFill>
-                <a:latin typeface="Calibri" pitchFamily="34" charset="0"/>
-                <a:ea typeface="Calibri" pitchFamily="34" charset="-122"/>
-                <a:cs typeface="Calibri" pitchFamily="34" charset="-120"/>
-              </a:rPr>
-              <a:t>tiers créés, zéro doublon détecté par les 3 clés</a:t>
-            </a:r>
-            <a:endParaRPr lang="en-US" sz="1100" dirty="0"/>
-          </a:p>
-        </p:txBody>
-      </p:sp>
-      <p:sp>
-        <p:nvSpPr>
-          <p:cNvPr id="10" name="Shape 7"/>
-          <p:cNvSpPr/>
-          <p:nvPr/>
-        </p:nvSpPr>
-        <p:spPr>
-          <a:xfrm>
-            <a:off x="4178808" y="4087368"/>
-            <a:ext cx="7507224" cy="1883664"/>
-          </a:xfrm>
-          <a:prstGeom prst="roundRect">
-            <a:avLst>
-              <a:gd name="adj" fmla="val 2913"/>
-            </a:avLst>
-          </a:prstGeom>
-          <a:solidFill>
-            <a:srgbClr val="FFFFFF"/>
-          </a:solidFill>
-          <a:ln w="12700">
-            <a:solidFill>
-              <a:srgbClr val="E3E7EE"/>
-            </a:solidFill>
-            <a:prstDash val="solid"/>
-          </a:ln>
-          <a:effectLst>
-            <a:outerShdw sx="100000" sy="100000" kx="0" ky="0" algn="bl" rotWithShape="0" blurRad="101600" dist="25400" dir="5400000">
-              <a:srgbClr val="1A1A19">
-                <a:alpha val="15000"/>
-              </a:srgbClr>
-            </a:outerShdw>
-          </a:effectLst>
-        </p:spPr>
-      </p:sp>
-      <p:pic>
-        <p:nvPicPr>
-          <p:cNvPr id="11" name="Image 1" descr="/tmp/claude-0/-home-user-MemoireM2S2/bac073a6-7c4e-552a-9627-815aeb6fe82a/scratchpad/figs/p20-000.png">    </p:cNvPr>
-          <p:cNvPicPr>
-            <a:picLocks noChangeAspect="1"/>
-          </p:cNvPicPr>
-          <p:nvPr/>
-        </p:nvPicPr>
-        <p:blipFill>
-          <a:blip r:embed="rId2"/>
-          <a:srcRect l="0" r="0" t="0" b="0"/>
-          <a:stretch/>
-        </p:blipFill>
-        <p:spPr>
-          <a:xfrm>
-            <a:off x="4251960" y="4160520"/>
-            <a:ext cx="7360920" cy="1737360"/>
-          </a:xfrm>
-          <a:prstGeom prst="rect">
-            <a:avLst/>
-          </a:prstGeom>
-        </p:spPr>
-      </p:pic>
-      <p:sp>
-        <p:nvSpPr>
-          <p:cNvPr id="12" name="Text 8"/>
-          <p:cNvSpPr/>
-          <p:nvPr/>
-        </p:nvSpPr>
-        <p:spPr>
-          <a:xfrm>
-            <a:off x="548640" y="6510528"/>
-            <a:ext cx="5486400" cy="274320"/>
-          </a:xfrm>
-          <a:prstGeom prst="rect">
-            <a:avLst/>
-          </a:prstGeom>
-          <a:noFill/>
-          <a:ln/>
-        </p:spPr>
-        <p:txBody>
-          <a:bodyPr wrap="square" lIns="0" tIns="0" rIns="0" bIns="0" rtlCol="0" anchor="ctr"/>
-          <a:lstStyle/>
-          <a:p>
-            <a:pPr indent="0" marL="0">
-              <a:buNone/>
-            </a:pPr>
-            <a:r>
-              <a:rPr lang="en-US" sz="900" dirty="0">
-                <a:solidFill>
-                  <a:srgbClr val="9A9A95"/>
-                </a:solidFill>
-                <a:latin typeface="Calibri" pitchFamily="34" charset="0"/>
-                <a:ea typeface="Calibri" pitchFamily="34" charset="-122"/>
-                <a:cs typeface="Calibri" pitchFamily="34" charset="-120"/>
-              </a:rPr>
-              <a:t>Copilote Financier — Groupe Angelotti</a:t>
-            </a:r>
-            <a:endParaRPr lang="en-US" sz="900" dirty="0"/>
-          </a:p>
-        </p:txBody>
-      </p:sp>
-      <p:sp>
-        <p:nvSpPr>
-          <p:cNvPr id="13" name="Text 9"/>
-          <p:cNvSpPr/>
-          <p:nvPr/>
-        </p:nvSpPr>
-        <p:spPr>
-          <a:xfrm>
-            <a:off x="11430000" y="6510528"/>
-            <a:ext cx="365760" cy="274320"/>
-          </a:xfrm>
-          <a:prstGeom prst="rect">
-            <a:avLst/>
-          </a:prstGeom>
-          <a:noFill/>
-          <a:ln/>
-        </p:spPr>
-        <p:txBody>
-          <a:bodyPr wrap="square" lIns="0" tIns="0" rIns="0" bIns="0" rtlCol="0" anchor="ctr"/>
-          <a:lstStyle/>
-          <a:p>
-            <a:pPr algn="r" indent="0" marL="0">
-              <a:buNone/>
-            </a:pPr>
-            <a:r>
-              <a:rPr lang="en-US" sz="900" dirty="0">
-                <a:solidFill>
-                  <a:srgbClr val="9A9A95"/>
-                </a:solidFill>
-                <a:latin typeface="Calibri" pitchFamily="34" charset="0"/>
-                <a:ea typeface="Calibri" pitchFamily="34" charset="-122"/>
-                <a:cs typeface="Calibri" pitchFamily="34" charset="-120"/>
-              </a:rPr>
-              <a:t>5</a:t>
-            </a:r>
-            <a:endParaRPr lang="en-US" sz="900" dirty="0"/>
-          </a:p>
-        </p:txBody>
-      </p:sp>
-    </p:spTree>
-  </p:cSld>
-  <p:clrMapOvr>
-    <a:masterClrMapping/>
-  </p:clrMapOvr>
-</p:sld>
-</file>
-
-<file path=ppt/slides/slide6.xml><?xml version="1.0" encoding="utf-8"?>
-<p:sld xmlns:a="http://schemas.openxmlformats.org/drawingml/2006/main" xmlns:r="http://schemas.openxmlformats.org/officeDocument/2006/relationships" xmlns:p="http://schemas.openxmlformats.org/presentationml/2006/main">
-  <p:cSld name="Slide 6">
-    <p:bg>
-      <p:bgPr>
-        <a:solidFill>
-          <a:srgbClr val="17223B"/>
-        </a:solidFill>
-      </p:bgPr>
-    </p:bg>
-    <p:spTree>
-      <p:nvGrpSpPr>
-        <p:cNvPr id="1" name=""/>
-        <p:cNvGrpSpPr/>
-        <p:nvPr/>
-      </p:nvGrpSpPr>
-      <p:grpSpPr>
-        <a:xfrm>
-          <a:off x="0" y="0"/>
-          <a:ext cx="0" cy="0"/>
-          <a:chOff x="0" y="0"/>
-          <a:chExt cx="0" cy="0"/>
-        </a:xfrm>
-      </p:grpSpPr>
-      <p:sp>
-        <p:nvSpPr>
-          <p:cNvPr id="2" name="Text 0"/>
-          <p:cNvSpPr/>
-          <p:nvPr/>
-        </p:nvSpPr>
-        <p:spPr>
-          <a:xfrm>
-            <a:off x="1097280" y="2286000"/>
-            <a:ext cx="9966960" cy="1371600"/>
-          </a:xfrm>
-          <a:prstGeom prst="rect">
-            <a:avLst/>
-          </a:prstGeom>
-          <a:noFill/>
-          <a:ln/>
-        </p:spPr>
-        <p:txBody>
-          <a:bodyPr wrap="square" lIns="0" tIns="0" rIns="0" bIns="0" rtlCol="0" anchor="ctr"/>
-          <a:lstStyle/>
-          <a:p>
-            <a:pPr algn="ctr" indent="0" marL="0">
-              <a:lnSpc>
-                <a:spcPct val="115000"/>
-              </a:lnSpc>
-              <a:buNone/>
-            </a:pPr>
-            <a:r>
-              <a:rPr lang="en-US" sz="2600" dirty="0">
-                <a:solidFill>
-                  <a:srgbClr val="CADCFC"/>
-                </a:solidFill>
-                <a:latin typeface="Cambria" pitchFamily="34" charset="0"/>
-                <a:ea typeface="Cambria" pitchFamily="34" charset="-122"/>
-                <a:cs typeface="Cambria" pitchFamily="34" charset="-120"/>
-              </a:rPr>
-              <a:t>Les deux reprises répondent à une question :</a:t>
-            </a:r>
-            <a:endParaRPr lang="en-US" sz="2600" dirty="0"/>
-          </a:p>
-          <a:p>
-            <a:pPr algn="ctr" indent="0" marL="0">
-              <a:lnSpc>
-                <a:spcPct val="115000"/>
-              </a:lnSpc>
-              <a:buNone/>
-            </a:pPr>
-            <a:r>
-              <a:rPr lang="en-US" sz="2600" dirty="0">
-                <a:solidFill>
-                  <a:srgbClr val="CADCFC"/>
-                </a:solidFill>
-                <a:latin typeface="Cambria" pitchFamily="34" charset="0"/>
-                <a:ea typeface="Cambria" pitchFamily="34" charset="-122"/>
-                <a:cs typeface="Cambria" pitchFamily="34" charset="-120"/>
-              </a:rPr>
-              <a:t>la donnée est-elle bien arrivée ?</a:t>
-            </a:r>
-            <a:endParaRPr lang="en-US" sz="2600" dirty="0"/>
-          </a:p>
-        </p:txBody>
-      </p:sp>
-      <p:sp>
-        <p:nvSpPr>
-          <p:cNvPr id="3" name="Text 1"/>
-          <p:cNvSpPr/>
-          <p:nvPr/>
-        </p:nvSpPr>
-        <p:spPr>
-          <a:xfrm>
-            <a:off x="1097280" y="3749040"/>
-            <a:ext cx="9966960" cy="1371600"/>
-          </a:xfrm>
-          <a:prstGeom prst="rect">
-            <a:avLst/>
-          </a:prstGeom>
-          <a:noFill/>
-          <a:ln/>
-        </p:spPr>
-        <p:txBody>
-          <a:bodyPr wrap="square" lIns="0" tIns="0" rIns="0" bIns="0" rtlCol="0" anchor="ctr"/>
-          <a:lstStyle/>
-          <a:p>
-            <a:pPr algn="ctr" indent="0" marL="0">
-              <a:lnSpc>
-                <a:spcPct val="115000"/>
-              </a:lnSpc>
-              <a:buNone/>
-            </a:pPr>
-            <a:r>
-              <a:rPr lang="en-US" sz="2600" b="1" dirty="0">
-                <a:solidFill>
-                  <a:srgbClr val="FFFFFF"/>
-                </a:solidFill>
-                <a:latin typeface="Cambria" pitchFamily="34" charset="0"/>
-                <a:ea typeface="Cambria" pitchFamily="34" charset="-122"/>
-                <a:cs typeface="Cambria" pitchFamily="34" charset="-120"/>
-              </a:rPr>
-              <a:t>Le socle reconstitué permet de se poser une question différente :</a:t>
-            </a:r>
-            <a:endParaRPr lang="en-US" sz="2600" dirty="0"/>
-          </a:p>
-          <a:p>
-            <a:pPr algn="ctr" indent="0" marL="0">
-              <a:lnSpc>
-                <a:spcPct val="115000"/>
-              </a:lnSpc>
-              <a:buNone/>
-            </a:pPr>
-            <a:r>
-              <a:rPr lang="en-US" sz="2600" b="1" dirty="0">
-                <a:solidFill>
-                  <a:srgbClr val="FFFFFF"/>
-                </a:solidFill>
-                <a:latin typeface="Cambria" pitchFamily="34" charset="0"/>
-                <a:ea typeface="Cambria" pitchFamily="34" charset="-122"/>
-                <a:cs typeface="Cambria" pitchFamily="34" charset="-120"/>
-              </a:rPr>
-              <a:t>que peut-on en tirer pour la décision ?</a:t>
-            </a:r>
-            <a:endParaRPr lang="en-US" sz="2600" dirty="0"/>
-          </a:p>
-        </p:txBody>
-      </p:sp>
-      <p:sp>
-        <p:nvSpPr>
-          <p:cNvPr id="4" name="Text 2"/>
-          <p:cNvSpPr/>
-          <p:nvPr/>
-        </p:nvSpPr>
-        <p:spPr>
-          <a:xfrm>
-            <a:off x="1097280" y="5257800"/>
-            <a:ext cx="9966960" cy="457200"/>
-          </a:xfrm>
-          <a:prstGeom prst="rect">
-            <a:avLst/>
-          </a:prstGeom>
-          <a:noFill/>
-          <a:ln/>
-        </p:spPr>
-        <p:txBody>
-          <a:bodyPr wrap="square" lIns="0" tIns="0" rIns="0" bIns="0" rtlCol="0" anchor="ctr"/>
-          <a:lstStyle/>
-          <a:p>
-            <a:pPr algn="ctr" indent="0" marL="0">
-              <a:buNone/>
-            </a:pPr>
-            <a:r>
-              <a:rPr lang="en-US" sz="1400" b="1" spc="300" kern="0" dirty="0">
-                <a:solidFill>
-                  <a:srgbClr val="2A78D6"/>
-                </a:solidFill>
-                <a:latin typeface="Calibri" pitchFamily="34" charset="0"/>
-                <a:ea typeface="Calibri" pitchFamily="34" charset="-122"/>
-                <a:cs typeface="Calibri" pitchFamily="34" charset="-120"/>
-              </a:rPr>
-              <a:t>LE COPILOTE FINANCIER</a:t>
+              <a:t>La direction financière suit ses dérives opération par opération, sur tableurs, sans vision transverse.</a:t>
             </a:r>
             <a:endParaRPr lang="en-US" sz="1400" dirty="0"/>
-          </a:p>
-        </p:txBody>
-      </p:sp>
-    </p:spTree>
-  </p:cSld>
-  <p:clrMapOvr>
-    <a:masterClrMapping/>
-  </p:clrMapOvr>
-</p:sld>
-</file>
-
-<file path=ppt/slides/slide7.xml><?xml version="1.0" encoding="utf-8"?>
-<p:sld xmlns:a="http://schemas.openxmlformats.org/drawingml/2006/main" xmlns:r="http://schemas.openxmlformats.org/officeDocument/2006/relationships" xmlns:p="http://schemas.openxmlformats.org/presentationml/2006/main">
-  <p:cSld name="Slide 7">
-    <p:bg>
-      <p:bgPr>
-        <a:solidFill>
-          <a:srgbClr val="FFFFFF"/>
-        </a:solidFill>
-      </p:bgPr>
-    </p:bg>
-    <p:spTree>
-      <p:nvGrpSpPr>
-        <p:cNvPr id="1" name=""/>
-        <p:cNvGrpSpPr/>
-        <p:nvPr/>
-      </p:nvGrpSpPr>
-      <p:grpSpPr>
-        <a:xfrm>
-          <a:off x="0" y="0"/>
-          <a:ext cx="0" cy="0"/>
-          <a:chOff x="0" y="0"/>
-          <a:chExt cx="0" cy="0"/>
-        </a:xfrm>
-      </p:grpSpPr>
-      <p:sp>
-        <p:nvSpPr>
-          <p:cNvPr id="2" name="Text 0"/>
-          <p:cNvSpPr/>
-          <p:nvPr/>
-        </p:nvSpPr>
-        <p:spPr>
-          <a:xfrm>
-            <a:off x="548640" y="384048"/>
-            <a:ext cx="7315200" cy="320040"/>
-          </a:xfrm>
-          <a:prstGeom prst="rect">
-            <a:avLst/>
-          </a:prstGeom>
-          <a:noFill/>
-          <a:ln/>
-        </p:spPr>
-        <p:txBody>
-          <a:bodyPr wrap="square" lIns="0" tIns="0" rIns="0" bIns="0" rtlCol="0" anchor="ctr"/>
-          <a:lstStyle/>
-          <a:p>
-            <a:pPr indent="0" marL="0">
-              <a:buNone/>
-            </a:pPr>
-            <a:r>
-              <a:rPr lang="en-US" sz="1200" b="1" spc="200" kern="0" dirty="0">
-                <a:solidFill>
-                  <a:srgbClr val="2A78D6"/>
-                </a:solidFill>
-                <a:latin typeface="Calibri" pitchFamily="34" charset="0"/>
-                <a:ea typeface="Calibri" pitchFamily="34" charset="-122"/>
-                <a:cs typeface="Calibri" pitchFamily="34" charset="-120"/>
-              </a:rPr>
-              <a:t>CHAPITRE 2 — LE COPILOTE FINANCIER</a:t>
-            </a:r>
-            <a:endParaRPr lang="en-US" sz="1200" dirty="0"/>
-          </a:p>
-        </p:txBody>
-      </p:sp>
-      <p:sp>
-        <p:nvSpPr>
-          <p:cNvPr id="3" name="Text 1"/>
-          <p:cNvSpPr/>
-          <p:nvPr/>
-        </p:nvSpPr>
-        <p:spPr>
-          <a:xfrm>
-            <a:off x="548640" y="658368"/>
-            <a:ext cx="9144000" cy="822960"/>
-          </a:xfrm>
-          <a:prstGeom prst="rect">
-            <a:avLst/>
-          </a:prstGeom>
-          <a:noFill/>
-          <a:ln/>
-        </p:spPr>
-        <p:txBody>
-          <a:bodyPr wrap="square" lIns="0" tIns="0" rIns="0" bIns="0" rtlCol="0" anchor="ctr"/>
-          <a:lstStyle/>
-          <a:p>
-            <a:pPr indent="0" marL="0">
-              <a:buNone/>
-            </a:pPr>
-            <a:r>
-              <a:rPr lang="en-US" sz="3000" b="1" dirty="0">
-                <a:solidFill>
-                  <a:srgbClr val="1A1A19"/>
-                </a:solidFill>
-                <a:latin typeface="Cambria" pitchFamily="34" charset="0"/>
-                <a:ea typeface="Cambria" pitchFamily="34" charset="-122"/>
-                <a:cs typeface="Cambria" pitchFamily="34" charset="-120"/>
-              </a:rPr>
-              <a:t>Contexte et trois axes de travail</a:t>
-            </a:r>
-            <a:endParaRPr lang="en-US" sz="3000" dirty="0"/>
-          </a:p>
-        </p:txBody>
-      </p:sp>
-      <p:sp>
-        <p:nvSpPr>
-          <p:cNvPr id="4" name="Text 2"/>
-          <p:cNvSpPr/>
-          <p:nvPr/>
-        </p:nvSpPr>
-        <p:spPr>
-          <a:xfrm>
-            <a:off x="548640" y="1536192"/>
-            <a:ext cx="11064240" cy="457200"/>
-          </a:xfrm>
-          <a:prstGeom prst="rect">
-            <a:avLst/>
-          </a:prstGeom>
-          <a:noFill/>
-          <a:ln/>
-        </p:spPr>
-        <p:txBody>
-          <a:bodyPr wrap="square" lIns="0" tIns="0" rIns="0" bIns="0" rtlCol="0" anchor="ctr"/>
-          <a:lstStyle/>
-          <a:p>
-            <a:pPr indent="0" marL="0">
-              <a:buNone/>
-            </a:pPr>
-            <a:r>
-              <a:rPr lang="en-US" sz="1450" i="1" dirty="0">
-                <a:solidFill>
-                  <a:srgbClr val="52514E"/>
-                </a:solidFill>
-                <a:latin typeface="Calibri" pitchFamily="34" charset="0"/>
-                <a:ea typeface="Calibri" pitchFamily="34" charset="-122"/>
-                <a:cs typeface="Calibri" pitchFamily="34" charset="-120"/>
-              </a:rPr>
-              <a:t>La direction financière suit ses dérives opération par opération, sur tableurs, sans vision transverse.</a:t>
-            </a:r>
-            <a:endParaRPr lang="en-US" sz="1450" dirty="0"/>
           </a:p>
         </p:txBody>
       </p:sp>
       <p:graphicFrame>
         <p:nvGraphicFramePr>
-          <p:cNvPr id="8" name="Table 0"/>
+          <p:cNvPr id="6" name="Table 0"/>
           <p:cNvGraphicFramePr>
             <a:graphicFrameLocks noGrp="1"/>
           </p:cNvGraphicFramePr>
@@ -7025,8 +6170,8 @@
           </p:nvPr>
         </p:nvGraphicFramePr>
         <p:xfrm>
-          <a:off x="548640" y="2148840"/>
-          <a:ext cx="11064240" cy="2377440"/>
+          <a:off x="548640" y="1965960"/>
+          <a:ext cx="11064240" cy="2148840"/>
         </p:xfrm>
         <a:graphic>
           <a:graphicData uri="http://schemas.openxmlformats.org/drawingml/2006/table">
@@ -7037,7 +6182,7 @@
                 <a:gridCol w="3688080"/>
                 <a:gridCol w="3688080"/>
               </a:tblGrid>
-              <a:tr h="566928">
+              <a:tr h="457200">
                 <a:tc>
                   <a:txBody>
                     <a:bodyPr/>
@@ -7047,7 +6192,7 @@
                         <a:buNone/>
                       </a:pPr>
                       <a:r>
-                        <a:rPr lang="en-US" sz="1450" b="1" dirty="0">
+                        <a:rPr lang="en-US" sz="1300" b="1" dirty="0">
                           <a:solidFill>
                             <a:srgbClr val="FFFFFF"/>
                           </a:solidFill>
@@ -7057,7 +6202,7 @@
                         </a:rPr>
                         <a:t>Axe</a:t>
                       </a:r>
-                      <a:endParaRPr lang="en-US" sz="1450" dirty="0">
+                      <a:endParaRPr lang="en-US" sz="1300" dirty="0">
                         <a:latin typeface="Calibri" charset="0"/>
                         <a:ea typeface="Calibri" charset="0"/>
                         <a:cs typeface="Calibri" charset="0"/>
@@ -7115,7 +6260,7 @@
                         <a:buNone/>
                       </a:pPr>
                       <a:r>
-                        <a:rPr lang="en-US" sz="1450" b="1" dirty="0">
+                        <a:rPr lang="en-US" sz="1300" b="1" dirty="0">
                           <a:solidFill>
                             <a:srgbClr val="FFFFFF"/>
                           </a:solidFill>
@@ -7125,7 +6270,7 @@
                         </a:rPr>
                         <a:t>Question métier</a:t>
                       </a:r>
-                      <a:endParaRPr lang="en-US" sz="1450" dirty="0">
+                      <a:endParaRPr lang="en-US" sz="1300" dirty="0">
                         <a:latin typeface="Calibri" charset="0"/>
                         <a:ea typeface="Calibri" charset="0"/>
                         <a:cs typeface="Calibri" charset="0"/>
@@ -7183,7 +6328,7 @@
                         <a:buNone/>
                       </a:pPr>
                       <a:r>
-                        <a:rPr lang="en-US" sz="1450" b="1" dirty="0">
+                        <a:rPr lang="en-US" sz="1300" b="1" dirty="0">
                           <a:solidFill>
                             <a:srgbClr val="FFFFFF"/>
                           </a:solidFill>
@@ -7193,7 +6338,7 @@
                         </a:rPr>
                         <a:t>Famille de modèles</a:t>
                       </a:r>
-                      <a:endParaRPr lang="en-US" sz="1450" dirty="0">
+                      <a:endParaRPr lang="en-US" sz="1300" dirty="0">
                         <a:latin typeface="Calibri" charset="0"/>
                         <a:ea typeface="Calibri" charset="0"/>
                         <a:cs typeface="Calibri" charset="0"/>
@@ -7243,7 +6388,7 @@
                   </a:tcPr>
                 </a:tc>
               </a:tr>
-              <a:tr h="566928">
+              <a:tr h="457200">
                 <a:tc>
                   <a:txBody>
                     <a:bodyPr/>
@@ -7253,7 +6398,7 @@
                         <a:buNone/>
                       </a:pPr>
                       <a:r>
-                        <a:rPr lang="en-US" sz="1450" b="1" dirty="0">
+                        <a:rPr lang="en-US" sz="1300" b="1" dirty="0">
                           <a:solidFill>
                             <a:srgbClr val="2A78D6"/>
                           </a:solidFill>
@@ -7263,7 +6408,7 @@
                         </a:rPr>
                         <a:t>A — Risque de marge</a:t>
                       </a:r>
-                      <a:endParaRPr lang="en-US" sz="1450" dirty="0">
+                      <a:endParaRPr lang="en-US" sz="1300" dirty="0">
                         <a:latin typeface="Calibri" charset="0"/>
                         <a:ea typeface="Calibri" charset="0"/>
                         <a:cs typeface="Calibri" charset="0"/>
@@ -7318,7 +6463,7 @@
                         <a:buNone/>
                       </a:pPr>
                       <a:r>
-                        <a:rPr lang="en-US" sz="1450" dirty="0">
+                        <a:rPr lang="en-US" sz="1300" dirty="0">
                           <a:solidFill>
                             <a:srgbClr val="1A1A19"/>
                           </a:solidFill>
@@ -7328,7 +6473,7 @@
                         </a:rPr>
                         <a:t>Quelles opérations dérapent ?</a:t>
                       </a:r>
-                      <a:endParaRPr lang="en-US" sz="1450" dirty="0">
+                      <a:endParaRPr lang="en-US" sz="1300" dirty="0">
                         <a:latin typeface="Calibri" charset="0"/>
                         <a:ea typeface="Calibri" charset="0"/>
                         <a:cs typeface="Calibri" charset="0"/>
@@ -7383,7 +6528,7 @@
                         <a:buNone/>
                       </a:pPr>
                       <a:r>
-                        <a:rPr lang="en-US" sz="1450" dirty="0">
+                        <a:rPr lang="en-US" sz="1300" dirty="0">
                           <a:solidFill>
                             <a:srgbClr val="1A1A19"/>
                           </a:solidFill>
@@ -7391,9 +6536,9 @@
                           <a:ea typeface="Calibri" pitchFamily="34" charset="-122"/>
                           <a:cs typeface="Calibri" pitchFamily="34" charset="-120"/>
                         </a:rPr>
-                        <a:t>Régression (OLS, Ridge), classification (logistique, SVM, arbres, forêt)</a:t>
+                        <a:t>Régression, classification (6 méthodes)</a:t>
                       </a:r>
-                      <a:endParaRPr lang="en-US" sz="1450" dirty="0">
+                      <a:endParaRPr lang="en-US" sz="1300" dirty="0">
                         <a:latin typeface="Calibri" charset="0"/>
                         <a:ea typeface="Calibri" charset="0"/>
                         <a:cs typeface="Calibri" charset="0"/>
@@ -7440,7 +6585,7 @@
                   </a:tcPr>
                 </a:tc>
               </a:tr>
-              <a:tr h="566928">
+              <a:tr h="457200">
                 <a:tc>
                   <a:txBody>
                     <a:bodyPr/>
@@ -7450,7 +6595,7 @@
                         <a:buNone/>
                       </a:pPr>
                       <a:r>
-                        <a:rPr lang="en-US" sz="1450" b="1" dirty="0">
+                        <a:rPr lang="en-US" sz="1300" b="1" dirty="0">
                           <a:solidFill>
                             <a:srgbClr val="1BAF7A"/>
                           </a:solidFill>
@@ -7460,7 +6605,7 @@
                         </a:rPr>
                         <a:t>B — Vitesse d'écoulement</a:t>
                       </a:r>
-                      <a:endParaRPr lang="en-US" sz="1450" dirty="0">
+                      <a:endParaRPr lang="en-US" sz="1300" dirty="0">
                         <a:latin typeface="Calibri" charset="0"/>
                         <a:ea typeface="Calibri" charset="0"/>
                         <a:cs typeface="Calibri" charset="0"/>
@@ -7515,7 +6660,7 @@
                         <a:buNone/>
                       </a:pPr>
                       <a:r>
-                        <a:rPr lang="en-US" sz="1450" dirty="0">
+                        <a:rPr lang="en-US" sz="1300" dirty="0">
                           <a:solidFill>
                             <a:srgbClr val="1A1A19"/>
                           </a:solidFill>
@@ -7525,7 +6670,7 @@
                         </a:rPr>
                         <a:t>Combien de réservations par mois ?</a:t>
                       </a:r>
-                      <a:endParaRPr lang="en-US" sz="1450" dirty="0">
+                      <a:endParaRPr lang="en-US" sz="1300" dirty="0">
                         <a:latin typeface="Calibri" charset="0"/>
                         <a:ea typeface="Calibri" charset="0"/>
                         <a:cs typeface="Calibri" charset="0"/>
@@ -7580,7 +6725,7 @@
                         <a:buNone/>
                       </a:pPr>
                       <a:r>
-                        <a:rPr lang="en-US" sz="1450" dirty="0">
+                        <a:rPr lang="en-US" sz="1300" dirty="0">
                           <a:solidFill>
                             <a:srgbClr val="1A1A19"/>
                           </a:solidFill>
@@ -7588,9 +6733,9 @@
                           <a:ea typeface="Calibri" pitchFamily="34" charset="-122"/>
                           <a:cs typeface="Calibri" pitchFamily="34" charset="-120"/>
                         </a:rPr>
-                        <a:t>Effets aléatoires (panel), ARIMAX, courbe logistique</a:t>
+                        <a:t>Effets aléatoires (panel), ARIMA, logistique</a:t>
                       </a:r>
-                      <a:endParaRPr lang="en-US" sz="1450" dirty="0">
+                      <a:endParaRPr lang="en-US" sz="1300" dirty="0">
                         <a:latin typeface="Calibri" charset="0"/>
                         <a:ea typeface="Calibri" charset="0"/>
                         <a:cs typeface="Calibri" charset="0"/>
@@ -7637,7 +6782,7 @@
                   </a:tcPr>
                 </a:tc>
               </a:tr>
-              <a:tr h="566928">
+              <a:tr h="457200">
                 <a:tc>
                   <a:txBody>
                     <a:bodyPr/>
@@ -7647,7 +6792,7 @@
                         <a:buNone/>
                       </a:pPr>
                       <a:r>
-                        <a:rPr lang="en-US" sz="1450" b="1" dirty="0">
+                        <a:rPr lang="en-US" sz="1300" b="1" dirty="0">
                           <a:solidFill>
                             <a:srgbClr val="4A3AA7"/>
                           </a:solidFill>
@@ -7657,7 +6802,7 @@
                         </a:rPr>
                         <a:t>C — Optimisation de prix</a:t>
                       </a:r>
-                      <a:endParaRPr lang="en-US" sz="1450" dirty="0">
+                      <a:endParaRPr lang="en-US" sz="1300" dirty="0">
                         <a:latin typeface="Calibri" charset="0"/>
                         <a:ea typeface="Calibri" charset="0"/>
                         <a:cs typeface="Calibri" charset="0"/>
@@ -7712,7 +6857,7 @@
                         <a:buNone/>
                       </a:pPr>
                       <a:r>
-                        <a:rPr lang="en-US" sz="1450" dirty="0">
+                        <a:rPr lang="en-US" sz="1300" dirty="0">
                           <a:solidFill>
                             <a:srgbClr val="1A1A19"/>
                           </a:solidFill>
@@ -7722,7 +6867,7 @@
                         </a:rPr>
                         <a:t>Quel prix pour quel lot ?</a:t>
                       </a:r>
-                      <a:endParaRPr lang="en-US" sz="1450" dirty="0">
+                      <a:endParaRPr lang="en-US" sz="1300" dirty="0">
                         <a:latin typeface="Calibri" charset="0"/>
                         <a:ea typeface="Calibri" charset="0"/>
                         <a:cs typeface="Calibri" charset="0"/>
@@ -7777,7 +6922,7 @@
                         <a:buNone/>
                       </a:pPr>
                       <a:r>
-                        <a:rPr lang="en-US" sz="1450" dirty="0">
+                        <a:rPr lang="en-US" sz="1300" dirty="0">
                           <a:solidFill>
                             <a:srgbClr val="1A1A19"/>
                           </a:solidFill>
@@ -7785,9 +6930,206 @@
                           <a:ea typeface="Calibri" pitchFamily="34" charset="-122"/>
                           <a:cs typeface="Calibri" pitchFamily="34" charset="-120"/>
                         </a:rPr>
-                        <a:t>OLS hédonique, optimisation sous contrainte (Lagrange)</a:t>
+                        <a:t>OLS hédonique, optimisation (Lagrange)</a:t>
                       </a:r>
-                      <a:endParaRPr lang="en-US" sz="1450" dirty="0">
+                      <a:endParaRPr lang="en-US" sz="1300" dirty="0">
+                        <a:latin typeface="Calibri" charset="0"/>
+                        <a:ea typeface="Calibri" charset="0"/>
+                        <a:cs typeface="Calibri" charset="0"/>
+                      </a:endParaRPr>
+                    </a:p>
+                  </a:txBody>
+                  <a:tcPr marL="91440" marR="91440" marT="45720" marB="45720" anchor="ctr">
+                    <a:lnL w="12700" cap="flat" cmpd="sng" algn="ctr">
+                      <a:solidFill>
+                        <a:srgbClr val="E3E7EE"/>
+                      </a:solidFill>
+                      <a:prstDash val="solid"/>
+                      <a:round/>
+                      <a:headEnd type="none" w="med" len="med"/>
+                      <a:tailEnd type="none" w="med" len="med"/>
+                    </a:lnL>
+                    <a:lnR w="12700" cap="flat" cmpd="sng" algn="ctr">
+                      <a:solidFill>
+                        <a:srgbClr val="E3E7EE"/>
+                      </a:solidFill>
+                      <a:prstDash val="solid"/>
+                      <a:round/>
+                      <a:headEnd type="none" w="med" len="med"/>
+                      <a:tailEnd type="none" w="med" len="med"/>
+                    </a:lnR>
+                    <a:lnT w="12700" cap="flat" cmpd="sng" algn="ctr">
+                      <a:solidFill>
+                        <a:srgbClr val="E3E7EE"/>
+                      </a:solidFill>
+                      <a:prstDash val="solid"/>
+                      <a:round/>
+                      <a:headEnd type="none" w="med" len="med"/>
+                      <a:tailEnd type="none" w="med" len="med"/>
+                    </a:lnT>
+                    <a:lnB w="12700" cap="flat" cmpd="sng" algn="ctr">
+                      <a:solidFill>
+                        <a:srgbClr val="E3E7EE"/>
+                      </a:solidFill>
+                      <a:prstDash val="solid"/>
+                      <a:round/>
+                      <a:headEnd type="none" w="med" len="med"/>
+                      <a:tailEnd type="none" w="med" len="med"/>
+                    </a:lnB>
+                  </a:tcPr>
+                </a:tc>
+              </a:tr>
+              <a:tr h="457200">
+                <a:tc>
+                  <a:txBody>
+                    <a:bodyPr/>
+                    <a:lstStyle/>
+                    <a:p>
+                      <a:pPr indent="0" marL="0">
+                        <a:buNone/>
+                      </a:pPr>
+                      <a:r>
+                        <a:rPr lang="en-US" sz="1300" b="1" dirty="0">
+                          <a:solidFill>
+                            <a:srgbClr val="EDA100"/>
+                          </a:solidFill>
+                          <a:latin typeface="Calibri" pitchFamily="34" charset="0"/>
+                          <a:ea typeface="Calibri" pitchFamily="34" charset="-122"/>
+                          <a:cs typeface="Calibri" pitchFamily="34" charset="-120"/>
+                        </a:rPr>
+                        <a:t>Transverse — signaux faibles</a:t>
+                      </a:r>
+                      <a:endParaRPr lang="en-US" sz="1300" dirty="0">
+                        <a:latin typeface="Calibri" charset="0"/>
+                        <a:ea typeface="Calibri" charset="0"/>
+                        <a:cs typeface="Calibri" charset="0"/>
+                      </a:endParaRPr>
+                    </a:p>
+                  </a:txBody>
+                  <a:tcPr marL="91440" marR="91440" marT="45720" marB="45720" anchor="ctr">
+                    <a:lnL w="12700" cap="flat" cmpd="sng" algn="ctr">
+                      <a:solidFill>
+                        <a:srgbClr val="E3E7EE"/>
+                      </a:solidFill>
+                      <a:prstDash val="solid"/>
+                      <a:round/>
+                      <a:headEnd type="none" w="med" len="med"/>
+                      <a:tailEnd type="none" w="med" len="med"/>
+                    </a:lnL>
+                    <a:lnR w="12700" cap="flat" cmpd="sng" algn="ctr">
+                      <a:solidFill>
+                        <a:srgbClr val="E3E7EE"/>
+                      </a:solidFill>
+                      <a:prstDash val="solid"/>
+                      <a:round/>
+                      <a:headEnd type="none" w="med" len="med"/>
+                      <a:tailEnd type="none" w="med" len="med"/>
+                    </a:lnR>
+                    <a:lnT w="12700" cap="flat" cmpd="sng" algn="ctr">
+                      <a:solidFill>
+                        <a:srgbClr val="E3E7EE"/>
+                      </a:solidFill>
+                      <a:prstDash val="solid"/>
+                      <a:round/>
+                      <a:headEnd type="none" w="med" len="med"/>
+                      <a:tailEnd type="none" w="med" len="med"/>
+                    </a:lnT>
+                    <a:lnB w="12700" cap="flat" cmpd="sng" algn="ctr">
+                      <a:solidFill>
+                        <a:srgbClr val="E3E7EE"/>
+                      </a:solidFill>
+                      <a:prstDash val="solid"/>
+                      <a:round/>
+                      <a:headEnd type="none" w="med" len="med"/>
+                      <a:tailEnd type="none" w="med" len="med"/>
+                    </a:lnB>
+                  </a:tcPr>
+                </a:tc>
+                <a:tc>
+                  <a:txBody>
+                    <a:bodyPr/>
+                    <a:lstStyle/>
+                    <a:p>
+                      <a:pPr indent="0" marL="0">
+                        <a:buNone/>
+                      </a:pPr>
+                      <a:r>
+                        <a:rPr lang="en-US" sz="1300" dirty="0">
+                          <a:solidFill>
+                            <a:srgbClr val="1A1A19"/>
+                          </a:solidFill>
+                          <a:latin typeface="Calibri" pitchFamily="34" charset="0"/>
+                          <a:ea typeface="Calibri" pitchFamily="34" charset="-122"/>
+                          <a:cs typeface="Calibri" pitchFamily="34" charset="-120"/>
+                        </a:rPr>
+                        <a:t>Texte et réseau de vente</a:t>
+                      </a:r>
+                      <a:endParaRPr lang="en-US" sz="1300" dirty="0">
+                        <a:latin typeface="Calibri" charset="0"/>
+                        <a:ea typeface="Calibri" charset="0"/>
+                        <a:cs typeface="Calibri" charset="0"/>
+                      </a:endParaRPr>
+                    </a:p>
+                  </a:txBody>
+                  <a:tcPr marL="91440" marR="91440" marT="45720" marB="45720" anchor="ctr">
+                    <a:lnL w="12700" cap="flat" cmpd="sng" algn="ctr">
+                      <a:solidFill>
+                        <a:srgbClr val="E3E7EE"/>
+                      </a:solidFill>
+                      <a:prstDash val="solid"/>
+                      <a:round/>
+                      <a:headEnd type="none" w="med" len="med"/>
+                      <a:tailEnd type="none" w="med" len="med"/>
+                    </a:lnL>
+                    <a:lnR w="12700" cap="flat" cmpd="sng" algn="ctr">
+                      <a:solidFill>
+                        <a:srgbClr val="E3E7EE"/>
+                      </a:solidFill>
+                      <a:prstDash val="solid"/>
+                      <a:round/>
+                      <a:headEnd type="none" w="med" len="med"/>
+                      <a:tailEnd type="none" w="med" len="med"/>
+                    </a:lnR>
+                    <a:lnT w="12700" cap="flat" cmpd="sng" algn="ctr">
+                      <a:solidFill>
+                        <a:srgbClr val="E3E7EE"/>
+                      </a:solidFill>
+                      <a:prstDash val="solid"/>
+                      <a:round/>
+                      <a:headEnd type="none" w="med" len="med"/>
+                      <a:tailEnd type="none" w="med" len="med"/>
+                    </a:lnT>
+                    <a:lnB w="12700" cap="flat" cmpd="sng" algn="ctr">
+                      <a:solidFill>
+                        <a:srgbClr val="E3E7EE"/>
+                      </a:solidFill>
+                      <a:prstDash val="solid"/>
+                      <a:round/>
+                      <a:headEnd type="none" w="med" len="med"/>
+                      <a:tailEnd type="none" w="med" len="med"/>
+                    </a:lnB>
+                  </a:tcPr>
+                </a:tc>
+                <a:tc>
+                  <a:txBody>
+                    <a:bodyPr/>
+                    <a:lstStyle/>
+                    <a:p>
+                      <a:pPr indent="0" marL="0">
+                        <a:buNone/>
+                      </a:pPr>
+                      <a:r>
+                        <a:rPr lang="en-US" sz="1300" dirty="0">
+                          <a:solidFill>
+                            <a:srgbClr val="1A1A19"/>
+                          </a:solidFill>
+                          <a:latin typeface="Calibri" pitchFamily="34" charset="0"/>
+                          <a:ea typeface="Calibri" pitchFamily="34" charset="-122"/>
+                          <a:cs typeface="Calibri" pitchFamily="34" charset="-120"/>
+                        </a:rPr>
+                        <a:t>TF-IDF, Naive Bayes, graphe biparti</a:t>
+                      </a:r>
+                      <a:endParaRPr lang="en-US" sz="1300" dirty="0">
                         <a:latin typeface="Calibri" charset="0"/>
                         <a:ea typeface="Calibri" charset="0"/>
                         <a:cs typeface="Calibri" charset="0"/>
@@ -7846,12 +7188,12 @@
         </p:nvSpPr>
         <p:spPr>
           <a:xfrm>
-            <a:off x="548640" y="4892040"/>
-            <a:ext cx="3566160" cy="1234440"/>
+            <a:off x="548640" y="4343400"/>
+            <a:ext cx="3566160" cy="1188720"/>
           </a:xfrm>
           <a:prstGeom prst="roundRect">
             <a:avLst>
-              <a:gd name="adj" fmla="val 5926"/>
+              <a:gd name="adj" fmla="val 6154"/>
             </a:avLst>
           </a:prstGeom>
           <a:solidFill>
@@ -7880,8 +7222,8 @@
         </p:nvSpPr>
         <p:spPr>
           <a:xfrm>
-            <a:off x="658368" y="4983480"/>
-            <a:ext cx="3346704" cy="667512"/>
+            <a:off x="658368" y="4416552"/>
+            <a:ext cx="3346704" cy="640080"/>
           </a:xfrm>
           <a:prstGeom prst="rect">
             <a:avLst/>
@@ -7897,7 +7239,7 @@
               <a:buNone/>
             </a:pPr>
             <a:r>
-              <a:rPr lang="en-US" sz="3000" b="1" dirty="0">
+              <a:rPr lang="en-US" sz="2400" b="1" dirty="0">
                 <a:solidFill>
                   <a:srgbClr val="2A78D6"/>
                 </a:solidFill>
@@ -7907,7 +7249,7 @@
               </a:rPr>
               <a:t>267</a:t>
             </a:r>
-            <a:endParaRPr lang="en-US" sz="3000" dirty="0"/>
+            <a:endParaRPr lang="en-US" sz="2400" dirty="0"/>
           </a:p>
         </p:txBody>
       </p:sp>
@@ -7919,7 +7261,7 @@
         </p:nvSpPr>
         <p:spPr>
           <a:xfrm>
-            <a:off x="658368" y="5669280"/>
+            <a:off x="658368" y="5093208"/>
             <a:ext cx="3346704" cy="384048"/>
           </a:xfrm>
           <a:prstGeom prst="rect">
@@ -7936,7 +7278,7 @@
               <a:buNone/>
             </a:pPr>
             <a:r>
-              <a:rPr lang="en-US" sz="1100" dirty="0">
+              <a:rPr lang="en-US" sz="1050" dirty="0">
                 <a:solidFill>
                   <a:srgbClr val="52514E"/>
                 </a:solidFill>
@@ -7946,7 +7288,7 @@
               </a:rPr>
               <a:t>opérations réelles mobilisées</a:t>
             </a:r>
-            <a:endParaRPr lang="en-US" sz="1100" dirty="0"/>
+            <a:endParaRPr lang="en-US" sz="1050" dirty="0"/>
           </a:p>
         </p:txBody>
       </p:sp>
@@ -7958,12 +7300,12 @@
         </p:nvSpPr>
         <p:spPr>
           <a:xfrm>
-            <a:off x="4297680" y="4892040"/>
-            <a:ext cx="3566160" cy="1234440"/>
+            <a:off x="4297680" y="4343400"/>
+            <a:ext cx="3566160" cy="1188720"/>
           </a:xfrm>
           <a:prstGeom prst="roundRect">
             <a:avLst>
-              <a:gd name="adj" fmla="val 5926"/>
+              <a:gd name="adj" fmla="val 6154"/>
             </a:avLst>
           </a:prstGeom>
           <a:solidFill>
@@ -7992,8 +7334,8 @@
         </p:nvSpPr>
         <p:spPr>
           <a:xfrm>
-            <a:off x="4407408" y="4983480"/>
-            <a:ext cx="3346704" cy="667512"/>
+            <a:off x="4407408" y="4416552"/>
+            <a:ext cx="3346704" cy="640080"/>
           </a:xfrm>
           <a:prstGeom prst="rect">
             <a:avLst/>
@@ -8009,7 +7351,7 @@
               <a:buNone/>
             </a:pPr>
             <a:r>
-              <a:rPr lang="en-US" sz="3000" b="1" dirty="0">
+              <a:rPr lang="en-US" sz="2400" b="1" dirty="0">
                 <a:solidFill>
                   <a:srgbClr val="1BAF7A"/>
                 </a:solidFill>
@@ -8019,7 +7361,7 @@
               </a:rPr>
               <a:t>7</a:t>
             </a:r>
-            <a:endParaRPr lang="en-US" sz="3000" dirty="0"/>
+            <a:endParaRPr lang="en-US" sz="2400" dirty="0"/>
           </a:p>
         </p:txBody>
       </p:sp>
@@ -8031,7 +7373,7 @@
         </p:nvSpPr>
         <p:spPr>
           <a:xfrm>
-            <a:off x="4407408" y="5669280"/>
+            <a:off x="4407408" y="5093208"/>
             <a:ext cx="3346704" cy="384048"/>
           </a:xfrm>
           <a:prstGeom prst="rect">
@@ -8048,7 +7390,7 @@
               <a:buNone/>
             </a:pPr>
             <a:r>
-              <a:rPr lang="en-US" sz="1100" dirty="0">
+              <a:rPr lang="en-US" sz="1050" dirty="0">
                 <a:solidFill>
                   <a:srgbClr val="52514E"/>
                 </a:solidFill>
@@ -8056,9 +7398,9 @@
                 <a:ea typeface="Calibri" pitchFamily="34" charset="-122"/>
                 <a:cs typeface="Calibri" pitchFamily="34" charset="-120"/>
               </a:rPr>
-              <a:t>notebooks exécutés et vérifiés</a:t>
-            </a:r>
-            <a:endParaRPr lang="en-US" sz="1100" dirty="0"/>
+              <a:t>programmes d'analyse exécutés</a:t>
+            </a:r>
+            <a:endParaRPr lang="en-US" sz="1050" dirty="0"/>
           </a:p>
         </p:txBody>
       </p:sp>
@@ -8070,12 +7412,12 @@
         </p:nvSpPr>
         <p:spPr>
           <a:xfrm>
-            <a:off x="8046720" y="4892040"/>
-            <a:ext cx="3566160" cy="1234440"/>
+            <a:off x="8046720" y="4343400"/>
+            <a:ext cx="3566160" cy="1188720"/>
           </a:xfrm>
           <a:prstGeom prst="roundRect">
             <a:avLst>
-              <a:gd name="adj" fmla="val 5926"/>
+              <a:gd name="adj" fmla="val 6154"/>
             </a:avLst>
           </a:prstGeom>
           <a:solidFill>
@@ -8104,8 +7446,8 @@
         </p:nvSpPr>
         <p:spPr>
           <a:xfrm>
-            <a:off x="8156448" y="4983480"/>
-            <a:ext cx="3346704" cy="667512"/>
+            <a:off x="8156448" y="4416552"/>
+            <a:ext cx="3346704" cy="640080"/>
           </a:xfrm>
           <a:prstGeom prst="rect">
             <a:avLst/>
@@ -8121,7 +7463,7 @@
               <a:buNone/>
             </a:pPr>
             <a:r>
-              <a:rPr lang="en-US" sz="3000" b="1" dirty="0">
+              <a:rPr lang="en-US" sz="2400" b="1" dirty="0">
                 <a:solidFill>
                   <a:srgbClr val="4A3AA7"/>
                 </a:solidFill>
@@ -8129,9 +7471,9 @@
                 <a:ea typeface="Cambria" pitchFamily="34" charset="-122"/>
                 <a:cs typeface="Cambria" pitchFamily="34" charset="-120"/>
               </a:rPr>
-              <a:t>147</a:t>
-            </a:r>
-            <a:endParaRPr lang="en-US" sz="3000" dirty="0"/>
+              <a:t>5</a:t>
+            </a:r>
+            <a:endParaRPr lang="en-US" sz="2400" dirty="0"/>
           </a:p>
         </p:txBody>
       </p:sp>
@@ -8143,7 +7485,7 @@
         </p:nvSpPr>
         <p:spPr>
           <a:xfrm>
-            <a:off x="8156448" y="5669280"/>
+            <a:off x="8156448" y="5093208"/>
             <a:ext cx="3346704" cy="384048"/>
           </a:xfrm>
           <a:prstGeom prst="rect">
@@ -8160,7 +7502,7 @@
               <a:buNone/>
             </a:pPr>
             <a:r>
-              <a:rPr lang="en-US" sz="1100" dirty="0">
+              <a:rPr lang="en-US" sz="1050" dirty="0">
                 <a:solidFill>
                   <a:srgbClr val="52514E"/>
                 </a:solidFill>
@@ -8168,9 +7510,9 @@
                 <a:ea typeface="Calibri" pitchFamily="34" charset="-122"/>
                 <a:cs typeface="Calibri" pitchFamily="34" charset="-120"/>
               </a:rPr>
-              <a:t>opérations restituées à l'écran</a:t>
-            </a:r>
-            <a:endParaRPr lang="en-US" sz="1100" dirty="0"/>
+              <a:t>familles de méthodes différentes</a:t>
+            </a:r>
+            <a:endParaRPr lang="en-US" sz="1050" dirty="0"/>
           </a:p>
         </p:txBody>
       </p:sp>
@@ -8182,8 +7524,8 @@
         </p:nvSpPr>
         <p:spPr>
           <a:xfrm>
-            <a:off x="548640" y="6510528"/>
-            <a:ext cx="5486400" cy="274320"/>
+            <a:off x="548640" y="5669280"/>
+            <a:ext cx="11064240" cy="548640"/>
           </a:xfrm>
           <a:prstGeom prst="rect">
             <a:avLst/>
@@ -8199,14 +7541,53 @@
               <a:buNone/>
             </a:pPr>
             <a:r>
-              <a:rPr lang="en-US" sz="900" dirty="0">
-                <a:solidFill>
-                  <a:srgbClr val="9A9A95"/>
+              <a:rPr lang="en-US" sz="1200" i="1" dirty="0">
+                <a:solidFill>
+                  <a:srgbClr val="52514E"/>
                 </a:solidFill>
                 <a:latin typeface="Calibri" pitchFamily="34" charset="0"/>
                 <a:ea typeface="Calibri" pitchFamily="34" charset="-122"/>
                 <a:cs typeface="Calibri" pitchFamily="34" charset="-120"/>
               </a:rPr>
+              <a:t>Principe transversal : sur un échantillon restreint, un résultat n'est retenu que s'il tient en validation croisée — jamais sur sa seule performance d'ajustement.</a:t>
+            </a:r>
+            <a:endParaRPr lang="en-US" sz="1200" dirty="0"/>
+          </a:p>
+        </p:txBody>
+      </p:sp>
+      <p:sp>
+        <p:nvSpPr>
+          <p:cNvPr id="16" name="Text 13"/>
+          <p:cNvSpPr/>
+          <p:nvPr/>
+        </p:nvSpPr>
+        <p:spPr>
+          <a:xfrm>
+            <a:off x="548640" y="6510528"/>
+            <a:ext cx="5486400" cy="274320"/>
+          </a:xfrm>
+          <a:prstGeom prst="rect">
+            <a:avLst/>
+          </a:prstGeom>
+          <a:noFill/>
+          <a:ln/>
+        </p:spPr>
+        <p:txBody>
+          <a:bodyPr wrap="square" lIns="0" tIns="0" rIns="0" bIns="0" rtlCol="0" anchor="ctr"/>
+          <a:lstStyle/>
+          <a:p>
+            <a:pPr indent="0" marL="0">
+              <a:buNone/>
+            </a:pPr>
+            <a:r>
+              <a:rPr lang="en-US" sz="900" dirty="0">
+                <a:solidFill>
+                  <a:srgbClr val="9A9A95"/>
+                </a:solidFill>
+                <a:latin typeface="Calibri" pitchFamily="34" charset="0"/>
+                <a:ea typeface="Calibri" pitchFamily="34" charset="-122"/>
+                <a:cs typeface="Calibri" pitchFamily="34" charset="-120"/>
+              </a:rPr>
               <a:t>Copilote Financier — Groupe Angelotti</a:t>
             </a:r>
             <a:endParaRPr lang="en-US" sz="900" dirty="0"/>
@@ -8215,7 +7596,1816 @@
       </p:sp>
       <p:sp>
         <p:nvSpPr>
-          <p:cNvPr id="16" name="Text 13"/>
+          <p:cNvPr id="17" name="Text 14"/>
+          <p:cNvSpPr/>
+          <p:nvPr/>
+        </p:nvSpPr>
+        <p:spPr>
+          <a:xfrm>
+            <a:off x="11430000" y="6510528"/>
+            <a:ext cx="365760" cy="274320"/>
+          </a:xfrm>
+          <a:prstGeom prst="rect">
+            <a:avLst/>
+          </a:prstGeom>
+          <a:noFill/>
+          <a:ln/>
+        </p:spPr>
+        <p:txBody>
+          <a:bodyPr wrap="square" lIns="0" tIns="0" rIns="0" bIns="0" rtlCol="0" anchor="ctr"/>
+          <a:lstStyle/>
+          <a:p>
+            <a:pPr algn="r" indent="0" marL="0">
+              <a:buNone/>
+            </a:pPr>
+            <a:r>
+              <a:rPr lang="en-US" sz="900" dirty="0">
+                <a:solidFill>
+                  <a:srgbClr val="9A9A95"/>
+                </a:solidFill>
+                <a:latin typeface="Calibri" pitchFamily="34" charset="0"/>
+                <a:ea typeface="Calibri" pitchFamily="34" charset="-122"/>
+                <a:cs typeface="Calibri" pitchFamily="34" charset="-120"/>
+              </a:rPr>
+              <a:t>5</a:t>
+            </a:r>
+            <a:endParaRPr lang="en-US" sz="900" dirty="0"/>
+          </a:p>
+        </p:txBody>
+      </p:sp>
+    </p:spTree>
+  </p:cSld>
+  <p:clrMapOvr>
+    <a:masterClrMapping/>
+  </p:clrMapOvr>
+</p:sld>
+</file>
+
+<file path=ppt/slides/slide6.xml><?xml version="1.0" encoding="utf-8"?>
+<p:sld xmlns:a="http://schemas.openxmlformats.org/drawingml/2006/main" xmlns:r="http://schemas.openxmlformats.org/officeDocument/2006/relationships" xmlns:p="http://schemas.openxmlformats.org/presentationml/2006/main">
+  <p:cSld name="Slide 6">
+    <p:bg>
+      <p:bgPr>
+        <a:solidFill>
+          <a:srgbClr val="FFFFFF"/>
+        </a:solidFill>
+      </p:bgPr>
+    </p:bg>
+    <p:spTree>
+      <p:nvGrpSpPr>
+        <p:cNvPr id="1" name=""/>
+        <p:cNvGrpSpPr/>
+        <p:nvPr/>
+      </p:nvGrpSpPr>
+      <p:grpSpPr>
+        <a:xfrm>
+          <a:off x="0" y="0"/>
+          <a:ext cx="0" cy="0"/>
+          <a:chOff x="0" y="0"/>
+          <a:chExt cx="0" cy="0"/>
+        </a:xfrm>
+      </p:grpSpPr>
+      <p:sp>
+        <p:nvSpPr>
+          <p:cNvPr id="2" name="Text 0"/>
+          <p:cNvSpPr/>
+          <p:nvPr/>
+        </p:nvSpPr>
+        <p:spPr>
+          <a:xfrm>
+            <a:off x="548640" y="384048"/>
+            <a:ext cx="8229600" cy="320040"/>
+          </a:xfrm>
+          <a:prstGeom prst="rect">
+            <a:avLst/>
+          </a:prstGeom>
+          <a:noFill/>
+          <a:ln/>
+        </p:spPr>
+        <p:txBody>
+          <a:bodyPr wrap="square" lIns="0" tIns="0" rIns="0" bIns="0" rtlCol="0" anchor="ctr"/>
+          <a:lstStyle/>
+          <a:p>
+            <a:pPr indent="0" marL="0">
+              <a:buNone/>
+            </a:pPr>
+            <a:r>
+              <a:rPr lang="en-US" sz="1200" b="1" spc="200" kern="0" dirty="0">
+                <a:solidFill>
+                  <a:srgbClr val="EDA100"/>
+                </a:solidFill>
+                <a:latin typeface="Calibri" pitchFamily="34" charset="0"/>
+                <a:ea typeface="Calibri" pitchFamily="34" charset="-122"/>
+                <a:cs typeface="Calibri" pitchFamily="34" charset="-120"/>
+              </a:rPr>
+              <a:t>COPILOTE FINANCIER — AVANT DE MODÉLISER</a:t>
+            </a:r>
+            <a:endParaRPr lang="en-US" sz="1200" dirty="0"/>
+          </a:p>
+        </p:txBody>
+      </p:sp>
+      <p:sp>
+        <p:nvSpPr>
+          <p:cNvPr id="3" name="Text 1"/>
+          <p:cNvSpPr/>
+          <p:nvPr/>
+        </p:nvSpPr>
+        <p:spPr>
+          <a:xfrm>
+            <a:off x="548640" y="658368"/>
+            <a:ext cx="10515600" cy="822960"/>
+          </a:xfrm>
+          <a:prstGeom prst="rect">
+            <a:avLst/>
+          </a:prstGeom>
+          <a:noFill/>
+          <a:ln/>
+        </p:spPr>
+        <p:txBody>
+          <a:bodyPr wrap="square" lIns="0" tIns="0" rIns="0" bIns="0" rtlCol="0" anchor="ctr"/>
+          <a:lstStyle/>
+          <a:p>
+            <a:pPr indent="0" marL="0">
+              <a:buNone/>
+            </a:pPr>
+            <a:r>
+              <a:rPr lang="en-US" sz="2800" b="1" dirty="0">
+                <a:solidFill>
+                  <a:srgbClr val="1A1A19"/>
+                </a:solidFill>
+                <a:latin typeface="Cambria" pitchFamily="34" charset="0"/>
+                <a:ea typeface="Cambria" pitchFamily="34" charset="-122"/>
+                <a:cs typeface="Cambria" pitchFamily="34" charset="-120"/>
+              </a:rPr>
+              <a:t>Exploration des données : deux leçons</a:t>
+            </a:r>
+            <a:endParaRPr lang="en-US" sz="2800" dirty="0"/>
+          </a:p>
+        </p:txBody>
+      </p:sp>
+      <p:sp>
+        <p:nvSpPr>
+          <p:cNvPr id="4" name="Text 2"/>
+          <p:cNvSpPr/>
+          <p:nvPr/>
+        </p:nvSpPr>
+        <p:spPr>
+          <a:xfrm>
+            <a:off x="548640" y="1600200"/>
+            <a:ext cx="11064240" cy="1737360"/>
+          </a:xfrm>
+          <a:prstGeom prst="rect">
+            <a:avLst/>
+          </a:prstGeom>
+          <a:noFill/>
+          <a:ln/>
+        </p:spPr>
+        <p:txBody>
+          <a:bodyPr wrap="square" lIns="0" tIns="0" rIns="0" bIns="0" rtlCol="0" anchor="t"/>
+          <a:lstStyle/>
+          <a:p>
+            <a:pPr marL="203200" indent="-203200">
+              <a:lnSpc>
+                <a:spcPct val="106000"/>
+              </a:lnSpc>
+              <a:spcAft>
+                <a:spcPts val="1000"/>
+              </a:spcAft>
+              <a:buSzPct val="100000"/>
+              <a:buChar char="•"/>
+            </a:pPr>
+            <a:r>
+              <a:rPr lang="en-US" sz="1400" dirty="0">
+                <a:solidFill>
+                  <a:srgbClr val="1A1A19"/>
+                </a:solidFill>
+                <a:latin typeface="Calibri" pitchFamily="34" charset="0"/>
+                <a:ea typeface="Calibri" pitchFamily="34" charset="-122"/>
+                <a:cs typeface="Calibri" pitchFamily="34" charset="-120"/>
+              </a:rPr>
+              <a:t>Prix au m² très asymétrique → quasi normal après log-transformation → l'axe C modélise le log-prix</a:t>
+            </a:r>
+            <a:endParaRPr lang="en-US" sz="1400" dirty="0"/>
+          </a:p>
+          <a:p>
+            <a:pPr marL="203200" indent="-203200">
+              <a:lnSpc>
+                <a:spcPct val="106000"/>
+              </a:lnSpc>
+              <a:spcAft>
+                <a:spcPts val="1000"/>
+              </a:spcAft>
+              <a:buSzPct val="100000"/>
+              <a:buChar char="•"/>
+            </a:pPr>
+            <a:r>
+              <a:rPr lang="en-US" sz="1400" dirty="0">
+                <a:solidFill>
+                  <a:srgbClr val="1A1A19"/>
+                </a:solidFill>
+                <a:latin typeface="Calibri" pitchFamily="34" charset="0"/>
+                <a:ea typeface="Calibri" pitchFamily="34" charset="-122"/>
+                <a:cs typeface="Calibri" pitchFamily="34" charset="-120"/>
+              </a:rPr>
+              <a:t>Piège repéré : la corrélation brute réservations / taux de crédit est quasi nulle — la croissance du portefeuille maquille la relation</a:t>
+            </a:r>
+            <a:endParaRPr lang="en-US" sz="1400" dirty="0"/>
+          </a:p>
+          <a:p>
+            <a:pPr marL="203200" indent="-203200">
+              <a:lnSpc>
+                <a:spcPct val="106000"/>
+              </a:lnSpc>
+              <a:spcAft>
+                <a:spcPts val="1000"/>
+              </a:spcAft>
+              <a:buSzPct val="100000"/>
+              <a:buChar char="•"/>
+            </a:pPr>
+            <a:r>
+              <a:rPr lang="en-US" sz="1400" dirty="0">
+                <a:solidFill>
+                  <a:srgbClr val="1A1A19"/>
+                </a:solidFill>
+                <a:latin typeface="Calibri" pitchFamily="34" charset="0"/>
+                <a:ea typeface="Calibri" pitchFamily="34" charset="-122"/>
+                <a:cs typeface="Calibri" pitchFamily="34" charset="-120"/>
+              </a:rPr>
+              <a:t>Corrigée par opération active, la corrélation redevient nette et négative — cette correction structure toute la démarche de l'axe B</a:t>
+            </a:r>
+            <a:endParaRPr lang="en-US" sz="1400" dirty="0"/>
+          </a:p>
+        </p:txBody>
+      </p:sp>
+      <p:sp>
+        <p:nvSpPr>
+          <p:cNvPr id="5" name="Shape 3"/>
+          <p:cNvSpPr/>
+          <p:nvPr/>
+        </p:nvSpPr>
+        <p:spPr>
+          <a:xfrm>
+            <a:off x="475488" y="3447288"/>
+            <a:ext cx="5678424" cy="2798064"/>
+          </a:xfrm>
+          <a:prstGeom prst="roundRect">
+            <a:avLst>
+              <a:gd name="adj" fmla="val 1961"/>
+            </a:avLst>
+          </a:prstGeom>
+          <a:solidFill>
+            <a:srgbClr val="FFFFFF"/>
+          </a:solidFill>
+          <a:ln w="12700">
+            <a:solidFill>
+              <a:srgbClr val="E3E7EE"/>
+            </a:solidFill>
+            <a:prstDash val="solid"/>
+          </a:ln>
+          <a:effectLst>
+            <a:outerShdw sx="100000" sy="100000" kx="0" ky="0" algn="bl" rotWithShape="0" blurRad="101600" dist="25400" dir="5400000">
+              <a:srgbClr val="1A1A19">
+                <a:alpha val="15000"/>
+              </a:srgbClr>
+            </a:outerShdw>
+          </a:effectLst>
+        </p:spPr>
+      </p:sp>
+      <p:pic>
+        <p:nvPicPr>
+          <p:cNvPr id="6" name="Image 0" descr="/tmp/claude-0/-home-user-MemoireM2S2/bac073a6-7c4e-552a-9627-815aeb6fe82a/scratchpad/figs/p26-000.png">    </p:cNvPr>
+          <p:cNvPicPr>
+            <a:picLocks noChangeAspect="1"/>
+          </p:cNvPicPr>
+          <p:nvPr/>
+        </p:nvPicPr>
+        <p:blipFill>
+          <a:blip r:embed="rId1"/>
+          <a:srcRect l="0" r="0" t="0" b="0"/>
+          <a:stretch/>
+        </p:blipFill>
+        <p:spPr>
+          <a:xfrm>
+            <a:off x="548640" y="3520440"/>
+            <a:ext cx="5532120" cy="2651760"/>
+          </a:xfrm>
+          <a:prstGeom prst="rect">
+            <a:avLst/>
+          </a:prstGeom>
+        </p:spPr>
+      </p:pic>
+      <p:sp>
+        <p:nvSpPr>
+          <p:cNvPr id="7" name="Shape 4"/>
+          <p:cNvSpPr/>
+          <p:nvPr/>
+        </p:nvSpPr>
+        <p:spPr>
+          <a:xfrm>
+            <a:off x="6281928" y="3447288"/>
+            <a:ext cx="5404104" cy="1746504"/>
+          </a:xfrm>
+          <a:prstGeom prst="roundRect">
+            <a:avLst>
+              <a:gd name="adj" fmla="val 3141"/>
+            </a:avLst>
+          </a:prstGeom>
+          <a:solidFill>
+            <a:srgbClr val="FFFFFF"/>
+          </a:solidFill>
+          <a:ln w="12700">
+            <a:solidFill>
+              <a:srgbClr val="E3E7EE"/>
+            </a:solidFill>
+            <a:prstDash val="solid"/>
+          </a:ln>
+          <a:effectLst>
+            <a:outerShdw sx="100000" sy="100000" kx="0" ky="0" algn="bl" rotWithShape="0" blurRad="101600" dist="25400" dir="5400000">
+              <a:srgbClr val="1A1A19">
+                <a:alpha val="15000"/>
+              </a:srgbClr>
+            </a:outerShdw>
+          </a:effectLst>
+        </p:spPr>
+      </p:sp>
+      <p:pic>
+        <p:nvPicPr>
+          <p:cNvPr id="8" name="Image 1" descr="/tmp/claude-0/-home-user-MemoireM2S2/bac073a6-7c4e-552a-9627-815aeb6fe82a/scratchpad/figs/p26-002.png">    </p:cNvPr>
+          <p:cNvPicPr>
+            <a:picLocks noChangeAspect="1"/>
+          </p:cNvPicPr>
+          <p:nvPr/>
+        </p:nvPicPr>
+        <p:blipFill>
+          <a:blip r:embed="rId2"/>
+          <a:srcRect l="0" r="0" t="0" b="0"/>
+          <a:stretch/>
+        </p:blipFill>
+        <p:spPr>
+          <a:xfrm>
+            <a:off x="6355080" y="3520440"/>
+            <a:ext cx="5257800" cy="1600200"/>
+          </a:xfrm>
+          <a:prstGeom prst="rect">
+            <a:avLst/>
+          </a:prstGeom>
+        </p:spPr>
+      </p:pic>
+      <p:sp>
+        <p:nvSpPr>
+          <p:cNvPr id="9" name="Text 5"/>
+          <p:cNvSpPr/>
+          <p:nvPr/>
+        </p:nvSpPr>
+        <p:spPr>
+          <a:xfrm>
+            <a:off x="548640" y="6236208"/>
+            <a:ext cx="5532120" cy="320040"/>
+          </a:xfrm>
+          <a:prstGeom prst="rect">
+            <a:avLst/>
+          </a:prstGeom>
+          <a:noFill/>
+          <a:ln/>
+        </p:spPr>
+        <p:txBody>
+          <a:bodyPr wrap="square" lIns="0" tIns="0" rIns="0" bIns="0" rtlCol="0" anchor="ctr"/>
+          <a:lstStyle/>
+          <a:p>
+            <a:pPr indent="0" marL="0">
+              <a:buNone/>
+            </a:pPr>
+            <a:r>
+              <a:rPr lang="en-US" sz="950" i="1" dirty="0">
+                <a:solidFill>
+                  <a:srgbClr val="52514E"/>
+                </a:solidFill>
+                <a:latin typeface="Calibri" pitchFamily="34" charset="0"/>
+                <a:ea typeface="Calibri" pitchFamily="34" charset="-122"/>
+                <a:cs typeface="Calibri" pitchFamily="34" charset="-120"/>
+              </a:rPr>
+              <a:t>Fig. — Prix au m², brut puis log-transformé (asymétrie corrigée)</a:t>
+            </a:r>
+            <a:endParaRPr lang="en-US" sz="950" dirty="0"/>
+          </a:p>
+        </p:txBody>
+      </p:sp>
+      <p:sp>
+        <p:nvSpPr>
+          <p:cNvPr id="10" name="Text 6"/>
+          <p:cNvSpPr/>
+          <p:nvPr/>
+        </p:nvSpPr>
+        <p:spPr>
+          <a:xfrm>
+            <a:off x="6355080" y="5193792"/>
+            <a:ext cx="5257800" cy="502920"/>
+          </a:xfrm>
+          <a:prstGeom prst="rect">
+            <a:avLst/>
+          </a:prstGeom>
+          <a:noFill/>
+          <a:ln/>
+        </p:spPr>
+        <p:txBody>
+          <a:bodyPr wrap="square" lIns="0" tIns="0" rIns="0" bIns="0" rtlCol="0" anchor="ctr"/>
+          <a:lstStyle/>
+          <a:p>
+            <a:pPr indent="0" marL="0">
+              <a:buNone/>
+            </a:pPr>
+            <a:r>
+              <a:rPr lang="en-US" sz="950" i="1" dirty="0">
+                <a:solidFill>
+                  <a:srgbClr val="52514E"/>
+                </a:solidFill>
+                <a:latin typeface="Calibri" pitchFamily="34" charset="0"/>
+                <a:ea typeface="Calibri" pitchFamily="34" charset="-122"/>
+                <a:cs typeface="Calibri" pitchFamily="34" charset="-120"/>
+              </a:rPr>
+              <a:t>Fig. — Intensité de vente : l'effet des taux apparaît une fois l'effet de portefeuille neutralisé</a:t>
+            </a:r>
+            <a:endParaRPr lang="en-US" sz="950" dirty="0"/>
+          </a:p>
+        </p:txBody>
+      </p:sp>
+      <p:sp>
+        <p:nvSpPr>
+          <p:cNvPr id="11" name="Text 7"/>
+          <p:cNvSpPr/>
+          <p:nvPr/>
+        </p:nvSpPr>
+        <p:spPr>
+          <a:xfrm>
+            <a:off x="548640" y="6510528"/>
+            <a:ext cx="5486400" cy="274320"/>
+          </a:xfrm>
+          <a:prstGeom prst="rect">
+            <a:avLst/>
+          </a:prstGeom>
+          <a:noFill/>
+          <a:ln/>
+        </p:spPr>
+        <p:txBody>
+          <a:bodyPr wrap="square" lIns="0" tIns="0" rIns="0" bIns="0" rtlCol="0" anchor="ctr"/>
+          <a:lstStyle/>
+          <a:p>
+            <a:pPr indent="0" marL="0">
+              <a:buNone/>
+            </a:pPr>
+            <a:r>
+              <a:rPr lang="en-US" sz="900" dirty="0">
+                <a:solidFill>
+                  <a:srgbClr val="9A9A95"/>
+                </a:solidFill>
+                <a:latin typeface="Calibri" pitchFamily="34" charset="0"/>
+                <a:ea typeface="Calibri" pitchFamily="34" charset="-122"/>
+                <a:cs typeface="Calibri" pitchFamily="34" charset="-120"/>
+              </a:rPr>
+              <a:t>Copilote Financier — Groupe Angelotti</a:t>
+            </a:r>
+            <a:endParaRPr lang="en-US" sz="900" dirty="0"/>
+          </a:p>
+        </p:txBody>
+      </p:sp>
+      <p:sp>
+        <p:nvSpPr>
+          <p:cNvPr id="12" name="Text 8"/>
+          <p:cNvSpPr/>
+          <p:nvPr/>
+        </p:nvSpPr>
+        <p:spPr>
+          <a:xfrm>
+            <a:off x="11430000" y="6510528"/>
+            <a:ext cx="365760" cy="274320"/>
+          </a:xfrm>
+          <a:prstGeom prst="rect">
+            <a:avLst/>
+          </a:prstGeom>
+          <a:noFill/>
+          <a:ln/>
+        </p:spPr>
+        <p:txBody>
+          <a:bodyPr wrap="square" lIns="0" tIns="0" rIns="0" bIns="0" rtlCol="0" anchor="ctr"/>
+          <a:lstStyle/>
+          <a:p>
+            <a:pPr algn="r" indent="0" marL="0">
+              <a:buNone/>
+            </a:pPr>
+            <a:r>
+              <a:rPr lang="en-US" sz="900" dirty="0">
+                <a:solidFill>
+                  <a:srgbClr val="9A9A95"/>
+                </a:solidFill>
+                <a:latin typeface="Calibri" pitchFamily="34" charset="0"/>
+                <a:ea typeface="Calibri" pitchFamily="34" charset="-122"/>
+                <a:cs typeface="Calibri" pitchFamily="34" charset="-120"/>
+              </a:rPr>
+              <a:t>6</a:t>
+            </a:r>
+            <a:endParaRPr lang="en-US" sz="900" dirty="0"/>
+          </a:p>
+        </p:txBody>
+      </p:sp>
+    </p:spTree>
+  </p:cSld>
+  <p:clrMapOvr>
+    <a:masterClrMapping/>
+  </p:clrMapOvr>
+</p:sld>
+</file>
+
+<file path=ppt/slides/slide7.xml><?xml version="1.0" encoding="utf-8"?>
+<p:sld xmlns:a="http://schemas.openxmlformats.org/drawingml/2006/main" xmlns:r="http://schemas.openxmlformats.org/officeDocument/2006/relationships" xmlns:p="http://schemas.openxmlformats.org/presentationml/2006/main">
+  <p:cSld name="Slide 7">
+    <p:bg>
+      <p:bgPr>
+        <a:solidFill>
+          <a:srgbClr val="FFFFFF"/>
+        </a:solidFill>
+      </p:bgPr>
+    </p:bg>
+    <p:spTree>
+      <p:nvGrpSpPr>
+        <p:cNvPr id="1" name=""/>
+        <p:cNvGrpSpPr/>
+        <p:nvPr/>
+      </p:nvGrpSpPr>
+      <p:grpSpPr>
+        <a:xfrm>
+          <a:off x="0" y="0"/>
+          <a:ext cx="0" cy="0"/>
+          <a:chOff x="0" y="0"/>
+          <a:chExt cx="0" cy="0"/>
+        </a:xfrm>
+      </p:grpSpPr>
+      <p:sp>
+        <p:nvSpPr>
+          <p:cNvPr id="2" name="Text 0"/>
+          <p:cNvSpPr/>
+          <p:nvPr/>
+        </p:nvSpPr>
+        <p:spPr>
+          <a:xfrm>
+            <a:off x="548640" y="384048"/>
+            <a:ext cx="8229600" cy="320040"/>
+          </a:xfrm>
+          <a:prstGeom prst="rect">
+            <a:avLst/>
+          </a:prstGeom>
+          <a:noFill/>
+          <a:ln/>
+        </p:spPr>
+        <p:txBody>
+          <a:bodyPr wrap="square" lIns="0" tIns="0" rIns="0" bIns="0" rtlCol="0" anchor="ctr"/>
+          <a:lstStyle/>
+          <a:p>
+            <a:pPr indent="0" marL="0">
+              <a:buNone/>
+            </a:pPr>
+            <a:r>
+              <a:rPr lang="en-US" sz="1200" b="1" spc="200" kern="0" dirty="0">
+                <a:solidFill>
+                  <a:srgbClr val="2A78D6"/>
+                </a:solidFill>
+                <a:latin typeface="Calibri" pitchFamily="34" charset="0"/>
+                <a:ea typeface="Calibri" pitchFamily="34" charset="-122"/>
+                <a:cs typeface="Calibri" pitchFamily="34" charset="-120"/>
+              </a:rPr>
+              <a:t>COPILOTE FINANCIER — AXE A</a:t>
+            </a:r>
+            <a:endParaRPr lang="en-US" sz="1200" dirty="0"/>
+          </a:p>
+        </p:txBody>
+      </p:sp>
+      <p:sp>
+        <p:nvSpPr>
+          <p:cNvPr id="3" name="Text 1"/>
+          <p:cNvSpPr/>
+          <p:nvPr/>
+        </p:nvSpPr>
+        <p:spPr>
+          <a:xfrm>
+            <a:off x="548640" y="658368"/>
+            <a:ext cx="7315200" cy="822960"/>
+          </a:xfrm>
+          <a:prstGeom prst="rect">
+            <a:avLst/>
+          </a:prstGeom>
+          <a:noFill/>
+          <a:ln/>
+        </p:spPr>
+        <p:txBody>
+          <a:bodyPr wrap="square" lIns="0" tIns="0" rIns="0" bIns="0" rtlCol="0" anchor="ctr"/>
+          <a:lstStyle/>
+          <a:p>
+            <a:pPr indent="0" marL="0">
+              <a:buNone/>
+            </a:pPr>
+            <a:r>
+              <a:rPr lang="en-US" sz="2800" b="1" dirty="0">
+                <a:solidFill>
+                  <a:srgbClr val="1A1A19"/>
+                </a:solidFill>
+                <a:latin typeface="Cambria" pitchFamily="34" charset="0"/>
+                <a:ea typeface="Cambria" pitchFamily="34" charset="-122"/>
+                <a:cs typeface="Cambria" pitchFamily="34" charset="-120"/>
+              </a:rPr>
+              <a:t>Le risque de marge</a:t>
+            </a:r>
+            <a:endParaRPr lang="en-US" sz="2800" dirty="0"/>
+          </a:p>
+        </p:txBody>
+      </p:sp>
+      <p:sp>
+        <p:nvSpPr>
+          <p:cNvPr id="4" name="Text 2"/>
+          <p:cNvSpPr/>
+          <p:nvPr/>
+        </p:nvSpPr>
+        <p:spPr>
+          <a:xfrm>
+            <a:off x="548640" y="1600200"/>
+            <a:ext cx="6309360" cy="2331720"/>
+          </a:xfrm>
+          <a:prstGeom prst="rect">
+            <a:avLst/>
+          </a:prstGeom>
+          <a:noFill/>
+          <a:ln/>
+        </p:spPr>
+        <p:txBody>
+          <a:bodyPr wrap="square" lIns="0" tIns="0" rIns="0" bIns="0" rtlCol="0" anchor="t"/>
+          <a:lstStyle/>
+          <a:p>
+            <a:pPr marL="203200" indent="-203200">
+              <a:lnSpc>
+                <a:spcPct val="106000"/>
+              </a:lnSpc>
+              <a:spcAft>
+                <a:spcPts val="1000"/>
+              </a:spcAft>
+              <a:buSzPct val="100000"/>
+              <a:buChar char="•"/>
+            </a:pPr>
+            <a:r>
+              <a:rPr lang="en-US" sz="1250" dirty="0">
+                <a:solidFill>
+                  <a:srgbClr val="1A1A19"/>
+                </a:solidFill>
+                <a:latin typeface="Calibri" pitchFamily="34" charset="0"/>
+                <a:ea typeface="Calibri" pitchFamily="34" charset="-122"/>
+                <a:cs typeface="Calibri" pitchFamily="34" charset="-120"/>
+              </a:rPr>
+              <a:t>123 opérations suffisamment avancées : 28 % en dérive matérielle (&gt; 2 %)</a:t>
+            </a:r>
+            <a:endParaRPr lang="en-US" sz="1250" dirty="0"/>
+          </a:p>
+          <a:p>
+            <a:pPr marL="203200" indent="-203200">
+              <a:lnSpc>
+                <a:spcPct val="106000"/>
+              </a:lnSpc>
+              <a:spcAft>
+                <a:spcPts val="1000"/>
+              </a:spcAft>
+              <a:buSzPct val="100000"/>
+              <a:buChar char="•"/>
+            </a:pPr>
+            <a:r>
+              <a:rPr lang="en-US" sz="1250" dirty="0">
+                <a:solidFill>
+                  <a:srgbClr val="1A1A19"/>
+                </a:solidFill>
+                <a:latin typeface="Calibri" pitchFamily="34" charset="0"/>
+                <a:ea typeface="Calibri" pitchFamily="34" charset="-122"/>
+                <a:cs typeface="Calibri" pitchFamily="34" charset="-120"/>
+              </a:rPr>
+              <a:t>Régression du taux de dérive : R² test = 0,08 → bascule en classification</a:t>
+            </a:r>
+            <a:endParaRPr lang="en-US" sz="1250" dirty="0"/>
+          </a:p>
+          <a:p>
+            <a:pPr marL="203200" indent="-203200">
+              <a:lnSpc>
+                <a:spcPct val="106000"/>
+              </a:lnSpc>
+              <a:spcAft>
+                <a:spcPts val="1000"/>
+              </a:spcAft>
+              <a:buSzPct val="100000"/>
+              <a:buChar char="•"/>
+            </a:pPr>
+            <a:r>
+              <a:rPr lang="en-US" sz="1250" dirty="0">
+                <a:solidFill>
+                  <a:srgbClr val="1A1A19"/>
+                </a:solidFill>
+                <a:latin typeface="Calibri" pitchFamily="34" charset="0"/>
+                <a:ea typeface="Calibri" pitchFamily="34" charset="-122"/>
+                <a:cs typeface="Calibri" pitchFamily="34" charset="-120"/>
+              </a:rPr>
+              <a:t>ACP (analyse en composantes principales) : 2 axes résument 61 % de la structure des coûts, vérifiée par SVD → typologie de 4 familles, comparateur d'opérations</a:t>
+            </a:r>
+            <a:endParaRPr lang="en-US" sz="1250" dirty="0"/>
+          </a:p>
+        </p:txBody>
+      </p:sp>
+      <p:sp>
+        <p:nvSpPr>
+          <p:cNvPr id="5" name="Shape 3"/>
+          <p:cNvSpPr/>
+          <p:nvPr/>
+        </p:nvSpPr>
+        <p:spPr>
+          <a:xfrm>
+            <a:off x="7013448" y="1618488"/>
+            <a:ext cx="4672584" cy="1655064"/>
+          </a:xfrm>
+          <a:prstGeom prst="roundRect">
+            <a:avLst>
+              <a:gd name="adj" fmla="val 3315"/>
+            </a:avLst>
+          </a:prstGeom>
+          <a:solidFill>
+            <a:srgbClr val="FFFFFF"/>
+          </a:solidFill>
+          <a:ln w="12700">
+            <a:solidFill>
+              <a:srgbClr val="E3E7EE"/>
+            </a:solidFill>
+            <a:prstDash val="solid"/>
+          </a:ln>
+          <a:effectLst>
+            <a:outerShdw sx="100000" sy="100000" kx="0" ky="0" algn="bl" rotWithShape="0" blurRad="101600" dist="25400" dir="5400000">
+              <a:srgbClr val="1A1A19">
+                <a:alpha val="15000"/>
+              </a:srgbClr>
+            </a:outerShdw>
+          </a:effectLst>
+        </p:spPr>
+      </p:sp>
+      <p:pic>
+        <p:nvPicPr>
+          <p:cNvPr id="6" name="Image 0" descr="/tmp/claude-0/-home-user-MemoireM2S2/bac073a6-7c4e-552a-9627-815aeb6fe82a/scratchpad/figs/p27-000.png">    </p:cNvPr>
+          <p:cNvPicPr>
+            <a:picLocks noChangeAspect="1"/>
+          </p:cNvPicPr>
+          <p:nvPr/>
+        </p:nvPicPr>
+        <p:blipFill>
+          <a:blip r:embed="rId1"/>
+          <a:srcRect l="0" r="0" t="0" b="0"/>
+          <a:stretch/>
+        </p:blipFill>
+        <p:spPr>
+          <a:xfrm>
+            <a:off x="7086600" y="1691640"/>
+            <a:ext cx="4526280" cy="1508760"/>
+          </a:xfrm>
+          <a:prstGeom prst="rect">
+            <a:avLst/>
+          </a:prstGeom>
+        </p:spPr>
+      </p:pic>
+      <p:sp>
+        <p:nvSpPr>
+          <p:cNvPr id="7" name="Text 4"/>
+          <p:cNvSpPr/>
+          <p:nvPr/>
+        </p:nvSpPr>
+        <p:spPr>
+          <a:xfrm>
+            <a:off x="7086600" y="3227832"/>
+            <a:ext cx="4526280" cy="411480"/>
+          </a:xfrm>
+          <a:prstGeom prst="rect">
+            <a:avLst/>
+          </a:prstGeom>
+          <a:noFill/>
+          <a:ln/>
+        </p:spPr>
+        <p:txBody>
+          <a:bodyPr wrap="square" lIns="0" tIns="0" rIns="0" bIns="0" rtlCol="0" anchor="ctr"/>
+          <a:lstStyle/>
+          <a:p>
+            <a:pPr indent="0" marL="0">
+              <a:buNone/>
+            </a:pPr>
+            <a:r>
+              <a:rPr lang="en-US" sz="950" i="1" dirty="0">
+                <a:solidFill>
+                  <a:srgbClr val="52514E"/>
+                </a:solidFill>
+                <a:latin typeface="Calibri" pitchFamily="34" charset="0"/>
+                <a:ea typeface="Calibri" pitchFamily="34" charset="-122"/>
+                <a:cs typeface="Calibri" pitchFamily="34" charset="-120"/>
+              </a:rPr>
+              <a:t>Fig. — Distribution de la variation de marge, seuil de dérive matérielle à −2 %</a:t>
+            </a:r>
+            <a:endParaRPr lang="en-US" sz="950" dirty="0"/>
+          </a:p>
+        </p:txBody>
+      </p:sp>
+      <p:sp>
+        <p:nvSpPr>
+          <p:cNvPr id="8" name="Shape 5"/>
+          <p:cNvSpPr/>
+          <p:nvPr/>
+        </p:nvSpPr>
+        <p:spPr>
+          <a:xfrm>
+            <a:off x="548640" y="3977640"/>
+            <a:ext cx="11064240" cy="384048"/>
+          </a:xfrm>
+          <a:prstGeom prst="roundRect">
+            <a:avLst>
+              <a:gd name="adj" fmla="val 14286"/>
+            </a:avLst>
+          </a:prstGeom>
+          <a:solidFill>
+            <a:srgbClr val="1A1A19"/>
+          </a:solidFill>
+          <a:ln/>
+        </p:spPr>
+      </p:sp>
+      <p:sp>
+        <p:nvSpPr>
+          <p:cNvPr id="9" name="Text 6"/>
+          <p:cNvSpPr/>
+          <p:nvPr/>
+        </p:nvSpPr>
+        <p:spPr>
+          <a:xfrm>
+            <a:off x="658368" y="3977640"/>
+            <a:ext cx="10844784" cy="384048"/>
+          </a:xfrm>
+          <a:prstGeom prst="rect">
+            <a:avLst/>
+          </a:prstGeom>
+          <a:noFill/>
+          <a:ln/>
+        </p:spPr>
+        <p:txBody>
+          <a:bodyPr wrap="square" lIns="0" tIns="0" rIns="0" bIns="0" rtlCol="0" anchor="ctr"/>
+          <a:lstStyle/>
+          <a:p>
+            <a:pPr indent="0" marL="0">
+              <a:buNone/>
+            </a:pPr>
+            <a:r>
+              <a:rPr lang="en-US" sz="1250" b="1" dirty="0">
+                <a:solidFill>
+                  <a:srgbClr val="FFFFFF"/>
+                </a:solidFill>
+                <a:latin typeface="Calibri" pitchFamily="34" charset="0"/>
+                <a:ea typeface="Calibri" pitchFamily="34" charset="-122"/>
+                <a:cs typeface="Calibri" pitchFamily="34" charset="-120"/>
+              </a:rPr>
+              <a:t>Comparaison de six méthodes en validation croisée — métrique F1</a:t>
+            </a:r>
+            <a:endParaRPr lang="en-US" sz="1250" dirty="0"/>
+          </a:p>
+        </p:txBody>
+      </p:sp>
+      <p:graphicFrame>
+        <p:nvGraphicFramePr>
+          <p:cNvPr id="8" name="Table 0"/>
+          <p:cNvGraphicFramePr>
+            <a:graphicFrameLocks noGrp="1"/>
+          </p:cNvGraphicFramePr>
+          <p:nvPr>
+            <p:extLst>
+              <p:ext uri="{D42A27DB-BD31-4B8C-83A1-F6EECF244321}">
+                <p14:modId xmlns:p14="http://schemas.microsoft.com/office/powerpoint/2010/main" val="1579011935"/>
+              </p:ext>
+            </p:extLst>
+          </p:nvPr>
+        </p:nvGraphicFramePr>
+        <p:xfrm>
+          <a:off x="548640" y="4434840"/>
+          <a:ext cx="11064240" cy="777240"/>
+        </p:xfrm>
+        <a:graphic>
+          <a:graphicData uri="http://schemas.openxmlformats.org/drawingml/2006/table">
+            <a:tbl>
+              <a:tblPr/>
+              <a:tblGrid>
+                <a:gridCol w="1844040"/>
+                <a:gridCol w="1844040"/>
+                <a:gridCol w="1844040"/>
+                <a:gridCol w="1844040"/>
+                <a:gridCol w="1844040"/>
+                <a:gridCol w="1844040"/>
+              </a:tblGrid>
+              <a:tr h="384048">
+                <a:tc>
+                  <a:txBody>
+                    <a:bodyPr/>
+                    <a:lstStyle/>
+                    <a:p>
+                      <a:pPr algn="ctr" indent="0" marL="0">
+                        <a:buNone/>
+                      </a:pPr>
+                      <a:r>
+                        <a:rPr lang="en-US" sz="1200" dirty="0">
+                          <a:solidFill>
+                            <a:srgbClr val="1A1A19"/>
+                          </a:solidFill>
+                          <a:latin typeface="Calibri" pitchFamily="34" charset="0"/>
+                          <a:ea typeface="Calibri" pitchFamily="34" charset="-122"/>
+                          <a:cs typeface="Calibri" pitchFamily="34" charset="-120"/>
+                        </a:rPr>
+                        <a:t>Logistique</a:t>
+                      </a:r>
+                      <a:endParaRPr lang="en-US" sz="1200" dirty="0">
+                        <a:latin typeface="Calibri" charset="0"/>
+                        <a:ea typeface="Calibri" charset="0"/>
+                        <a:cs typeface="Calibri" charset="0"/>
+                      </a:endParaRPr>
+                    </a:p>
+                  </a:txBody>
+                  <a:tcPr marL="91440" marR="91440" marT="45720" marB="45720" anchor="ctr">
+                    <a:lnL w="12700" cap="flat" cmpd="sng" algn="ctr">
+                      <a:solidFill>
+                        <a:srgbClr val="E3E7EE"/>
+                      </a:solidFill>
+                      <a:prstDash val="solid"/>
+                      <a:round/>
+                      <a:headEnd type="none" w="med" len="med"/>
+                      <a:tailEnd type="none" w="med" len="med"/>
+                    </a:lnL>
+                    <a:lnR w="12700" cap="flat" cmpd="sng" algn="ctr">
+                      <a:solidFill>
+                        <a:srgbClr val="E3E7EE"/>
+                      </a:solidFill>
+                      <a:prstDash val="solid"/>
+                      <a:round/>
+                      <a:headEnd type="none" w="med" len="med"/>
+                      <a:tailEnd type="none" w="med" len="med"/>
+                    </a:lnR>
+                    <a:lnT w="12700" cap="flat" cmpd="sng" algn="ctr">
+                      <a:solidFill>
+                        <a:srgbClr val="E3E7EE"/>
+                      </a:solidFill>
+                      <a:prstDash val="solid"/>
+                      <a:round/>
+                      <a:headEnd type="none" w="med" len="med"/>
+                      <a:tailEnd type="none" w="med" len="med"/>
+                    </a:lnT>
+                    <a:lnB w="12700" cap="flat" cmpd="sng" algn="ctr">
+                      <a:solidFill>
+                        <a:srgbClr val="E3E7EE"/>
+                      </a:solidFill>
+                      <a:prstDash val="solid"/>
+                      <a:round/>
+                      <a:headEnd type="none" w="med" len="med"/>
+                      <a:tailEnd type="none" w="med" len="med"/>
+                    </a:lnB>
+                  </a:tcPr>
+                </a:tc>
+                <a:tc>
+                  <a:txBody>
+                    <a:bodyPr/>
+                    <a:lstStyle/>
+                    <a:p>
+                      <a:pPr algn="ctr" indent="0" marL="0">
+                        <a:buNone/>
+                      </a:pPr>
+                      <a:r>
+                        <a:rPr lang="en-US" sz="1200" dirty="0">
+                          <a:solidFill>
+                            <a:srgbClr val="1A1A19"/>
+                          </a:solidFill>
+                          <a:latin typeface="Calibri" pitchFamily="34" charset="0"/>
+                          <a:ea typeface="Calibri" pitchFamily="34" charset="-122"/>
+                          <a:cs typeface="Calibri" pitchFamily="34" charset="-120"/>
+                        </a:rPr>
+                        <a:t>SVM linéaire</a:t>
+                      </a:r>
+                      <a:endParaRPr lang="en-US" sz="1200" dirty="0">
+                        <a:latin typeface="Calibri" charset="0"/>
+                        <a:ea typeface="Calibri" charset="0"/>
+                        <a:cs typeface="Calibri" charset="0"/>
+                      </a:endParaRPr>
+                    </a:p>
+                  </a:txBody>
+                  <a:tcPr marL="91440" marR="91440" marT="45720" marB="45720" anchor="ctr">
+                    <a:lnL w="12700" cap="flat" cmpd="sng" algn="ctr">
+                      <a:solidFill>
+                        <a:srgbClr val="E3E7EE"/>
+                      </a:solidFill>
+                      <a:prstDash val="solid"/>
+                      <a:round/>
+                      <a:headEnd type="none" w="med" len="med"/>
+                      <a:tailEnd type="none" w="med" len="med"/>
+                    </a:lnL>
+                    <a:lnR w="12700" cap="flat" cmpd="sng" algn="ctr">
+                      <a:solidFill>
+                        <a:srgbClr val="E3E7EE"/>
+                      </a:solidFill>
+                      <a:prstDash val="solid"/>
+                      <a:round/>
+                      <a:headEnd type="none" w="med" len="med"/>
+                      <a:tailEnd type="none" w="med" len="med"/>
+                    </a:lnR>
+                    <a:lnT w="12700" cap="flat" cmpd="sng" algn="ctr">
+                      <a:solidFill>
+                        <a:srgbClr val="E3E7EE"/>
+                      </a:solidFill>
+                      <a:prstDash val="solid"/>
+                      <a:round/>
+                      <a:headEnd type="none" w="med" len="med"/>
+                      <a:tailEnd type="none" w="med" len="med"/>
+                    </a:lnT>
+                    <a:lnB w="12700" cap="flat" cmpd="sng" algn="ctr">
+                      <a:solidFill>
+                        <a:srgbClr val="E3E7EE"/>
+                      </a:solidFill>
+                      <a:prstDash val="solid"/>
+                      <a:round/>
+                      <a:headEnd type="none" w="med" len="med"/>
+                      <a:tailEnd type="none" w="med" len="med"/>
+                    </a:lnB>
+                  </a:tcPr>
+                </a:tc>
+                <a:tc>
+                  <a:txBody>
+                    <a:bodyPr/>
+                    <a:lstStyle/>
+                    <a:p>
+                      <a:pPr algn="ctr" indent="0" marL="0">
+                        <a:buNone/>
+                      </a:pPr>
+                      <a:r>
+                        <a:rPr lang="en-US" sz="1200" dirty="0">
+                          <a:solidFill>
+                            <a:srgbClr val="1A1A19"/>
+                          </a:solidFill>
+                          <a:latin typeface="Calibri" pitchFamily="34" charset="0"/>
+                          <a:ea typeface="Calibri" pitchFamily="34" charset="-122"/>
+                          <a:cs typeface="Calibri" pitchFamily="34" charset="-120"/>
+                        </a:rPr>
+                        <a:t>SVM RBF</a:t>
+                      </a:r>
+                      <a:endParaRPr lang="en-US" sz="1200" dirty="0">
+                        <a:latin typeface="Calibri" charset="0"/>
+                        <a:ea typeface="Calibri" charset="0"/>
+                        <a:cs typeface="Calibri" charset="0"/>
+                      </a:endParaRPr>
+                    </a:p>
+                  </a:txBody>
+                  <a:tcPr marL="91440" marR="91440" marT="45720" marB="45720" anchor="ctr">
+                    <a:lnL w="12700" cap="flat" cmpd="sng" algn="ctr">
+                      <a:solidFill>
+                        <a:srgbClr val="E3E7EE"/>
+                      </a:solidFill>
+                      <a:prstDash val="solid"/>
+                      <a:round/>
+                      <a:headEnd type="none" w="med" len="med"/>
+                      <a:tailEnd type="none" w="med" len="med"/>
+                    </a:lnL>
+                    <a:lnR w="12700" cap="flat" cmpd="sng" algn="ctr">
+                      <a:solidFill>
+                        <a:srgbClr val="E3E7EE"/>
+                      </a:solidFill>
+                      <a:prstDash val="solid"/>
+                      <a:round/>
+                      <a:headEnd type="none" w="med" len="med"/>
+                      <a:tailEnd type="none" w="med" len="med"/>
+                    </a:lnR>
+                    <a:lnT w="12700" cap="flat" cmpd="sng" algn="ctr">
+                      <a:solidFill>
+                        <a:srgbClr val="E3E7EE"/>
+                      </a:solidFill>
+                      <a:prstDash val="solid"/>
+                      <a:round/>
+                      <a:headEnd type="none" w="med" len="med"/>
+                      <a:tailEnd type="none" w="med" len="med"/>
+                    </a:lnT>
+                    <a:lnB w="12700" cap="flat" cmpd="sng" algn="ctr">
+                      <a:solidFill>
+                        <a:srgbClr val="E3E7EE"/>
+                      </a:solidFill>
+                      <a:prstDash val="solid"/>
+                      <a:round/>
+                      <a:headEnd type="none" w="med" len="med"/>
+                      <a:tailEnd type="none" w="med" len="med"/>
+                    </a:lnB>
+                  </a:tcPr>
+                </a:tc>
+                <a:tc>
+                  <a:txBody>
+                    <a:bodyPr/>
+                    <a:lstStyle/>
+                    <a:p>
+                      <a:pPr algn="ctr" indent="0" marL="0">
+                        <a:buNone/>
+                      </a:pPr>
+                      <a:r>
+                        <a:rPr lang="en-US" sz="1200" dirty="0">
+                          <a:solidFill>
+                            <a:srgbClr val="1A1A19"/>
+                          </a:solidFill>
+                          <a:latin typeface="Calibri" pitchFamily="34" charset="0"/>
+                          <a:ea typeface="Calibri" pitchFamily="34" charset="-122"/>
+                          <a:cs typeface="Calibri" pitchFamily="34" charset="-120"/>
+                        </a:rPr>
+                        <a:t>Arbre</a:t>
+                      </a:r>
+                      <a:endParaRPr lang="en-US" sz="1200" dirty="0">
+                        <a:latin typeface="Calibri" charset="0"/>
+                        <a:ea typeface="Calibri" charset="0"/>
+                        <a:cs typeface="Calibri" charset="0"/>
+                      </a:endParaRPr>
+                    </a:p>
+                  </a:txBody>
+                  <a:tcPr marL="91440" marR="91440" marT="45720" marB="45720" anchor="ctr">
+                    <a:lnL w="12700" cap="flat" cmpd="sng" algn="ctr">
+                      <a:solidFill>
+                        <a:srgbClr val="E3E7EE"/>
+                      </a:solidFill>
+                      <a:prstDash val="solid"/>
+                      <a:round/>
+                      <a:headEnd type="none" w="med" len="med"/>
+                      <a:tailEnd type="none" w="med" len="med"/>
+                    </a:lnL>
+                    <a:lnR w="12700" cap="flat" cmpd="sng" algn="ctr">
+                      <a:solidFill>
+                        <a:srgbClr val="E3E7EE"/>
+                      </a:solidFill>
+                      <a:prstDash val="solid"/>
+                      <a:round/>
+                      <a:headEnd type="none" w="med" len="med"/>
+                      <a:tailEnd type="none" w="med" len="med"/>
+                    </a:lnR>
+                    <a:lnT w="12700" cap="flat" cmpd="sng" algn="ctr">
+                      <a:solidFill>
+                        <a:srgbClr val="E3E7EE"/>
+                      </a:solidFill>
+                      <a:prstDash val="solid"/>
+                      <a:round/>
+                      <a:headEnd type="none" w="med" len="med"/>
+                      <a:tailEnd type="none" w="med" len="med"/>
+                    </a:lnT>
+                    <a:lnB w="12700" cap="flat" cmpd="sng" algn="ctr">
+                      <a:solidFill>
+                        <a:srgbClr val="E3E7EE"/>
+                      </a:solidFill>
+                      <a:prstDash val="solid"/>
+                      <a:round/>
+                      <a:headEnd type="none" w="med" len="med"/>
+                      <a:tailEnd type="none" w="med" len="med"/>
+                    </a:lnB>
+                  </a:tcPr>
+                </a:tc>
+                <a:tc>
+                  <a:txBody>
+                    <a:bodyPr/>
+                    <a:lstStyle/>
+                    <a:p>
+                      <a:pPr algn="ctr" indent="0" marL="0">
+                        <a:buNone/>
+                      </a:pPr>
+                      <a:r>
+                        <a:rPr lang="en-US" sz="1200" b="1" dirty="0">
+                          <a:solidFill>
+                            <a:srgbClr val="1BAF7A"/>
+                          </a:solidFill>
+                          <a:latin typeface="Calibri" pitchFamily="34" charset="0"/>
+                          <a:ea typeface="Calibri" pitchFamily="34" charset="-122"/>
+                          <a:cs typeface="Calibri" pitchFamily="34" charset="-120"/>
+                        </a:rPr>
+                        <a:t>Forêt (retenue)</a:t>
+                      </a:r>
+                      <a:endParaRPr lang="en-US" sz="1200" dirty="0">
+                        <a:latin typeface="Calibri" charset="0"/>
+                        <a:ea typeface="Calibri" charset="0"/>
+                        <a:cs typeface="Calibri" charset="0"/>
+                      </a:endParaRPr>
+                    </a:p>
+                  </a:txBody>
+                  <a:tcPr marL="91440" marR="91440" marT="45720" marB="45720" anchor="ctr">
+                    <a:lnL w="12700" cap="flat" cmpd="sng" algn="ctr">
+                      <a:solidFill>
+                        <a:srgbClr val="E3E7EE"/>
+                      </a:solidFill>
+                      <a:prstDash val="solid"/>
+                      <a:round/>
+                      <a:headEnd type="none" w="med" len="med"/>
+                      <a:tailEnd type="none" w="med" len="med"/>
+                    </a:lnL>
+                    <a:lnR w="12700" cap="flat" cmpd="sng" algn="ctr">
+                      <a:solidFill>
+                        <a:srgbClr val="E3E7EE"/>
+                      </a:solidFill>
+                      <a:prstDash val="solid"/>
+                      <a:round/>
+                      <a:headEnd type="none" w="med" len="med"/>
+                      <a:tailEnd type="none" w="med" len="med"/>
+                    </a:lnR>
+                    <a:lnT w="12700" cap="flat" cmpd="sng" algn="ctr">
+                      <a:solidFill>
+                        <a:srgbClr val="E3E7EE"/>
+                      </a:solidFill>
+                      <a:prstDash val="solid"/>
+                      <a:round/>
+                      <a:headEnd type="none" w="med" len="med"/>
+                      <a:tailEnd type="none" w="med" len="med"/>
+                    </a:lnT>
+                    <a:lnB w="12700" cap="flat" cmpd="sng" algn="ctr">
+                      <a:solidFill>
+                        <a:srgbClr val="E3E7EE"/>
+                      </a:solidFill>
+                      <a:prstDash val="solid"/>
+                      <a:round/>
+                      <a:headEnd type="none" w="med" len="med"/>
+                      <a:tailEnd type="none" w="med" len="med"/>
+                    </a:lnB>
+                  </a:tcPr>
+                </a:tc>
+                <a:tc>
+                  <a:txBody>
+                    <a:bodyPr/>
+                    <a:lstStyle/>
+                    <a:p>
+                      <a:pPr algn="ctr" indent="0" marL="0">
+                        <a:buNone/>
+                      </a:pPr>
+                      <a:r>
+                        <a:rPr lang="en-US" sz="1200" b="1" dirty="0">
+                          <a:solidFill>
+                            <a:srgbClr val="E34948"/>
+                          </a:solidFill>
+                          <a:latin typeface="Calibri" pitchFamily="34" charset="0"/>
+                          <a:ea typeface="Calibri" pitchFamily="34" charset="-122"/>
+                          <a:cs typeface="Calibri" pitchFamily="34" charset="-120"/>
+                        </a:rPr>
+                        <a:t>MLP (train / CV)</a:t>
+                      </a:r>
+                      <a:endParaRPr lang="en-US" sz="1200" dirty="0">
+                        <a:latin typeface="Calibri" charset="0"/>
+                        <a:ea typeface="Calibri" charset="0"/>
+                        <a:cs typeface="Calibri" charset="0"/>
+                      </a:endParaRPr>
+                    </a:p>
+                  </a:txBody>
+                  <a:tcPr marL="91440" marR="91440" marT="45720" marB="45720" anchor="ctr">
+                    <a:lnL w="12700" cap="flat" cmpd="sng" algn="ctr">
+                      <a:solidFill>
+                        <a:srgbClr val="E3E7EE"/>
+                      </a:solidFill>
+                      <a:prstDash val="solid"/>
+                      <a:round/>
+                      <a:headEnd type="none" w="med" len="med"/>
+                      <a:tailEnd type="none" w="med" len="med"/>
+                    </a:lnL>
+                    <a:lnR w="12700" cap="flat" cmpd="sng" algn="ctr">
+                      <a:solidFill>
+                        <a:srgbClr val="E3E7EE"/>
+                      </a:solidFill>
+                      <a:prstDash val="solid"/>
+                      <a:round/>
+                      <a:headEnd type="none" w="med" len="med"/>
+                      <a:tailEnd type="none" w="med" len="med"/>
+                    </a:lnR>
+                    <a:lnT w="12700" cap="flat" cmpd="sng" algn="ctr">
+                      <a:solidFill>
+                        <a:srgbClr val="E3E7EE"/>
+                      </a:solidFill>
+                      <a:prstDash val="solid"/>
+                      <a:round/>
+                      <a:headEnd type="none" w="med" len="med"/>
+                      <a:tailEnd type="none" w="med" len="med"/>
+                    </a:lnT>
+                    <a:lnB w="12700" cap="flat" cmpd="sng" algn="ctr">
+                      <a:solidFill>
+                        <a:srgbClr val="E3E7EE"/>
+                      </a:solidFill>
+                      <a:prstDash val="solid"/>
+                      <a:round/>
+                      <a:headEnd type="none" w="med" len="med"/>
+                      <a:tailEnd type="none" w="med" len="med"/>
+                    </a:lnB>
+                  </a:tcPr>
+                </a:tc>
+              </a:tr>
+              <a:tr h="384048">
+                <a:tc>
+                  <a:txBody>
+                    <a:bodyPr/>
+                    <a:lstStyle/>
+                    <a:p>
+                      <a:pPr algn="ctr" indent="0" marL="0">
+                        <a:buNone/>
+                      </a:pPr>
+                      <a:r>
+                        <a:rPr lang="en-US" sz="1200" dirty="0">
+                          <a:solidFill>
+                            <a:srgbClr val="1A1A19"/>
+                          </a:solidFill>
+                          <a:latin typeface="Calibri" pitchFamily="34" charset="0"/>
+                          <a:ea typeface="Calibri" pitchFamily="34" charset="-122"/>
+                          <a:cs typeface="Calibri" pitchFamily="34" charset="-120"/>
+                        </a:rPr>
+                        <a:t>0,283</a:t>
+                      </a:r>
+                      <a:endParaRPr lang="en-US" sz="1200" dirty="0">
+                        <a:latin typeface="Calibri" charset="0"/>
+                        <a:ea typeface="Calibri" charset="0"/>
+                        <a:cs typeface="Calibri" charset="0"/>
+                      </a:endParaRPr>
+                    </a:p>
+                  </a:txBody>
+                  <a:tcPr marL="91440" marR="91440" marT="45720" marB="45720" anchor="ctr">
+                    <a:lnL w="12700" cap="flat" cmpd="sng" algn="ctr">
+                      <a:solidFill>
+                        <a:srgbClr val="E3E7EE"/>
+                      </a:solidFill>
+                      <a:prstDash val="solid"/>
+                      <a:round/>
+                      <a:headEnd type="none" w="med" len="med"/>
+                      <a:tailEnd type="none" w="med" len="med"/>
+                    </a:lnL>
+                    <a:lnR w="12700" cap="flat" cmpd="sng" algn="ctr">
+                      <a:solidFill>
+                        <a:srgbClr val="E3E7EE"/>
+                      </a:solidFill>
+                      <a:prstDash val="solid"/>
+                      <a:round/>
+                      <a:headEnd type="none" w="med" len="med"/>
+                      <a:tailEnd type="none" w="med" len="med"/>
+                    </a:lnR>
+                    <a:lnT w="12700" cap="flat" cmpd="sng" algn="ctr">
+                      <a:solidFill>
+                        <a:srgbClr val="E3E7EE"/>
+                      </a:solidFill>
+                      <a:prstDash val="solid"/>
+                      <a:round/>
+                      <a:headEnd type="none" w="med" len="med"/>
+                      <a:tailEnd type="none" w="med" len="med"/>
+                    </a:lnT>
+                    <a:lnB w="12700" cap="flat" cmpd="sng" algn="ctr">
+                      <a:solidFill>
+                        <a:srgbClr val="E3E7EE"/>
+                      </a:solidFill>
+                      <a:prstDash val="solid"/>
+                      <a:round/>
+                      <a:headEnd type="none" w="med" len="med"/>
+                      <a:tailEnd type="none" w="med" len="med"/>
+                    </a:lnB>
+                  </a:tcPr>
+                </a:tc>
+                <a:tc>
+                  <a:txBody>
+                    <a:bodyPr/>
+                    <a:lstStyle/>
+                    <a:p>
+                      <a:pPr algn="ctr" indent="0" marL="0">
+                        <a:buNone/>
+                      </a:pPr>
+                      <a:r>
+                        <a:rPr lang="en-US" sz="1200" dirty="0">
+                          <a:solidFill>
+                            <a:srgbClr val="1A1A19"/>
+                          </a:solidFill>
+                          <a:latin typeface="Calibri" pitchFamily="34" charset="0"/>
+                          <a:ea typeface="Calibri" pitchFamily="34" charset="-122"/>
+                          <a:cs typeface="Calibri" pitchFamily="34" charset="-120"/>
+                        </a:rPr>
+                        <a:t>0,303</a:t>
+                      </a:r>
+                      <a:endParaRPr lang="en-US" sz="1200" dirty="0">
+                        <a:latin typeface="Calibri" charset="0"/>
+                        <a:ea typeface="Calibri" charset="0"/>
+                        <a:cs typeface="Calibri" charset="0"/>
+                      </a:endParaRPr>
+                    </a:p>
+                  </a:txBody>
+                  <a:tcPr marL="91440" marR="91440" marT="45720" marB="45720" anchor="ctr">
+                    <a:lnL w="12700" cap="flat" cmpd="sng" algn="ctr">
+                      <a:solidFill>
+                        <a:srgbClr val="E3E7EE"/>
+                      </a:solidFill>
+                      <a:prstDash val="solid"/>
+                      <a:round/>
+                      <a:headEnd type="none" w="med" len="med"/>
+                      <a:tailEnd type="none" w="med" len="med"/>
+                    </a:lnL>
+                    <a:lnR w="12700" cap="flat" cmpd="sng" algn="ctr">
+                      <a:solidFill>
+                        <a:srgbClr val="E3E7EE"/>
+                      </a:solidFill>
+                      <a:prstDash val="solid"/>
+                      <a:round/>
+                      <a:headEnd type="none" w="med" len="med"/>
+                      <a:tailEnd type="none" w="med" len="med"/>
+                    </a:lnR>
+                    <a:lnT w="12700" cap="flat" cmpd="sng" algn="ctr">
+                      <a:solidFill>
+                        <a:srgbClr val="E3E7EE"/>
+                      </a:solidFill>
+                      <a:prstDash val="solid"/>
+                      <a:round/>
+                      <a:headEnd type="none" w="med" len="med"/>
+                      <a:tailEnd type="none" w="med" len="med"/>
+                    </a:lnT>
+                    <a:lnB w="12700" cap="flat" cmpd="sng" algn="ctr">
+                      <a:solidFill>
+                        <a:srgbClr val="E3E7EE"/>
+                      </a:solidFill>
+                      <a:prstDash val="solid"/>
+                      <a:round/>
+                      <a:headEnd type="none" w="med" len="med"/>
+                      <a:tailEnd type="none" w="med" len="med"/>
+                    </a:lnB>
+                  </a:tcPr>
+                </a:tc>
+                <a:tc>
+                  <a:txBody>
+                    <a:bodyPr/>
+                    <a:lstStyle/>
+                    <a:p>
+                      <a:pPr algn="ctr" indent="0" marL="0">
+                        <a:buNone/>
+                      </a:pPr>
+                      <a:r>
+                        <a:rPr lang="en-US" sz="1200" dirty="0">
+                          <a:solidFill>
+                            <a:srgbClr val="1A1A19"/>
+                          </a:solidFill>
+                          <a:latin typeface="Calibri" pitchFamily="34" charset="0"/>
+                          <a:ea typeface="Calibri" pitchFamily="34" charset="-122"/>
+                          <a:cs typeface="Calibri" pitchFamily="34" charset="-120"/>
+                        </a:rPr>
+                        <a:t>0,257</a:t>
+                      </a:r>
+                      <a:endParaRPr lang="en-US" sz="1200" dirty="0">
+                        <a:latin typeface="Calibri" charset="0"/>
+                        <a:ea typeface="Calibri" charset="0"/>
+                        <a:cs typeface="Calibri" charset="0"/>
+                      </a:endParaRPr>
+                    </a:p>
+                  </a:txBody>
+                  <a:tcPr marL="91440" marR="91440" marT="45720" marB="45720" anchor="ctr">
+                    <a:lnL w="12700" cap="flat" cmpd="sng" algn="ctr">
+                      <a:solidFill>
+                        <a:srgbClr val="E3E7EE"/>
+                      </a:solidFill>
+                      <a:prstDash val="solid"/>
+                      <a:round/>
+                      <a:headEnd type="none" w="med" len="med"/>
+                      <a:tailEnd type="none" w="med" len="med"/>
+                    </a:lnL>
+                    <a:lnR w="12700" cap="flat" cmpd="sng" algn="ctr">
+                      <a:solidFill>
+                        <a:srgbClr val="E3E7EE"/>
+                      </a:solidFill>
+                      <a:prstDash val="solid"/>
+                      <a:round/>
+                      <a:headEnd type="none" w="med" len="med"/>
+                      <a:tailEnd type="none" w="med" len="med"/>
+                    </a:lnR>
+                    <a:lnT w="12700" cap="flat" cmpd="sng" algn="ctr">
+                      <a:solidFill>
+                        <a:srgbClr val="E3E7EE"/>
+                      </a:solidFill>
+                      <a:prstDash val="solid"/>
+                      <a:round/>
+                      <a:headEnd type="none" w="med" len="med"/>
+                      <a:tailEnd type="none" w="med" len="med"/>
+                    </a:lnT>
+                    <a:lnB w="12700" cap="flat" cmpd="sng" algn="ctr">
+                      <a:solidFill>
+                        <a:srgbClr val="E3E7EE"/>
+                      </a:solidFill>
+                      <a:prstDash val="solid"/>
+                      <a:round/>
+                      <a:headEnd type="none" w="med" len="med"/>
+                      <a:tailEnd type="none" w="med" len="med"/>
+                    </a:lnB>
+                  </a:tcPr>
+                </a:tc>
+                <a:tc>
+                  <a:txBody>
+                    <a:bodyPr/>
+                    <a:lstStyle/>
+                    <a:p>
+                      <a:pPr algn="ctr" indent="0" marL="0">
+                        <a:buNone/>
+                      </a:pPr>
+                      <a:r>
+                        <a:rPr lang="en-US" sz="1200" dirty="0">
+                          <a:solidFill>
+                            <a:srgbClr val="1A1A19"/>
+                          </a:solidFill>
+                          <a:latin typeface="Calibri" pitchFamily="34" charset="0"/>
+                          <a:ea typeface="Calibri" pitchFamily="34" charset="-122"/>
+                          <a:cs typeface="Calibri" pitchFamily="34" charset="-120"/>
+                        </a:rPr>
+                        <a:t>0,340</a:t>
+                      </a:r>
+                      <a:endParaRPr lang="en-US" sz="1200" dirty="0">
+                        <a:latin typeface="Calibri" charset="0"/>
+                        <a:ea typeface="Calibri" charset="0"/>
+                        <a:cs typeface="Calibri" charset="0"/>
+                      </a:endParaRPr>
+                    </a:p>
+                  </a:txBody>
+                  <a:tcPr marL="91440" marR="91440" marT="45720" marB="45720" anchor="ctr">
+                    <a:lnL w="12700" cap="flat" cmpd="sng" algn="ctr">
+                      <a:solidFill>
+                        <a:srgbClr val="E3E7EE"/>
+                      </a:solidFill>
+                      <a:prstDash val="solid"/>
+                      <a:round/>
+                      <a:headEnd type="none" w="med" len="med"/>
+                      <a:tailEnd type="none" w="med" len="med"/>
+                    </a:lnL>
+                    <a:lnR w="12700" cap="flat" cmpd="sng" algn="ctr">
+                      <a:solidFill>
+                        <a:srgbClr val="E3E7EE"/>
+                      </a:solidFill>
+                      <a:prstDash val="solid"/>
+                      <a:round/>
+                      <a:headEnd type="none" w="med" len="med"/>
+                      <a:tailEnd type="none" w="med" len="med"/>
+                    </a:lnR>
+                    <a:lnT w="12700" cap="flat" cmpd="sng" algn="ctr">
+                      <a:solidFill>
+                        <a:srgbClr val="E3E7EE"/>
+                      </a:solidFill>
+                      <a:prstDash val="solid"/>
+                      <a:round/>
+                      <a:headEnd type="none" w="med" len="med"/>
+                      <a:tailEnd type="none" w="med" len="med"/>
+                    </a:lnT>
+                    <a:lnB w="12700" cap="flat" cmpd="sng" algn="ctr">
+                      <a:solidFill>
+                        <a:srgbClr val="E3E7EE"/>
+                      </a:solidFill>
+                      <a:prstDash val="solid"/>
+                      <a:round/>
+                      <a:headEnd type="none" w="med" len="med"/>
+                      <a:tailEnd type="none" w="med" len="med"/>
+                    </a:lnB>
+                  </a:tcPr>
+                </a:tc>
+                <a:tc>
+                  <a:txBody>
+                    <a:bodyPr/>
+                    <a:lstStyle/>
+                    <a:p>
+                      <a:pPr algn="ctr" indent="0" marL="0">
+                        <a:buNone/>
+                      </a:pPr>
+                      <a:r>
+                        <a:rPr lang="en-US" sz="1200" b="1" dirty="0">
+                          <a:solidFill>
+                            <a:srgbClr val="1BAF7A"/>
+                          </a:solidFill>
+                          <a:latin typeface="Calibri" pitchFamily="34" charset="0"/>
+                          <a:ea typeface="Calibri" pitchFamily="34" charset="-122"/>
+                          <a:cs typeface="Calibri" pitchFamily="34" charset="-120"/>
+                        </a:rPr>
+                        <a:t>0,306</a:t>
+                      </a:r>
+                      <a:endParaRPr lang="en-US" sz="1200" dirty="0">
+                        <a:latin typeface="Calibri" charset="0"/>
+                        <a:ea typeface="Calibri" charset="0"/>
+                        <a:cs typeface="Calibri" charset="0"/>
+                      </a:endParaRPr>
+                    </a:p>
+                  </a:txBody>
+                  <a:tcPr marL="91440" marR="91440" marT="45720" marB="45720" anchor="ctr">
+                    <a:lnL w="12700" cap="flat" cmpd="sng" algn="ctr">
+                      <a:solidFill>
+                        <a:srgbClr val="E3E7EE"/>
+                      </a:solidFill>
+                      <a:prstDash val="solid"/>
+                      <a:round/>
+                      <a:headEnd type="none" w="med" len="med"/>
+                      <a:tailEnd type="none" w="med" len="med"/>
+                    </a:lnL>
+                    <a:lnR w="12700" cap="flat" cmpd="sng" algn="ctr">
+                      <a:solidFill>
+                        <a:srgbClr val="E3E7EE"/>
+                      </a:solidFill>
+                      <a:prstDash val="solid"/>
+                      <a:round/>
+                      <a:headEnd type="none" w="med" len="med"/>
+                      <a:tailEnd type="none" w="med" len="med"/>
+                    </a:lnR>
+                    <a:lnT w="12700" cap="flat" cmpd="sng" algn="ctr">
+                      <a:solidFill>
+                        <a:srgbClr val="E3E7EE"/>
+                      </a:solidFill>
+                      <a:prstDash val="solid"/>
+                      <a:round/>
+                      <a:headEnd type="none" w="med" len="med"/>
+                      <a:tailEnd type="none" w="med" len="med"/>
+                    </a:lnT>
+                    <a:lnB w="12700" cap="flat" cmpd="sng" algn="ctr">
+                      <a:solidFill>
+                        <a:srgbClr val="E3E7EE"/>
+                      </a:solidFill>
+                      <a:prstDash val="solid"/>
+                      <a:round/>
+                      <a:headEnd type="none" w="med" len="med"/>
+                      <a:tailEnd type="none" w="med" len="med"/>
+                    </a:lnB>
+                  </a:tcPr>
+                </a:tc>
+                <a:tc>
+                  <a:txBody>
+                    <a:bodyPr/>
+                    <a:lstStyle/>
+                    <a:p>
+                      <a:pPr algn="ctr" indent="0" marL="0">
+                        <a:buNone/>
+                      </a:pPr>
+                      <a:r>
+                        <a:rPr lang="en-US" sz="1200" b="1" dirty="0">
+                          <a:solidFill>
+                            <a:srgbClr val="E34948"/>
+                          </a:solidFill>
+                          <a:latin typeface="Calibri" pitchFamily="34" charset="0"/>
+                          <a:ea typeface="Calibri" pitchFamily="34" charset="-122"/>
+                          <a:cs typeface="Calibri" pitchFamily="34" charset="-120"/>
+                        </a:rPr>
+                        <a:t>0,913 / 0,262</a:t>
+                      </a:r>
+                      <a:endParaRPr lang="en-US" sz="1200" dirty="0">
+                        <a:latin typeface="Calibri" charset="0"/>
+                        <a:ea typeface="Calibri" charset="0"/>
+                        <a:cs typeface="Calibri" charset="0"/>
+                      </a:endParaRPr>
+                    </a:p>
+                  </a:txBody>
+                  <a:tcPr marL="91440" marR="91440" marT="45720" marB="45720" anchor="ctr">
+                    <a:lnL w="12700" cap="flat" cmpd="sng" algn="ctr">
+                      <a:solidFill>
+                        <a:srgbClr val="E3E7EE"/>
+                      </a:solidFill>
+                      <a:prstDash val="solid"/>
+                      <a:round/>
+                      <a:headEnd type="none" w="med" len="med"/>
+                      <a:tailEnd type="none" w="med" len="med"/>
+                    </a:lnL>
+                    <a:lnR w="12700" cap="flat" cmpd="sng" algn="ctr">
+                      <a:solidFill>
+                        <a:srgbClr val="E3E7EE"/>
+                      </a:solidFill>
+                      <a:prstDash val="solid"/>
+                      <a:round/>
+                      <a:headEnd type="none" w="med" len="med"/>
+                      <a:tailEnd type="none" w="med" len="med"/>
+                    </a:lnR>
+                    <a:lnT w="12700" cap="flat" cmpd="sng" algn="ctr">
+                      <a:solidFill>
+                        <a:srgbClr val="E3E7EE"/>
+                      </a:solidFill>
+                      <a:prstDash val="solid"/>
+                      <a:round/>
+                      <a:headEnd type="none" w="med" len="med"/>
+                      <a:tailEnd type="none" w="med" len="med"/>
+                    </a:lnT>
+                    <a:lnB w="12700" cap="flat" cmpd="sng" algn="ctr">
+                      <a:solidFill>
+                        <a:srgbClr val="E3E7EE"/>
+                      </a:solidFill>
+                      <a:prstDash val="solid"/>
+                      <a:round/>
+                      <a:headEnd type="none" w="med" len="med"/>
+                      <a:tailEnd type="none" w="med" len="med"/>
+                    </a:lnB>
+                  </a:tcPr>
+                </a:tc>
+              </a:tr>
+            </a:tbl>
+          </a:graphicData>
+        </a:graphic>
+      </p:graphicFrame>
+      <p:sp>
+        <p:nvSpPr>
+          <p:cNvPr id="11" name="Text 7"/>
+          <p:cNvSpPr/>
+          <p:nvPr/>
+        </p:nvSpPr>
+        <p:spPr>
+          <a:xfrm>
+            <a:off x="548640" y="5303520"/>
+            <a:ext cx="11064240" cy="502920"/>
+          </a:xfrm>
+          <a:prstGeom prst="rect">
+            <a:avLst/>
+          </a:prstGeom>
+          <a:noFill/>
+          <a:ln/>
+        </p:spPr>
+        <p:txBody>
+          <a:bodyPr wrap="square" lIns="0" tIns="0" rIns="0" bIns="0" rtlCol="0" anchor="ctr"/>
+          <a:lstStyle/>
+          <a:p>
+            <a:pPr indent="0" marL="0">
+              <a:buNone/>
+            </a:pPr>
+            <a:r>
+              <a:rPr lang="en-US" sz="1250" i="1" dirty="0">
+                <a:solidFill>
+                  <a:srgbClr val="52514E"/>
+                </a:solidFill>
+                <a:latin typeface="Calibri" pitchFamily="34" charset="0"/>
+                <a:ea typeface="Calibri" pitchFamily="34" charset="-122"/>
+                <a:cs typeface="Calibri" pitchFamily="34" charset="-120"/>
+              </a:rPr>
+              <a:t>Le MLP illustre le sur-apprentissage : F1 = 0,91 en apprentissage contre 0,26 en validation — la signature d'un petit échantillon.</a:t>
+            </a:r>
+            <a:endParaRPr lang="en-US" sz="1250" dirty="0"/>
+          </a:p>
+        </p:txBody>
+      </p:sp>
+      <p:sp>
+        <p:nvSpPr>
+          <p:cNvPr id="12" name="Text 8"/>
+          <p:cNvSpPr/>
+          <p:nvPr/>
+        </p:nvSpPr>
+        <p:spPr>
+          <a:xfrm>
+            <a:off x="548640" y="5852160"/>
+            <a:ext cx="11064240" cy="320040"/>
+          </a:xfrm>
+          <a:prstGeom prst="rect">
+            <a:avLst/>
+          </a:prstGeom>
+          <a:noFill/>
+          <a:ln/>
+        </p:spPr>
+        <p:txBody>
+          <a:bodyPr wrap="square" lIns="0" tIns="0" rIns="0" bIns="0" rtlCol="0" anchor="ctr"/>
+          <a:lstStyle/>
+          <a:p>
+            <a:pPr indent="0" marL="0">
+              <a:buNone/>
+            </a:pPr>
+            <a:r>
+              <a:rPr lang="en-US" sz="1200" b="1" dirty="0">
+                <a:solidFill>
+                  <a:srgbClr val="1A1A19"/>
+                </a:solidFill>
+                <a:latin typeface="Calibri" pitchFamily="34" charset="0"/>
+                <a:ea typeface="Calibri" pitchFamily="34" charset="-122"/>
+                <a:cs typeface="Calibri" pitchFamily="34" charset="-120"/>
+              </a:rPr>
+              <a:t>Signal réel mais faible — pas un oracle.</a:t>
+            </a:r>
+            <a:endParaRPr lang="en-US" sz="1200" dirty="0"/>
+          </a:p>
+        </p:txBody>
+      </p:sp>
+      <p:sp>
+        <p:nvSpPr>
+          <p:cNvPr id="13" name="Text 9"/>
+          <p:cNvSpPr/>
+          <p:nvPr/>
+        </p:nvSpPr>
+        <p:spPr>
+          <a:xfrm>
+            <a:off x="548640" y="6510528"/>
+            <a:ext cx="5486400" cy="274320"/>
+          </a:xfrm>
+          <a:prstGeom prst="rect">
+            <a:avLst/>
+          </a:prstGeom>
+          <a:noFill/>
+          <a:ln/>
+        </p:spPr>
+        <p:txBody>
+          <a:bodyPr wrap="square" lIns="0" tIns="0" rIns="0" bIns="0" rtlCol="0" anchor="ctr"/>
+          <a:lstStyle/>
+          <a:p>
+            <a:pPr indent="0" marL="0">
+              <a:buNone/>
+            </a:pPr>
+            <a:r>
+              <a:rPr lang="en-US" sz="900" dirty="0">
+                <a:solidFill>
+                  <a:srgbClr val="9A9A95"/>
+                </a:solidFill>
+                <a:latin typeface="Calibri" pitchFamily="34" charset="0"/>
+                <a:ea typeface="Calibri" pitchFamily="34" charset="-122"/>
+                <a:cs typeface="Calibri" pitchFamily="34" charset="-120"/>
+              </a:rPr>
+              <a:t>Copilote Financier — Groupe Angelotti</a:t>
+            </a:r>
+            <a:endParaRPr lang="en-US" sz="900" dirty="0"/>
+          </a:p>
+        </p:txBody>
+      </p:sp>
+      <p:sp>
+        <p:nvSpPr>
+          <p:cNvPr id="14" name="Text 10"/>
           <p:cNvSpPr/>
           <p:nvPr/>
         </p:nvSpPr>
@@ -8293,7 +9483,7 @@
         <p:spPr>
           <a:xfrm>
             <a:off x="548640" y="384048"/>
-            <a:ext cx="7315200" cy="320040"/>
+            <a:ext cx="8229600" cy="320040"/>
           </a:xfrm>
           <a:prstGeom prst="rect">
             <a:avLst/>
@@ -8311,13 +9501,13 @@
             <a:r>
               <a:rPr lang="en-US" sz="1200" b="1" spc="200" kern="0" dirty="0">
                 <a:solidFill>
-                  <a:srgbClr val="2A78D6"/>
+                  <a:srgbClr val="1BAF7A"/>
                 </a:solidFill>
                 <a:latin typeface="Calibri" pitchFamily="34" charset="0"/>
                 <a:ea typeface="Calibri" pitchFamily="34" charset="-122"/>
                 <a:cs typeface="Calibri" pitchFamily="34" charset="-120"/>
               </a:rPr>
-              <a:t>COPILOTE FINANCIER — AXE A</a:t>
+              <a:t>COPILOTE FINANCIER — AXE B</a:t>
             </a:r>
             <a:endParaRPr lang="en-US" sz="1200" dirty="0"/>
           </a:p>
@@ -8348,7 +9538,7 @@
               <a:buNone/>
             </a:pPr>
             <a:r>
-              <a:rPr lang="en-US" sz="3000" b="1" dirty="0">
+              <a:rPr lang="en-US" sz="2800" b="1" dirty="0">
                 <a:solidFill>
                   <a:srgbClr val="1A1A19"/>
                 </a:solidFill>
@@ -8356,9 +9546,9 @@
                 <a:ea typeface="Cambria" pitchFamily="34" charset="-122"/>
                 <a:cs typeface="Cambria" pitchFamily="34" charset="-120"/>
               </a:rPr>
-              <a:t>Le risque de marge</a:t>
-            </a:r>
-            <a:endParaRPr lang="en-US" sz="3000" dirty="0"/>
+              <a:t>La vitesse d'écoulement</a:t>
+            </a:r>
+            <a:endParaRPr lang="en-US" sz="2800" dirty="0"/>
           </a:p>
         </p:txBody>
       </p:sp>
@@ -8371,7 +9561,7 @@
         <p:spPr>
           <a:xfrm>
             <a:off x="548640" y="1600200"/>
-            <a:ext cx="6309360" cy="4480560"/>
+            <a:ext cx="6309360" cy="3108960"/>
           </a:xfrm>
           <a:prstGeom prst="rect">
             <a:avLst/>
@@ -8383,18 +9573,18 @@
           <a:bodyPr wrap="square" lIns="0" tIns="0" rIns="0" bIns="0" rtlCol="0" anchor="t"/>
           <a:lstStyle/>
           <a:p>
-            <a:pPr marL="228600" indent="-228600">
+            <a:pPr marL="203200" indent="-203200">
               <a:lnSpc>
-                <a:spcPct val="108000"/>
+                <a:spcPct val="106000"/>
               </a:lnSpc>
               <a:spcAft>
-                <a:spcPts val="1400"/>
+                <a:spcPts val="1300"/>
               </a:spcAft>
               <a:buSzPct val="100000"/>
               <a:buChar char="•"/>
             </a:pPr>
             <a:r>
-              <a:rPr lang="en-US" sz="1450" dirty="0">
+              <a:rPr lang="en-US" sz="1400" dirty="0">
                 <a:solidFill>
                   <a:srgbClr val="1A1A19"/>
                 </a:solidFill>
@@ -8402,23 +9592,23 @@
                 <a:ea typeface="Calibri" pitchFamily="34" charset="-122"/>
                 <a:cs typeface="Calibri" pitchFamily="34" charset="-120"/>
               </a:rPr>
-              <a:t>Périmètre : 123 opérations suffisamment avancées (engagement ≥ 60 %)</a:t>
-            </a:r>
-            <a:endParaRPr lang="en-US" sz="1450" dirty="0"/>
-          </a:p>
-          <a:p>
-            <a:pPr marL="228600" indent="-228600">
+              <a:t>Panel de 3 230 observations (opération × mois) — modèle à effets aléatoires</a:t>
+            </a:r>
+            <a:endParaRPr lang="en-US" sz="1400" dirty="0"/>
+          </a:p>
+          <a:p>
+            <a:pPr marL="203200" indent="-203200">
               <a:lnSpc>
-                <a:spcPct val="108000"/>
+                <a:spcPct val="106000"/>
               </a:lnSpc>
               <a:spcAft>
-                <a:spcPts val="1400"/>
+                <a:spcPts val="1300"/>
               </a:spcAft>
               <a:buSzPct val="100000"/>
               <a:buChar char="•"/>
             </a:pPr>
             <a:r>
-              <a:rPr lang="en-US" sz="1450" dirty="0">
+              <a:rPr lang="en-US" sz="1400" dirty="0">
                 <a:solidFill>
                   <a:srgbClr val="1A1A19"/>
                 </a:solidFill>
@@ -8426,23 +9616,23 @@
                 <a:ea typeface="Calibri" pitchFamily="34" charset="-122"/>
                 <a:cs typeface="Calibri" pitchFamily="34" charset="-120"/>
               </a:rPr>
-              <a:t>Régression du taux de dérive : R² test = 0,08 — résultat modeste</a:t>
-            </a:r>
-            <a:endParaRPr lang="en-US" sz="1450" dirty="0"/>
-          </a:p>
-          <a:p>
-            <a:pPr marL="228600" indent="-228600">
+              <a:t>2/3 de la variance = effet propre à l'opération, 1/3 = conjoncture</a:t>
+            </a:r>
+            <a:endParaRPr lang="en-US" sz="1400" dirty="0"/>
+          </a:p>
+          <a:p>
+            <a:pPr marL="203200" indent="-203200">
               <a:lnSpc>
-                <a:spcPct val="108000"/>
+                <a:spcPct val="106000"/>
               </a:lnSpc>
               <a:spcAft>
-                <a:spcPts val="1400"/>
+                <a:spcPts val="1300"/>
               </a:spcAft>
               <a:buSzPct val="100000"/>
               <a:buChar char="•"/>
             </a:pPr>
             <a:r>
-              <a:rPr lang="en-US" sz="1450" dirty="0">
+              <a:rPr lang="en-US" sz="1400" dirty="0">
                 <a:solidFill>
                   <a:srgbClr val="1A1A19"/>
                 </a:solidFill>
@@ -8450,33 +9640,9 @@
                 <a:ea typeface="Calibri" pitchFamily="34" charset="-122"/>
                 <a:cs typeface="Calibri" pitchFamily="34" charset="-120"/>
               </a:rPr>
-              <a:t>Bascule en classification « à risque » : F1 ≈ 0,30 (forêt aléatoire) contre 0 pour la référence naïve</a:t>
-            </a:r>
-            <a:endParaRPr lang="en-US" sz="1450" dirty="0"/>
-          </a:p>
-          <a:p>
-            <a:pPr marL="228600" indent="-228600">
-              <a:lnSpc>
-                <a:spcPct val="108000"/>
-              </a:lnSpc>
-              <a:spcAft>
-                <a:spcPts val="1400"/>
-              </a:spcAft>
-              <a:buSzPct val="100000"/>
-              <a:buChar char="•"/>
-            </a:pPr>
-            <a:r>
-              <a:rPr lang="en-US" sz="1450" dirty="0">
-                <a:solidFill>
-                  <a:srgbClr val="1A1A19"/>
-                </a:solidFill>
-                <a:latin typeface="Calibri" pitchFamily="34" charset="0"/>
-                <a:ea typeface="Calibri" pitchFamily="34" charset="-122"/>
-                <a:cs typeface="Calibri" pitchFamily="34" charset="-120"/>
-              </a:rPr>
-              <a:t>Message assumé : signal réel mais faible — la structure budgétaire prédispose, elle ne détermine pas</a:t>
-            </a:r>
-            <a:endParaRPr lang="en-US" sz="1450" dirty="0"/>
+              <a:t>Contrôle par série temporelle : effet du taux non identifiable isolément — validation méthodologique, pas un échec</a:t>
+            </a:r>
+            <a:endParaRPr lang="en-US" sz="1400" dirty="0"/>
           </a:p>
         </p:txBody>
       </p:sp>
@@ -8489,11 +9655,11 @@
         <p:spPr>
           <a:xfrm>
             <a:off x="7013448" y="1618488"/>
-            <a:ext cx="4672584" cy="1655064"/>
+            <a:ext cx="4672584" cy="1956816"/>
           </a:xfrm>
           <a:prstGeom prst="roundRect">
             <a:avLst>
-              <a:gd name="adj" fmla="val 3315"/>
+              <a:gd name="adj" fmla="val 2804"/>
             </a:avLst>
           </a:prstGeom>
           <a:solidFill>
@@ -8516,7 +9682,7 @@
       </p:sp>
       <p:pic>
         <p:nvPicPr>
-          <p:cNvPr id="6" name="Image 0" descr="/tmp/claude-0/-home-user-MemoireM2S2/bac073a6-7c4e-552a-9627-815aeb6fe82a/scratchpad/figs/p27-000.png">    </p:cNvPr>
+          <p:cNvPr id="6" name="Image 0" descr="/tmp/claude-0/-home-user-MemoireM2S2/bac073a6-7c4e-552a-9627-815aeb6fe82a/scratchpad/figs/p28-000.png">    </p:cNvPr>
           <p:cNvPicPr>
             <a:picLocks noChangeAspect="1"/>
           </p:cNvPicPr>
@@ -8530,7 +9696,7 @@
         <p:spPr>
           <a:xfrm>
             <a:off x="7086600" y="1691640"/>
-            <a:ext cx="4526280" cy="1508760"/>
+            <a:ext cx="4526280" cy="1810512"/>
           </a:xfrm>
           <a:prstGeom prst="rect">
             <a:avLst/>
@@ -8545,8 +9711,8 @@
         </p:nvSpPr>
         <p:spPr>
           <a:xfrm>
-            <a:off x="7086600" y="3227832"/>
-            <a:ext cx="4526280" cy="457200"/>
+            <a:off x="7086600" y="3529584"/>
+            <a:ext cx="4526280" cy="411480"/>
           </a:xfrm>
           <a:prstGeom prst="rect">
             <a:avLst/>
@@ -8562,7 +9728,7 @@
               <a:buNone/>
             </a:pPr>
             <a:r>
-              <a:rPr lang="en-US" sz="1000" i="1" dirty="0">
+              <a:rPr lang="en-US" sz="950" i="1" dirty="0">
                 <a:solidFill>
                   <a:srgbClr val="52514E"/>
                 </a:solidFill>
@@ -8570,9 +9736,9 @@
                 <a:ea typeface="Calibri" pitchFamily="34" charset="-122"/>
                 <a:cs typeface="Calibri" pitchFamily="34" charset="-120"/>
               </a:rPr>
-              <a:t>Fig. — Distribution de la variation de marge, seuil de dérive matérielle à −2 %</a:t>
-            </a:r>
-            <a:endParaRPr lang="en-US" sz="1000" dirty="0"/>
+              <a:t>Fig. — Scénarios de taux 2026 : trajectoire ARIMA combinée à l'élasticité du panel</a:t>
+            </a:r>
+            <a:endParaRPr lang="en-US" sz="950" dirty="0"/>
           </a:p>
         </p:txBody>
       </p:sp>
@@ -8584,12 +9750,12 @@
         </p:nvSpPr>
         <p:spPr>
           <a:xfrm>
-            <a:off x="7086600" y="3977640"/>
-            <a:ext cx="2148840" cy="1737360"/>
+            <a:off x="7086600" y="4251960"/>
+            <a:ext cx="2148840" cy="1417320"/>
           </a:xfrm>
           <a:prstGeom prst="roundRect">
             <a:avLst>
-              <a:gd name="adj" fmla="val 4211"/>
+              <a:gd name="adj" fmla="val 5161"/>
             </a:avLst>
           </a:prstGeom>
           <a:solidFill>
@@ -8618,8 +9784,8 @@
         </p:nvSpPr>
         <p:spPr>
           <a:xfrm>
-            <a:off x="7196328" y="4069080"/>
-            <a:ext cx="1929384" cy="1170432"/>
+            <a:off x="7196328" y="4325112"/>
+            <a:ext cx="1929384" cy="868680"/>
           </a:xfrm>
           <a:prstGeom prst="rect">
             <a:avLst/>
@@ -8635,17 +9801,17 @@
               <a:buNone/>
             </a:pPr>
             <a:r>
-              <a:rPr lang="en-US" sz="3000" b="1" dirty="0">
-                <a:solidFill>
-                  <a:srgbClr val="E34948"/>
+              <a:rPr lang="en-US" sz="2800" b="1" dirty="0">
+                <a:solidFill>
+                  <a:srgbClr val="1BAF7A"/>
                 </a:solidFill>
                 <a:latin typeface="Cambria" pitchFamily="34" charset="0"/>
                 <a:ea typeface="Cambria" pitchFamily="34" charset="-122"/>
                 <a:cs typeface="Cambria" pitchFamily="34" charset="-120"/>
               </a:rPr>
-              <a:t>28 %</a:t>
-            </a:r>
-            <a:endParaRPr lang="en-US" sz="3000" dirty="0"/>
+              <a:t>−19 %</a:t>
+            </a:r>
+            <a:endParaRPr lang="en-US" sz="2800" dirty="0"/>
           </a:p>
         </p:txBody>
       </p:sp>
@@ -8657,7 +9823,7 @@
         </p:nvSpPr>
         <p:spPr>
           <a:xfrm>
-            <a:off x="7196328" y="5257800"/>
+            <a:off x="7196328" y="5230368"/>
             <a:ext cx="1929384" cy="384048"/>
           </a:xfrm>
           <a:prstGeom prst="rect">
@@ -8674,7 +9840,7 @@
               <a:buNone/>
             </a:pPr>
             <a:r>
-              <a:rPr lang="en-US" sz="1100" dirty="0">
+              <a:rPr lang="en-US" sz="1050" dirty="0">
                 <a:solidFill>
                   <a:srgbClr val="52514E"/>
                 </a:solidFill>
@@ -8682,9 +9848,9 @@
                 <a:ea typeface="Calibri" pitchFamily="34" charset="-122"/>
                 <a:cs typeface="Calibri" pitchFamily="34" charset="-120"/>
               </a:rPr>
-              <a:t>des opérations en dérive matérielle (&gt; 2 %)</a:t>
-            </a:r>
-            <a:endParaRPr lang="en-US" sz="1100" dirty="0"/>
+              <a:t>de réservations par point de taux en plus</a:t>
+            </a:r>
+            <a:endParaRPr lang="en-US" sz="1050" dirty="0"/>
           </a:p>
         </p:txBody>
       </p:sp>
@@ -8696,12 +9862,12 @@
         </p:nvSpPr>
         <p:spPr>
           <a:xfrm>
-            <a:off x="9464040" y="3977640"/>
-            <a:ext cx="2148840" cy="1737360"/>
+            <a:off x="9464040" y="4251960"/>
+            <a:ext cx="2148840" cy="1417320"/>
           </a:xfrm>
           <a:prstGeom prst="roundRect">
             <a:avLst>
-              <a:gd name="adj" fmla="val 4211"/>
+              <a:gd name="adj" fmla="val 5161"/>
             </a:avLst>
           </a:prstGeom>
           <a:solidFill>
@@ -8730,8 +9896,8 @@
         </p:nvSpPr>
         <p:spPr>
           <a:xfrm>
-            <a:off x="9573768" y="4069080"/>
-            <a:ext cx="1929384" cy="1170432"/>
+            <a:off x="9573768" y="4325112"/>
+            <a:ext cx="1929384" cy="868680"/>
           </a:xfrm>
           <a:prstGeom prst="rect">
             <a:avLst/>
@@ -8747,7 +9913,7 @@
               <a:buNone/>
             </a:pPr>
             <a:r>
-              <a:rPr lang="en-US" sz="3000" b="1" dirty="0">
+              <a:rPr lang="en-US" sz="2800" b="1" dirty="0">
                 <a:solidFill>
                   <a:srgbClr val="2A78D6"/>
                 </a:solidFill>
@@ -8755,9 +9921,9 @@
                 <a:ea typeface="Cambria" pitchFamily="34" charset="-122"/>
                 <a:cs typeface="Cambria" pitchFamily="34" charset="-120"/>
               </a:rPr>
-              <a:t>F1 ≈ 0,30</a:t>
-            </a:r>
-            <a:endParaRPr lang="en-US" sz="3000" dirty="0"/>
+              <a:t>20 mois</a:t>
+            </a:r>
+            <a:endParaRPr lang="en-US" sz="2800" dirty="0"/>
           </a:p>
         </p:txBody>
       </p:sp>
@@ -8769,7 +9935,7 @@
         </p:nvSpPr>
         <p:spPr>
           <a:xfrm>
-            <a:off x="9573768" y="5257800"/>
+            <a:off x="9573768" y="5230368"/>
             <a:ext cx="1929384" cy="384048"/>
           </a:xfrm>
           <a:prstGeom prst="rect">
@@ -8786,7 +9952,7 @@
               <a:buNone/>
             </a:pPr>
             <a:r>
-              <a:rPr lang="en-US" sz="1100" dirty="0">
+              <a:rPr lang="en-US" sz="1050" dirty="0">
                 <a:solidFill>
                   <a:srgbClr val="52514E"/>
                 </a:solidFill>
@@ -8794,9 +9960,9 @@
                 <a:ea typeface="Calibri" pitchFamily="34" charset="-122"/>
                 <a:cs typeface="Calibri" pitchFamily="34" charset="-120"/>
               </a:rPr>
-              <a:t>vs 0 pour la référence naïve</a:t>
-            </a:r>
-            <a:endParaRPr lang="en-US" sz="1100" dirty="0"/>
+              <a:t>délai médian pour 90 % du potentiel vendu</a:t>
+            </a:r>
+            <a:endParaRPr lang="en-US" sz="1050" dirty="0"/>
           </a:p>
         </p:txBody>
       </p:sp>
@@ -8808,8 +9974,8 @@
         </p:nvSpPr>
         <p:spPr>
           <a:xfrm>
-            <a:off x="548640" y="6510528"/>
-            <a:ext cx="5486400" cy="274320"/>
+            <a:off x="548640" y="5852160"/>
+            <a:ext cx="6309360" cy="365760"/>
           </a:xfrm>
           <a:prstGeom prst="rect">
             <a:avLst/>
@@ -8825,14 +9991,53 @@
               <a:buNone/>
             </a:pPr>
             <a:r>
-              <a:rPr lang="en-US" sz="900" dirty="0">
-                <a:solidFill>
-                  <a:srgbClr val="9A9A95"/>
+              <a:rPr lang="en-US" sz="1200" b="1" i="1" dirty="0">
+                <a:solidFill>
+                  <a:srgbClr val="1BAF7A"/>
                 </a:solidFill>
                 <a:latin typeface="Calibri" pitchFamily="34" charset="0"/>
                 <a:ea typeface="Calibri" pitchFamily="34" charset="-122"/>
                 <a:cs typeface="Calibri" pitchFamily="34" charset="-120"/>
               </a:rPr>
+              <a:t>Axe le plus solide du projet.</a:t>
+            </a:r>
+            <a:endParaRPr lang="en-US" sz="1200" dirty="0"/>
+          </a:p>
+        </p:txBody>
+      </p:sp>
+      <p:sp>
+        <p:nvSpPr>
+          <p:cNvPr id="15" name="Text 12"/>
+          <p:cNvSpPr/>
+          <p:nvPr/>
+        </p:nvSpPr>
+        <p:spPr>
+          <a:xfrm>
+            <a:off x="548640" y="6510528"/>
+            <a:ext cx="5486400" cy="274320"/>
+          </a:xfrm>
+          <a:prstGeom prst="rect">
+            <a:avLst/>
+          </a:prstGeom>
+          <a:noFill/>
+          <a:ln/>
+        </p:spPr>
+        <p:txBody>
+          <a:bodyPr wrap="square" lIns="0" tIns="0" rIns="0" bIns="0" rtlCol="0" anchor="ctr"/>
+          <a:lstStyle/>
+          <a:p>
+            <a:pPr indent="0" marL="0">
+              <a:buNone/>
+            </a:pPr>
+            <a:r>
+              <a:rPr lang="en-US" sz="900" dirty="0">
+                <a:solidFill>
+                  <a:srgbClr val="9A9A95"/>
+                </a:solidFill>
+                <a:latin typeface="Calibri" pitchFamily="34" charset="0"/>
+                <a:ea typeface="Calibri" pitchFamily="34" charset="-122"/>
+                <a:cs typeface="Calibri" pitchFamily="34" charset="-120"/>
+              </a:rPr>
               <a:t>Copilote Financier — Groupe Angelotti</a:t>
             </a:r>
             <a:endParaRPr lang="en-US" sz="900" dirty="0"/>
@@ -8841,7 +10046,7 @@
       </p:sp>
       <p:sp>
         <p:nvSpPr>
-          <p:cNvPr id="15" name="Text 12"/>
+          <p:cNvPr id="16" name="Text 13"/>
           <p:cNvSpPr/>
           <p:nvPr/>
         </p:nvSpPr>
@@ -8919,7 +10124,7 @@
         <p:spPr>
           <a:xfrm>
             <a:off x="548640" y="384048"/>
-            <a:ext cx="7315200" cy="320040"/>
+            <a:ext cx="8229600" cy="320040"/>
           </a:xfrm>
           <a:prstGeom prst="rect">
             <a:avLst/>
@@ -8937,13 +10142,13 @@
             <a:r>
               <a:rPr lang="en-US" sz="1200" b="1" spc="200" kern="0" dirty="0">
                 <a:solidFill>
-                  <a:srgbClr val="1BAF7A"/>
+                  <a:srgbClr val="4A3AA7"/>
                 </a:solidFill>
                 <a:latin typeface="Calibri" pitchFamily="34" charset="0"/>
                 <a:ea typeface="Calibri" pitchFamily="34" charset="-122"/>
                 <a:cs typeface="Calibri" pitchFamily="34" charset="-120"/>
               </a:rPr>
-              <a:t>COPILOTE FINANCIER — AXE B</a:t>
+              <a:t>COPILOTE FINANCIER — AXE C</a:t>
             </a:r>
             <a:endParaRPr lang="en-US" sz="1200" dirty="0"/>
           </a:p>
@@ -8958,7 +10163,7 @@
         <p:spPr>
           <a:xfrm>
             <a:off x="548640" y="658368"/>
-            <a:ext cx="7315200" cy="822960"/>
+            <a:ext cx="10058400" cy="822960"/>
           </a:xfrm>
           <a:prstGeom prst="rect">
             <a:avLst/>
@@ -8974,7 +10179,7 @@
               <a:buNone/>
             </a:pPr>
             <a:r>
-              <a:rPr lang="en-US" sz="3000" b="1" dirty="0">
+              <a:rPr lang="en-US" sz="2800" b="1" dirty="0">
                 <a:solidFill>
                   <a:srgbClr val="1A1A19"/>
                 </a:solidFill>
@@ -8982,9 +10187,9 @@
                 <a:ea typeface="Cambria" pitchFamily="34" charset="-122"/>
                 <a:cs typeface="Cambria" pitchFamily="34" charset="-120"/>
               </a:rPr>
-              <a:t>La vitesse d'écoulement</a:t>
-            </a:r>
-            <a:endParaRPr lang="en-US" sz="3000" dirty="0"/>
+              <a:t>L'optimisation des prix</a:t>
+            </a:r>
+            <a:endParaRPr lang="en-US" sz="2800" dirty="0"/>
           </a:p>
         </p:txBody>
       </p:sp>
@@ -8996,8 +10201,8 @@
         </p:nvSpPr>
         <p:spPr>
           <a:xfrm>
-            <a:off x="548640" y="1600200"/>
-            <a:ext cx="6309360" cy="4480560"/>
+            <a:off x="548640" y="1691640"/>
+            <a:ext cx="6492240" cy="4572000"/>
           </a:xfrm>
           <a:prstGeom prst="rect">
             <a:avLst/>
@@ -9009,9 +10214,9 @@
           <a:bodyPr wrap="square" lIns="0" tIns="0" rIns="0" bIns="0" rtlCol="0" anchor="t"/>
           <a:lstStyle/>
           <a:p>
-            <a:pPr marL="228600" indent="-228600">
+            <a:pPr marL="203200" indent="-203200">
               <a:lnSpc>
-                <a:spcPct val="108000"/>
+                <a:spcPct val="106000"/>
               </a:lnSpc>
               <a:spcAft>
                 <a:spcPts val="1300"/>
@@ -9020,7 +10225,7 @@
               <a:buChar char="•"/>
             </a:pPr>
             <a:r>
-              <a:rPr lang="en-US" sz="1450" dirty="0">
+              <a:rPr lang="en-US" sz="1370" dirty="0">
                 <a:solidFill>
                   <a:srgbClr val="1A1A19"/>
                 </a:solidFill>
@@ -9028,14 +10233,14 @@
                 <a:ea typeface="Calibri" pitchFamily="34" charset="-122"/>
                 <a:cs typeface="Calibri" pitchFamily="34" charset="-120"/>
               </a:rPr>
-              <a:t>Panel de 3 230 observations (opération × mois, 160 opérations)</a:t>
-            </a:r>
-            <a:endParaRPr lang="en-US" sz="1450" dirty="0"/>
-          </a:p>
-          <a:p>
-            <a:pPr marL="228600" indent="-228600">
+              <a:t>Modèle hédonique sur 5 064 appartements vendus depuis 2016 — primes cohérentes (étage +6,0 %, sud +2,6 %, social −62,8 %)</a:t>
+            </a:r>
+            <a:endParaRPr lang="en-US" sz="1370" dirty="0"/>
+          </a:p>
+          <a:p>
+            <a:pPr marL="203200" indent="-203200">
               <a:lnSpc>
-                <a:spcPct val="108000"/>
+                <a:spcPct val="106000"/>
               </a:lnSpc>
               <a:spcAft>
                 <a:spcPts val="1300"/>
@@ -9044,7 +10249,7 @@
               <a:buChar char="•"/>
             </a:pPr>
             <a:r>
-              <a:rPr lang="en-US" sz="1450" dirty="0">
+              <a:rPr lang="en-US" sz="1370" dirty="0">
                 <a:solidFill>
                   <a:srgbClr val="1A1A19"/>
                 </a:solidFill>
@@ -9052,14 +10257,14 @@
                 <a:ea typeface="Calibri" pitchFamily="34" charset="-122"/>
                 <a:cs typeface="Calibri" pitchFamily="34" charset="-120"/>
               </a:rPr>
-              <a:t>2/3 de la variance du rythme tient au programme lui-même, 1/3 à la conjoncture (ICC = 0,66)</a:t>
-            </a:r>
-            <a:endParaRPr lang="en-US" sz="1450" dirty="0"/>
-          </a:p>
-          <a:p>
-            <a:pPr marL="228600" indent="-228600">
+              <a:t>Élasticité non significative en interne (p = 0,57) → fixée prudemment à −1, documentée plutôt que masquée</a:t>
+            </a:r>
+            <a:endParaRPr lang="en-US" sz="1370" dirty="0"/>
+          </a:p>
+          <a:p>
+            <a:pPr marL="203200" indent="-203200">
               <a:lnSpc>
-                <a:spcPct val="108000"/>
+                <a:spcPct val="106000"/>
               </a:lnSpc>
               <a:spcAft>
                 <a:spcPts val="1300"/>
@@ -9068,7 +10273,7 @@
               <a:buChar char="•"/>
             </a:pPr>
             <a:r>
-              <a:rPr lang="en-US" sz="1450" dirty="0">
+              <a:rPr lang="en-US" sz="1370" dirty="0">
                 <a:solidFill>
                   <a:srgbClr val="1A1A19"/>
                 </a:solidFill>
@@ -9076,14 +10281,14 @@
                 <a:ea typeface="Calibri" pitchFamily="34" charset="-122"/>
                 <a:cs typeface="Calibri" pitchFamily="34" charset="-120"/>
               </a:rPr>
-              <a:t>+1 point de taux de crédit ⇒ −19 % de réservations mensuelles (p &lt; 10⁻¹⁵)</a:t>
-            </a:r>
-            <a:endParaRPr lang="en-US" sz="1450" dirty="0"/>
-          </a:p>
-          <a:p>
-            <a:pPr marL="228600" indent="-228600">
+              <a:t>Optimisation par multiplicateur de Lagrange, vérifiée par un second solveur indépendant (SLSQP) — convergence à 0,006 près</a:t>
+            </a:r>
+            <a:endParaRPr lang="en-US" sz="1370" dirty="0"/>
+          </a:p>
+          <a:p>
+            <a:pPr marL="203200" indent="-203200">
               <a:lnSpc>
-                <a:spcPct val="108000"/>
+                <a:spcPct val="106000"/>
               </a:lnSpc>
               <a:spcAft>
                 <a:spcPts val="1300"/>
@@ -9092,7 +10297,7 @@
               <a:buChar char="•"/>
             </a:pPr>
             <a:r>
-              <a:rPr lang="en-US" sz="1450" dirty="0">
+              <a:rPr lang="en-US" sz="1370" dirty="0">
                 <a:solidFill>
                   <a:srgbClr val="1A1A19"/>
                 </a:solidFill>
@@ -9100,9 +10305,9 @@
                 <a:ea typeface="Calibri" pitchFamily="34" charset="-122"/>
                 <a:cs typeface="Calibri" pitchFamily="34" charset="-120"/>
               </a:rPr>
-              <a:t>Contrôle par série temporelle : effet non identifiable isolément (p = 0,82) — validation méthodologique, pas un échec</a:t>
-            </a:r>
-            <a:endParaRPr lang="en-US" sz="1450" dirty="0"/>
+              <a:t>Résultat contre-intuitif : remise optimale identique en euros sur tous les lots — donc un % plus fort sur les petits lots</a:t>
+            </a:r>
+            <a:endParaRPr lang="en-US" sz="1370" dirty="0"/>
           </a:p>
         </p:txBody>
       </p:sp>
@@ -9114,108 +10319,12 @@
         </p:nvSpPr>
         <p:spPr>
           <a:xfrm>
-            <a:off x="7013448" y="1618488"/>
-            <a:ext cx="4672584" cy="1956816"/>
+            <a:off x="7315200" y="1691640"/>
+            <a:ext cx="4297680" cy="1371600"/>
           </a:xfrm>
           <a:prstGeom prst="roundRect">
             <a:avLst>
-              <a:gd name="adj" fmla="val 2804"/>
-            </a:avLst>
-          </a:prstGeom>
-          <a:solidFill>
-            <a:srgbClr val="FFFFFF"/>
-          </a:solidFill>
-          <a:ln w="12700">
-            <a:solidFill>
-              <a:srgbClr val="E3E7EE"/>
-            </a:solidFill>
-            <a:prstDash val="solid"/>
-          </a:ln>
-          <a:effectLst>
-            <a:outerShdw sx="100000" sy="100000" kx="0" ky="0" algn="bl" rotWithShape="0" blurRad="101600" dist="25400" dir="5400000">
-              <a:srgbClr val="1A1A19">
-                <a:alpha val="15000"/>
-              </a:srgbClr>
-            </a:outerShdw>
-          </a:effectLst>
-        </p:spPr>
-      </p:sp>
-      <p:pic>
-        <p:nvPicPr>
-          <p:cNvPr id="6" name="Image 0" descr="/tmp/claude-0/-home-user-MemoireM2S2/bac073a6-7c4e-552a-9627-815aeb6fe82a/scratchpad/figs/p28-000.png">    </p:cNvPr>
-          <p:cNvPicPr>
-            <a:picLocks noChangeAspect="1"/>
-          </p:cNvPicPr>
-          <p:nvPr/>
-        </p:nvPicPr>
-        <p:blipFill>
-          <a:blip r:embed="rId1"/>
-          <a:srcRect l="0" r="0" t="0" b="0"/>
-          <a:stretch/>
-        </p:blipFill>
-        <p:spPr>
-          <a:xfrm>
-            <a:off x="7086600" y="1691640"/>
-            <a:ext cx="4526280" cy="1810512"/>
-          </a:xfrm>
-          <a:prstGeom prst="rect">
-            <a:avLst/>
-          </a:prstGeom>
-        </p:spPr>
-      </p:pic>
-      <p:sp>
-        <p:nvSpPr>
-          <p:cNvPr id="7" name="Text 4"/>
-          <p:cNvSpPr/>
-          <p:nvPr/>
-        </p:nvSpPr>
-        <p:spPr>
-          <a:xfrm>
-            <a:off x="7086600" y="3529584"/>
-            <a:ext cx="4526280" cy="457200"/>
-          </a:xfrm>
-          <a:prstGeom prst="rect">
-            <a:avLst/>
-          </a:prstGeom>
-          <a:noFill/>
-          <a:ln/>
-        </p:spPr>
-        <p:txBody>
-          <a:bodyPr wrap="square" lIns="0" tIns="0" rIns="0" bIns="0" rtlCol="0" anchor="ctr"/>
-          <a:lstStyle/>
-          <a:p>
-            <a:pPr indent="0" marL="0">
-              <a:buNone/>
-            </a:pPr>
-            <a:r>
-              <a:rPr lang="en-US" sz="1000" i="1" dirty="0">
-                <a:solidFill>
-                  <a:srgbClr val="52514E"/>
-                </a:solidFill>
-                <a:latin typeface="Calibri" pitchFamily="34" charset="0"/>
-                <a:ea typeface="Calibri" pitchFamily="34" charset="-122"/>
-                <a:cs typeface="Calibri" pitchFamily="34" charset="-120"/>
-              </a:rPr>
-              <a:t>Fig. — Scénarios de taux 2026 : trajectoire ARIMA combinée à l'élasticité du panel</a:t>
-            </a:r>
-            <a:endParaRPr lang="en-US" sz="1000" dirty="0"/>
-          </a:p>
-        </p:txBody>
-      </p:sp>
-      <p:sp>
-        <p:nvSpPr>
-          <p:cNvPr id="8" name="Shape 5"/>
-          <p:cNvSpPr/>
-          <p:nvPr/>
-        </p:nvSpPr>
-        <p:spPr>
-          <a:xfrm>
-            <a:off x="7086600" y="4279392"/>
-            <a:ext cx="2148840" cy="1417320"/>
-          </a:xfrm>
-          <a:prstGeom prst="roundRect">
-            <a:avLst>
-              <a:gd name="adj" fmla="val 5161"/>
+              <a:gd name="adj" fmla="val 5333"/>
             </a:avLst>
           </a:prstGeom>
           <a:solidFill>
@@ -9238,14 +10347,14 @@
       </p:sp>
       <p:sp>
         <p:nvSpPr>
-          <p:cNvPr id="9" name="Text 6"/>
-          <p:cNvSpPr/>
-          <p:nvPr/>
-        </p:nvSpPr>
-        <p:spPr>
-          <a:xfrm>
-            <a:off x="7196328" y="4370832"/>
-            <a:ext cx="1929384" cy="850392"/>
+          <p:cNvPr id="6" name="Text 4"/>
+          <p:cNvSpPr/>
+          <p:nvPr/>
+        </p:nvSpPr>
+        <p:spPr>
+          <a:xfrm>
+            <a:off x="7424928" y="1764792"/>
+            <a:ext cx="4078224" cy="822960"/>
           </a:xfrm>
           <a:prstGeom prst="rect">
             <a:avLst/>
@@ -9261,30 +10370,30 @@
               <a:buNone/>
             </a:pPr>
             <a:r>
-              <a:rPr lang="en-US" sz="3000" b="1" dirty="0">
-                <a:solidFill>
-                  <a:srgbClr val="1BAF7A"/>
+              <a:rPr lang="en-US" sz="2800" b="1" dirty="0">
+                <a:solidFill>
+                  <a:srgbClr val="4A3AA7"/>
                 </a:solidFill>
                 <a:latin typeface="Cambria" pitchFamily="34" charset="0"/>
                 <a:ea typeface="Cambria" pitchFamily="34" charset="-122"/>
                 <a:cs typeface="Cambria" pitchFamily="34" charset="-120"/>
               </a:rPr>
-              <a:t>−19 %</a:t>
-            </a:r>
-            <a:endParaRPr lang="en-US" sz="3000" dirty="0"/>
-          </a:p>
-        </p:txBody>
-      </p:sp>
-      <p:sp>
-        <p:nvSpPr>
-          <p:cNvPr id="10" name="Text 7"/>
-          <p:cNvSpPr/>
-          <p:nvPr/>
-        </p:nvSpPr>
-        <p:spPr>
-          <a:xfrm>
-            <a:off x="7196328" y="5239512"/>
-            <a:ext cx="1929384" cy="384048"/>
+              <a:t>R² = 0,886</a:t>
+            </a:r>
+            <a:endParaRPr lang="en-US" sz="2800" dirty="0"/>
+          </a:p>
+        </p:txBody>
+      </p:sp>
+      <p:sp>
+        <p:nvSpPr>
+          <p:cNvPr id="7" name="Text 5"/>
+          <p:cNvSpPr/>
+          <p:nvPr/>
+        </p:nvSpPr>
+        <p:spPr>
+          <a:xfrm>
+            <a:off x="7424928" y="2624328"/>
+            <a:ext cx="4078224" cy="384048"/>
           </a:xfrm>
           <a:prstGeom prst="rect">
             <a:avLst/>
@@ -9300,7 +10409,7 @@
               <a:buNone/>
             </a:pPr>
             <a:r>
-              <a:rPr lang="en-US" sz="1100" dirty="0">
+              <a:rPr lang="en-US" sz="1050" dirty="0">
                 <a:solidFill>
                   <a:srgbClr val="52514E"/>
                 </a:solidFill>
@@ -9308,26 +10417,26 @@
                 <a:ea typeface="Calibri" pitchFamily="34" charset="-122"/>
                 <a:cs typeface="Calibri" pitchFamily="34" charset="-120"/>
               </a:rPr>
-              <a:t>de réservations par point de taux en plus</a:t>
-            </a:r>
-            <a:endParaRPr lang="en-US" sz="1100" dirty="0"/>
-          </a:p>
-        </p:txBody>
-      </p:sp>
-      <p:sp>
-        <p:nvSpPr>
-          <p:cNvPr id="11" name="Shape 8"/>
-          <p:cNvSpPr/>
-          <p:nvPr/>
-        </p:nvSpPr>
-        <p:spPr>
-          <a:xfrm>
-            <a:off x="9464040" y="4279392"/>
-            <a:ext cx="2148840" cy="1417320"/>
+              <a:t>variance du prix expliquée, erreur type ≈ 11 %</a:t>
+            </a:r>
+            <a:endParaRPr lang="en-US" sz="1050" dirty="0"/>
+          </a:p>
+        </p:txBody>
+      </p:sp>
+      <p:sp>
+        <p:nvSpPr>
+          <p:cNvPr id="8" name="Shape 6"/>
+          <p:cNvSpPr/>
+          <p:nvPr/>
+        </p:nvSpPr>
+        <p:spPr>
+          <a:xfrm>
+            <a:off x="7315200" y="3246120"/>
+            <a:ext cx="4297680" cy="1371600"/>
           </a:xfrm>
           <a:prstGeom prst="roundRect">
             <a:avLst>
-              <a:gd name="adj" fmla="val 5161"/>
+              <a:gd name="adj" fmla="val 5333"/>
             </a:avLst>
           </a:prstGeom>
           <a:solidFill>
@@ -9350,14 +10459,14 @@
       </p:sp>
       <p:sp>
         <p:nvSpPr>
-          <p:cNvPr id="12" name="Text 9"/>
-          <p:cNvSpPr/>
-          <p:nvPr/>
-        </p:nvSpPr>
-        <p:spPr>
-          <a:xfrm>
-            <a:off x="9573768" y="4370832"/>
-            <a:ext cx="1929384" cy="850392"/>
+          <p:cNvPr id="9" name="Text 7"/>
+          <p:cNvSpPr/>
+          <p:nvPr/>
+        </p:nvSpPr>
+        <p:spPr>
+          <a:xfrm>
+            <a:off x="7424928" y="3319272"/>
+            <a:ext cx="4078224" cy="822960"/>
           </a:xfrm>
           <a:prstGeom prst="rect">
             <a:avLst/>
@@ -9373,30 +10482,30 @@
               <a:buNone/>
             </a:pPr>
             <a:r>
-              <a:rPr lang="en-US" sz="3000" b="1" dirty="0">
-                <a:solidFill>
-                  <a:srgbClr val="2A78D6"/>
+              <a:rPr lang="en-US" sz="2800" b="1" dirty="0">
+                <a:solidFill>
+                  <a:srgbClr val="EDA100"/>
                 </a:solidFill>
                 <a:latin typeface="Cambria" pitchFamily="34" charset="0"/>
                 <a:ea typeface="Cambria" pitchFamily="34" charset="-122"/>
                 <a:cs typeface="Cambria" pitchFamily="34" charset="-120"/>
               </a:rPr>
-              <a:t>ICC 0,66</a:t>
-            </a:r>
-            <a:endParaRPr lang="en-US" sz="3000" dirty="0"/>
-          </a:p>
-        </p:txBody>
-      </p:sp>
-      <p:sp>
-        <p:nvSpPr>
-          <p:cNvPr id="13" name="Text 10"/>
-          <p:cNvSpPr/>
-          <p:nvPr/>
-        </p:nvSpPr>
-        <p:spPr>
-          <a:xfrm>
-            <a:off x="9573768" y="5239512"/>
-            <a:ext cx="1929384" cy="384048"/>
+              <a:t>24 / 127</a:t>
+            </a:r>
+            <a:endParaRPr lang="en-US" sz="2800" dirty="0"/>
+          </a:p>
+        </p:txBody>
+      </p:sp>
+      <p:sp>
+        <p:nvSpPr>
+          <p:cNvPr id="10" name="Text 8"/>
+          <p:cNvSpPr/>
+          <p:nvPr/>
+        </p:nvSpPr>
+        <p:spPr>
+          <a:xfrm>
+            <a:off x="7424928" y="4178808"/>
+            <a:ext cx="4078224" cy="384048"/>
           </a:xfrm>
           <a:prstGeom prst="rect">
             <a:avLst/>
@@ -9412,7 +10521,7 @@
               <a:buNone/>
             </a:pPr>
             <a:r>
-              <a:rPr lang="en-US" sz="1100" dirty="0">
+              <a:rPr lang="en-US" sz="1050" dirty="0">
                 <a:solidFill>
                   <a:srgbClr val="52514E"/>
                 </a:solidFill>
@@ -9420,54 +10529,127 @@
                 <a:ea typeface="Calibri" pitchFamily="34" charset="-122"/>
                 <a:cs typeface="Calibri" pitchFamily="34" charset="-120"/>
               </a:rPr>
-              <a:t>de la variance imputable au programme</a:t>
-            </a:r>
-            <a:endParaRPr lang="en-US" sz="1100" dirty="0"/>
-          </a:p>
-        </p:txBody>
-      </p:sp>
-      <p:sp>
-        <p:nvSpPr>
-          <p:cNvPr id="14" name="Text 11"/>
-          <p:cNvSpPr/>
-          <p:nvPr/>
-        </p:nvSpPr>
-        <p:spPr>
-          <a:xfrm>
-            <a:off x="548640" y="5989320"/>
-            <a:ext cx="6309360" cy="365760"/>
-          </a:xfrm>
-          <a:prstGeom prst="rect">
-            <a:avLst/>
-          </a:prstGeom>
-          <a:noFill/>
-          <a:ln/>
-        </p:spPr>
-        <p:txBody>
-          <a:bodyPr wrap="square" lIns="0" tIns="0" rIns="0" bIns="0" rtlCol="0" anchor="ctr"/>
-          <a:lstStyle/>
-          <a:p>
-            <a:pPr indent="0" marL="0">
-              <a:buNone/>
-            </a:pPr>
-            <a:r>
-              <a:rPr lang="en-US" sz="1200" b="1" i="1" dirty="0">
-                <a:solidFill>
-                  <a:srgbClr val="1BAF7A"/>
+              <a:t>lots du stock signalés hors marché</a:t>
+            </a:r>
+            <a:endParaRPr lang="en-US" sz="1050" dirty="0"/>
+          </a:p>
+        </p:txBody>
+      </p:sp>
+      <p:sp>
+        <p:nvSpPr>
+          <p:cNvPr id="11" name="Shape 9"/>
+          <p:cNvSpPr/>
+          <p:nvPr/>
+        </p:nvSpPr>
+        <p:spPr>
+          <a:xfrm>
+            <a:off x="7315200" y="4800600"/>
+            <a:ext cx="4297680" cy="1371600"/>
+          </a:xfrm>
+          <a:prstGeom prst="roundRect">
+            <a:avLst>
+              <a:gd name="adj" fmla="val 5333"/>
+            </a:avLst>
+          </a:prstGeom>
+          <a:solidFill>
+            <a:srgbClr val="FFFFFF"/>
+          </a:solidFill>
+          <a:ln w="12700">
+            <a:solidFill>
+              <a:srgbClr val="E3E7EE"/>
+            </a:solidFill>
+            <a:prstDash val="solid"/>
+          </a:ln>
+          <a:effectLst>
+            <a:outerShdw sx="100000" sy="100000" kx="0" ky="0" algn="bl" rotWithShape="0" blurRad="76200" dist="25400" dir="5400000">
+              <a:srgbClr val="1A1A19">
+                <a:alpha val="12000"/>
+              </a:srgbClr>
+            </a:outerShdw>
+          </a:effectLst>
+        </p:spPr>
+      </p:sp>
+      <p:sp>
+        <p:nvSpPr>
+          <p:cNvPr id="12" name="Text 10"/>
+          <p:cNvSpPr/>
+          <p:nvPr/>
+        </p:nvSpPr>
+        <p:spPr>
+          <a:xfrm>
+            <a:off x="7424928" y="4873752"/>
+            <a:ext cx="4078224" cy="822960"/>
+          </a:xfrm>
+          <a:prstGeom prst="rect">
+            <a:avLst/>
+          </a:prstGeom>
+          <a:noFill/>
+          <a:ln/>
+        </p:spPr>
+        <p:txBody>
+          <a:bodyPr wrap="square" lIns="0" tIns="0" rIns="0" bIns="0" rtlCol="0" anchor="b"/>
+          <a:lstStyle/>
+          <a:p>
+            <a:pPr algn="l" indent="0" marL="0">
+              <a:buNone/>
+            </a:pPr>
+            <a:r>
+              <a:rPr lang="en-US" sz="2800" b="1" dirty="0">
+                <a:solidFill>
+                  <a:srgbClr val="2A78D6"/>
+                </a:solidFill>
+                <a:latin typeface="Cambria" pitchFamily="34" charset="0"/>
+                <a:ea typeface="Cambria" pitchFamily="34" charset="-122"/>
+                <a:cs typeface="Cambria" pitchFamily="34" charset="-120"/>
+              </a:rPr>
+              <a:t>0,006</a:t>
+            </a:r>
+            <a:endParaRPr lang="en-US" sz="2800" dirty="0"/>
+          </a:p>
+        </p:txBody>
+      </p:sp>
+      <p:sp>
+        <p:nvSpPr>
+          <p:cNvPr id="13" name="Text 11"/>
+          <p:cNvSpPr/>
+          <p:nvPr/>
+        </p:nvSpPr>
+        <p:spPr>
+          <a:xfrm>
+            <a:off x="7424928" y="5733288"/>
+            <a:ext cx="4078224" cy="384048"/>
+          </a:xfrm>
+          <a:prstGeom prst="rect">
+            <a:avLst/>
+          </a:prstGeom>
+          <a:noFill/>
+          <a:ln/>
+        </p:spPr>
+        <p:txBody>
+          <a:bodyPr wrap="square" lIns="0" tIns="0" rIns="0" bIns="0" rtlCol="0" anchor="t"/>
+          <a:lstStyle/>
+          <a:p>
+            <a:pPr algn="l" indent="0" marL="0">
+              <a:buNone/>
+            </a:pPr>
+            <a:r>
+              <a:rPr lang="en-US" sz="1050" dirty="0">
+                <a:solidFill>
+                  <a:srgbClr val="52514E"/>
                 </a:solidFill>
                 <a:latin typeface="Calibri" pitchFamily="34" charset="0"/>
                 <a:ea typeface="Calibri" pitchFamily="34" charset="-122"/>
                 <a:cs typeface="Calibri" pitchFamily="34" charset="-120"/>
               </a:rPr>
-              <a:t>Axe le plus solide du projet.</a:t>
-            </a:r>
-            <a:endParaRPr lang="en-US" sz="1200" dirty="0"/>
-          </a:p>
-        </p:txBody>
-      </p:sp>
-      <p:sp>
-        <p:nvSpPr>
-          <p:cNvPr id="15" name="Text 12"/>
+              <a:t>écart entre les deux solveurs d'optimisation</a:t>
+            </a:r>
+            <a:endParaRPr lang="en-US" sz="1050" dirty="0"/>
+          </a:p>
+        </p:txBody>
+      </p:sp>
+      <p:sp>
+        <p:nvSpPr>
+          <p:cNvPr id="14" name="Text 12"/>
           <p:cNvSpPr/>
           <p:nvPr/>
         </p:nvSpPr>
@@ -9506,7 +10688,7 @@
       </p:sp>
       <p:sp>
         <p:nvSpPr>
-          <p:cNvPr id="16" name="Text 13"/>
+          <p:cNvPr id="15" name="Text 13"/>
           <p:cNvSpPr/>
           <p:nvPr/>
         </p:nvSpPr>

--- a/soutenance_copilote_financier.pptx
+++ b/soutenance_copilote_financier.pptx
@@ -22,9 +22,10 @@
     <p:sldId id="270" r:id="rId16"/>
     <p:sldId id="271" r:id="rId17"/>
     <p:sldId id="272" r:id="rId18"/>
+    <p:sldId id="273" r:id="rId19"/>
   </p:sldIdLst>
   <p:notesMasterIdLst>
-    <p:notesMasterId r:id="rId19"/>
+    <p:notesMasterId r:id="rId20"/>
   </p:notesMasterIdLst>
   <p:sldSz cx="12192000" cy="6858000"/>
   <p:notesSz cx="6858000" cy="12192000"/>
@@ -1246,6 +1247,94 @@
             <a:fld id="{F7021451-1387-4CA6-816F-3879F97B5CBC}" type="slidenum">
               <a:rPr lang="en-US"/>
               <a:t>17</a:t>
+            </a:fld>
+            <a:endParaRPr lang="en-US"/>
+          </a:p>
+        </p:txBody>
+      </p:sp>
+    </p:spTree>
+    <p:extLst>
+      <p:ext uri="{BB962C8B-B14F-4D97-AF65-F5344CB8AC3E}">
+        <p14:creationId xmlns:p14="http://schemas.microsoft.com/office/powerpoint/2010/main" val="1024086991"/>
+      </p:ext>
+    </p:extLst>
+  </p:cSld>
+  <p:clrMapOvr>
+    <a:masterClrMapping/>
+  </p:clrMapOvr>
+</p:notes>
+</file>
+
+<file path=ppt/notesSlides/notesSlide18.xml><?xml version="1.0" encoding="utf-8"?>
+<p:notes xmlns:a="http://schemas.openxmlformats.org/drawingml/2006/main" xmlns:r="http://schemas.openxmlformats.org/officeDocument/2006/relationships" xmlns:p="http://schemas.openxmlformats.org/presentationml/2006/main">
+  <p:cSld>
+    <p:spTree>
+      <p:nvGrpSpPr>
+        <p:cNvPr id="1" name=""/>
+        <p:cNvGrpSpPr/>
+        <p:nvPr/>
+      </p:nvGrpSpPr>
+      <p:grpSpPr>
+        <a:xfrm>
+          <a:off x="0" y="0"/>
+          <a:ext cx="0" cy="0"/>
+          <a:chOff x="0" y="0"/>
+          <a:chExt cx="0" cy="0"/>
+        </a:xfrm>
+      </p:grpSpPr>
+      <p:sp>
+        <p:nvSpPr>
+          <p:cNvPr id="2" name="Slide Image Placeholder 1"/>
+          <p:cNvSpPr>
+            <a:spLocks noGrp="1" noRot="1" noChangeAspect="1"/>
+          </p:cNvSpPr>
+          <p:nvPr>
+            <p:ph type="sldImg"/>
+          </p:nvPr>
+        </p:nvSpPr>
+        <p:spPr/>
+      </p:sp>
+      <p:sp>
+        <p:nvSpPr>
+          <p:cNvPr id="3" name="Notes Placeholder 2"/>
+          <p:cNvSpPr>
+            <a:spLocks noGrp="1"/>
+          </p:cNvSpPr>
+          <p:nvPr>
+            <p:ph type="body" idx="1"/>
+          </p:nvPr>
+        </p:nvSpPr>
+        <p:spPr/>
+        <p:txBody>
+          <a:bodyPr/>
+          <a:lstStyle/>
+          <a:p>
+            <a:r>
+              <a:rPr lang="en-US" dirty="0"/>
+              <a:t/>
+            </a:r>
+            <a:endParaRPr lang="en-US" dirty="0"/>
+          </a:p>
+        </p:txBody>
+      </p:sp>
+      <p:sp>
+        <p:nvSpPr>
+          <p:cNvPr id="4" name="Slide Number Placeholder 3"/>
+          <p:cNvSpPr>
+            <a:spLocks noGrp="1"/>
+          </p:cNvSpPr>
+          <p:nvPr>
+            <p:ph type="sldNum" sz="quarter" idx="10"/>
+          </p:nvPr>
+        </p:nvSpPr>
+        <p:spPr/>
+        <p:txBody>
+          <a:bodyPr/>
+          <a:lstStyle/>
+          <a:p>
+            <a:fld id="{F7021451-1387-4CA6-816F-3879F97B5CBC}" type="slidenum">
+              <a:rPr lang="en-US"/>
+              <a:t>18</a:t>
             </a:fld>
             <a:endParaRPr lang="en-US"/>
           </a:p>
@@ -2521,6 +2610,566 @@
             <a:r>
               <a:rPr lang="en-US" sz="1200" b="1" spc="200" kern="0" dirty="0">
                 <a:solidFill>
+                  <a:srgbClr val="EDA100"/>
+                </a:solidFill>
+                <a:latin typeface="Calibri" pitchFamily="34" charset="0"/>
+                <a:ea typeface="Calibri" pitchFamily="34" charset="-122"/>
+                <a:cs typeface="Calibri" pitchFamily="34" charset="-120"/>
+              </a:rPr>
+              <a:t>COPILOTE FINANCIER — UNE ÉTAPE AVANT L'AXE A</a:t>
+            </a:r>
+            <a:endParaRPr lang="en-US" sz="1200" dirty="0"/>
+          </a:p>
+        </p:txBody>
+      </p:sp>
+      <p:sp>
+        <p:nvSpPr>
+          <p:cNvPr id="3" name="Text 1"/>
+          <p:cNvSpPr/>
+          <p:nvPr/>
+        </p:nvSpPr>
+        <p:spPr>
+          <a:xfrm>
+            <a:off x="548640" y="658368"/>
+            <a:ext cx="10515600" cy="822960"/>
+          </a:xfrm>
+          <a:prstGeom prst="rect">
+            <a:avLst/>
+          </a:prstGeom>
+          <a:noFill/>
+          <a:ln/>
+        </p:spPr>
+        <p:txBody>
+          <a:bodyPr wrap="square" lIns="0" tIns="0" rIns="0" bIns="0" rtlCol="0" anchor="ctr"/>
+          <a:lstStyle/>
+          <a:p>
+            <a:pPr indent="0" marL="0">
+              <a:buNone/>
+            </a:pPr>
+            <a:r>
+              <a:rPr lang="en-US" sz="2800" b="1" dirty="0">
+                <a:solidFill>
+                  <a:srgbClr val="1A1A19"/>
+                </a:solidFill>
+                <a:latin typeface="Cambria" pitchFamily="34" charset="0"/>
+                <a:ea typeface="Cambria" pitchFamily="34" charset="-122"/>
+                <a:cs typeface="Cambria" pitchFamily="34" charset="-120"/>
+              </a:rPr>
+              <a:t>La typologie des opérations</a:t>
+            </a:r>
+            <a:endParaRPr lang="en-US" sz="2800" dirty="0"/>
+          </a:p>
+        </p:txBody>
+      </p:sp>
+      <p:sp>
+        <p:nvSpPr>
+          <p:cNvPr id="4" name="Text 2"/>
+          <p:cNvSpPr/>
+          <p:nvPr/>
+        </p:nvSpPr>
+        <p:spPr>
+          <a:xfrm>
+            <a:off x="548640" y="1517904"/>
+            <a:ext cx="11064240" cy="548640"/>
+          </a:xfrm>
+          <a:prstGeom prst="rect">
+            <a:avLst/>
+          </a:prstGeom>
+          <a:noFill/>
+          <a:ln/>
+        </p:spPr>
+        <p:txBody>
+          <a:bodyPr wrap="square" lIns="0" tIns="0" rIns="0" bIns="0" rtlCol="0" anchor="ctr"/>
+          <a:lstStyle/>
+          <a:p>
+            <a:pPr indent="0" marL="0">
+              <a:buNone/>
+            </a:pPr>
+            <a:r>
+              <a:rPr lang="en-US" sz="1400" i="1" dirty="0">
+                <a:solidFill>
+                  <a:srgbClr val="52514E"/>
+                </a:solidFill>
+                <a:latin typeface="Calibri" pitchFamily="34" charset="0"/>
+                <a:ea typeface="Calibri" pitchFamily="34" charset="-122"/>
+                <a:cs typeface="Calibri" pitchFamily="34" charset="-120"/>
+              </a:rPr>
+              <a:t>Comparer une opération de 2 M€ à une de 50 M€ sur leurs montants bruts n'a pas de sens : c'est la structure du budget qui les distingue.</a:t>
+            </a:r>
+            <a:endParaRPr lang="en-US" sz="1400" dirty="0"/>
+          </a:p>
+        </p:txBody>
+      </p:sp>
+      <p:sp>
+        <p:nvSpPr>
+          <p:cNvPr id="5" name="Text 3"/>
+          <p:cNvSpPr/>
+          <p:nvPr/>
+        </p:nvSpPr>
+        <p:spPr>
+          <a:xfrm>
+            <a:off x="548640" y="2240280"/>
+            <a:ext cx="11064240" cy="1737360"/>
+          </a:xfrm>
+          <a:prstGeom prst="rect">
+            <a:avLst/>
+          </a:prstGeom>
+          <a:noFill/>
+          <a:ln/>
+        </p:spPr>
+        <p:txBody>
+          <a:bodyPr wrap="square" lIns="0" tIns="0" rIns="0" bIns="0" rtlCol="0" anchor="t"/>
+          <a:lstStyle/>
+          <a:p>
+            <a:pPr marL="203200" indent="-203200">
+              <a:lnSpc>
+                <a:spcPct val="106000"/>
+              </a:lnSpc>
+              <a:spcAft>
+                <a:spcPts val="1400"/>
+              </a:spcAft>
+              <a:buSzPct val="100000"/>
+              <a:buChar char="•"/>
+            </a:pPr>
+            <a:r>
+              <a:rPr lang="en-US" sz="1500" dirty="0">
+                <a:solidFill>
+                  <a:srgbClr val="1A1A19"/>
+                </a:solidFill>
+                <a:latin typeface="Calibri" pitchFamily="34" charset="0"/>
+                <a:ea typeface="Calibri" pitchFamily="34" charset="-122"/>
+                <a:cs typeface="Calibri" pitchFamily="34" charset="-120"/>
+              </a:rPr>
+              <a:t>ACP (analyse en composantes principales) : 2 axes résument 61 % de la structure des coûts, vérifié par une seconde méthode indépendante (SVD)</a:t>
+            </a:r>
+            <a:endParaRPr lang="en-US" sz="1500" dirty="0"/>
+          </a:p>
+          <a:p>
+            <a:pPr marL="203200" indent="-203200">
+              <a:lnSpc>
+                <a:spcPct val="106000"/>
+              </a:lnSpc>
+              <a:spcAft>
+                <a:spcPts val="1400"/>
+              </a:spcAft>
+              <a:buSzPct val="100000"/>
+              <a:buChar char="•"/>
+            </a:pPr>
+            <a:r>
+              <a:rPr lang="en-US" sz="1500" dirty="0">
+                <a:solidFill>
+                  <a:srgbClr val="1A1A19"/>
+                </a:solidFill>
+                <a:latin typeface="Calibri" pitchFamily="34" charset="0"/>
+                <a:ea typeface="Calibri" pitchFamily="34" charset="-122"/>
+                <a:cs typeface="Calibri" pitchFamily="34" charset="-120"/>
+              </a:rPr>
+              <a:t>Croisée avec une classification non supervisée : 4 familles d'opérations — résidentiel classique, aménagement foncier, promotion sur foncier allégé, aménagement lourd VRD</a:t>
+            </a:r>
+            <a:endParaRPr lang="en-US" sz="1500" dirty="0"/>
+          </a:p>
+        </p:txBody>
+      </p:sp>
+      <p:sp>
+        <p:nvSpPr>
+          <p:cNvPr id="6" name="Shape 4"/>
+          <p:cNvSpPr/>
+          <p:nvPr/>
+        </p:nvSpPr>
+        <p:spPr>
+          <a:xfrm>
+            <a:off x="548640" y="4206240"/>
+            <a:ext cx="5394960" cy="1737360"/>
+          </a:xfrm>
+          <a:prstGeom prst="roundRect">
+            <a:avLst>
+              <a:gd name="adj" fmla="val 4211"/>
+            </a:avLst>
+          </a:prstGeom>
+          <a:solidFill>
+            <a:srgbClr val="FFFFFF"/>
+          </a:solidFill>
+          <a:ln w="12700">
+            <a:solidFill>
+              <a:srgbClr val="E3E7EE"/>
+            </a:solidFill>
+            <a:prstDash val="solid"/>
+          </a:ln>
+          <a:effectLst>
+            <a:outerShdw sx="100000" sy="100000" kx="0" ky="0" algn="bl" rotWithShape="0" blurRad="76200" dist="25400" dir="5400000">
+              <a:srgbClr val="1A1A19">
+                <a:alpha val="12000"/>
+              </a:srgbClr>
+            </a:outerShdw>
+          </a:effectLst>
+        </p:spPr>
+      </p:sp>
+      <p:sp>
+        <p:nvSpPr>
+          <p:cNvPr id="7" name="Text 5"/>
+          <p:cNvSpPr/>
+          <p:nvPr/>
+        </p:nvSpPr>
+        <p:spPr>
+          <a:xfrm>
+            <a:off x="658368" y="4279392"/>
+            <a:ext cx="5175504" cy="1188720"/>
+          </a:xfrm>
+          <a:prstGeom prst="rect">
+            <a:avLst/>
+          </a:prstGeom>
+          <a:noFill/>
+          <a:ln/>
+        </p:spPr>
+        <p:txBody>
+          <a:bodyPr wrap="square" lIns="0" tIns="0" rIns="0" bIns="0" rtlCol="0" anchor="b"/>
+          <a:lstStyle/>
+          <a:p>
+            <a:pPr algn="l" indent="0" marL="0">
+              <a:buNone/>
+            </a:pPr>
+            <a:r>
+              <a:rPr lang="en-US" sz="2800" b="1" dirty="0">
+                <a:solidFill>
+                  <a:srgbClr val="EDA100"/>
+                </a:solidFill>
+                <a:latin typeface="Cambria" pitchFamily="34" charset="0"/>
+                <a:ea typeface="Cambria" pitchFamily="34" charset="-122"/>
+                <a:cs typeface="Cambria" pitchFamily="34" charset="-120"/>
+              </a:rPr>
+              <a:t>61 %</a:t>
+            </a:r>
+            <a:endParaRPr lang="en-US" sz="2800" dirty="0"/>
+          </a:p>
+        </p:txBody>
+      </p:sp>
+      <p:sp>
+        <p:nvSpPr>
+          <p:cNvPr id="8" name="Text 6"/>
+          <p:cNvSpPr/>
+          <p:nvPr/>
+        </p:nvSpPr>
+        <p:spPr>
+          <a:xfrm>
+            <a:off x="658368" y="5504688"/>
+            <a:ext cx="5175504" cy="384048"/>
+          </a:xfrm>
+          <a:prstGeom prst="rect">
+            <a:avLst/>
+          </a:prstGeom>
+          <a:noFill/>
+          <a:ln/>
+        </p:spPr>
+        <p:txBody>
+          <a:bodyPr wrap="square" lIns="0" tIns="0" rIns="0" bIns="0" rtlCol="0" anchor="t"/>
+          <a:lstStyle/>
+          <a:p>
+            <a:pPr algn="l" indent="0" marL="0">
+              <a:buNone/>
+            </a:pPr>
+            <a:r>
+              <a:rPr lang="en-US" sz="1050" dirty="0">
+                <a:solidFill>
+                  <a:srgbClr val="52514E"/>
+                </a:solidFill>
+                <a:latin typeface="Calibri" pitchFamily="34" charset="0"/>
+                <a:ea typeface="Calibri" pitchFamily="34" charset="-122"/>
+                <a:cs typeface="Calibri" pitchFamily="34" charset="-120"/>
+              </a:rPr>
+              <a:t>de la structure des coûts résumée par 2 axes de l'ACP</a:t>
+            </a:r>
+            <a:endParaRPr lang="en-US" sz="1050" dirty="0"/>
+          </a:p>
+        </p:txBody>
+      </p:sp>
+      <p:sp>
+        <p:nvSpPr>
+          <p:cNvPr id="9" name="Shape 7"/>
+          <p:cNvSpPr/>
+          <p:nvPr/>
+        </p:nvSpPr>
+        <p:spPr>
+          <a:xfrm>
+            <a:off x="6217920" y="4206240"/>
+            <a:ext cx="5394960" cy="1737360"/>
+          </a:xfrm>
+          <a:prstGeom prst="roundRect">
+            <a:avLst>
+              <a:gd name="adj" fmla="val 4211"/>
+            </a:avLst>
+          </a:prstGeom>
+          <a:solidFill>
+            <a:srgbClr val="FFFFFF"/>
+          </a:solidFill>
+          <a:ln w="12700">
+            <a:solidFill>
+              <a:srgbClr val="E3E7EE"/>
+            </a:solidFill>
+            <a:prstDash val="solid"/>
+          </a:ln>
+          <a:effectLst>
+            <a:outerShdw sx="100000" sy="100000" kx="0" ky="0" algn="bl" rotWithShape="0" blurRad="76200" dist="25400" dir="5400000">
+              <a:srgbClr val="1A1A19">
+                <a:alpha val="12000"/>
+              </a:srgbClr>
+            </a:outerShdw>
+          </a:effectLst>
+        </p:spPr>
+      </p:sp>
+      <p:sp>
+        <p:nvSpPr>
+          <p:cNvPr id="10" name="Text 8"/>
+          <p:cNvSpPr/>
+          <p:nvPr/>
+        </p:nvSpPr>
+        <p:spPr>
+          <a:xfrm>
+            <a:off x="6327648" y="4279392"/>
+            <a:ext cx="5175504" cy="1188720"/>
+          </a:xfrm>
+          <a:prstGeom prst="rect">
+            <a:avLst/>
+          </a:prstGeom>
+          <a:noFill/>
+          <a:ln/>
+        </p:spPr>
+        <p:txBody>
+          <a:bodyPr wrap="square" lIns="0" tIns="0" rIns="0" bIns="0" rtlCol="0" anchor="b"/>
+          <a:lstStyle/>
+          <a:p>
+            <a:pPr algn="l" indent="0" marL="0">
+              <a:buNone/>
+            </a:pPr>
+            <a:r>
+              <a:rPr lang="en-US" sz="2200" b="1" dirty="0">
+                <a:solidFill>
+                  <a:srgbClr val="4A3AA7"/>
+                </a:solidFill>
+                <a:latin typeface="Cambria" pitchFamily="34" charset="0"/>
+                <a:ea typeface="Cambria" pitchFamily="34" charset="-122"/>
+                <a:cs typeface="Cambria" pitchFamily="34" charset="-120"/>
+              </a:rPr>
+              <a:t>+7,9 % à +11,3 %</a:t>
+            </a:r>
+            <a:endParaRPr lang="en-US" sz="2200" dirty="0"/>
+          </a:p>
+        </p:txBody>
+      </p:sp>
+      <p:sp>
+        <p:nvSpPr>
+          <p:cNvPr id="11" name="Text 9"/>
+          <p:cNvSpPr/>
+          <p:nvPr/>
+        </p:nvSpPr>
+        <p:spPr>
+          <a:xfrm>
+            <a:off x="6327648" y="5504688"/>
+            <a:ext cx="5175504" cy="384048"/>
+          </a:xfrm>
+          <a:prstGeom prst="rect">
+            <a:avLst/>
+          </a:prstGeom>
+          <a:noFill/>
+          <a:ln/>
+        </p:spPr>
+        <p:txBody>
+          <a:bodyPr wrap="square" lIns="0" tIns="0" rIns="0" bIns="0" rtlCol="0" anchor="t"/>
+          <a:lstStyle/>
+          <a:p>
+            <a:pPr algn="l" indent="0" marL="0">
+              <a:buNone/>
+            </a:pPr>
+            <a:r>
+              <a:rPr lang="en-US" sz="1050" dirty="0">
+                <a:solidFill>
+                  <a:srgbClr val="52514E"/>
+                </a:solidFill>
+                <a:latin typeface="Calibri" pitchFamily="34" charset="0"/>
+                <a:ea typeface="Calibri" pitchFamily="34" charset="-122"/>
+                <a:cs typeface="Calibri" pitchFamily="34" charset="-120"/>
+              </a:rPr>
+              <a:t>marges des 5 voisines du Parc des Cyclades (budget +6,5 %)</a:t>
+            </a:r>
+            <a:endParaRPr lang="en-US" sz="1050" dirty="0"/>
+          </a:p>
+        </p:txBody>
+      </p:sp>
+      <p:sp>
+        <p:nvSpPr>
+          <p:cNvPr id="12" name="Text 10"/>
+          <p:cNvSpPr/>
+          <p:nvPr/>
+        </p:nvSpPr>
+        <p:spPr>
+          <a:xfrm>
+            <a:off x="548640" y="6080760"/>
+            <a:ext cx="11064240" cy="365760"/>
+          </a:xfrm>
+          <a:prstGeom prst="rect">
+            <a:avLst/>
+          </a:prstGeom>
+          <a:noFill/>
+          <a:ln/>
+        </p:spPr>
+        <p:txBody>
+          <a:bodyPr wrap="square" lIns="0" tIns="0" rIns="0" bIns="0" rtlCol="0" anchor="ctr"/>
+          <a:lstStyle/>
+          <a:p>
+            <a:pPr indent="0" marL="0">
+              <a:buNone/>
+            </a:pPr>
+            <a:r>
+              <a:rPr lang="en-US" sz="1200" b="1" i="1" dirty="0">
+                <a:solidFill>
+                  <a:srgbClr val="1A1A19"/>
+                </a:solidFill>
+                <a:latin typeface="Calibri" pitchFamily="34" charset="0"/>
+                <a:ea typeface="Calibri" pitchFamily="34" charset="-122"/>
+                <a:cs typeface="Calibri" pitchFamily="34" charset="-120"/>
+              </a:rPr>
+              <a:t>Cette typologie sert directement de comparateur dans l'axe A.</a:t>
+            </a:r>
+            <a:endParaRPr lang="en-US" sz="1200" dirty="0"/>
+          </a:p>
+        </p:txBody>
+      </p:sp>
+      <p:sp>
+        <p:nvSpPr>
+          <p:cNvPr id="13" name="Text 11"/>
+          <p:cNvSpPr/>
+          <p:nvPr/>
+        </p:nvSpPr>
+        <p:spPr>
+          <a:xfrm>
+            <a:off x="548640" y="6510528"/>
+            <a:ext cx="5486400" cy="274320"/>
+          </a:xfrm>
+          <a:prstGeom prst="rect">
+            <a:avLst/>
+          </a:prstGeom>
+          <a:noFill/>
+          <a:ln/>
+        </p:spPr>
+        <p:txBody>
+          <a:bodyPr wrap="square" lIns="0" tIns="0" rIns="0" bIns="0" rtlCol="0" anchor="ctr"/>
+          <a:lstStyle/>
+          <a:p>
+            <a:pPr indent="0" marL="0">
+              <a:buNone/>
+            </a:pPr>
+            <a:r>
+              <a:rPr lang="en-US" sz="900" dirty="0">
+                <a:solidFill>
+                  <a:srgbClr val="9A9A95"/>
+                </a:solidFill>
+                <a:latin typeface="Calibri" pitchFamily="34" charset="0"/>
+                <a:ea typeface="Calibri" pitchFamily="34" charset="-122"/>
+                <a:cs typeface="Calibri" pitchFamily="34" charset="-120"/>
+              </a:rPr>
+              <a:t>Copilote Financier — Groupe Angelotti</a:t>
+            </a:r>
+            <a:endParaRPr lang="en-US" sz="900" dirty="0"/>
+          </a:p>
+        </p:txBody>
+      </p:sp>
+      <p:sp>
+        <p:nvSpPr>
+          <p:cNvPr id="14" name="Text 12"/>
+          <p:cNvSpPr/>
+          <p:nvPr/>
+        </p:nvSpPr>
+        <p:spPr>
+          <a:xfrm>
+            <a:off x="11430000" y="6510528"/>
+            <a:ext cx="365760" cy="274320"/>
+          </a:xfrm>
+          <a:prstGeom prst="rect">
+            <a:avLst/>
+          </a:prstGeom>
+          <a:noFill/>
+          <a:ln/>
+        </p:spPr>
+        <p:txBody>
+          <a:bodyPr wrap="square" lIns="0" tIns="0" rIns="0" bIns="0" rtlCol="0" anchor="ctr"/>
+          <a:lstStyle/>
+          <a:p>
+            <a:pPr algn="r" indent="0" marL="0">
+              <a:buNone/>
+            </a:pPr>
+            <a:r>
+              <a:rPr lang="en-US" sz="900" dirty="0">
+                <a:solidFill>
+                  <a:srgbClr val="9A9A95"/>
+                </a:solidFill>
+                <a:latin typeface="Calibri" pitchFamily="34" charset="0"/>
+                <a:ea typeface="Calibri" pitchFamily="34" charset="-122"/>
+                <a:cs typeface="Calibri" pitchFamily="34" charset="-120"/>
+              </a:rPr>
+              <a:t>10</a:t>
+            </a:r>
+            <a:endParaRPr lang="en-US" sz="900" dirty="0"/>
+          </a:p>
+        </p:txBody>
+      </p:sp>
+    </p:spTree>
+  </p:cSld>
+  <p:clrMapOvr>
+    <a:masterClrMapping/>
+  </p:clrMapOvr>
+</p:sld>
+</file>
+
+<file path=ppt/slides/slide11.xml><?xml version="1.0" encoding="utf-8"?>
+<p:sld xmlns:a="http://schemas.openxmlformats.org/drawingml/2006/main" xmlns:r="http://schemas.openxmlformats.org/officeDocument/2006/relationships" xmlns:p="http://schemas.openxmlformats.org/presentationml/2006/main">
+  <p:cSld name="Slide 11">
+    <p:bg>
+      <p:bgPr>
+        <a:solidFill>
+          <a:srgbClr val="FFFFFF"/>
+        </a:solidFill>
+      </p:bgPr>
+    </p:bg>
+    <p:spTree>
+      <p:nvGrpSpPr>
+        <p:cNvPr id="1" name=""/>
+        <p:cNvGrpSpPr/>
+        <p:nvPr/>
+      </p:nvGrpSpPr>
+      <p:grpSpPr>
+        <a:xfrm>
+          <a:off x="0" y="0"/>
+          <a:ext cx="0" cy="0"/>
+          <a:chOff x="0" y="0"/>
+          <a:chExt cx="0" cy="0"/>
+        </a:xfrm>
+      </p:grpSpPr>
+      <p:sp>
+        <p:nvSpPr>
+          <p:cNvPr id="2" name="Text 0"/>
+          <p:cNvSpPr/>
+          <p:nvPr/>
+        </p:nvSpPr>
+        <p:spPr>
+          <a:xfrm>
+            <a:off x="548640" y="384048"/>
+            <a:ext cx="8229600" cy="320040"/>
+          </a:xfrm>
+          <a:prstGeom prst="rect">
+            <a:avLst/>
+          </a:prstGeom>
+          <a:noFill/>
+          <a:ln/>
+        </p:spPr>
+        <p:txBody>
+          <a:bodyPr wrap="square" lIns="0" tIns="0" rIns="0" bIns="0" rtlCol="0" anchor="ctr"/>
+          <a:lstStyle/>
+          <a:p>
+            <a:pPr indent="0" marL="0">
+              <a:buNone/>
+            </a:pPr>
+            <a:r>
+              <a:rPr lang="en-US" sz="1200" b="1" spc="200" kern="0" dirty="0">
+                <a:solidFill>
                   <a:srgbClr val="2A78D6"/>
                 </a:solidFill>
                 <a:latin typeface="Calibri" pitchFamily="34" charset="0"/>
@@ -2660,7 +3309,7 @@
                 <a:ea typeface="Calibri" pitchFamily="34" charset="-122"/>
                 <a:cs typeface="Calibri" pitchFamily="34" charset="-120"/>
               </a:rPr>
-              <a:t>ACP : 2 axes résument 61 % de la structure des coûts (vérifié par SVD) → typologie de 4 familles, comparateur d'opérations (ex. Le Parc des Cyclades)</a:t>
+              <a:t>Avec la typologie construite juste avant, comparaison de six méthodes de classification</a:t>
             </a:r>
             <a:endParaRPr lang="en-US" sz="1200" dirty="0"/>
           </a:p>
@@ -2825,7 +3474,7 @@
       </p:sp>
       <p:graphicFrame>
         <p:nvGraphicFramePr>
-          <p:cNvPr id="11" name="Table 0"/>
+          <p:cNvPr id="12" name="Table 0"/>
           <p:cNvGraphicFramePr>
             <a:graphicFrameLocks noGrp="1"/>
           </p:cNvGraphicFramePr>
@@ -3791,647 +4440,6 @@
                 <a:ea typeface="Calibri" pitchFamily="34" charset="-122"/>
                 <a:cs typeface="Calibri" pitchFamily="34" charset="-120"/>
               </a:rPr>
-              <a:t>10</a:t>
-            </a:r>
-            <a:endParaRPr lang="en-US" sz="900" dirty="0"/>
-          </a:p>
-        </p:txBody>
-      </p:sp>
-    </p:spTree>
-  </p:cSld>
-  <p:clrMapOvr>
-    <a:masterClrMapping/>
-  </p:clrMapOvr>
-</p:sld>
-</file>
-
-<file path=ppt/slides/slide11.xml><?xml version="1.0" encoding="utf-8"?>
-<p:sld xmlns:a="http://schemas.openxmlformats.org/drawingml/2006/main" xmlns:r="http://schemas.openxmlformats.org/officeDocument/2006/relationships" xmlns:p="http://schemas.openxmlformats.org/presentationml/2006/main">
-  <p:cSld name="Slide 11">
-    <p:bg>
-      <p:bgPr>
-        <a:solidFill>
-          <a:srgbClr val="FFFFFF"/>
-        </a:solidFill>
-      </p:bgPr>
-    </p:bg>
-    <p:spTree>
-      <p:nvGrpSpPr>
-        <p:cNvPr id="1" name=""/>
-        <p:cNvGrpSpPr/>
-        <p:nvPr/>
-      </p:nvGrpSpPr>
-      <p:grpSpPr>
-        <a:xfrm>
-          <a:off x="0" y="0"/>
-          <a:ext cx="0" cy="0"/>
-          <a:chOff x="0" y="0"/>
-          <a:chExt cx="0" cy="0"/>
-        </a:xfrm>
-      </p:grpSpPr>
-      <p:sp>
-        <p:nvSpPr>
-          <p:cNvPr id="2" name="Text 0"/>
-          <p:cNvSpPr/>
-          <p:nvPr/>
-        </p:nvSpPr>
-        <p:spPr>
-          <a:xfrm>
-            <a:off x="548640" y="384048"/>
-            <a:ext cx="8229600" cy="320040"/>
-          </a:xfrm>
-          <a:prstGeom prst="rect">
-            <a:avLst/>
-          </a:prstGeom>
-          <a:noFill/>
-          <a:ln/>
-        </p:spPr>
-        <p:txBody>
-          <a:bodyPr wrap="square" lIns="0" tIns="0" rIns="0" bIns="0" rtlCol="0" anchor="ctr"/>
-          <a:lstStyle/>
-          <a:p>
-            <a:pPr indent="0" marL="0">
-              <a:buNone/>
-            </a:pPr>
-            <a:r>
-              <a:rPr lang="en-US" sz="1200" b="1" spc="200" kern="0" dirty="0">
-                <a:solidFill>
-                  <a:srgbClr val="1BAF7A"/>
-                </a:solidFill>
-                <a:latin typeface="Calibri" pitchFamily="34" charset="0"/>
-                <a:ea typeface="Calibri" pitchFamily="34" charset="-122"/>
-                <a:cs typeface="Calibri" pitchFamily="34" charset="-120"/>
-              </a:rPr>
-              <a:t>COPILOTE FINANCIER — AXE B</a:t>
-            </a:r>
-            <a:endParaRPr lang="en-US" sz="1200" dirty="0"/>
-          </a:p>
-        </p:txBody>
-      </p:sp>
-      <p:sp>
-        <p:nvSpPr>
-          <p:cNvPr id="3" name="Text 1"/>
-          <p:cNvSpPr/>
-          <p:nvPr/>
-        </p:nvSpPr>
-        <p:spPr>
-          <a:xfrm>
-            <a:off x="548640" y="658368"/>
-            <a:ext cx="7315200" cy="822960"/>
-          </a:xfrm>
-          <a:prstGeom prst="rect">
-            <a:avLst/>
-          </a:prstGeom>
-          <a:noFill/>
-          <a:ln/>
-        </p:spPr>
-        <p:txBody>
-          <a:bodyPr wrap="square" lIns="0" tIns="0" rIns="0" bIns="0" rtlCol="0" anchor="ctr"/>
-          <a:lstStyle/>
-          <a:p>
-            <a:pPr indent="0" marL="0">
-              <a:buNone/>
-            </a:pPr>
-            <a:r>
-              <a:rPr lang="en-US" sz="2800" b="1" dirty="0">
-                <a:solidFill>
-                  <a:srgbClr val="1A1A19"/>
-                </a:solidFill>
-                <a:latin typeface="Cambria" pitchFamily="34" charset="0"/>
-                <a:ea typeface="Cambria" pitchFamily="34" charset="-122"/>
-                <a:cs typeface="Cambria" pitchFamily="34" charset="-120"/>
-              </a:rPr>
-              <a:t>La vitesse d'écoulement</a:t>
-            </a:r>
-            <a:endParaRPr lang="en-US" sz="2800" dirty="0"/>
-          </a:p>
-        </p:txBody>
-      </p:sp>
-      <p:sp>
-        <p:nvSpPr>
-          <p:cNvPr id="4" name="Text 2"/>
-          <p:cNvSpPr/>
-          <p:nvPr/>
-        </p:nvSpPr>
-        <p:spPr>
-          <a:xfrm>
-            <a:off x="548640" y="1600200"/>
-            <a:ext cx="6309360" cy="3108960"/>
-          </a:xfrm>
-          <a:prstGeom prst="rect">
-            <a:avLst/>
-          </a:prstGeom>
-          <a:noFill/>
-          <a:ln/>
-        </p:spPr>
-        <p:txBody>
-          <a:bodyPr wrap="square" lIns="0" tIns="0" rIns="0" bIns="0" rtlCol="0" anchor="t"/>
-          <a:lstStyle/>
-          <a:p>
-            <a:pPr marL="203200" indent="-203200">
-              <a:lnSpc>
-                <a:spcPct val="106000"/>
-              </a:lnSpc>
-              <a:spcAft>
-                <a:spcPts val="1300"/>
-              </a:spcAft>
-              <a:buSzPct val="100000"/>
-              <a:buChar char="•"/>
-            </a:pPr>
-            <a:r>
-              <a:rPr lang="en-US" sz="1400" dirty="0">
-                <a:solidFill>
-                  <a:srgbClr val="1A1A19"/>
-                </a:solidFill>
-                <a:latin typeface="Calibri" pitchFamily="34" charset="0"/>
-                <a:ea typeface="Calibri" pitchFamily="34" charset="-122"/>
-                <a:cs typeface="Calibri" pitchFamily="34" charset="-120"/>
-              </a:rPr>
-              <a:t>Panel de 3 230 observations (opération × mois) — modèle à effets aléatoires</a:t>
-            </a:r>
-            <a:endParaRPr lang="en-US" sz="1400" dirty="0"/>
-          </a:p>
-          <a:p>
-            <a:pPr marL="203200" indent="-203200">
-              <a:lnSpc>
-                <a:spcPct val="106000"/>
-              </a:lnSpc>
-              <a:spcAft>
-                <a:spcPts val="1300"/>
-              </a:spcAft>
-              <a:buSzPct val="100000"/>
-              <a:buChar char="•"/>
-            </a:pPr>
-            <a:r>
-              <a:rPr lang="en-US" sz="1400" dirty="0">
-                <a:solidFill>
-                  <a:srgbClr val="1A1A19"/>
-                </a:solidFill>
-                <a:latin typeface="Calibri" pitchFamily="34" charset="0"/>
-                <a:ea typeface="Calibri" pitchFamily="34" charset="-122"/>
-                <a:cs typeface="Calibri" pitchFamily="34" charset="-120"/>
-              </a:rPr>
-              <a:t>2/3 de la variance = effet propre à l'opération, 1/3 = conjoncture</a:t>
-            </a:r>
-            <a:endParaRPr lang="en-US" sz="1400" dirty="0"/>
-          </a:p>
-          <a:p>
-            <a:pPr marL="203200" indent="-203200">
-              <a:lnSpc>
-                <a:spcPct val="106000"/>
-              </a:lnSpc>
-              <a:spcAft>
-                <a:spcPts val="1300"/>
-              </a:spcAft>
-              <a:buSzPct val="100000"/>
-              <a:buChar char="•"/>
-            </a:pPr>
-            <a:r>
-              <a:rPr lang="en-US" sz="1400" dirty="0">
-                <a:solidFill>
-                  <a:srgbClr val="1A1A19"/>
-                </a:solidFill>
-                <a:latin typeface="Calibri" pitchFamily="34" charset="0"/>
-                <a:ea typeface="Calibri" pitchFamily="34" charset="-122"/>
-                <a:cs typeface="Calibri" pitchFamily="34" charset="-120"/>
-              </a:rPr>
-              <a:t>Contrôle par série temporelle : effet du taux non identifiable isolément — validation méthodologique, pas un échec</a:t>
-            </a:r>
-            <a:endParaRPr lang="en-US" sz="1400" dirty="0"/>
-          </a:p>
-        </p:txBody>
-      </p:sp>
-      <p:sp>
-        <p:nvSpPr>
-          <p:cNvPr id="5" name="Shape 3"/>
-          <p:cNvSpPr/>
-          <p:nvPr/>
-        </p:nvSpPr>
-        <p:spPr>
-          <a:xfrm>
-            <a:off x="7013448" y="1618488"/>
-            <a:ext cx="4672584" cy="1956816"/>
-          </a:xfrm>
-          <a:prstGeom prst="roundRect">
-            <a:avLst>
-              <a:gd name="adj" fmla="val 2804"/>
-            </a:avLst>
-          </a:prstGeom>
-          <a:solidFill>
-            <a:srgbClr val="FFFFFF"/>
-          </a:solidFill>
-          <a:ln w="12700">
-            <a:solidFill>
-              <a:srgbClr val="E3E7EE"/>
-            </a:solidFill>
-            <a:prstDash val="solid"/>
-          </a:ln>
-          <a:effectLst>
-            <a:outerShdw sx="100000" sy="100000" kx="0" ky="0" algn="bl" rotWithShape="0" blurRad="101600" dist="25400" dir="5400000">
-              <a:srgbClr val="1A1A19">
-                <a:alpha val="15000"/>
-              </a:srgbClr>
-            </a:outerShdw>
-          </a:effectLst>
-        </p:spPr>
-      </p:sp>
-      <p:pic>
-        <p:nvPicPr>
-          <p:cNvPr id="6" name="Image 0" descr="/tmp/claude-0/-home-user-MemoireM2S2/bac073a6-7c4e-552a-9627-815aeb6fe82a/scratchpad/figs/p28-000.png">    </p:cNvPr>
-          <p:cNvPicPr>
-            <a:picLocks noChangeAspect="1"/>
-          </p:cNvPicPr>
-          <p:nvPr/>
-        </p:nvPicPr>
-        <p:blipFill>
-          <a:blip r:embed="rId1"/>
-          <a:srcRect l="0" r="0" t="0" b="0"/>
-          <a:stretch/>
-        </p:blipFill>
-        <p:spPr>
-          <a:xfrm>
-            <a:off x="7086600" y="1691640"/>
-            <a:ext cx="4526280" cy="1810512"/>
-          </a:xfrm>
-          <a:prstGeom prst="rect">
-            <a:avLst/>
-          </a:prstGeom>
-        </p:spPr>
-      </p:pic>
-      <p:sp>
-        <p:nvSpPr>
-          <p:cNvPr id="7" name="Text 4"/>
-          <p:cNvSpPr/>
-          <p:nvPr/>
-        </p:nvSpPr>
-        <p:spPr>
-          <a:xfrm>
-            <a:off x="7086600" y="3529584"/>
-            <a:ext cx="4526280" cy="411480"/>
-          </a:xfrm>
-          <a:prstGeom prst="rect">
-            <a:avLst/>
-          </a:prstGeom>
-          <a:noFill/>
-          <a:ln/>
-        </p:spPr>
-        <p:txBody>
-          <a:bodyPr wrap="square" lIns="0" tIns="0" rIns="0" bIns="0" rtlCol="0" anchor="ctr"/>
-          <a:lstStyle/>
-          <a:p>
-            <a:pPr indent="0" marL="0">
-              <a:buNone/>
-            </a:pPr>
-            <a:r>
-              <a:rPr lang="en-US" sz="950" i="1" dirty="0">
-                <a:solidFill>
-                  <a:srgbClr val="52514E"/>
-                </a:solidFill>
-                <a:latin typeface="Calibri" pitchFamily="34" charset="0"/>
-                <a:ea typeface="Calibri" pitchFamily="34" charset="-122"/>
-                <a:cs typeface="Calibri" pitchFamily="34" charset="-120"/>
-              </a:rPr>
-              <a:t>Fig. — Scénarios de taux 2026 : trajectoire ARIMA combinée à l'élasticité du panel</a:t>
-            </a:r>
-            <a:endParaRPr lang="en-US" sz="950" dirty="0"/>
-          </a:p>
-        </p:txBody>
-      </p:sp>
-      <p:sp>
-        <p:nvSpPr>
-          <p:cNvPr id="8" name="Shape 5"/>
-          <p:cNvSpPr/>
-          <p:nvPr/>
-        </p:nvSpPr>
-        <p:spPr>
-          <a:xfrm>
-            <a:off x="7086600" y="4251960"/>
-            <a:ext cx="2148840" cy="1417320"/>
-          </a:xfrm>
-          <a:prstGeom prst="roundRect">
-            <a:avLst>
-              <a:gd name="adj" fmla="val 5161"/>
-            </a:avLst>
-          </a:prstGeom>
-          <a:solidFill>
-            <a:srgbClr val="FFFFFF"/>
-          </a:solidFill>
-          <a:ln w="12700">
-            <a:solidFill>
-              <a:srgbClr val="E3E7EE"/>
-            </a:solidFill>
-            <a:prstDash val="solid"/>
-          </a:ln>
-          <a:effectLst>
-            <a:outerShdw sx="100000" sy="100000" kx="0" ky="0" algn="bl" rotWithShape="0" blurRad="76200" dist="25400" dir="5400000">
-              <a:srgbClr val="1A1A19">
-                <a:alpha val="12000"/>
-              </a:srgbClr>
-            </a:outerShdw>
-          </a:effectLst>
-        </p:spPr>
-      </p:sp>
-      <p:sp>
-        <p:nvSpPr>
-          <p:cNvPr id="9" name="Text 6"/>
-          <p:cNvSpPr/>
-          <p:nvPr/>
-        </p:nvSpPr>
-        <p:spPr>
-          <a:xfrm>
-            <a:off x="7196328" y="4325112"/>
-            <a:ext cx="1929384" cy="868680"/>
-          </a:xfrm>
-          <a:prstGeom prst="rect">
-            <a:avLst/>
-          </a:prstGeom>
-          <a:noFill/>
-          <a:ln/>
-        </p:spPr>
-        <p:txBody>
-          <a:bodyPr wrap="square" lIns="0" tIns="0" rIns="0" bIns="0" rtlCol="0" anchor="b"/>
-          <a:lstStyle/>
-          <a:p>
-            <a:pPr algn="l" indent="0" marL="0">
-              <a:buNone/>
-            </a:pPr>
-            <a:r>
-              <a:rPr lang="en-US" sz="2800" b="1" dirty="0">
-                <a:solidFill>
-                  <a:srgbClr val="1BAF7A"/>
-                </a:solidFill>
-                <a:latin typeface="Cambria" pitchFamily="34" charset="0"/>
-                <a:ea typeface="Cambria" pitchFamily="34" charset="-122"/>
-                <a:cs typeface="Cambria" pitchFamily="34" charset="-120"/>
-              </a:rPr>
-              <a:t>−19 %</a:t>
-            </a:r>
-            <a:endParaRPr lang="en-US" sz="2800" dirty="0"/>
-          </a:p>
-        </p:txBody>
-      </p:sp>
-      <p:sp>
-        <p:nvSpPr>
-          <p:cNvPr id="10" name="Text 7"/>
-          <p:cNvSpPr/>
-          <p:nvPr/>
-        </p:nvSpPr>
-        <p:spPr>
-          <a:xfrm>
-            <a:off x="7196328" y="5230368"/>
-            <a:ext cx="1929384" cy="384048"/>
-          </a:xfrm>
-          <a:prstGeom prst="rect">
-            <a:avLst/>
-          </a:prstGeom>
-          <a:noFill/>
-          <a:ln/>
-        </p:spPr>
-        <p:txBody>
-          <a:bodyPr wrap="square" lIns="0" tIns="0" rIns="0" bIns="0" rtlCol="0" anchor="t"/>
-          <a:lstStyle/>
-          <a:p>
-            <a:pPr algn="l" indent="0" marL="0">
-              <a:buNone/>
-            </a:pPr>
-            <a:r>
-              <a:rPr lang="en-US" sz="1050" dirty="0">
-                <a:solidFill>
-                  <a:srgbClr val="52514E"/>
-                </a:solidFill>
-                <a:latin typeface="Calibri" pitchFamily="34" charset="0"/>
-                <a:ea typeface="Calibri" pitchFamily="34" charset="-122"/>
-                <a:cs typeface="Calibri" pitchFamily="34" charset="-120"/>
-              </a:rPr>
-              <a:t>de réservations par point de taux en plus</a:t>
-            </a:r>
-            <a:endParaRPr lang="en-US" sz="1050" dirty="0"/>
-          </a:p>
-        </p:txBody>
-      </p:sp>
-      <p:sp>
-        <p:nvSpPr>
-          <p:cNvPr id="11" name="Shape 8"/>
-          <p:cNvSpPr/>
-          <p:nvPr/>
-        </p:nvSpPr>
-        <p:spPr>
-          <a:xfrm>
-            <a:off x="9464040" y="4251960"/>
-            <a:ext cx="2148840" cy="1417320"/>
-          </a:xfrm>
-          <a:prstGeom prst="roundRect">
-            <a:avLst>
-              <a:gd name="adj" fmla="val 5161"/>
-            </a:avLst>
-          </a:prstGeom>
-          <a:solidFill>
-            <a:srgbClr val="FFFFFF"/>
-          </a:solidFill>
-          <a:ln w="12700">
-            <a:solidFill>
-              <a:srgbClr val="E3E7EE"/>
-            </a:solidFill>
-            <a:prstDash val="solid"/>
-          </a:ln>
-          <a:effectLst>
-            <a:outerShdw sx="100000" sy="100000" kx="0" ky="0" algn="bl" rotWithShape="0" blurRad="76200" dist="25400" dir="5400000">
-              <a:srgbClr val="1A1A19">
-                <a:alpha val="12000"/>
-              </a:srgbClr>
-            </a:outerShdw>
-          </a:effectLst>
-        </p:spPr>
-      </p:sp>
-      <p:sp>
-        <p:nvSpPr>
-          <p:cNvPr id="12" name="Text 9"/>
-          <p:cNvSpPr/>
-          <p:nvPr/>
-        </p:nvSpPr>
-        <p:spPr>
-          <a:xfrm>
-            <a:off x="9573768" y="4325112"/>
-            <a:ext cx="1929384" cy="868680"/>
-          </a:xfrm>
-          <a:prstGeom prst="rect">
-            <a:avLst/>
-          </a:prstGeom>
-          <a:noFill/>
-          <a:ln/>
-        </p:spPr>
-        <p:txBody>
-          <a:bodyPr wrap="square" lIns="0" tIns="0" rIns="0" bIns="0" rtlCol="0" anchor="b"/>
-          <a:lstStyle/>
-          <a:p>
-            <a:pPr algn="l" indent="0" marL="0">
-              <a:buNone/>
-            </a:pPr>
-            <a:r>
-              <a:rPr lang="en-US" sz="2800" b="1" dirty="0">
-                <a:solidFill>
-                  <a:srgbClr val="2A78D6"/>
-                </a:solidFill>
-                <a:latin typeface="Cambria" pitchFamily="34" charset="0"/>
-                <a:ea typeface="Cambria" pitchFamily="34" charset="-122"/>
-                <a:cs typeface="Cambria" pitchFamily="34" charset="-120"/>
-              </a:rPr>
-              <a:t>20 mois</a:t>
-            </a:r>
-            <a:endParaRPr lang="en-US" sz="2800" dirty="0"/>
-          </a:p>
-        </p:txBody>
-      </p:sp>
-      <p:sp>
-        <p:nvSpPr>
-          <p:cNvPr id="13" name="Text 10"/>
-          <p:cNvSpPr/>
-          <p:nvPr/>
-        </p:nvSpPr>
-        <p:spPr>
-          <a:xfrm>
-            <a:off x="9573768" y="5230368"/>
-            <a:ext cx="1929384" cy="384048"/>
-          </a:xfrm>
-          <a:prstGeom prst="rect">
-            <a:avLst/>
-          </a:prstGeom>
-          <a:noFill/>
-          <a:ln/>
-        </p:spPr>
-        <p:txBody>
-          <a:bodyPr wrap="square" lIns="0" tIns="0" rIns="0" bIns="0" rtlCol="0" anchor="t"/>
-          <a:lstStyle/>
-          <a:p>
-            <a:pPr algn="l" indent="0" marL="0">
-              <a:buNone/>
-            </a:pPr>
-            <a:r>
-              <a:rPr lang="en-US" sz="1050" dirty="0">
-                <a:solidFill>
-                  <a:srgbClr val="52514E"/>
-                </a:solidFill>
-                <a:latin typeface="Calibri" pitchFamily="34" charset="0"/>
-                <a:ea typeface="Calibri" pitchFamily="34" charset="-122"/>
-                <a:cs typeface="Calibri" pitchFamily="34" charset="-120"/>
-              </a:rPr>
-              <a:t>délai médian pour 90 % du potentiel vendu</a:t>
-            </a:r>
-            <a:endParaRPr lang="en-US" sz="1050" dirty="0"/>
-          </a:p>
-        </p:txBody>
-      </p:sp>
-      <p:sp>
-        <p:nvSpPr>
-          <p:cNvPr id="14" name="Text 11"/>
-          <p:cNvSpPr/>
-          <p:nvPr/>
-        </p:nvSpPr>
-        <p:spPr>
-          <a:xfrm>
-            <a:off x="548640" y="5852160"/>
-            <a:ext cx="6309360" cy="365760"/>
-          </a:xfrm>
-          <a:prstGeom prst="rect">
-            <a:avLst/>
-          </a:prstGeom>
-          <a:noFill/>
-          <a:ln/>
-        </p:spPr>
-        <p:txBody>
-          <a:bodyPr wrap="square" lIns="0" tIns="0" rIns="0" bIns="0" rtlCol="0" anchor="ctr"/>
-          <a:lstStyle/>
-          <a:p>
-            <a:pPr indent="0" marL="0">
-              <a:buNone/>
-            </a:pPr>
-            <a:r>
-              <a:rPr lang="en-US" sz="1200" b="1" i="1" dirty="0">
-                <a:solidFill>
-                  <a:srgbClr val="1BAF7A"/>
-                </a:solidFill>
-                <a:latin typeface="Calibri" pitchFamily="34" charset="0"/>
-                <a:ea typeface="Calibri" pitchFamily="34" charset="-122"/>
-                <a:cs typeface="Calibri" pitchFamily="34" charset="-120"/>
-              </a:rPr>
-              <a:t>Axe le plus solide du projet.</a:t>
-            </a:r>
-            <a:endParaRPr lang="en-US" sz="1200" dirty="0"/>
-          </a:p>
-        </p:txBody>
-      </p:sp>
-      <p:sp>
-        <p:nvSpPr>
-          <p:cNvPr id="15" name="Text 12"/>
-          <p:cNvSpPr/>
-          <p:nvPr/>
-        </p:nvSpPr>
-        <p:spPr>
-          <a:xfrm>
-            <a:off x="548640" y="6510528"/>
-            <a:ext cx="5486400" cy="274320"/>
-          </a:xfrm>
-          <a:prstGeom prst="rect">
-            <a:avLst/>
-          </a:prstGeom>
-          <a:noFill/>
-          <a:ln/>
-        </p:spPr>
-        <p:txBody>
-          <a:bodyPr wrap="square" lIns="0" tIns="0" rIns="0" bIns="0" rtlCol="0" anchor="ctr"/>
-          <a:lstStyle/>
-          <a:p>
-            <a:pPr indent="0" marL="0">
-              <a:buNone/>
-            </a:pPr>
-            <a:r>
-              <a:rPr lang="en-US" sz="900" dirty="0">
-                <a:solidFill>
-                  <a:srgbClr val="9A9A95"/>
-                </a:solidFill>
-                <a:latin typeface="Calibri" pitchFamily="34" charset="0"/>
-                <a:ea typeface="Calibri" pitchFamily="34" charset="-122"/>
-                <a:cs typeface="Calibri" pitchFamily="34" charset="-120"/>
-              </a:rPr>
-              <a:t>Copilote Financier — Groupe Angelotti</a:t>
-            </a:r>
-            <a:endParaRPr lang="en-US" sz="900" dirty="0"/>
-          </a:p>
-        </p:txBody>
-      </p:sp>
-      <p:sp>
-        <p:nvSpPr>
-          <p:cNvPr id="16" name="Text 13"/>
-          <p:cNvSpPr/>
-          <p:nvPr/>
-        </p:nvSpPr>
-        <p:spPr>
-          <a:xfrm>
-            <a:off x="11430000" y="6510528"/>
-            <a:ext cx="365760" cy="274320"/>
-          </a:xfrm>
-          <a:prstGeom prst="rect">
-            <a:avLst/>
-          </a:prstGeom>
-          <a:noFill/>
-          <a:ln/>
-        </p:spPr>
-        <p:txBody>
-          <a:bodyPr wrap="square" lIns="0" tIns="0" rIns="0" bIns="0" rtlCol="0" anchor="ctr"/>
-          <a:lstStyle/>
-          <a:p>
-            <a:pPr algn="r" indent="0" marL="0">
-              <a:buNone/>
-            </a:pPr>
-            <a:r>
-              <a:rPr lang="en-US" sz="900" dirty="0">
-                <a:solidFill>
-                  <a:srgbClr val="9A9A95"/>
-                </a:solidFill>
-                <a:latin typeface="Calibri" pitchFamily="34" charset="0"/>
-                <a:ea typeface="Calibri" pitchFamily="34" charset="-122"/>
-                <a:cs typeface="Calibri" pitchFamily="34" charset="-120"/>
-              </a:rPr>
               <a:t>11</a:t>
             </a:r>
             <a:endParaRPr lang="en-US" sz="900" dirty="0"/>
@@ -4497,13 +4505,13 @@
             <a:r>
               <a:rPr lang="en-US" sz="1200" b="1" spc="200" kern="0" dirty="0">
                 <a:solidFill>
-                  <a:srgbClr val="4A3AA7"/>
+                  <a:srgbClr val="1BAF7A"/>
                 </a:solidFill>
                 <a:latin typeface="Calibri" pitchFamily="34" charset="0"/>
                 <a:ea typeface="Calibri" pitchFamily="34" charset="-122"/>
                 <a:cs typeface="Calibri" pitchFamily="34" charset="-120"/>
               </a:rPr>
-              <a:t>COPILOTE FINANCIER — AXE C</a:t>
+              <a:t>COPILOTE FINANCIER — AXE B</a:t>
             </a:r>
             <a:endParaRPr lang="en-US" sz="1200" dirty="0"/>
           </a:p>
@@ -4518,7 +4526,7 @@
         <p:spPr>
           <a:xfrm>
             <a:off x="548640" y="658368"/>
-            <a:ext cx="10058400" cy="822960"/>
+            <a:ext cx="7315200" cy="822960"/>
           </a:xfrm>
           <a:prstGeom prst="rect">
             <a:avLst/>
@@ -4542,7 +4550,7 @@
                 <a:ea typeface="Cambria" pitchFamily="34" charset="-122"/>
                 <a:cs typeface="Cambria" pitchFamily="34" charset="-120"/>
               </a:rPr>
-              <a:t>L'optimisation des prix</a:t>
+              <a:t>La vitesse d'écoulement</a:t>
             </a:r>
             <a:endParaRPr lang="en-US" sz="2800" dirty="0"/>
           </a:p>
@@ -4556,8 +4564,8 @@
         </p:nvSpPr>
         <p:spPr>
           <a:xfrm>
-            <a:off x="548640" y="1691640"/>
-            <a:ext cx="6492240" cy="4572000"/>
+            <a:off x="548640" y="1600200"/>
+            <a:ext cx="6309360" cy="3108960"/>
           </a:xfrm>
           <a:prstGeom prst="rect">
             <a:avLst/>
@@ -4574,13 +4582,13 @@
                 <a:spcPct val="106000"/>
               </a:lnSpc>
               <a:spcAft>
-                <a:spcPts val="1200"/>
+                <a:spcPts val="1300"/>
               </a:spcAft>
               <a:buSzPct val="100000"/>
               <a:buChar char="•"/>
             </a:pPr>
             <a:r>
-              <a:rPr lang="en-US" sz="1300" dirty="0">
+              <a:rPr lang="en-US" sz="1400" dirty="0">
                 <a:solidFill>
                   <a:srgbClr val="1A1A19"/>
                 </a:solidFill>
@@ -4588,9 +4596,9 @@
                 <a:ea typeface="Calibri" pitchFamily="34" charset="-122"/>
                 <a:cs typeface="Calibri" pitchFamily="34" charset="-120"/>
               </a:rPr>
-              <a:t>Modèle hédonique sur 5 064 appartements vendus depuis 2016 — primes cohérentes (étage +6,0 %, sud +2,6 %, social −62,8 %, millésime +19-21 %)</a:t>
-            </a:r>
-            <a:endParaRPr lang="en-US" sz="1300" dirty="0"/>
+              <a:t>Panel de 3 230 observations (opération × mois) — modèle à effets aléatoires</a:t>
+            </a:r>
+            <a:endParaRPr lang="en-US" sz="1400" dirty="0"/>
           </a:p>
           <a:p>
             <a:pPr marL="203200" indent="-203200">
@@ -4598,13 +4606,13 @@
                 <a:spcPct val="106000"/>
               </a:lnSpc>
               <a:spcAft>
-                <a:spcPts val="1200"/>
+                <a:spcPts val="1300"/>
               </a:spcAft>
               <a:buSzPct val="100000"/>
               <a:buChar char="•"/>
             </a:pPr>
             <a:r>
-              <a:rPr lang="en-US" sz="1300" dirty="0">
+              <a:rPr lang="en-US" sz="1400" dirty="0">
                 <a:solidFill>
                   <a:srgbClr val="1A1A19"/>
                 </a:solidFill>
@@ -4612,9 +4620,9 @@
                 <a:ea typeface="Calibri" pitchFamily="34" charset="-122"/>
                 <a:cs typeface="Calibri" pitchFamily="34" charset="-120"/>
               </a:rPr>
-              <a:t>Élasticité non significative en interne (p = 0,57) → fixée prudemment à −1, documentée plutôt que masquée</a:t>
-            </a:r>
-            <a:endParaRPr lang="en-US" sz="1300" dirty="0"/>
+              <a:t>2/3 de la variance = effet propre à l'opération, 1/3 = conjoncture</a:t>
+            </a:r>
+            <a:endParaRPr lang="en-US" sz="1400" dirty="0"/>
           </a:p>
           <a:p>
             <a:pPr marL="203200" indent="-203200">
@@ -4622,13 +4630,13 @@
                 <a:spcPct val="106000"/>
               </a:lnSpc>
               <a:spcAft>
-                <a:spcPts val="1200"/>
+                <a:spcPts val="1300"/>
               </a:spcAft>
               <a:buSzPct val="100000"/>
               <a:buChar char="•"/>
             </a:pPr>
             <a:r>
-              <a:rPr lang="en-US" sz="1300" dirty="0">
+              <a:rPr lang="en-US" sz="1400" dirty="0">
                 <a:solidFill>
                   <a:srgbClr val="1A1A19"/>
                 </a:solidFill>
@@ -4636,50 +4644,122 @@
                 <a:ea typeface="Calibri" pitchFamily="34" charset="-122"/>
                 <a:cs typeface="Calibri" pitchFamily="34" charset="-120"/>
               </a:rPr>
-              <a:t>Optimisation par multiplicateur de Lagrange, vérifiée par un second solveur indépendant (SLSQP) — convergence à 0,006 près</a:t>
-            </a:r>
-            <a:endParaRPr lang="en-US" sz="1300" dirty="0"/>
-          </a:p>
-          <a:p>
-            <a:pPr marL="203200" indent="-203200">
-              <a:lnSpc>
-                <a:spcPct val="106000"/>
-              </a:lnSpc>
-              <a:spcAft>
-                <a:spcPts val="1200"/>
-              </a:spcAft>
-              <a:buSzPct val="100000"/>
-              <a:buChar char="•"/>
-            </a:pPr>
-            <a:r>
-              <a:rPr lang="en-US" sz="1300" dirty="0">
-                <a:solidFill>
-                  <a:srgbClr val="1A1A19"/>
+              <a:t>Contrôle par série temporelle : effet du taux non identifiable isolément — validation méthodologique, pas un échec</a:t>
+            </a:r>
+            <a:endParaRPr lang="en-US" sz="1400" dirty="0"/>
+          </a:p>
+        </p:txBody>
+      </p:sp>
+      <p:sp>
+        <p:nvSpPr>
+          <p:cNvPr id="5" name="Shape 3"/>
+          <p:cNvSpPr/>
+          <p:nvPr/>
+        </p:nvSpPr>
+        <p:spPr>
+          <a:xfrm>
+            <a:off x="7013448" y="1618488"/>
+            <a:ext cx="4672584" cy="1956816"/>
+          </a:xfrm>
+          <a:prstGeom prst="roundRect">
+            <a:avLst>
+              <a:gd name="adj" fmla="val 2804"/>
+            </a:avLst>
+          </a:prstGeom>
+          <a:solidFill>
+            <a:srgbClr val="FFFFFF"/>
+          </a:solidFill>
+          <a:ln w="12700">
+            <a:solidFill>
+              <a:srgbClr val="E3E7EE"/>
+            </a:solidFill>
+            <a:prstDash val="solid"/>
+          </a:ln>
+          <a:effectLst>
+            <a:outerShdw sx="100000" sy="100000" kx="0" ky="0" algn="bl" rotWithShape="0" blurRad="101600" dist="25400" dir="5400000">
+              <a:srgbClr val="1A1A19">
+                <a:alpha val="15000"/>
+              </a:srgbClr>
+            </a:outerShdw>
+          </a:effectLst>
+        </p:spPr>
+      </p:sp>
+      <p:pic>
+        <p:nvPicPr>
+          <p:cNvPr id="6" name="Image 0" descr="/tmp/claude-0/-home-user-MemoireM2S2/bac073a6-7c4e-552a-9627-815aeb6fe82a/scratchpad/figs/p28-000.png">    </p:cNvPr>
+          <p:cNvPicPr>
+            <a:picLocks noChangeAspect="1"/>
+          </p:cNvPicPr>
+          <p:nvPr/>
+        </p:nvPicPr>
+        <p:blipFill>
+          <a:blip r:embed="rId1"/>
+          <a:srcRect l="0" r="0" t="0" b="0"/>
+          <a:stretch/>
+        </p:blipFill>
+        <p:spPr>
+          <a:xfrm>
+            <a:off x="7086600" y="1691640"/>
+            <a:ext cx="4526280" cy="1810512"/>
+          </a:xfrm>
+          <a:prstGeom prst="rect">
+            <a:avLst/>
+          </a:prstGeom>
+        </p:spPr>
+      </p:pic>
+      <p:sp>
+        <p:nvSpPr>
+          <p:cNvPr id="7" name="Text 4"/>
+          <p:cNvSpPr/>
+          <p:nvPr/>
+        </p:nvSpPr>
+        <p:spPr>
+          <a:xfrm>
+            <a:off x="7086600" y="3529584"/>
+            <a:ext cx="4526280" cy="411480"/>
+          </a:xfrm>
+          <a:prstGeom prst="rect">
+            <a:avLst/>
+          </a:prstGeom>
+          <a:noFill/>
+          <a:ln/>
+        </p:spPr>
+        <p:txBody>
+          <a:bodyPr wrap="square" lIns="0" tIns="0" rIns="0" bIns="0" rtlCol="0" anchor="ctr"/>
+          <a:lstStyle/>
+          <a:p>
+            <a:pPr indent="0" marL="0">
+              <a:buNone/>
+            </a:pPr>
+            <a:r>
+              <a:rPr lang="en-US" sz="950" i="1" dirty="0">
+                <a:solidFill>
+                  <a:srgbClr val="52514E"/>
                 </a:solidFill>
                 <a:latin typeface="Calibri" pitchFamily="34" charset="0"/>
                 <a:ea typeface="Calibri" pitchFamily="34" charset="-122"/>
                 <a:cs typeface="Calibri" pitchFamily="34" charset="-120"/>
               </a:rPr>
-              <a:t>Résultat contre-intuitif : remise optimale identique en euros sur tous les lots — ex. Arpeggio (18 lots), ajustements de −5 % à −14 % selon le prix</a:t>
-            </a:r>
-            <a:endParaRPr lang="en-US" sz="1300" dirty="0"/>
-          </a:p>
-        </p:txBody>
-      </p:sp>
-      <p:sp>
-        <p:nvSpPr>
-          <p:cNvPr id="5" name="Shape 3"/>
-          <p:cNvSpPr/>
-          <p:nvPr/>
-        </p:nvSpPr>
-        <p:spPr>
-          <a:xfrm>
-            <a:off x="7315200" y="1691640"/>
-            <a:ext cx="4297680" cy="1371600"/>
+              <a:t>Fig. — Scénarios de taux 2026 : trajectoire ARIMA combinée à l'élasticité du panel</a:t>
+            </a:r>
+            <a:endParaRPr lang="en-US" sz="950" dirty="0"/>
+          </a:p>
+        </p:txBody>
+      </p:sp>
+      <p:sp>
+        <p:nvSpPr>
+          <p:cNvPr id="8" name="Shape 5"/>
+          <p:cNvSpPr/>
+          <p:nvPr/>
+        </p:nvSpPr>
+        <p:spPr>
+          <a:xfrm>
+            <a:off x="7086600" y="4251960"/>
+            <a:ext cx="2148840" cy="1417320"/>
           </a:xfrm>
           <a:prstGeom prst="roundRect">
             <a:avLst>
-              <a:gd name="adj" fmla="val 5333"/>
+              <a:gd name="adj" fmla="val 5161"/>
             </a:avLst>
           </a:prstGeom>
           <a:solidFill>
@@ -4702,14 +4782,14 @@
       </p:sp>
       <p:sp>
         <p:nvSpPr>
-          <p:cNvPr id="6" name="Text 4"/>
-          <p:cNvSpPr/>
-          <p:nvPr/>
-        </p:nvSpPr>
-        <p:spPr>
-          <a:xfrm>
-            <a:off x="7424928" y="1764792"/>
-            <a:ext cx="4078224" cy="822960"/>
+          <p:cNvPr id="9" name="Text 6"/>
+          <p:cNvSpPr/>
+          <p:nvPr/>
+        </p:nvSpPr>
+        <p:spPr>
+          <a:xfrm>
+            <a:off x="7196328" y="4325112"/>
+            <a:ext cx="1929384" cy="868680"/>
           </a:xfrm>
           <a:prstGeom prst="rect">
             <a:avLst/>
@@ -4727,13 +4807,13 @@
             <a:r>
               <a:rPr lang="en-US" sz="2800" b="1" dirty="0">
                 <a:solidFill>
-                  <a:srgbClr val="4A3AA7"/>
+                  <a:srgbClr val="1BAF7A"/>
                 </a:solidFill>
                 <a:latin typeface="Cambria" pitchFamily="34" charset="0"/>
                 <a:ea typeface="Cambria" pitchFamily="34" charset="-122"/>
                 <a:cs typeface="Cambria" pitchFamily="34" charset="-120"/>
               </a:rPr>
-              <a:t>R² = 0,886</a:t>
+              <a:t>−19 %</a:t>
             </a:r>
             <a:endParaRPr lang="en-US" sz="2800" dirty="0"/>
           </a:p>
@@ -4741,14 +4821,14 @@
       </p:sp>
       <p:sp>
         <p:nvSpPr>
-          <p:cNvPr id="7" name="Text 5"/>
-          <p:cNvSpPr/>
-          <p:nvPr/>
-        </p:nvSpPr>
-        <p:spPr>
-          <a:xfrm>
-            <a:off x="7424928" y="2624328"/>
-            <a:ext cx="4078224" cy="384048"/>
+          <p:cNvPr id="10" name="Text 7"/>
+          <p:cNvSpPr/>
+          <p:nvPr/>
+        </p:nvSpPr>
+        <p:spPr>
+          <a:xfrm>
+            <a:off x="7196328" y="5230368"/>
+            <a:ext cx="1929384" cy="384048"/>
           </a:xfrm>
           <a:prstGeom prst="rect">
             <a:avLst/>
@@ -4772,7 +4852,7 @@
                 <a:ea typeface="Calibri" pitchFamily="34" charset="-122"/>
                 <a:cs typeface="Calibri" pitchFamily="34" charset="-120"/>
               </a:rPr>
-              <a:t>variance du prix expliquée, erreur type ≈ 11 %</a:t>
+              <a:t>de réservations par point de taux en plus</a:t>
             </a:r>
             <a:endParaRPr lang="en-US" sz="1050" dirty="0"/>
           </a:p>
@@ -4780,18 +4860,18 @@
       </p:sp>
       <p:sp>
         <p:nvSpPr>
-          <p:cNvPr id="8" name="Shape 6"/>
-          <p:cNvSpPr/>
-          <p:nvPr/>
-        </p:nvSpPr>
-        <p:spPr>
-          <a:xfrm>
-            <a:off x="7315200" y="3246120"/>
-            <a:ext cx="4297680" cy="1371600"/>
+          <p:cNvPr id="11" name="Shape 8"/>
+          <p:cNvSpPr/>
+          <p:nvPr/>
+        </p:nvSpPr>
+        <p:spPr>
+          <a:xfrm>
+            <a:off x="9464040" y="4251960"/>
+            <a:ext cx="2148840" cy="1417320"/>
           </a:xfrm>
           <a:prstGeom prst="roundRect">
             <a:avLst>
-              <a:gd name="adj" fmla="val 5333"/>
+              <a:gd name="adj" fmla="val 5161"/>
             </a:avLst>
           </a:prstGeom>
           <a:solidFill>
@@ -4814,14 +4894,14 @@
       </p:sp>
       <p:sp>
         <p:nvSpPr>
-          <p:cNvPr id="9" name="Text 7"/>
-          <p:cNvSpPr/>
-          <p:nvPr/>
-        </p:nvSpPr>
-        <p:spPr>
-          <a:xfrm>
-            <a:off x="7424928" y="3319272"/>
-            <a:ext cx="4078224" cy="822960"/>
+          <p:cNvPr id="12" name="Text 9"/>
+          <p:cNvSpPr/>
+          <p:nvPr/>
+        </p:nvSpPr>
+        <p:spPr>
+          <a:xfrm>
+            <a:off x="9573768" y="4325112"/>
+            <a:ext cx="1929384" cy="868680"/>
           </a:xfrm>
           <a:prstGeom prst="rect">
             <a:avLst/>
@@ -4839,13 +4919,13 @@
             <a:r>
               <a:rPr lang="en-US" sz="2800" b="1" dirty="0">
                 <a:solidFill>
-                  <a:srgbClr val="EDA100"/>
+                  <a:srgbClr val="2A78D6"/>
                 </a:solidFill>
                 <a:latin typeface="Cambria" pitchFamily="34" charset="0"/>
                 <a:ea typeface="Cambria" pitchFamily="34" charset="-122"/>
                 <a:cs typeface="Cambria" pitchFamily="34" charset="-120"/>
               </a:rPr>
-              <a:t>24 / 127</a:t>
+              <a:t>20 mois</a:t>
             </a:r>
             <a:endParaRPr lang="en-US" sz="2800" dirty="0"/>
           </a:p>
@@ -4853,14 +4933,14 @@
       </p:sp>
       <p:sp>
         <p:nvSpPr>
-          <p:cNvPr id="10" name="Text 8"/>
-          <p:cNvSpPr/>
-          <p:nvPr/>
-        </p:nvSpPr>
-        <p:spPr>
-          <a:xfrm>
-            <a:off x="7424928" y="4178808"/>
-            <a:ext cx="4078224" cy="384048"/>
+          <p:cNvPr id="13" name="Text 10"/>
+          <p:cNvSpPr/>
+          <p:nvPr/>
+        </p:nvSpPr>
+        <p:spPr>
+          <a:xfrm>
+            <a:off x="9573768" y="5230368"/>
+            <a:ext cx="1929384" cy="384048"/>
           </a:xfrm>
           <a:prstGeom prst="rect">
             <a:avLst/>
@@ -4884,7 +4964,7 @@
                 <a:ea typeface="Calibri" pitchFamily="34" charset="-122"/>
                 <a:cs typeface="Calibri" pitchFamily="34" charset="-120"/>
               </a:rPr>
-              <a:t>lots du stock signalés hors marché</a:t>
+              <a:t>délai médian pour 90 % du potentiel vendu</a:t>
             </a:r>
             <a:endParaRPr lang="en-US" sz="1050" dirty="0"/>
           </a:p>
@@ -4892,119 +4972,46 @@
       </p:sp>
       <p:sp>
         <p:nvSpPr>
-          <p:cNvPr id="11" name="Shape 9"/>
-          <p:cNvSpPr/>
-          <p:nvPr/>
-        </p:nvSpPr>
-        <p:spPr>
-          <a:xfrm>
-            <a:off x="7315200" y="4800600"/>
-            <a:ext cx="4297680" cy="1371600"/>
-          </a:xfrm>
-          <a:prstGeom prst="roundRect">
-            <a:avLst>
-              <a:gd name="adj" fmla="val 5333"/>
-            </a:avLst>
-          </a:prstGeom>
-          <a:solidFill>
-            <a:srgbClr val="FFFFFF"/>
-          </a:solidFill>
-          <a:ln w="12700">
-            <a:solidFill>
-              <a:srgbClr val="E3E7EE"/>
-            </a:solidFill>
-            <a:prstDash val="solid"/>
-          </a:ln>
-          <a:effectLst>
-            <a:outerShdw sx="100000" sy="100000" kx="0" ky="0" algn="bl" rotWithShape="0" blurRad="76200" dist="25400" dir="5400000">
-              <a:srgbClr val="1A1A19">
-                <a:alpha val="12000"/>
-              </a:srgbClr>
-            </a:outerShdw>
-          </a:effectLst>
-        </p:spPr>
-      </p:sp>
-      <p:sp>
-        <p:nvSpPr>
-          <p:cNvPr id="12" name="Text 10"/>
-          <p:cNvSpPr/>
-          <p:nvPr/>
-        </p:nvSpPr>
-        <p:spPr>
-          <a:xfrm>
-            <a:off x="7424928" y="4873752"/>
-            <a:ext cx="4078224" cy="822960"/>
-          </a:xfrm>
-          <a:prstGeom prst="rect">
-            <a:avLst/>
-          </a:prstGeom>
-          <a:noFill/>
-          <a:ln/>
-        </p:spPr>
-        <p:txBody>
-          <a:bodyPr wrap="square" lIns="0" tIns="0" rIns="0" bIns="0" rtlCol="0" anchor="b"/>
-          <a:lstStyle/>
-          <a:p>
-            <a:pPr algn="l" indent="0" marL="0">
-              <a:buNone/>
-            </a:pPr>
-            <a:r>
-              <a:rPr lang="en-US" sz="2800" b="1" dirty="0">
-                <a:solidFill>
-                  <a:srgbClr val="2A78D6"/>
-                </a:solidFill>
-                <a:latin typeface="Cambria" pitchFamily="34" charset="0"/>
-                <a:ea typeface="Cambria" pitchFamily="34" charset="-122"/>
-                <a:cs typeface="Cambria" pitchFamily="34" charset="-120"/>
-              </a:rPr>
-              <a:t>0,006</a:t>
-            </a:r>
-            <a:endParaRPr lang="en-US" sz="2800" dirty="0"/>
-          </a:p>
-        </p:txBody>
-      </p:sp>
-      <p:sp>
-        <p:nvSpPr>
-          <p:cNvPr id="13" name="Text 11"/>
-          <p:cNvSpPr/>
-          <p:nvPr/>
-        </p:nvSpPr>
-        <p:spPr>
-          <a:xfrm>
-            <a:off x="7424928" y="5733288"/>
-            <a:ext cx="4078224" cy="384048"/>
-          </a:xfrm>
-          <a:prstGeom prst="rect">
-            <a:avLst/>
-          </a:prstGeom>
-          <a:noFill/>
-          <a:ln/>
-        </p:spPr>
-        <p:txBody>
-          <a:bodyPr wrap="square" lIns="0" tIns="0" rIns="0" bIns="0" rtlCol="0" anchor="t"/>
-          <a:lstStyle/>
-          <a:p>
-            <a:pPr algn="l" indent="0" marL="0">
-              <a:buNone/>
-            </a:pPr>
-            <a:r>
-              <a:rPr lang="en-US" sz="1050" dirty="0">
-                <a:solidFill>
-                  <a:srgbClr val="52514E"/>
+          <p:cNvPr id="14" name="Text 11"/>
+          <p:cNvSpPr/>
+          <p:nvPr/>
+        </p:nvSpPr>
+        <p:spPr>
+          <a:xfrm>
+            <a:off x="548640" y="5852160"/>
+            <a:ext cx="6309360" cy="365760"/>
+          </a:xfrm>
+          <a:prstGeom prst="rect">
+            <a:avLst/>
+          </a:prstGeom>
+          <a:noFill/>
+          <a:ln/>
+        </p:spPr>
+        <p:txBody>
+          <a:bodyPr wrap="square" lIns="0" tIns="0" rIns="0" bIns="0" rtlCol="0" anchor="ctr"/>
+          <a:lstStyle/>
+          <a:p>
+            <a:pPr indent="0" marL="0">
+              <a:buNone/>
+            </a:pPr>
+            <a:r>
+              <a:rPr lang="en-US" sz="1200" b="1" i="1" dirty="0">
+                <a:solidFill>
+                  <a:srgbClr val="1BAF7A"/>
                 </a:solidFill>
                 <a:latin typeface="Calibri" pitchFamily="34" charset="0"/>
                 <a:ea typeface="Calibri" pitchFamily="34" charset="-122"/>
                 <a:cs typeface="Calibri" pitchFamily="34" charset="-120"/>
               </a:rPr>
-              <a:t>écart entre les deux solveurs d'optimisation</a:t>
-            </a:r>
-            <a:endParaRPr lang="en-US" sz="1050" dirty="0"/>
-          </a:p>
-        </p:txBody>
-      </p:sp>
-      <p:sp>
-        <p:nvSpPr>
-          <p:cNvPr id="14" name="Text 12"/>
+              <a:t>Axe le plus solide du projet.</a:t>
+            </a:r>
+            <a:endParaRPr lang="en-US" sz="1200" dirty="0"/>
+          </a:p>
+        </p:txBody>
+      </p:sp>
+      <p:sp>
+        <p:nvSpPr>
+          <p:cNvPr id="15" name="Text 12"/>
           <p:cNvSpPr/>
           <p:nvPr/>
         </p:nvSpPr>
@@ -5043,7 +5050,7 @@
       </p:sp>
       <p:sp>
         <p:nvSpPr>
-          <p:cNvPr id="15" name="Text 13"/>
+          <p:cNvPr id="16" name="Text 13"/>
           <p:cNvSpPr/>
           <p:nvPr/>
         </p:nvSpPr>
@@ -5139,13 +5146,13 @@
             <a:r>
               <a:rPr lang="en-US" sz="1200" b="1" spc="200" kern="0" dirty="0">
                 <a:solidFill>
-                  <a:srgbClr val="EDA100"/>
+                  <a:srgbClr val="4A3AA7"/>
                 </a:solidFill>
                 <a:latin typeface="Calibri" pitchFamily="34" charset="0"/>
                 <a:ea typeface="Calibri" pitchFamily="34" charset="-122"/>
                 <a:cs typeface="Calibri" pitchFamily="34" charset="-120"/>
               </a:rPr>
-              <a:t>COPILOTE FINANCIER — AXE TRANSVERSE</a:t>
+              <a:t>COPILOTE FINANCIER — AXE C</a:t>
             </a:r>
             <a:endParaRPr lang="en-US" sz="1200" dirty="0"/>
           </a:p>
@@ -5160,7 +5167,7 @@
         <p:spPr>
           <a:xfrm>
             <a:off x="548640" y="658368"/>
-            <a:ext cx="10515600" cy="822960"/>
+            <a:ext cx="10058400" cy="822960"/>
           </a:xfrm>
           <a:prstGeom prst="rect">
             <a:avLst/>
@@ -5184,7 +5191,7 @@
                 <a:ea typeface="Cambria" pitchFamily="34" charset="-122"/>
                 <a:cs typeface="Cambria" pitchFamily="34" charset="-120"/>
               </a:rPr>
-              <a:t>Signaux faibles : texte et réseau de vente</a:t>
+              <a:t>L'optimisation des prix</a:t>
             </a:r>
             <a:endParaRPr lang="en-US" sz="2800" dirty="0"/>
           </a:p>
@@ -5198,8 +5205,8 @@
         </p:nvSpPr>
         <p:spPr>
           <a:xfrm>
-            <a:off x="548640" y="1600200"/>
-            <a:ext cx="6583680" cy="4663440"/>
+            <a:off x="548640" y="1691640"/>
+            <a:ext cx="6492240" cy="4572000"/>
           </a:xfrm>
           <a:prstGeom prst="rect">
             <a:avLst/>
@@ -5216,7 +5223,7 @@
                 <a:spcPct val="106000"/>
               </a:lnSpc>
               <a:spcAft>
-                <a:spcPts val="1300"/>
+                <a:spcPts val="1200"/>
               </a:spcAft>
               <a:buSzPct val="100000"/>
               <a:buChar char="•"/>
@@ -5230,7 +5237,7 @@
                 <a:ea typeface="Calibri" pitchFamily="34" charset="-122"/>
                 <a:cs typeface="Calibri" pitchFamily="34" charset="-120"/>
               </a:rPr>
-              <a:t>9 688 commentaires libres de vente : moteur de recherche par similarité (TF-IDF + cosinus, corpus de 1 346 documents)</a:t>
+              <a:t>Modèle hédonique sur 5 064 appartements vendus depuis 2016 — primes cohérentes (étage +6,0 %, sud +2,6 %, social −62,8 %, millésime +19-21 %)</a:t>
             </a:r>
             <a:endParaRPr lang="en-US" sz="1300" dirty="0"/>
           </a:p>
@@ -5240,7 +5247,7 @@
                 <a:spcPct val="106000"/>
               </a:lnSpc>
               <a:spcAft>
-                <a:spcPts val="1300"/>
+                <a:spcPts val="1200"/>
               </a:spcAft>
               <a:buSzPct val="100000"/>
               <a:buChar char="•"/>
@@ -5254,7 +5261,7 @@
                 <a:ea typeface="Calibri" pitchFamily="34" charset="-122"/>
                 <a:cs typeface="Calibri" pitchFamily="34" charset="-120"/>
               </a:rPr>
-              <a:t>Prédiction du désistement par le texte, fuite contrôlée (314 commentaires écartés) : Naive Bayes F1 = 0,343, préféré à une régression logistique quasi muette</a:t>
+              <a:t>Élasticité non significative en interne (p = 0,57) → fixée prudemment à −1, documentée plutôt que masquée</a:t>
             </a:r>
             <a:endParaRPr lang="en-US" sz="1300" dirty="0"/>
           </a:p>
@@ -5264,7 +5271,7 @@
                 <a:spcPct val="106000"/>
               </a:lnSpc>
               <a:spcAft>
-                <a:spcPts val="1300"/>
+                <a:spcPts val="1200"/>
               </a:spcAft>
               <a:buSzPct val="100000"/>
               <a:buChar char="•"/>
@@ -5278,7 +5285,7 @@
                 <a:ea typeface="Calibri" pitchFamily="34" charset="-122"/>
                 <a:cs typeface="Calibri" pitchFamily="34" charset="-120"/>
               </a:rPr>
-              <a:t>Divergence de Kullback-Leibler (écart entre distributions) : révèle un défaut de saisie sur une agence (90 % de motifs « autres »), pas un profil client</a:t>
+              <a:t>Optimisation par multiplicateur de Lagrange, vérifiée par un second solveur indépendant (SLSQP) — convergence à 0,006 près</a:t>
             </a:r>
             <a:endParaRPr lang="en-US" sz="1300" dirty="0"/>
           </a:p>
@@ -5288,7 +5295,7 @@
                 <a:spcPct val="106000"/>
               </a:lnSpc>
               <a:spcAft>
-                <a:spcPts val="1300"/>
+                <a:spcPts val="1200"/>
               </a:spcAft>
               <a:buSzPct val="100000"/>
               <a:buChar char="•"/>
@@ -5302,7 +5309,7 @@
                 <a:ea typeface="Calibri" pitchFamily="34" charset="-122"/>
                 <a:cs typeface="Calibri" pitchFamily="34" charset="-120"/>
               </a:rPr>
-              <a:t>Réseau biparti vendeurs-opérations (209 vendeurs, 711 arêtes) : deux pivots concentrent 51,6 % des dossiers, désistement très contrasté (9,0 % vs 29,6 %)</a:t>
+              <a:t>Résultat contre-intuitif : remise optimale identique en euros sur tous les lots — ex. Arpeggio (18 lots), ajustements de −5 % à −14 % selon le prix</a:t>
             </a:r>
             <a:endParaRPr lang="en-US" sz="1300" dirty="0"/>
           </a:p>
@@ -5316,8 +5323,8 @@
         </p:nvSpPr>
         <p:spPr>
           <a:xfrm>
-            <a:off x="7360920" y="1691640"/>
-            <a:ext cx="4251960" cy="1371600"/>
+            <a:off x="7315200" y="1691640"/>
+            <a:ext cx="4297680" cy="1371600"/>
           </a:xfrm>
           <a:prstGeom prst="roundRect">
             <a:avLst>
@@ -5350,8 +5357,8 @@
         </p:nvSpPr>
         <p:spPr>
           <a:xfrm>
-            <a:off x="7470648" y="1764792"/>
-            <a:ext cx="4032504" cy="822960"/>
+            <a:off x="7424928" y="1764792"/>
+            <a:ext cx="4078224" cy="822960"/>
           </a:xfrm>
           <a:prstGeom prst="rect">
             <a:avLst/>
@@ -5369,13 +5376,13 @@
             <a:r>
               <a:rPr lang="en-US" sz="2800" b="1" dirty="0">
                 <a:solidFill>
-                  <a:srgbClr val="EDA100"/>
+                  <a:srgbClr val="4A3AA7"/>
                 </a:solidFill>
                 <a:latin typeface="Cambria" pitchFamily="34" charset="0"/>
                 <a:ea typeface="Cambria" pitchFamily="34" charset="-122"/>
                 <a:cs typeface="Cambria" pitchFamily="34" charset="-120"/>
               </a:rPr>
-              <a:t>F1 = 0,343</a:t>
+              <a:t>R² = 0,886</a:t>
             </a:r>
             <a:endParaRPr lang="en-US" sz="2800" dirty="0"/>
           </a:p>
@@ -5389,8 +5396,8 @@
         </p:nvSpPr>
         <p:spPr>
           <a:xfrm>
-            <a:off x="7470648" y="2624328"/>
-            <a:ext cx="4032504" cy="384048"/>
+            <a:off x="7424928" y="2624328"/>
+            <a:ext cx="4078224" cy="384048"/>
           </a:xfrm>
           <a:prstGeom prst="rect">
             <a:avLst/>
@@ -5414,7 +5421,7 @@
                 <a:ea typeface="Calibri" pitchFamily="34" charset="-122"/>
                 <a:cs typeface="Calibri" pitchFamily="34" charset="-120"/>
               </a:rPr>
-              <a:t>Naive Bayes, désistement prédit par le texte</a:t>
+              <a:t>variance du prix expliquée, erreur type ≈ 11 %</a:t>
             </a:r>
             <a:endParaRPr lang="en-US" sz="1050" dirty="0"/>
           </a:p>
@@ -5428,8 +5435,8 @@
         </p:nvSpPr>
         <p:spPr>
           <a:xfrm>
-            <a:off x="7360920" y="3246120"/>
-            <a:ext cx="4251960" cy="1371600"/>
+            <a:off x="7315200" y="3246120"/>
+            <a:ext cx="4297680" cy="1371600"/>
           </a:xfrm>
           <a:prstGeom prst="roundRect">
             <a:avLst>
@@ -5462,8 +5469,8 @@
         </p:nvSpPr>
         <p:spPr>
           <a:xfrm>
-            <a:off x="7470648" y="3319272"/>
-            <a:ext cx="4032504" cy="822960"/>
+            <a:off x="7424928" y="3319272"/>
+            <a:ext cx="4078224" cy="822960"/>
           </a:xfrm>
           <a:prstGeom prst="rect">
             <a:avLst/>
@@ -5481,13 +5488,13 @@
             <a:r>
               <a:rPr lang="en-US" sz="2800" b="1" dirty="0">
                 <a:solidFill>
-                  <a:srgbClr val="4A3AA7"/>
+                  <a:srgbClr val="EDA100"/>
                 </a:solidFill>
                 <a:latin typeface="Cambria" pitchFamily="34" charset="0"/>
                 <a:ea typeface="Cambria" pitchFamily="34" charset="-122"/>
                 <a:cs typeface="Cambria" pitchFamily="34" charset="-120"/>
               </a:rPr>
-              <a:t>51,6 %</a:t>
+              <a:t>24 / 127</a:t>
             </a:r>
             <a:endParaRPr lang="en-US" sz="2800" dirty="0"/>
           </a:p>
@@ -5501,8 +5508,8 @@
         </p:nvSpPr>
         <p:spPr>
           <a:xfrm>
-            <a:off x="7470648" y="4178808"/>
-            <a:ext cx="4032504" cy="384048"/>
+            <a:off x="7424928" y="4178808"/>
+            <a:ext cx="4078224" cy="384048"/>
           </a:xfrm>
           <a:prstGeom prst="rect">
             <a:avLst/>
@@ -5526,7 +5533,7 @@
                 <a:ea typeface="Calibri" pitchFamily="34" charset="-122"/>
                 <a:cs typeface="Calibri" pitchFamily="34" charset="-120"/>
               </a:rPr>
-              <a:t>des dossiers concentrés sur 2 vendeurs pivots</a:t>
+              <a:t>lots du stock signalés hors marché</a:t>
             </a:r>
             <a:endParaRPr lang="en-US" sz="1050" dirty="0"/>
           </a:p>
@@ -5540,8 +5547,8 @@
         </p:nvSpPr>
         <p:spPr>
           <a:xfrm>
-            <a:off x="7360920" y="4800600"/>
-            <a:ext cx="4251960" cy="1371600"/>
+            <a:off x="7315200" y="4800600"/>
+            <a:ext cx="4297680" cy="1371600"/>
           </a:xfrm>
           <a:prstGeom prst="roundRect">
             <a:avLst>
@@ -5574,8 +5581,8 @@
         </p:nvSpPr>
         <p:spPr>
           <a:xfrm>
-            <a:off x="7470648" y="4873752"/>
-            <a:ext cx="4032504" cy="822960"/>
+            <a:off x="7424928" y="4873752"/>
+            <a:ext cx="4078224" cy="822960"/>
           </a:xfrm>
           <a:prstGeom prst="rect">
             <a:avLst/>
@@ -5591,17 +5598,17 @@
               <a:buNone/>
             </a:pPr>
             <a:r>
-              <a:rPr lang="en-US" sz="2000" b="1" dirty="0">
-                <a:solidFill>
-                  <a:srgbClr val="E34948"/>
+              <a:rPr lang="en-US" sz="2800" b="1" dirty="0">
+                <a:solidFill>
+                  <a:srgbClr val="2A78D6"/>
                 </a:solidFill>
                 <a:latin typeface="Cambria" pitchFamily="34" charset="0"/>
                 <a:ea typeface="Cambria" pitchFamily="34" charset="-122"/>
                 <a:cs typeface="Cambria" pitchFamily="34" charset="-120"/>
               </a:rPr>
-              <a:t>9,0 % / 29,6 %</a:t>
-            </a:r>
-            <a:endParaRPr lang="en-US" sz="2000" dirty="0"/>
+              <a:t>0,006</a:t>
+            </a:r>
+            <a:endParaRPr lang="en-US" sz="2800" dirty="0"/>
           </a:p>
         </p:txBody>
       </p:sp>
@@ -5613,8 +5620,8 @@
         </p:nvSpPr>
         <p:spPr>
           <a:xfrm>
-            <a:off x="7470648" y="5733288"/>
-            <a:ext cx="4032504" cy="384048"/>
+            <a:off x="7424928" y="5733288"/>
+            <a:ext cx="4078224" cy="384048"/>
           </a:xfrm>
           <a:prstGeom prst="rect">
             <a:avLst/>
@@ -5638,7 +5645,7 @@
                 <a:ea typeface="Calibri" pitchFamily="34" charset="-122"/>
                 <a:cs typeface="Calibri" pitchFamily="34" charset="-120"/>
               </a:rPr>
-              <a:t>désistement : pivot interne vs prescripteur externe</a:t>
+              <a:t>écart entre les deux solveurs d'optimisation</a:t>
             </a:r>
             <a:endParaRPr lang="en-US" sz="1050" dirty="0"/>
           </a:p>
@@ -5781,13 +5788,13 @@
             <a:r>
               <a:rPr lang="en-US" sz="1200" b="1" spc="200" kern="0" dirty="0">
                 <a:solidFill>
-                  <a:srgbClr val="2A78D6"/>
+                  <a:srgbClr val="EDA100"/>
                 </a:solidFill>
                 <a:latin typeface="Calibri" pitchFamily="34" charset="0"/>
                 <a:ea typeface="Calibri" pitchFamily="34" charset="-122"/>
                 <a:cs typeface="Calibri" pitchFamily="34" charset="-120"/>
               </a:rPr>
-              <a:t>LE COPILOTE FINANCIER EN USAGE</a:t>
+              <a:t>COPILOTE FINANCIER — AXE TRANSVERSE</a:t>
             </a:r>
             <a:endParaRPr lang="en-US" sz="1200" dirty="0"/>
           </a:p>
@@ -5826,7 +5833,7 @@
                 <a:ea typeface="Cambria" pitchFamily="34" charset="-122"/>
                 <a:cs typeface="Cambria" pitchFamily="34" charset="-120"/>
               </a:rPr>
-              <a:t>La plateforme : cinq pages pour la direction financière</a:t>
+              <a:t>Signaux faibles : texte et réseau de vente</a:t>
             </a:r>
             <a:endParaRPr lang="en-US" sz="2800" dirty="0"/>
           </a:p>
@@ -5840,8 +5847,8 @@
         </p:nvSpPr>
         <p:spPr>
           <a:xfrm>
-            <a:off x="548640" y="1554480"/>
-            <a:ext cx="4160520" cy="4754880"/>
+            <a:off x="548640" y="1600200"/>
+            <a:ext cx="6583680" cy="4663440"/>
           </a:xfrm>
           <a:prstGeom prst="rect">
             <a:avLst/>
@@ -5858,13 +5865,13 @@
                 <a:spcPct val="106000"/>
               </a:lnSpc>
               <a:spcAft>
-                <a:spcPts val="1100"/>
+                <a:spcPts val="1300"/>
               </a:spcAft>
               <a:buSzPct val="100000"/>
               <a:buChar char="•"/>
             </a:pPr>
             <a:r>
-              <a:rPr lang="en-US" sz="1250" dirty="0">
+              <a:rPr lang="en-US" sz="1300" dirty="0">
                 <a:solidFill>
                   <a:srgbClr val="1A1A19"/>
                 </a:solidFill>
@@ -5872,9 +5879,9 @@
                 <a:ea typeface="Calibri" pitchFamily="34" charset="-122"/>
                 <a:cs typeface="Calibri" pitchFamily="34" charset="-120"/>
               </a:rPr>
-              <a:t>Vue d'ensemble : 147 opérations, 421 lots en stock</a:t>
-            </a:r>
-            <a:endParaRPr lang="en-US" sz="1250" dirty="0"/>
+              <a:t>9 688 commentaires libres de vente : moteur de recherche par similarité (TF-IDF + cosinus, corpus de 1 346 documents)</a:t>
+            </a:r>
+            <a:endParaRPr lang="en-US" sz="1300" dirty="0"/>
           </a:p>
           <a:p>
             <a:pPr marL="203200" indent="-203200">
@@ -5882,13 +5889,13 @@
                 <a:spcPct val="106000"/>
               </a:lnSpc>
               <a:spcAft>
-                <a:spcPts val="1100"/>
+                <a:spcPts val="1300"/>
               </a:spcAft>
               <a:buSzPct val="100000"/>
               <a:buChar char="•"/>
             </a:pPr>
             <a:r>
-              <a:rPr lang="en-US" sz="1250" dirty="0">
+              <a:rPr lang="en-US" sz="1300" dirty="0">
                 <a:solidFill>
                   <a:srgbClr val="1A1A19"/>
                 </a:solidFill>
@@ -5896,9 +5903,9 @@
                 <a:ea typeface="Calibri" pitchFamily="34" charset="-122"/>
                 <a:cs typeface="Calibri" pitchFamily="34" charset="-120"/>
               </a:rPr>
-              <a:t>Alertes marge : 10 en alerte sur 68 suffisamment engagées</a:t>
-            </a:r>
-            <a:endParaRPr lang="en-US" sz="1250" dirty="0"/>
+              <a:t>Prédiction du désistement par le texte, fuite contrôlée (314 commentaires écartés) : Naive Bayes F1 = 0,343, préféré à une régression logistique quasi muette</a:t>
+            </a:r>
+            <a:endParaRPr lang="en-US" sz="1300" dirty="0"/>
           </a:p>
           <a:p>
             <a:pPr marL="203200" indent="-203200">
@@ -5906,13 +5913,13 @@
                 <a:spcPct val="106000"/>
               </a:lnSpc>
               <a:spcAft>
-                <a:spcPts val="1100"/>
+                <a:spcPts val="1300"/>
               </a:spcAft>
               <a:buSzPct val="100000"/>
               <a:buChar char="•"/>
             </a:pPr>
             <a:r>
-              <a:rPr lang="en-US" sz="1250" dirty="0">
+              <a:rPr lang="en-US" sz="1300" dirty="0">
                 <a:solidFill>
                   <a:srgbClr val="1A1A19"/>
                 </a:solidFill>
@@ -5920,9 +5927,9 @@
                 <a:ea typeface="Calibri" pitchFamily="34" charset="-122"/>
                 <a:cs typeface="Calibri" pitchFamily="34" charset="-120"/>
               </a:rPr>
-              <a:t>Rythme de vente : simulateur de taux 2026</a:t>
-            </a:r>
-            <a:endParaRPr lang="en-US" sz="1250" dirty="0"/>
+              <a:t>Divergence de Kullback-Leibler (écart entre distributions) : révèle un défaut de saisie sur une agence (90 % de motifs « autres »), pas un profil client</a:t>
+            </a:r>
+            <a:endParaRPr lang="en-US" sz="1300" dirty="0"/>
           </a:p>
           <a:p>
             <a:pPr marL="203200" indent="-203200">
@@ -5930,13 +5937,13 @@
                 <a:spcPct val="106000"/>
               </a:lnSpc>
               <a:spcAft>
-                <a:spcPts val="1100"/>
+                <a:spcPts val="1300"/>
               </a:spcAft>
               <a:buSzPct val="100000"/>
               <a:buChar char="•"/>
             </a:pPr>
             <a:r>
-              <a:rPr lang="en-US" sz="1250" dirty="0">
+              <a:rPr lang="en-US" sz="1300" dirty="0">
                 <a:solidFill>
                   <a:srgbClr val="1A1A19"/>
                 </a:solidFill>
@@ -5944,33 +5951,9 @@
                 <a:ea typeface="Calibri" pitchFamily="34" charset="-122"/>
                 <a:cs typeface="Calibri" pitchFamily="34" charset="-120"/>
               </a:rPr>
-              <a:t>Pilotage des prix : lots hors marché + grille ajustée</a:t>
-            </a:r>
-            <a:endParaRPr lang="en-US" sz="1250" dirty="0"/>
-          </a:p>
-          <a:p>
-            <a:pPr marL="203200" indent="-203200">
-              <a:lnSpc>
-                <a:spcPct val="106000"/>
-              </a:lnSpc>
-              <a:spcAft>
-                <a:spcPts val="1100"/>
-              </a:spcAft>
-              <a:buSzPct val="100000"/>
-              <a:buChar char="•"/>
-            </a:pPr>
-            <a:r>
-              <a:rPr lang="en-US" sz="1250" dirty="0">
-                <a:solidFill>
-                  <a:srgbClr val="1A1A19"/>
-                </a:solidFill>
-                <a:latin typeface="Calibri" pitchFamily="34" charset="0"/>
-                <a:ea typeface="Calibri" pitchFamily="34" charset="-122"/>
-                <a:cs typeface="Calibri" pitchFamily="34" charset="-120"/>
-              </a:rPr>
-              <a:t>Qualité commerciale : alerte de saisie + recherche de dossiers</a:t>
-            </a:r>
-            <a:endParaRPr lang="en-US" sz="1250" dirty="0"/>
+              <a:t>Réseau biparti vendeurs-opérations (209 vendeurs, 711 arêtes) : deux pivots concentrent 51,6 % des dossiers, désistement très contrasté (9,0 % vs 29,6 %)</a:t>
+            </a:r>
+            <a:endParaRPr lang="en-US" sz="1300" dirty="0"/>
           </a:p>
         </p:txBody>
       </p:sp>
@@ -5982,12 +5965,12 @@
         </p:nvSpPr>
         <p:spPr>
           <a:xfrm>
-            <a:off x="4864608" y="1481328"/>
-            <a:ext cx="3529584" cy="2212848"/>
+            <a:off x="7360920" y="1691640"/>
+            <a:ext cx="4251960" cy="1371600"/>
           </a:xfrm>
           <a:prstGeom prst="roundRect">
             <a:avLst>
-              <a:gd name="adj" fmla="val 2479"/>
+              <a:gd name="adj" fmla="val 5333"/>
             </a:avLst>
           </a:prstGeom>
           <a:solidFill>
@@ -6000,51 +5983,106 @@
             <a:prstDash val="solid"/>
           </a:ln>
           <a:effectLst>
-            <a:outerShdw sx="100000" sy="100000" kx="0" ky="0" algn="bl" rotWithShape="0" blurRad="101600" dist="25400" dir="5400000">
+            <a:outerShdw sx="100000" sy="100000" kx="0" ky="0" algn="bl" rotWithShape="0" blurRad="76200" dist="25400" dir="5400000">
               <a:srgbClr val="1A1A19">
-                <a:alpha val="15000"/>
+                <a:alpha val="12000"/>
               </a:srgbClr>
             </a:outerShdw>
           </a:effectLst>
         </p:spPr>
       </p:sp>
-      <p:pic>
-        <p:nvPicPr>
-          <p:cNvPr id="6" name="Image 0" descr="/tmp/claude-0/-home-user-MemoireM2S2/bac073a6-7c4e-552a-9627-815aeb6fe82a/scratchpad/figs/p31-000.png">    </p:cNvPr>
-          <p:cNvPicPr>
-            <a:picLocks noChangeAspect="1"/>
-          </p:cNvPicPr>
-          <p:nvPr/>
-        </p:nvPicPr>
-        <p:blipFill>
-          <a:blip r:embed="rId1"/>
-          <a:srcRect l="0" r="0" t="0" b="0"/>
-          <a:stretch/>
-        </p:blipFill>
-        <p:spPr>
-          <a:xfrm>
-            <a:off x="4937760" y="1554480"/>
-            <a:ext cx="3383280" cy="2066544"/>
-          </a:xfrm>
-          <a:prstGeom prst="rect">
-            <a:avLst/>
-          </a:prstGeom>
-        </p:spPr>
-      </p:pic>
-      <p:sp>
-        <p:nvSpPr>
-          <p:cNvPr id="7" name="Shape 4"/>
-          <p:cNvSpPr/>
-          <p:nvPr/>
-        </p:nvSpPr>
-        <p:spPr>
-          <a:xfrm>
-            <a:off x="8476488" y="1481328"/>
-            <a:ext cx="3255264" cy="2414016"/>
+      <p:sp>
+        <p:nvSpPr>
+          <p:cNvPr id="6" name="Text 4"/>
+          <p:cNvSpPr/>
+          <p:nvPr/>
+        </p:nvSpPr>
+        <p:spPr>
+          <a:xfrm>
+            <a:off x="7470648" y="1764792"/>
+            <a:ext cx="4032504" cy="822960"/>
+          </a:xfrm>
+          <a:prstGeom prst="rect">
+            <a:avLst/>
+          </a:prstGeom>
+          <a:noFill/>
+          <a:ln/>
+        </p:spPr>
+        <p:txBody>
+          <a:bodyPr wrap="square" lIns="0" tIns="0" rIns="0" bIns="0" rtlCol="0" anchor="b"/>
+          <a:lstStyle/>
+          <a:p>
+            <a:pPr algn="l" indent="0" marL="0">
+              <a:buNone/>
+            </a:pPr>
+            <a:r>
+              <a:rPr lang="en-US" sz="2800" b="1" dirty="0">
+                <a:solidFill>
+                  <a:srgbClr val="EDA100"/>
+                </a:solidFill>
+                <a:latin typeface="Cambria" pitchFamily="34" charset="0"/>
+                <a:ea typeface="Cambria" pitchFamily="34" charset="-122"/>
+                <a:cs typeface="Cambria" pitchFamily="34" charset="-120"/>
+              </a:rPr>
+              <a:t>F1 = 0,343</a:t>
+            </a:r>
+            <a:endParaRPr lang="en-US" sz="2800" dirty="0"/>
+          </a:p>
+        </p:txBody>
+      </p:sp>
+      <p:sp>
+        <p:nvSpPr>
+          <p:cNvPr id="7" name="Text 5"/>
+          <p:cNvSpPr/>
+          <p:nvPr/>
+        </p:nvSpPr>
+        <p:spPr>
+          <a:xfrm>
+            <a:off x="7470648" y="2624328"/>
+            <a:ext cx="4032504" cy="384048"/>
+          </a:xfrm>
+          <a:prstGeom prst="rect">
+            <a:avLst/>
+          </a:prstGeom>
+          <a:noFill/>
+          <a:ln/>
+        </p:spPr>
+        <p:txBody>
+          <a:bodyPr wrap="square" lIns="0" tIns="0" rIns="0" bIns="0" rtlCol="0" anchor="t"/>
+          <a:lstStyle/>
+          <a:p>
+            <a:pPr algn="l" indent="0" marL="0">
+              <a:buNone/>
+            </a:pPr>
+            <a:r>
+              <a:rPr lang="en-US" sz="1050" dirty="0">
+                <a:solidFill>
+                  <a:srgbClr val="52514E"/>
+                </a:solidFill>
+                <a:latin typeface="Calibri" pitchFamily="34" charset="0"/>
+                <a:ea typeface="Calibri" pitchFamily="34" charset="-122"/>
+                <a:cs typeface="Calibri" pitchFamily="34" charset="-120"/>
+              </a:rPr>
+              <a:t>Naive Bayes, désistement prédit par le texte</a:t>
+            </a:r>
+            <a:endParaRPr lang="en-US" sz="1050" dirty="0"/>
+          </a:p>
+        </p:txBody>
+      </p:sp>
+      <p:sp>
+        <p:nvSpPr>
+          <p:cNvPr id="8" name="Shape 6"/>
+          <p:cNvSpPr/>
+          <p:nvPr/>
+        </p:nvSpPr>
+        <p:spPr>
+          <a:xfrm>
+            <a:off x="7360920" y="3246120"/>
+            <a:ext cx="4251960" cy="1371600"/>
           </a:xfrm>
           <a:prstGeom prst="roundRect">
             <a:avLst>
-              <a:gd name="adj" fmla="val 2273"/>
+              <a:gd name="adj" fmla="val 5333"/>
             </a:avLst>
           </a:prstGeom>
           <a:solidFill>
@@ -6057,63 +6095,79 @@
             <a:prstDash val="solid"/>
           </a:ln>
           <a:effectLst>
-            <a:outerShdw sx="100000" sy="100000" kx="0" ky="0" algn="bl" rotWithShape="0" blurRad="101600" dist="25400" dir="5400000">
+            <a:outerShdw sx="100000" sy="100000" kx="0" ky="0" algn="bl" rotWithShape="0" blurRad="76200" dist="25400" dir="5400000">
               <a:srgbClr val="1A1A19">
-                <a:alpha val="15000"/>
+                <a:alpha val="12000"/>
               </a:srgbClr>
             </a:outerShdw>
           </a:effectLst>
         </p:spPr>
       </p:sp>
-      <p:pic>
-        <p:nvPicPr>
-          <p:cNvPr id="8" name="Image 1" descr="/tmp/claude-0/-home-user-MemoireM2S2/bac073a6-7c4e-552a-9627-815aeb6fe82a/scratchpad/figs/p31-001.png">    </p:cNvPr>
-          <p:cNvPicPr>
-            <a:picLocks noChangeAspect="1"/>
-          </p:cNvPicPr>
-          <p:nvPr/>
-        </p:nvPicPr>
-        <p:blipFill>
-          <a:blip r:embed="rId2"/>
-          <a:srcRect l="0" r="0" t="0" b="0"/>
-          <a:stretch/>
-        </p:blipFill>
-        <p:spPr>
-          <a:xfrm>
-            <a:off x="8549640" y="1554480"/>
-            <a:ext cx="3108960" cy="2267712"/>
-          </a:xfrm>
-          <a:prstGeom prst="rect">
-            <a:avLst/>
-          </a:prstGeom>
-        </p:spPr>
-      </p:pic>
-      <p:sp>
-        <p:nvSpPr>
-          <p:cNvPr id="9" name="Text 5"/>
-          <p:cNvSpPr/>
-          <p:nvPr/>
-        </p:nvSpPr>
-        <p:spPr>
-          <a:xfrm>
-            <a:off x="4937760" y="3703320"/>
-            <a:ext cx="3383280" cy="274320"/>
-          </a:xfrm>
-          <a:prstGeom prst="rect">
-            <a:avLst/>
-          </a:prstGeom>
-          <a:noFill/>
-          <a:ln/>
-        </p:spPr>
-        <p:txBody>
-          <a:bodyPr wrap="square" lIns="0" tIns="0" rIns="0" bIns="0" rtlCol="0" anchor="ctr"/>
-          <a:lstStyle/>
-          <a:p>
-            <a:pPr algn="ctr" indent="0" marL="0">
-              <a:buNone/>
-            </a:pPr>
-            <a:r>
-              <a:rPr lang="en-US" sz="1000" i="1" dirty="0">
+      <p:sp>
+        <p:nvSpPr>
+          <p:cNvPr id="9" name="Text 7"/>
+          <p:cNvSpPr/>
+          <p:nvPr/>
+        </p:nvSpPr>
+        <p:spPr>
+          <a:xfrm>
+            <a:off x="7470648" y="3319272"/>
+            <a:ext cx="4032504" cy="822960"/>
+          </a:xfrm>
+          <a:prstGeom prst="rect">
+            <a:avLst/>
+          </a:prstGeom>
+          <a:noFill/>
+          <a:ln/>
+        </p:spPr>
+        <p:txBody>
+          <a:bodyPr wrap="square" lIns="0" tIns="0" rIns="0" bIns="0" rtlCol="0" anchor="b"/>
+          <a:lstStyle/>
+          <a:p>
+            <a:pPr algn="l" indent="0" marL="0">
+              <a:buNone/>
+            </a:pPr>
+            <a:r>
+              <a:rPr lang="en-US" sz="2800" b="1" dirty="0">
+                <a:solidFill>
+                  <a:srgbClr val="4A3AA7"/>
+                </a:solidFill>
+                <a:latin typeface="Cambria" pitchFamily="34" charset="0"/>
+                <a:ea typeface="Cambria" pitchFamily="34" charset="-122"/>
+                <a:cs typeface="Cambria" pitchFamily="34" charset="-120"/>
+              </a:rPr>
+              <a:t>51,6 %</a:t>
+            </a:r>
+            <a:endParaRPr lang="en-US" sz="2800" dirty="0"/>
+          </a:p>
+        </p:txBody>
+      </p:sp>
+      <p:sp>
+        <p:nvSpPr>
+          <p:cNvPr id="10" name="Text 8"/>
+          <p:cNvSpPr/>
+          <p:nvPr/>
+        </p:nvSpPr>
+        <p:spPr>
+          <a:xfrm>
+            <a:off x="7470648" y="4178808"/>
+            <a:ext cx="4032504" cy="384048"/>
+          </a:xfrm>
+          <a:prstGeom prst="rect">
+            <a:avLst/>
+          </a:prstGeom>
+          <a:noFill/>
+          <a:ln/>
+        </p:spPr>
+        <p:txBody>
+          <a:bodyPr wrap="square" lIns="0" tIns="0" rIns="0" bIns="0" rtlCol="0" anchor="t"/>
+          <a:lstStyle/>
+          <a:p>
+            <a:pPr algn="l" indent="0" marL="0">
+              <a:buNone/>
+            </a:pPr>
+            <a:r>
+              <a:rPr lang="en-US" sz="1050" dirty="0">
                 <a:solidFill>
                   <a:srgbClr val="52514E"/>
                 </a:solidFill>
@@ -6121,38 +6175,111 @@
                 <a:ea typeface="Calibri" pitchFamily="34" charset="-122"/>
                 <a:cs typeface="Calibri" pitchFamily="34" charset="-120"/>
               </a:rPr>
-              <a:t>Vue d'ensemble</a:t>
-            </a:r>
-            <a:endParaRPr lang="en-US" sz="1000" dirty="0"/>
-          </a:p>
-        </p:txBody>
-      </p:sp>
-      <p:sp>
-        <p:nvSpPr>
-          <p:cNvPr id="10" name="Text 6"/>
-          <p:cNvSpPr/>
-          <p:nvPr/>
-        </p:nvSpPr>
-        <p:spPr>
-          <a:xfrm>
-            <a:off x="8549640" y="3931920"/>
-            <a:ext cx="3108960" cy="274320"/>
-          </a:xfrm>
-          <a:prstGeom prst="rect">
-            <a:avLst/>
-          </a:prstGeom>
-          <a:noFill/>
-          <a:ln/>
-        </p:spPr>
-        <p:txBody>
-          <a:bodyPr wrap="square" lIns="0" tIns="0" rIns="0" bIns="0" rtlCol="0" anchor="ctr"/>
-          <a:lstStyle/>
-          <a:p>
-            <a:pPr algn="ctr" indent="0" marL="0">
-              <a:buNone/>
-            </a:pPr>
-            <a:r>
-              <a:rPr lang="en-US" sz="1000" i="1" dirty="0">
+              <a:t>des dossiers concentrés sur 2 vendeurs pivots</a:t>
+            </a:r>
+            <a:endParaRPr lang="en-US" sz="1050" dirty="0"/>
+          </a:p>
+        </p:txBody>
+      </p:sp>
+      <p:sp>
+        <p:nvSpPr>
+          <p:cNvPr id="11" name="Shape 9"/>
+          <p:cNvSpPr/>
+          <p:nvPr/>
+        </p:nvSpPr>
+        <p:spPr>
+          <a:xfrm>
+            <a:off x="7360920" y="4800600"/>
+            <a:ext cx="4251960" cy="1371600"/>
+          </a:xfrm>
+          <a:prstGeom prst="roundRect">
+            <a:avLst>
+              <a:gd name="adj" fmla="val 5333"/>
+            </a:avLst>
+          </a:prstGeom>
+          <a:solidFill>
+            <a:srgbClr val="FFFFFF"/>
+          </a:solidFill>
+          <a:ln w="12700">
+            <a:solidFill>
+              <a:srgbClr val="E3E7EE"/>
+            </a:solidFill>
+            <a:prstDash val="solid"/>
+          </a:ln>
+          <a:effectLst>
+            <a:outerShdw sx="100000" sy="100000" kx="0" ky="0" algn="bl" rotWithShape="0" blurRad="76200" dist="25400" dir="5400000">
+              <a:srgbClr val="1A1A19">
+                <a:alpha val="12000"/>
+              </a:srgbClr>
+            </a:outerShdw>
+          </a:effectLst>
+        </p:spPr>
+      </p:sp>
+      <p:sp>
+        <p:nvSpPr>
+          <p:cNvPr id="12" name="Text 10"/>
+          <p:cNvSpPr/>
+          <p:nvPr/>
+        </p:nvSpPr>
+        <p:spPr>
+          <a:xfrm>
+            <a:off x="7470648" y="4873752"/>
+            <a:ext cx="4032504" cy="822960"/>
+          </a:xfrm>
+          <a:prstGeom prst="rect">
+            <a:avLst/>
+          </a:prstGeom>
+          <a:noFill/>
+          <a:ln/>
+        </p:spPr>
+        <p:txBody>
+          <a:bodyPr wrap="square" lIns="0" tIns="0" rIns="0" bIns="0" rtlCol="0" anchor="b"/>
+          <a:lstStyle/>
+          <a:p>
+            <a:pPr algn="l" indent="0" marL="0">
+              <a:buNone/>
+            </a:pPr>
+            <a:r>
+              <a:rPr lang="en-US" sz="2000" b="1" dirty="0">
+                <a:solidFill>
+                  <a:srgbClr val="E34948"/>
+                </a:solidFill>
+                <a:latin typeface="Cambria" pitchFamily="34" charset="0"/>
+                <a:ea typeface="Cambria" pitchFamily="34" charset="-122"/>
+                <a:cs typeface="Cambria" pitchFamily="34" charset="-120"/>
+              </a:rPr>
+              <a:t>9,0 % / 29,6 %</a:t>
+            </a:r>
+            <a:endParaRPr lang="en-US" sz="2000" dirty="0"/>
+          </a:p>
+        </p:txBody>
+      </p:sp>
+      <p:sp>
+        <p:nvSpPr>
+          <p:cNvPr id="13" name="Text 11"/>
+          <p:cNvSpPr/>
+          <p:nvPr/>
+        </p:nvSpPr>
+        <p:spPr>
+          <a:xfrm>
+            <a:off x="7470648" y="5733288"/>
+            <a:ext cx="4032504" cy="384048"/>
+          </a:xfrm>
+          <a:prstGeom prst="rect">
+            <a:avLst/>
+          </a:prstGeom>
+          <a:noFill/>
+          <a:ln/>
+        </p:spPr>
+        <p:txBody>
+          <a:bodyPr wrap="square" lIns="0" tIns="0" rIns="0" bIns="0" rtlCol="0" anchor="t"/>
+          <a:lstStyle/>
+          <a:p>
+            <a:pPr algn="l" indent="0" marL="0">
+              <a:buNone/>
+            </a:pPr>
+            <a:r>
+              <a:rPr lang="en-US" sz="1050" dirty="0">
                 <a:solidFill>
                   <a:srgbClr val="52514E"/>
                 </a:solidFill>
@@ -6160,49 +6287,22 @@
                 <a:ea typeface="Calibri" pitchFamily="34" charset="-122"/>
                 <a:cs typeface="Calibri" pitchFamily="34" charset="-120"/>
               </a:rPr>
-              <a:t>Alertes marge</a:t>
-            </a:r>
-            <a:endParaRPr lang="en-US" sz="1000" dirty="0"/>
-          </a:p>
-        </p:txBody>
-      </p:sp>
-      <p:sp>
-        <p:nvSpPr>
-          <p:cNvPr id="11" name="Shape 7"/>
-          <p:cNvSpPr/>
-          <p:nvPr/>
-        </p:nvSpPr>
-        <p:spPr>
-          <a:xfrm>
-            <a:off x="4937760" y="4160520"/>
-            <a:ext cx="6720840" cy="1508760"/>
-          </a:xfrm>
-          <a:prstGeom prst="roundRect">
-            <a:avLst>
-              <a:gd name="adj" fmla="val 4848"/>
-            </a:avLst>
-          </a:prstGeom>
-          <a:solidFill>
-            <a:srgbClr val="F6F8FB"/>
-          </a:solidFill>
-          <a:ln w="12700">
-            <a:solidFill>
-              <a:srgbClr val="EDA100"/>
-            </a:solidFill>
-            <a:prstDash val="solid"/>
-          </a:ln>
-        </p:spPr>
-      </p:sp>
-      <p:sp>
-        <p:nvSpPr>
-          <p:cNvPr id="12" name="Text 8"/>
-          <p:cNvSpPr/>
-          <p:nvPr/>
-        </p:nvSpPr>
-        <p:spPr>
-          <a:xfrm>
-            <a:off x="5166360" y="4160520"/>
-            <a:ext cx="6309360" cy="1508760"/>
+              <a:t>désistement : pivot interne vs prescripteur externe</a:t>
+            </a:r>
+            <a:endParaRPr lang="en-US" sz="1050" dirty="0"/>
+          </a:p>
+        </p:txBody>
+      </p:sp>
+      <p:sp>
+        <p:nvSpPr>
+          <p:cNvPr id="14" name="Text 12"/>
+          <p:cNvSpPr/>
+          <p:nvPr/>
+        </p:nvSpPr>
+        <p:spPr>
+          <a:xfrm>
+            <a:off x="548640" y="6510528"/>
+            <a:ext cx="5486400" cy="274320"/>
           </a:xfrm>
           <a:prstGeom prst="rect">
             <a:avLst/>
@@ -6218,53 +6318,14 @@
               <a:buNone/>
             </a:pPr>
             <a:r>
-              <a:rPr lang="en-US" sz="1300" i="1" dirty="0">
-                <a:solidFill>
-                  <a:srgbClr val="1A1A19"/>
+              <a:rPr lang="en-US" sz="900" dirty="0">
+                <a:solidFill>
+                  <a:srgbClr val="9A9A95"/>
                 </a:solidFill>
                 <a:latin typeface="Calibri" pitchFamily="34" charset="0"/>
                 <a:ea typeface="Calibri" pitchFamily="34" charset="-122"/>
                 <a:cs typeface="Calibri" pitchFamily="34" charset="-120"/>
               </a:rPr>
-              <a:t>Leçon de conduite de projet : la première version parlait le vocabulaire des statistiques (F1, R²) — trop technique pour ses utilisateurs. Reconstruite en langage métier.</a:t>
-            </a:r>
-            <a:endParaRPr lang="en-US" sz="1300" dirty="0"/>
-          </a:p>
-        </p:txBody>
-      </p:sp>
-      <p:sp>
-        <p:nvSpPr>
-          <p:cNvPr id="13" name="Text 9"/>
-          <p:cNvSpPr/>
-          <p:nvPr/>
-        </p:nvSpPr>
-        <p:spPr>
-          <a:xfrm>
-            <a:off x="548640" y="6510528"/>
-            <a:ext cx="5486400" cy="274320"/>
-          </a:xfrm>
-          <a:prstGeom prst="rect">
-            <a:avLst/>
-          </a:prstGeom>
-          <a:noFill/>
-          <a:ln/>
-        </p:spPr>
-        <p:txBody>
-          <a:bodyPr wrap="square" lIns="0" tIns="0" rIns="0" bIns="0" rtlCol="0" anchor="ctr"/>
-          <a:lstStyle/>
-          <a:p>
-            <a:pPr indent="0" marL="0">
-              <a:buNone/>
-            </a:pPr>
-            <a:r>
-              <a:rPr lang="en-US" sz="900" dirty="0">
-                <a:solidFill>
-                  <a:srgbClr val="9A9A95"/>
-                </a:solidFill>
-                <a:latin typeface="Calibri" pitchFamily="34" charset="0"/>
-                <a:ea typeface="Calibri" pitchFamily="34" charset="-122"/>
-                <a:cs typeface="Calibri" pitchFamily="34" charset="-120"/>
-              </a:rPr>
               <a:t>Copilote Financier — Groupe Angelotti</a:t>
             </a:r>
             <a:endParaRPr lang="en-US" sz="900" dirty="0"/>
@@ -6273,7 +6334,7 @@
       </p:sp>
       <p:sp>
         <p:nvSpPr>
-          <p:cNvPr id="14" name="Text 10"/>
+          <p:cNvPr id="15" name="Text 13"/>
           <p:cNvSpPr/>
           <p:nvPr/>
         </p:nvSpPr>
@@ -6375,7 +6436,7 @@
                 <a:ea typeface="Calibri" pitchFamily="34" charset="-122"/>
                 <a:cs typeface="Calibri" pitchFamily="34" charset="-120"/>
               </a:rPr>
-              <a:t>RÉFLEXION TRANSVERSALE</a:t>
+              <a:t>LE COPILOTE FINANCIER EN USAGE</a:t>
             </a:r>
             <a:endParaRPr lang="en-US" sz="1200" dirty="0"/>
           </a:p>
@@ -6414,7 +6475,7 @@
                 <a:ea typeface="Cambria" pitchFamily="34" charset="-122"/>
                 <a:cs typeface="Cambria" pitchFamily="34" charset="-120"/>
               </a:rPr>
-              <a:t>Un traducteur avant d'être un modélisateur</a:t>
+              <a:t>La plateforme : cinq pages pour la direction financière</a:t>
             </a:r>
             <a:endParaRPr lang="en-US" sz="2800" dirty="0"/>
           </a:p>
@@ -6428,24 +6489,31 @@
         </p:nvSpPr>
         <p:spPr>
           <a:xfrm>
-            <a:off x="548640" y="1508760"/>
-            <a:ext cx="11064240" cy="640080"/>
-          </a:xfrm>
-          <a:prstGeom prst="rect">
-            <a:avLst/>
-          </a:prstGeom>
-          <a:noFill/>
-          <a:ln/>
-        </p:spPr>
-        <p:txBody>
-          <a:bodyPr wrap="square" lIns="0" tIns="0" rIns="0" bIns="0" rtlCol="0" anchor="ctr"/>
-          <a:lstStyle/>
-          <a:p>
-            <a:pPr indent="0" marL="0">
-              <a:buNone/>
-            </a:pPr>
-            <a:r>
-              <a:rPr lang="en-US" sz="1500" dirty="0">
+            <a:off x="548640" y="1554480"/>
+            <a:ext cx="4160520" cy="4754880"/>
+          </a:xfrm>
+          <a:prstGeom prst="rect">
+            <a:avLst/>
+          </a:prstGeom>
+          <a:noFill/>
+          <a:ln/>
+        </p:spPr>
+        <p:txBody>
+          <a:bodyPr wrap="square" lIns="0" tIns="0" rIns="0" bIns="0" rtlCol="0" anchor="t"/>
+          <a:lstStyle/>
+          <a:p>
+            <a:pPr marL="203200" indent="-203200">
+              <a:lnSpc>
+                <a:spcPct val="106000"/>
+              </a:lnSpc>
+              <a:spcAft>
+                <a:spcPts val="1100"/>
+              </a:spcAft>
+              <a:buSzPct val="100000"/>
+              <a:buChar char="•"/>
+            </a:pPr>
+            <a:r>
+              <a:rPr lang="en-US" sz="1250" dirty="0">
                 <a:solidFill>
                   <a:srgbClr val="1A1A19"/>
                 </a:solidFill>
@@ -6453,9 +6521,105 @@
                 <a:ea typeface="Calibri" pitchFamily="34" charset="-122"/>
                 <a:cs typeface="Calibri" pitchFamily="34" charset="-120"/>
               </a:rPr>
-              <a:t>Traduire une gêne métier en question calculable, puis un résultat statistique en information sur laquelle décider. Le régime de preuve se déduit de la nature du livrable :</a:t>
-            </a:r>
-            <a:endParaRPr lang="en-US" sz="1500" dirty="0"/>
+              <a:t>Vue d'ensemble : 147 opérations, 421 lots en stock</a:t>
+            </a:r>
+            <a:endParaRPr lang="en-US" sz="1250" dirty="0"/>
+          </a:p>
+          <a:p>
+            <a:pPr marL="203200" indent="-203200">
+              <a:lnSpc>
+                <a:spcPct val="106000"/>
+              </a:lnSpc>
+              <a:spcAft>
+                <a:spcPts val="1100"/>
+              </a:spcAft>
+              <a:buSzPct val="100000"/>
+              <a:buChar char="•"/>
+            </a:pPr>
+            <a:r>
+              <a:rPr lang="en-US" sz="1250" dirty="0">
+                <a:solidFill>
+                  <a:srgbClr val="1A1A19"/>
+                </a:solidFill>
+                <a:latin typeface="Calibri" pitchFamily="34" charset="0"/>
+                <a:ea typeface="Calibri" pitchFamily="34" charset="-122"/>
+                <a:cs typeface="Calibri" pitchFamily="34" charset="-120"/>
+              </a:rPr>
+              <a:t>Alertes marge : 10 en alerte sur 68 suffisamment engagées</a:t>
+            </a:r>
+            <a:endParaRPr lang="en-US" sz="1250" dirty="0"/>
+          </a:p>
+          <a:p>
+            <a:pPr marL="203200" indent="-203200">
+              <a:lnSpc>
+                <a:spcPct val="106000"/>
+              </a:lnSpc>
+              <a:spcAft>
+                <a:spcPts val="1100"/>
+              </a:spcAft>
+              <a:buSzPct val="100000"/>
+              <a:buChar char="•"/>
+            </a:pPr>
+            <a:r>
+              <a:rPr lang="en-US" sz="1250" dirty="0">
+                <a:solidFill>
+                  <a:srgbClr val="1A1A19"/>
+                </a:solidFill>
+                <a:latin typeface="Calibri" pitchFamily="34" charset="0"/>
+                <a:ea typeface="Calibri" pitchFamily="34" charset="-122"/>
+                <a:cs typeface="Calibri" pitchFamily="34" charset="-120"/>
+              </a:rPr>
+              <a:t>Rythme de vente : simulateur de taux 2026</a:t>
+            </a:r>
+            <a:endParaRPr lang="en-US" sz="1250" dirty="0"/>
+          </a:p>
+          <a:p>
+            <a:pPr marL="203200" indent="-203200">
+              <a:lnSpc>
+                <a:spcPct val="106000"/>
+              </a:lnSpc>
+              <a:spcAft>
+                <a:spcPts val="1100"/>
+              </a:spcAft>
+              <a:buSzPct val="100000"/>
+              <a:buChar char="•"/>
+            </a:pPr>
+            <a:r>
+              <a:rPr lang="en-US" sz="1250" dirty="0">
+                <a:solidFill>
+                  <a:srgbClr val="1A1A19"/>
+                </a:solidFill>
+                <a:latin typeface="Calibri" pitchFamily="34" charset="0"/>
+                <a:ea typeface="Calibri" pitchFamily="34" charset="-122"/>
+                <a:cs typeface="Calibri" pitchFamily="34" charset="-120"/>
+              </a:rPr>
+              <a:t>Pilotage des prix : lots hors marché + grille ajustée</a:t>
+            </a:r>
+            <a:endParaRPr lang="en-US" sz="1250" dirty="0"/>
+          </a:p>
+          <a:p>
+            <a:pPr marL="203200" indent="-203200">
+              <a:lnSpc>
+                <a:spcPct val="106000"/>
+              </a:lnSpc>
+              <a:spcAft>
+                <a:spcPts val="1100"/>
+              </a:spcAft>
+              <a:buSzPct val="100000"/>
+              <a:buChar char="•"/>
+            </a:pPr>
+            <a:r>
+              <a:rPr lang="en-US" sz="1250" dirty="0">
+                <a:solidFill>
+                  <a:srgbClr val="1A1A19"/>
+                </a:solidFill>
+                <a:latin typeface="Calibri" pitchFamily="34" charset="0"/>
+                <a:ea typeface="Calibri" pitchFamily="34" charset="-122"/>
+                <a:cs typeface="Calibri" pitchFamily="34" charset="-120"/>
+              </a:rPr>
+              <a:t>Qualité commerciale : alerte de saisie + recherche de dossiers</a:t>
+            </a:r>
+            <a:endParaRPr lang="en-US" sz="1250" dirty="0"/>
           </a:p>
         </p:txBody>
       </p:sp>
@@ -6467,12 +6631,12 @@
         </p:nvSpPr>
         <p:spPr>
           <a:xfrm>
-            <a:off x="1207008" y="2258568"/>
-            <a:ext cx="9747504" cy="4059936"/>
+            <a:off x="4864608" y="1481328"/>
+            <a:ext cx="3529584" cy="2212848"/>
           </a:xfrm>
           <a:prstGeom prst="roundRect">
             <a:avLst>
-              <a:gd name="adj" fmla="val 1351"/>
+              <a:gd name="adj" fmla="val 2479"/>
             </a:avLst>
           </a:prstGeom>
           <a:solidFill>
@@ -6495,7 +6659,7 @@
       </p:sp>
       <p:pic>
         <p:nvPicPr>
-          <p:cNvPr id="6" name="Image 0" descr="/tmp/claude-0/-home-user-MemoireM2S2/bac073a6-7c4e-552a-9627-815aeb6fe82a/scratchpad/figs/p35-000.png">    </p:cNvPr>
+          <p:cNvPr id="6" name="Image 0" descr="/tmp/claude-0/-home-user-MemoireM2S2/bac073a6-7c4e-552a-9627-815aeb6fe82a/scratchpad/figs/p31-000.png">    </p:cNvPr>
           <p:cNvPicPr>
             <a:picLocks noChangeAspect="1"/>
           </p:cNvPicPr>
@@ -6508,8 +6672,8 @@
         </p:blipFill>
         <p:spPr>
           <a:xfrm>
-            <a:off x="1280160" y="2331720"/>
-            <a:ext cx="9601200" cy="3913632"/>
+            <a:off x="4937760" y="1554480"/>
+            <a:ext cx="3383280" cy="2066544"/>
           </a:xfrm>
           <a:prstGeom prst="rect">
             <a:avLst/>
@@ -6518,14 +6682,71 @@
       </p:pic>
       <p:sp>
         <p:nvSpPr>
-          <p:cNvPr id="7" name="Text 4"/>
-          <p:cNvSpPr/>
-          <p:nvPr/>
-        </p:nvSpPr>
-        <p:spPr>
-          <a:xfrm>
-            <a:off x="548640" y="6510528"/>
-            <a:ext cx="5486400" cy="274320"/>
+          <p:cNvPr id="7" name="Shape 4"/>
+          <p:cNvSpPr/>
+          <p:nvPr/>
+        </p:nvSpPr>
+        <p:spPr>
+          <a:xfrm>
+            <a:off x="8476488" y="1481328"/>
+            <a:ext cx="3255264" cy="2414016"/>
+          </a:xfrm>
+          <a:prstGeom prst="roundRect">
+            <a:avLst>
+              <a:gd name="adj" fmla="val 2273"/>
+            </a:avLst>
+          </a:prstGeom>
+          <a:solidFill>
+            <a:srgbClr val="FFFFFF"/>
+          </a:solidFill>
+          <a:ln w="12700">
+            <a:solidFill>
+              <a:srgbClr val="E3E7EE"/>
+            </a:solidFill>
+            <a:prstDash val="solid"/>
+          </a:ln>
+          <a:effectLst>
+            <a:outerShdw sx="100000" sy="100000" kx="0" ky="0" algn="bl" rotWithShape="0" blurRad="101600" dist="25400" dir="5400000">
+              <a:srgbClr val="1A1A19">
+                <a:alpha val="15000"/>
+              </a:srgbClr>
+            </a:outerShdw>
+          </a:effectLst>
+        </p:spPr>
+      </p:sp>
+      <p:pic>
+        <p:nvPicPr>
+          <p:cNvPr id="8" name="Image 1" descr="/tmp/claude-0/-home-user-MemoireM2S2/bac073a6-7c4e-552a-9627-815aeb6fe82a/scratchpad/figs/p31-001.png">    </p:cNvPr>
+          <p:cNvPicPr>
+            <a:picLocks noChangeAspect="1"/>
+          </p:cNvPicPr>
+          <p:nvPr/>
+        </p:nvPicPr>
+        <p:blipFill>
+          <a:blip r:embed="rId2"/>
+          <a:srcRect l="0" r="0" t="0" b="0"/>
+          <a:stretch/>
+        </p:blipFill>
+        <p:spPr>
+          <a:xfrm>
+            <a:off x="8549640" y="1554480"/>
+            <a:ext cx="3108960" cy="2267712"/>
+          </a:xfrm>
+          <a:prstGeom prst="rect">
+            <a:avLst/>
+          </a:prstGeom>
+        </p:spPr>
+      </p:pic>
+      <p:sp>
+        <p:nvSpPr>
+          <p:cNvPr id="9" name="Text 5"/>
+          <p:cNvSpPr/>
+          <p:nvPr/>
+        </p:nvSpPr>
+        <p:spPr>
+          <a:xfrm>
+            <a:off x="4937760" y="3703320"/>
+            <a:ext cx="3383280" cy="274320"/>
           </a:xfrm>
           <a:prstGeom prst="rect">
             <a:avLst/>
@@ -6537,18 +6758,162 @@
           <a:bodyPr wrap="square" lIns="0" tIns="0" rIns="0" bIns="0" rtlCol="0" anchor="ctr"/>
           <a:lstStyle/>
           <a:p>
-            <a:pPr indent="0" marL="0">
-              <a:buNone/>
-            </a:pPr>
-            <a:r>
-              <a:rPr lang="en-US" sz="900" dirty="0">
-                <a:solidFill>
-                  <a:srgbClr val="9A9A95"/>
+            <a:pPr algn="ctr" indent="0" marL="0">
+              <a:buNone/>
+            </a:pPr>
+            <a:r>
+              <a:rPr lang="en-US" sz="1000" i="1" dirty="0">
+                <a:solidFill>
+                  <a:srgbClr val="52514E"/>
                 </a:solidFill>
                 <a:latin typeface="Calibri" pitchFamily="34" charset="0"/>
                 <a:ea typeface="Calibri" pitchFamily="34" charset="-122"/>
                 <a:cs typeface="Calibri" pitchFamily="34" charset="-120"/>
               </a:rPr>
+              <a:t>Vue d'ensemble</a:t>
+            </a:r>
+            <a:endParaRPr lang="en-US" sz="1000" dirty="0"/>
+          </a:p>
+        </p:txBody>
+      </p:sp>
+      <p:sp>
+        <p:nvSpPr>
+          <p:cNvPr id="10" name="Text 6"/>
+          <p:cNvSpPr/>
+          <p:nvPr/>
+        </p:nvSpPr>
+        <p:spPr>
+          <a:xfrm>
+            <a:off x="8549640" y="3931920"/>
+            <a:ext cx="3108960" cy="274320"/>
+          </a:xfrm>
+          <a:prstGeom prst="rect">
+            <a:avLst/>
+          </a:prstGeom>
+          <a:noFill/>
+          <a:ln/>
+        </p:spPr>
+        <p:txBody>
+          <a:bodyPr wrap="square" lIns="0" tIns="0" rIns="0" bIns="0" rtlCol="0" anchor="ctr"/>
+          <a:lstStyle/>
+          <a:p>
+            <a:pPr algn="ctr" indent="0" marL="0">
+              <a:buNone/>
+            </a:pPr>
+            <a:r>
+              <a:rPr lang="en-US" sz="1000" i="1" dirty="0">
+                <a:solidFill>
+                  <a:srgbClr val="52514E"/>
+                </a:solidFill>
+                <a:latin typeface="Calibri" pitchFamily="34" charset="0"/>
+                <a:ea typeface="Calibri" pitchFamily="34" charset="-122"/>
+                <a:cs typeface="Calibri" pitchFamily="34" charset="-120"/>
+              </a:rPr>
+              <a:t>Alertes marge</a:t>
+            </a:r>
+            <a:endParaRPr lang="en-US" sz="1000" dirty="0"/>
+          </a:p>
+        </p:txBody>
+      </p:sp>
+      <p:sp>
+        <p:nvSpPr>
+          <p:cNvPr id="11" name="Shape 7"/>
+          <p:cNvSpPr/>
+          <p:nvPr/>
+        </p:nvSpPr>
+        <p:spPr>
+          <a:xfrm>
+            <a:off x="4937760" y="4160520"/>
+            <a:ext cx="6720840" cy="1508760"/>
+          </a:xfrm>
+          <a:prstGeom prst="roundRect">
+            <a:avLst>
+              <a:gd name="adj" fmla="val 4848"/>
+            </a:avLst>
+          </a:prstGeom>
+          <a:solidFill>
+            <a:srgbClr val="F6F8FB"/>
+          </a:solidFill>
+          <a:ln w="12700">
+            <a:solidFill>
+              <a:srgbClr val="EDA100"/>
+            </a:solidFill>
+            <a:prstDash val="solid"/>
+          </a:ln>
+        </p:spPr>
+      </p:sp>
+      <p:sp>
+        <p:nvSpPr>
+          <p:cNvPr id="12" name="Text 8"/>
+          <p:cNvSpPr/>
+          <p:nvPr/>
+        </p:nvSpPr>
+        <p:spPr>
+          <a:xfrm>
+            <a:off x="5166360" y="4160520"/>
+            <a:ext cx="6309360" cy="1508760"/>
+          </a:xfrm>
+          <a:prstGeom prst="rect">
+            <a:avLst/>
+          </a:prstGeom>
+          <a:noFill/>
+          <a:ln/>
+        </p:spPr>
+        <p:txBody>
+          <a:bodyPr wrap="square" lIns="0" tIns="0" rIns="0" bIns="0" rtlCol="0" anchor="ctr"/>
+          <a:lstStyle/>
+          <a:p>
+            <a:pPr indent="0" marL="0">
+              <a:buNone/>
+            </a:pPr>
+            <a:r>
+              <a:rPr lang="en-US" sz="1300" i="1" dirty="0">
+                <a:solidFill>
+                  <a:srgbClr val="1A1A19"/>
+                </a:solidFill>
+                <a:latin typeface="Calibri" pitchFamily="34" charset="0"/>
+                <a:ea typeface="Calibri" pitchFamily="34" charset="-122"/>
+                <a:cs typeface="Calibri" pitchFamily="34" charset="-120"/>
+              </a:rPr>
+              <a:t>Leçon de conduite de projet : la première version parlait le vocabulaire des statistiques (F1, R²) — trop technique pour ses utilisateurs. Reconstruite en langage métier.</a:t>
+            </a:r>
+            <a:endParaRPr lang="en-US" sz="1300" dirty="0"/>
+          </a:p>
+        </p:txBody>
+      </p:sp>
+      <p:sp>
+        <p:nvSpPr>
+          <p:cNvPr id="13" name="Text 9"/>
+          <p:cNvSpPr/>
+          <p:nvPr/>
+        </p:nvSpPr>
+        <p:spPr>
+          <a:xfrm>
+            <a:off x="548640" y="6510528"/>
+            <a:ext cx="5486400" cy="274320"/>
+          </a:xfrm>
+          <a:prstGeom prst="rect">
+            <a:avLst/>
+          </a:prstGeom>
+          <a:noFill/>
+          <a:ln/>
+        </p:spPr>
+        <p:txBody>
+          <a:bodyPr wrap="square" lIns="0" tIns="0" rIns="0" bIns="0" rtlCol="0" anchor="ctr"/>
+          <a:lstStyle/>
+          <a:p>
+            <a:pPr indent="0" marL="0">
+              <a:buNone/>
+            </a:pPr>
+            <a:r>
+              <a:rPr lang="en-US" sz="900" dirty="0">
+                <a:solidFill>
+                  <a:srgbClr val="9A9A95"/>
+                </a:solidFill>
+                <a:latin typeface="Calibri" pitchFamily="34" charset="0"/>
+                <a:ea typeface="Calibri" pitchFamily="34" charset="-122"/>
+                <a:cs typeface="Calibri" pitchFamily="34" charset="-120"/>
+              </a:rPr>
               <a:t>Copilote Financier — Groupe Angelotti</a:t>
             </a:r>
             <a:endParaRPr lang="en-US" sz="900" dirty="0"/>
@@ -6557,7 +6922,7 @@
       </p:sp>
       <p:sp>
         <p:nvSpPr>
-          <p:cNvPr id="8" name="Text 5"/>
+          <p:cNvPr id="14" name="Text 10"/>
           <p:cNvSpPr/>
           <p:nvPr/>
         </p:nvSpPr>
@@ -6659,6 +7024,290 @@
                 <a:ea typeface="Calibri" pitchFamily="34" charset="-122"/>
                 <a:cs typeface="Calibri" pitchFamily="34" charset="-120"/>
               </a:rPr>
+              <a:t>RÉFLEXION TRANSVERSALE</a:t>
+            </a:r>
+            <a:endParaRPr lang="en-US" sz="1200" dirty="0"/>
+          </a:p>
+        </p:txBody>
+      </p:sp>
+      <p:sp>
+        <p:nvSpPr>
+          <p:cNvPr id="3" name="Text 1"/>
+          <p:cNvSpPr/>
+          <p:nvPr/>
+        </p:nvSpPr>
+        <p:spPr>
+          <a:xfrm>
+            <a:off x="548640" y="658368"/>
+            <a:ext cx="10515600" cy="822960"/>
+          </a:xfrm>
+          <a:prstGeom prst="rect">
+            <a:avLst/>
+          </a:prstGeom>
+          <a:noFill/>
+          <a:ln/>
+        </p:spPr>
+        <p:txBody>
+          <a:bodyPr wrap="square" lIns="0" tIns="0" rIns="0" bIns="0" rtlCol="0" anchor="ctr"/>
+          <a:lstStyle/>
+          <a:p>
+            <a:pPr indent="0" marL="0">
+              <a:buNone/>
+            </a:pPr>
+            <a:r>
+              <a:rPr lang="en-US" sz="2800" b="1" dirty="0">
+                <a:solidFill>
+                  <a:srgbClr val="1A1A19"/>
+                </a:solidFill>
+                <a:latin typeface="Cambria" pitchFamily="34" charset="0"/>
+                <a:ea typeface="Cambria" pitchFamily="34" charset="-122"/>
+                <a:cs typeface="Cambria" pitchFamily="34" charset="-120"/>
+              </a:rPr>
+              <a:t>Un traducteur avant d'être un modélisateur</a:t>
+            </a:r>
+            <a:endParaRPr lang="en-US" sz="2800" dirty="0"/>
+          </a:p>
+        </p:txBody>
+      </p:sp>
+      <p:sp>
+        <p:nvSpPr>
+          <p:cNvPr id="4" name="Text 2"/>
+          <p:cNvSpPr/>
+          <p:nvPr/>
+        </p:nvSpPr>
+        <p:spPr>
+          <a:xfrm>
+            <a:off x="548640" y="1508760"/>
+            <a:ext cx="11064240" cy="640080"/>
+          </a:xfrm>
+          <a:prstGeom prst="rect">
+            <a:avLst/>
+          </a:prstGeom>
+          <a:noFill/>
+          <a:ln/>
+        </p:spPr>
+        <p:txBody>
+          <a:bodyPr wrap="square" lIns="0" tIns="0" rIns="0" bIns="0" rtlCol="0" anchor="ctr"/>
+          <a:lstStyle/>
+          <a:p>
+            <a:pPr indent="0" marL="0">
+              <a:buNone/>
+            </a:pPr>
+            <a:r>
+              <a:rPr lang="en-US" sz="1500" dirty="0">
+                <a:solidFill>
+                  <a:srgbClr val="1A1A19"/>
+                </a:solidFill>
+                <a:latin typeface="Calibri" pitchFamily="34" charset="0"/>
+                <a:ea typeface="Calibri" pitchFamily="34" charset="-122"/>
+                <a:cs typeface="Calibri" pitchFamily="34" charset="-120"/>
+              </a:rPr>
+              <a:t>Traduire une gêne métier en question calculable, puis un résultat statistique en information sur laquelle décider. Le régime de preuve se déduit de la nature du livrable :</a:t>
+            </a:r>
+            <a:endParaRPr lang="en-US" sz="1500" dirty="0"/>
+          </a:p>
+        </p:txBody>
+      </p:sp>
+      <p:sp>
+        <p:nvSpPr>
+          <p:cNvPr id="5" name="Shape 3"/>
+          <p:cNvSpPr/>
+          <p:nvPr/>
+        </p:nvSpPr>
+        <p:spPr>
+          <a:xfrm>
+            <a:off x="1207008" y="2258568"/>
+            <a:ext cx="9747504" cy="4059936"/>
+          </a:xfrm>
+          <a:prstGeom prst="roundRect">
+            <a:avLst>
+              <a:gd name="adj" fmla="val 1351"/>
+            </a:avLst>
+          </a:prstGeom>
+          <a:solidFill>
+            <a:srgbClr val="FFFFFF"/>
+          </a:solidFill>
+          <a:ln w="12700">
+            <a:solidFill>
+              <a:srgbClr val="E3E7EE"/>
+            </a:solidFill>
+            <a:prstDash val="solid"/>
+          </a:ln>
+          <a:effectLst>
+            <a:outerShdw sx="100000" sy="100000" kx="0" ky="0" algn="bl" rotWithShape="0" blurRad="101600" dist="25400" dir="5400000">
+              <a:srgbClr val="1A1A19">
+                <a:alpha val="15000"/>
+              </a:srgbClr>
+            </a:outerShdw>
+          </a:effectLst>
+        </p:spPr>
+      </p:sp>
+      <p:pic>
+        <p:nvPicPr>
+          <p:cNvPr id="6" name="Image 0" descr="/tmp/claude-0/-home-user-MemoireM2S2/bac073a6-7c4e-552a-9627-815aeb6fe82a/scratchpad/figs/p35-000.png">    </p:cNvPr>
+          <p:cNvPicPr>
+            <a:picLocks noChangeAspect="1"/>
+          </p:cNvPicPr>
+          <p:nvPr/>
+        </p:nvPicPr>
+        <p:blipFill>
+          <a:blip r:embed="rId1"/>
+          <a:srcRect l="0" r="0" t="0" b="0"/>
+          <a:stretch/>
+        </p:blipFill>
+        <p:spPr>
+          <a:xfrm>
+            <a:off x="1280160" y="2331720"/>
+            <a:ext cx="9601200" cy="3913632"/>
+          </a:xfrm>
+          <a:prstGeom prst="rect">
+            <a:avLst/>
+          </a:prstGeom>
+        </p:spPr>
+      </p:pic>
+      <p:sp>
+        <p:nvSpPr>
+          <p:cNvPr id="7" name="Text 4"/>
+          <p:cNvSpPr/>
+          <p:nvPr/>
+        </p:nvSpPr>
+        <p:spPr>
+          <a:xfrm>
+            <a:off x="548640" y="6510528"/>
+            <a:ext cx="5486400" cy="274320"/>
+          </a:xfrm>
+          <a:prstGeom prst="rect">
+            <a:avLst/>
+          </a:prstGeom>
+          <a:noFill/>
+          <a:ln/>
+        </p:spPr>
+        <p:txBody>
+          <a:bodyPr wrap="square" lIns="0" tIns="0" rIns="0" bIns="0" rtlCol="0" anchor="ctr"/>
+          <a:lstStyle/>
+          <a:p>
+            <a:pPr indent="0" marL="0">
+              <a:buNone/>
+            </a:pPr>
+            <a:r>
+              <a:rPr lang="en-US" sz="900" dirty="0">
+                <a:solidFill>
+                  <a:srgbClr val="9A9A95"/>
+                </a:solidFill>
+                <a:latin typeface="Calibri" pitchFamily="34" charset="0"/>
+                <a:ea typeface="Calibri" pitchFamily="34" charset="-122"/>
+                <a:cs typeface="Calibri" pitchFamily="34" charset="-120"/>
+              </a:rPr>
+              <a:t>Copilote Financier — Groupe Angelotti</a:t>
+            </a:r>
+            <a:endParaRPr lang="en-US" sz="900" dirty="0"/>
+          </a:p>
+        </p:txBody>
+      </p:sp>
+      <p:sp>
+        <p:nvSpPr>
+          <p:cNvPr id="8" name="Text 5"/>
+          <p:cNvSpPr/>
+          <p:nvPr/>
+        </p:nvSpPr>
+        <p:spPr>
+          <a:xfrm>
+            <a:off x="11430000" y="6510528"/>
+            <a:ext cx="365760" cy="274320"/>
+          </a:xfrm>
+          <a:prstGeom prst="rect">
+            <a:avLst/>
+          </a:prstGeom>
+          <a:noFill/>
+          <a:ln/>
+        </p:spPr>
+        <p:txBody>
+          <a:bodyPr wrap="square" lIns="0" tIns="0" rIns="0" bIns="0" rtlCol="0" anchor="ctr"/>
+          <a:lstStyle/>
+          <a:p>
+            <a:pPr algn="r" indent="0" marL="0">
+              <a:buNone/>
+            </a:pPr>
+            <a:r>
+              <a:rPr lang="en-US" sz="900" dirty="0">
+                <a:solidFill>
+                  <a:srgbClr val="9A9A95"/>
+                </a:solidFill>
+                <a:latin typeface="Calibri" pitchFamily="34" charset="0"/>
+                <a:ea typeface="Calibri" pitchFamily="34" charset="-122"/>
+                <a:cs typeface="Calibri" pitchFamily="34" charset="-120"/>
+              </a:rPr>
+              <a:t>16</a:t>
+            </a:r>
+            <a:endParaRPr lang="en-US" sz="900" dirty="0"/>
+          </a:p>
+        </p:txBody>
+      </p:sp>
+    </p:spTree>
+  </p:cSld>
+  <p:clrMapOvr>
+    <a:masterClrMapping/>
+  </p:clrMapOvr>
+</p:sld>
+</file>
+
+<file path=ppt/slides/slide17.xml><?xml version="1.0" encoding="utf-8"?>
+<p:sld xmlns:a="http://schemas.openxmlformats.org/drawingml/2006/main" xmlns:r="http://schemas.openxmlformats.org/officeDocument/2006/relationships" xmlns:p="http://schemas.openxmlformats.org/presentationml/2006/main">
+  <p:cSld name="Slide 17">
+    <p:bg>
+      <p:bgPr>
+        <a:solidFill>
+          <a:srgbClr val="FFFFFF"/>
+        </a:solidFill>
+      </p:bgPr>
+    </p:bg>
+    <p:spTree>
+      <p:nvGrpSpPr>
+        <p:cNvPr id="1" name=""/>
+        <p:cNvGrpSpPr/>
+        <p:nvPr/>
+      </p:nvGrpSpPr>
+      <p:grpSpPr>
+        <a:xfrm>
+          <a:off x="0" y="0"/>
+          <a:ext cx="0" cy="0"/>
+          <a:chOff x="0" y="0"/>
+          <a:chExt cx="0" cy="0"/>
+        </a:xfrm>
+      </p:grpSpPr>
+      <p:sp>
+        <p:nvSpPr>
+          <p:cNvPr id="2" name="Text 0"/>
+          <p:cNvSpPr/>
+          <p:nvPr/>
+        </p:nvSpPr>
+        <p:spPr>
+          <a:xfrm>
+            <a:off x="548640" y="384048"/>
+            <a:ext cx="8229600" cy="320040"/>
+          </a:xfrm>
+          <a:prstGeom prst="rect">
+            <a:avLst/>
+          </a:prstGeom>
+          <a:noFill/>
+          <a:ln/>
+        </p:spPr>
+        <p:txBody>
+          <a:bodyPr wrap="square" lIns="0" tIns="0" rIns="0" bIns="0" rtlCol="0" anchor="ctr"/>
+          <a:lstStyle/>
+          <a:p>
+            <a:pPr indent="0" marL="0">
+              <a:buNone/>
+            </a:pPr>
+            <a:r>
+              <a:rPr lang="en-US" sz="1200" b="1" spc="200" kern="0" dirty="0">
+                <a:solidFill>
+                  <a:srgbClr val="2A78D6"/>
+                </a:solidFill>
+                <a:latin typeface="Calibri" pitchFamily="34" charset="0"/>
+                <a:ea typeface="Calibri" pitchFamily="34" charset="-122"/>
+                <a:cs typeface="Calibri" pitchFamily="34" charset="-120"/>
+              </a:rPr>
               <a:t>PERSPECTIVES</a:t>
             </a:r>
             <a:endParaRPr lang="en-US" sz="1200" dirty="0"/>
@@ -7337,7 +7986,7 @@
                 <a:ea typeface="Calibri" pitchFamily="34" charset="-122"/>
                 <a:cs typeface="Calibri" pitchFamily="34" charset="-120"/>
               </a:rPr>
-              <a:t>16</a:t>
+              <a:t>17</a:t>
             </a:r>
             <a:endParaRPr lang="en-US" sz="900" dirty="0"/>
           </a:p>
@@ -7351,9 +8000,9 @@
 </p:sld>
 </file>
 
-<file path=ppt/slides/slide17.xml><?xml version="1.0" encoding="utf-8"?>
+<file path=ppt/slides/slide18.xml><?xml version="1.0" encoding="utf-8"?>
 <p:sld xmlns:a="http://schemas.openxmlformats.org/drawingml/2006/main" xmlns:r="http://schemas.openxmlformats.org/officeDocument/2006/relationships" xmlns:p="http://schemas.openxmlformats.org/presentationml/2006/main">
-  <p:cSld name="Slide 17">
+  <p:cSld name="Slide 18">
     <p:bg>
       <p:bgPr>
         <a:solidFill>

--- a/soutenance_copilote_financier.pptx
+++ b/soutenance_copilote_financier.pptx
@@ -23,9 +23,10 @@
     <p:sldId id="271" r:id="rId17"/>
     <p:sldId id="272" r:id="rId18"/>
     <p:sldId id="273" r:id="rId19"/>
+    <p:sldId id="274" r:id="rId20"/>
   </p:sldIdLst>
   <p:notesMasterIdLst>
-    <p:notesMasterId r:id="rId20"/>
+    <p:notesMasterId r:id="rId21"/>
   </p:notesMasterIdLst>
   <p:sldSz cx="12192000" cy="6858000"/>
   <p:notesSz cx="6858000" cy="12192000"/>
@@ -1335,6 +1336,94 @@
             <a:fld id="{F7021451-1387-4CA6-816F-3879F97B5CBC}" type="slidenum">
               <a:rPr lang="en-US"/>
               <a:t>18</a:t>
+            </a:fld>
+            <a:endParaRPr lang="en-US"/>
+          </a:p>
+        </p:txBody>
+      </p:sp>
+    </p:spTree>
+    <p:extLst>
+      <p:ext uri="{BB962C8B-B14F-4D97-AF65-F5344CB8AC3E}">
+        <p14:creationId xmlns:p14="http://schemas.microsoft.com/office/powerpoint/2010/main" val="1024086991"/>
+      </p:ext>
+    </p:extLst>
+  </p:cSld>
+  <p:clrMapOvr>
+    <a:masterClrMapping/>
+  </p:clrMapOvr>
+</p:notes>
+</file>
+
+<file path=ppt/notesSlides/notesSlide19.xml><?xml version="1.0" encoding="utf-8"?>
+<p:notes xmlns:a="http://schemas.openxmlformats.org/drawingml/2006/main" xmlns:r="http://schemas.openxmlformats.org/officeDocument/2006/relationships" xmlns:p="http://schemas.openxmlformats.org/presentationml/2006/main">
+  <p:cSld>
+    <p:spTree>
+      <p:nvGrpSpPr>
+        <p:cNvPr id="1" name=""/>
+        <p:cNvGrpSpPr/>
+        <p:nvPr/>
+      </p:nvGrpSpPr>
+      <p:grpSpPr>
+        <a:xfrm>
+          <a:off x="0" y="0"/>
+          <a:ext cx="0" cy="0"/>
+          <a:chOff x="0" y="0"/>
+          <a:chExt cx="0" cy="0"/>
+        </a:xfrm>
+      </p:grpSpPr>
+      <p:sp>
+        <p:nvSpPr>
+          <p:cNvPr id="2" name="Slide Image Placeholder 1"/>
+          <p:cNvSpPr>
+            <a:spLocks noGrp="1" noRot="1" noChangeAspect="1"/>
+          </p:cNvSpPr>
+          <p:nvPr>
+            <p:ph type="sldImg"/>
+          </p:nvPr>
+        </p:nvSpPr>
+        <p:spPr/>
+      </p:sp>
+      <p:sp>
+        <p:nvSpPr>
+          <p:cNvPr id="3" name="Notes Placeholder 2"/>
+          <p:cNvSpPr>
+            <a:spLocks noGrp="1"/>
+          </p:cNvSpPr>
+          <p:nvPr>
+            <p:ph type="body" idx="1"/>
+          </p:nvPr>
+        </p:nvSpPr>
+        <p:spPr/>
+        <p:txBody>
+          <a:bodyPr/>
+          <a:lstStyle/>
+          <a:p>
+            <a:r>
+              <a:rPr lang="en-US" dirty="0"/>
+              <a:t/>
+            </a:r>
+            <a:endParaRPr lang="en-US" dirty="0"/>
+          </a:p>
+        </p:txBody>
+      </p:sp>
+      <p:sp>
+        <p:nvSpPr>
+          <p:cNvPr id="4" name="Slide Number Placeholder 3"/>
+          <p:cNvSpPr>
+            <a:spLocks noGrp="1"/>
+          </p:cNvSpPr>
+          <p:nvPr>
+            <p:ph type="sldNum" sz="quarter" idx="10"/>
+          </p:nvPr>
+        </p:nvSpPr>
+        <p:spPr/>
+        <p:txBody>
+          <a:bodyPr/>
+          <a:lstStyle/>
+          <a:p>
+            <a:fld id="{F7021451-1387-4CA6-816F-3879F97B5CBC}" type="slidenum">
+              <a:rPr lang="en-US"/>
+              <a:t>19</a:t>
             </a:fld>
             <a:endParaRPr lang="en-US"/>
           </a:p>
@@ -2616,7 +2705,7 @@
                 <a:ea typeface="Calibri" pitchFamily="34" charset="-122"/>
                 <a:cs typeface="Calibri" pitchFamily="34" charset="-120"/>
               </a:rPr>
-              <a:t>COPILOTE FINANCIER — UNE ÉTAPE AVANT L'AXE A</a:t>
+              <a:t>COPILOTE FINANCIER — INFRASTRUCTURE (NOTEBOOK 01)</a:t>
             </a:r>
             <a:endParaRPr lang="en-US" sz="1200" dirty="0"/>
           </a:p>
@@ -2655,7 +2744,7 @@
                 <a:ea typeface="Cambria" pitchFamily="34" charset="-122"/>
                 <a:cs typeface="Cambria" pitchFamily="34" charset="-120"/>
               </a:rPr>
-              <a:t>La typologie des opérations</a:t>
+              <a:t>La base de données SQL</a:t>
             </a:r>
             <a:endParaRPr lang="en-US" sz="2800" dirty="0"/>
           </a:p>
@@ -2669,46 +2758,7 @@
         </p:nvSpPr>
         <p:spPr>
           <a:xfrm>
-            <a:off x="548640" y="1517904"/>
-            <a:ext cx="11064240" cy="548640"/>
-          </a:xfrm>
-          <a:prstGeom prst="rect">
-            <a:avLst/>
-          </a:prstGeom>
-          <a:noFill/>
-          <a:ln/>
-        </p:spPr>
-        <p:txBody>
-          <a:bodyPr wrap="square" lIns="0" tIns="0" rIns="0" bIns="0" rtlCol="0" anchor="ctr"/>
-          <a:lstStyle/>
-          <a:p>
-            <a:pPr indent="0" marL="0">
-              <a:buNone/>
-            </a:pPr>
-            <a:r>
-              <a:rPr lang="en-US" sz="1400" i="1" dirty="0">
-                <a:solidFill>
-                  <a:srgbClr val="52514E"/>
-                </a:solidFill>
-                <a:latin typeface="Calibri" pitchFamily="34" charset="0"/>
-                <a:ea typeface="Calibri" pitchFamily="34" charset="-122"/>
-                <a:cs typeface="Calibri" pitchFamily="34" charset="-120"/>
-              </a:rPr>
-              <a:t>Comparer une opération de 2 M€ à une de 50 M€ sur leurs montants bruts n'a pas de sens : c'est la structure du budget qui les distingue.</a:t>
-            </a:r>
-            <a:endParaRPr lang="en-US" sz="1400" dirty="0"/>
-          </a:p>
-        </p:txBody>
-      </p:sp>
-      <p:sp>
-        <p:nvSpPr>
-          <p:cNvPr id="5" name="Text 3"/>
-          <p:cNvSpPr/>
-          <p:nvPr/>
-        </p:nvSpPr>
-        <p:spPr>
-          <a:xfrm>
-            <a:off x="548640" y="2240280"/>
+            <a:off x="548640" y="1600200"/>
             <a:ext cx="11064240" cy="1737360"/>
           </a:xfrm>
           <a:prstGeom prst="rect">
@@ -2726,13 +2776,13 @@
                 <a:spcPct val="106000"/>
               </a:lnSpc>
               <a:spcAft>
-                <a:spcPts val="1400"/>
+                <a:spcPts val="1000"/>
               </a:spcAft>
               <a:buSzPct val="100000"/>
               <a:buChar char="•"/>
             </a:pPr>
             <a:r>
-              <a:rPr lang="en-US" sz="1500" dirty="0">
+              <a:rPr lang="en-US" sz="1400" dirty="0">
                 <a:solidFill>
                   <a:srgbClr val="1A1A19"/>
                 </a:solidFill>
@@ -2740,9 +2790,9 @@
                 <a:ea typeface="Calibri" pitchFamily="34" charset="-122"/>
                 <a:cs typeface="Calibri" pitchFamily="34" charset="-120"/>
               </a:rPr>
-              <a:t>ACP (analyse en composantes principales) : 2 axes résument 61 % de la structure des coûts, vérifié par une seconde méthode indépendante (SVD)</a:t>
-            </a:r>
-            <a:endParaRPr lang="en-US" sz="1500" dirty="0"/>
+              <a:t>Les 4 exports Excel transformés en base SQLite : 7 tables + 3 vues SQL métier (marge par opération, réservations par mois, état du stock)</a:t>
+            </a:r>
+            <a:endParaRPr lang="en-US" sz="1400" dirty="0"/>
           </a:p>
           <a:p>
             <a:pPr marL="203200" indent="-203200">
@@ -2750,13 +2800,13 @@
                 <a:spcPct val="106000"/>
               </a:lnSpc>
               <a:spcAft>
-                <a:spcPts val="1400"/>
+                <a:spcPts val="1000"/>
               </a:spcAft>
               <a:buSzPct val="100000"/>
               <a:buChar char="•"/>
             </a:pPr>
             <a:r>
-              <a:rPr lang="en-US" sz="1500" dirty="0">
+              <a:rPr lang="en-US" sz="1400" dirty="0">
                 <a:solidFill>
                   <a:srgbClr val="1A1A19"/>
                 </a:solidFill>
@@ -2764,22 +2814,46 @@
                 <a:ea typeface="Calibri" pitchFamily="34" charset="-122"/>
                 <a:cs typeface="Calibri" pitchFamily="34" charset="-120"/>
               </a:rPr>
-              <a:t>Croisée avec une classification non supervisée : 4 familles d'opérations — résidentiel classique, aménagement foncier, promotion sur foncier allégé, aménagement lourd VRD</a:t>
-            </a:r>
-            <a:endParaRPr lang="en-US" sz="1500" dirty="0"/>
-          </a:p>
-        </p:txBody>
-      </p:sp>
-      <p:sp>
-        <p:nvSpPr>
-          <p:cNvPr id="6" name="Shape 4"/>
+              <a:t>Une vue n'est écrite qu'une fois : notebooks et plateforme partagent la même définition de chaque indicateur, au lieu de la recopier</a:t>
+            </a:r>
+            <a:endParaRPr lang="en-US" sz="1400" dirty="0"/>
+          </a:p>
+          <a:p>
+            <a:pPr marL="203200" indent="-203200">
+              <a:lnSpc>
+                <a:spcPct val="106000"/>
+              </a:lnSpc>
+              <a:spcAft>
+                <a:spcPts val="1000"/>
+              </a:spcAft>
+              <a:buSzPct val="100000"/>
+              <a:buChar char="•"/>
+            </a:pPr>
+            <a:r>
+              <a:rPr lang="en-US" sz="1400" dirty="0">
+                <a:solidFill>
+                  <a:srgbClr val="1A1A19"/>
+                </a:solidFill>
+                <a:latin typeface="Calibri" pitchFamily="34" charset="0"/>
+                <a:ea typeface="Calibri" pitchFamily="34" charset="-122"/>
+                <a:cs typeface="Calibri" pitchFamily="34" charset="-120"/>
+              </a:rPr>
+              <a:t>Comparatif chronométré honnêtement avec Spark, pour vérifier le chemin de montée en charge si le Copilote devait couvrir tout le groupe Nexity</a:t>
+            </a:r>
+            <a:endParaRPr lang="en-US" sz="1400" dirty="0"/>
+          </a:p>
+        </p:txBody>
+      </p:sp>
+      <p:sp>
+        <p:nvSpPr>
+          <p:cNvPr id="5" name="Shape 3"/>
           <p:cNvSpPr/>
           <p:nvPr/>
         </p:nvSpPr>
         <p:spPr>
           <a:xfrm>
             <a:off x="548640" y="4206240"/>
-            <a:ext cx="5394960" cy="1737360"/>
+            <a:ext cx="3566160" cy="1737360"/>
           </a:xfrm>
           <a:prstGeom prst="roundRect">
             <a:avLst>
@@ -2806,14 +2880,14 @@
       </p:sp>
       <p:sp>
         <p:nvSpPr>
-          <p:cNvPr id="7" name="Text 5"/>
+          <p:cNvPr id="6" name="Text 4"/>
           <p:cNvSpPr/>
           <p:nvPr/>
         </p:nvSpPr>
         <p:spPr>
           <a:xfrm>
             <a:off x="658368" y="4279392"/>
-            <a:ext cx="5175504" cy="1188720"/>
+            <a:ext cx="3346704" cy="1188720"/>
           </a:xfrm>
           <a:prstGeom prst="rect">
             <a:avLst/>
@@ -2829,7 +2903,7 @@
               <a:buNone/>
             </a:pPr>
             <a:r>
-              <a:rPr lang="en-US" sz="2800" b="1" dirty="0">
+              <a:rPr lang="en-US" sz="2600" b="1" dirty="0">
                 <a:solidFill>
                   <a:srgbClr val="EDA100"/>
                 </a:solidFill>
@@ -2837,22 +2911,22 @@
                 <a:ea typeface="Cambria" pitchFamily="34" charset="-122"/>
                 <a:cs typeface="Cambria" pitchFamily="34" charset="-120"/>
               </a:rPr>
-              <a:t>61 %</a:t>
-            </a:r>
-            <a:endParaRPr lang="en-US" sz="2800" dirty="0"/>
-          </a:p>
-        </p:txBody>
-      </p:sp>
-      <p:sp>
-        <p:nvSpPr>
-          <p:cNvPr id="8" name="Text 6"/>
+              <a:t>7 + 3</a:t>
+            </a:r>
+            <a:endParaRPr lang="en-US" sz="2600" dirty="0"/>
+          </a:p>
+        </p:txBody>
+      </p:sp>
+      <p:sp>
+        <p:nvSpPr>
+          <p:cNvPr id="7" name="Text 5"/>
           <p:cNvSpPr/>
           <p:nvPr/>
         </p:nvSpPr>
         <p:spPr>
           <a:xfrm>
             <a:off x="658368" y="5504688"/>
-            <a:ext cx="5175504" cy="384048"/>
+            <a:ext cx="3346704" cy="384048"/>
           </a:xfrm>
           <a:prstGeom prst="rect">
             <a:avLst/>
@@ -2876,7 +2950,7 @@
                 <a:ea typeface="Calibri" pitchFamily="34" charset="-122"/>
                 <a:cs typeface="Calibri" pitchFamily="34" charset="-120"/>
               </a:rPr>
-              <a:t>de la structure des coûts résumée par 2 axes de l'ACP</a:t>
+              <a:t>tables et vues SQL métier construites</a:t>
             </a:r>
             <a:endParaRPr lang="en-US" sz="1050" dirty="0"/>
           </a:p>
@@ -2884,14 +2958,14 @@
       </p:sp>
       <p:sp>
         <p:nvSpPr>
-          <p:cNvPr id="9" name="Shape 7"/>
-          <p:cNvSpPr/>
-          <p:nvPr/>
-        </p:nvSpPr>
-        <p:spPr>
-          <a:xfrm>
-            <a:off x="6217920" y="4206240"/>
-            <a:ext cx="5394960" cy="1737360"/>
+          <p:cNvPr id="8" name="Shape 6"/>
+          <p:cNvSpPr/>
+          <p:nvPr/>
+        </p:nvSpPr>
+        <p:spPr>
+          <a:xfrm>
+            <a:off x="4297680" y="4206240"/>
+            <a:ext cx="3566160" cy="1737360"/>
           </a:xfrm>
           <a:prstGeom prst="roundRect">
             <a:avLst>
@@ -2918,14 +2992,14 @@
       </p:sp>
       <p:sp>
         <p:nvSpPr>
-          <p:cNvPr id="10" name="Text 8"/>
-          <p:cNvSpPr/>
-          <p:nvPr/>
-        </p:nvSpPr>
-        <p:spPr>
-          <a:xfrm>
-            <a:off x="6327648" y="4279392"/>
-            <a:ext cx="5175504" cy="1188720"/>
+          <p:cNvPr id="9" name="Text 7"/>
+          <p:cNvSpPr/>
+          <p:nvPr/>
+        </p:nvSpPr>
+        <p:spPr>
+          <a:xfrm>
+            <a:off x="4407408" y="4279392"/>
+            <a:ext cx="3346704" cy="1188720"/>
           </a:xfrm>
           <a:prstGeom prst="rect">
             <a:avLst/>
@@ -2949,7 +3023,7 @@
                 <a:ea typeface="Cambria" pitchFamily="34" charset="-122"/>
                 <a:cs typeface="Cambria" pitchFamily="34" charset="-120"/>
               </a:rPr>
-              <a:t>+7,9 % à +11,3 %</a:t>
+              <a:t>117,1 M€</a:t>
             </a:r>
             <a:endParaRPr lang="en-US" sz="2200" dirty="0"/>
           </a:p>
@@ -2957,14 +3031,14 @@
       </p:sp>
       <p:sp>
         <p:nvSpPr>
-          <p:cNvPr id="11" name="Text 9"/>
-          <p:cNvSpPr/>
-          <p:nvPr/>
-        </p:nvSpPr>
-        <p:spPr>
-          <a:xfrm>
-            <a:off x="6327648" y="5504688"/>
-            <a:ext cx="5175504" cy="384048"/>
+          <p:cNvPr id="10" name="Text 8"/>
+          <p:cNvSpPr/>
+          <p:nvPr/>
+        </p:nvSpPr>
+        <p:spPr>
+          <a:xfrm>
+            <a:off x="4407408" y="5504688"/>
+            <a:ext cx="3346704" cy="384048"/>
           </a:xfrm>
           <a:prstGeom prst="rect">
             <a:avLst/>
@@ -2988,7 +3062,7 @@
                 <a:ea typeface="Calibri" pitchFamily="34" charset="-122"/>
                 <a:cs typeface="Calibri" pitchFamily="34" charset="-120"/>
               </a:rPr>
-              <a:t>marges des 5 voisines du Parc des Cyclades (budget +6,5 %)</a:t>
+              <a:t>de CA budgété sur 2 opérations au Cap d'Agde</a:t>
             </a:r>
             <a:endParaRPr lang="en-US" sz="1050" dirty="0"/>
           </a:p>
@@ -2996,7 +3070,119 @@
       </p:sp>
       <p:sp>
         <p:nvSpPr>
+          <p:cNvPr id="11" name="Shape 9"/>
+          <p:cNvSpPr/>
+          <p:nvPr/>
+        </p:nvSpPr>
+        <p:spPr>
+          <a:xfrm>
+            <a:off x="8046720" y="4206240"/>
+            <a:ext cx="3566160" cy="1737360"/>
+          </a:xfrm>
+          <a:prstGeom prst="roundRect">
+            <a:avLst>
+              <a:gd name="adj" fmla="val 4211"/>
+            </a:avLst>
+          </a:prstGeom>
+          <a:solidFill>
+            <a:srgbClr val="FFFFFF"/>
+          </a:solidFill>
+          <a:ln w="12700">
+            <a:solidFill>
+              <a:srgbClr val="E3E7EE"/>
+            </a:solidFill>
+            <a:prstDash val="solid"/>
+          </a:ln>
+          <a:effectLst>
+            <a:outerShdw sx="100000" sy="100000" kx="0" ky="0" algn="bl" rotWithShape="0" blurRad="76200" dist="25400" dir="5400000">
+              <a:srgbClr val="1A1A19">
+                <a:alpha val="12000"/>
+              </a:srgbClr>
+            </a:outerShdw>
+          </a:effectLst>
+        </p:spPr>
+      </p:sp>
+      <p:sp>
+        <p:nvSpPr>
           <p:cNvPr id="12" name="Text 10"/>
+          <p:cNvSpPr/>
+          <p:nvPr/>
+        </p:nvSpPr>
+        <p:spPr>
+          <a:xfrm>
+            <a:off x="8156448" y="4279392"/>
+            <a:ext cx="3346704" cy="1188720"/>
+          </a:xfrm>
+          <a:prstGeom prst="rect">
+            <a:avLst/>
+          </a:prstGeom>
+          <a:noFill/>
+          <a:ln/>
+        </p:spPr>
+        <p:txBody>
+          <a:bodyPr wrap="square" lIns="0" tIns="0" rIns="0" bIns="0" rtlCol="0" anchor="b"/>
+          <a:lstStyle/>
+          <a:p>
+            <a:pPr algn="l" indent="0" marL="0">
+              <a:buNone/>
+            </a:pPr>
+            <a:r>
+              <a:rPr lang="en-US" sz="1600" b="1" dirty="0">
+                <a:solidFill>
+                  <a:srgbClr val="2A78D6"/>
+                </a:solidFill>
+                <a:latin typeface="Cambria" pitchFamily="34" charset="0"/>
+                <a:ea typeface="Cambria" pitchFamily="34" charset="-122"/>
+                <a:cs typeface="Cambria" pitchFamily="34" charset="-120"/>
+              </a:rPr>
+              <a:t>9,9 ms / 577,4 ms</a:t>
+            </a:r>
+            <a:endParaRPr lang="en-US" sz="1600" dirty="0"/>
+          </a:p>
+        </p:txBody>
+      </p:sp>
+      <p:sp>
+        <p:nvSpPr>
+          <p:cNvPr id="13" name="Text 11"/>
+          <p:cNvSpPr/>
+          <p:nvPr/>
+        </p:nvSpPr>
+        <p:spPr>
+          <a:xfrm>
+            <a:off x="8156448" y="5504688"/>
+            <a:ext cx="3346704" cy="384048"/>
+          </a:xfrm>
+          <a:prstGeom prst="rect">
+            <a:avLst/>
+          </a:prstGeom>
+          <a:noFill/>
+          <a:ln/>
+        </p:spPr>
+        <p:txBody>
+          <a:bodyPr wrap="square" lIns="0" tIns="0" rIns="0" bIns="0" rtlCol="0" anchor="t"/>
+          <a:lstStyle/>
+          <a:p>
+            <a:pPr algn="l" indent="0" marL="0">
+              <a:buNone/>
+            </a:pPr>
+            <a:r>
+              <a:rPr lang="en-US" sz="1050" dirty="0">
+                <a:solidFill>
+                  <a:srgbClr val="52514E"/>
+                </a:solidFill>
+                <a:latin typeface="Calibri" pitchFamily="34" charset="0"/>
+                <a:ea typeface="Calibri" pitchFamily="34" charset="-122"/>
+                <a:cs typeface="Calibri" pitchFamily="34" charset="-120"/>
+              </a:rPr>
+              <a:t>pandas vs Spark (+ 23,9 s de démarrage) — Spark surdimensionné ici</a:t>
+            </a:r>
+            <a:endParaRPr lang="en-US" sz="1050" dirty="0"/>
+          </a:p>
+        </p:txBody>
+      </p:sp>
+      <p:sp>
+        <p:nvSpPr>
+          <p:cNvPr id="14" name="Text 12"/>
           <p:cNvSpPr/>
           <p:nvPr/>
         </p:nvSpPr>
@@ -3027,7 +3213,7 @@
                 <a:ea typeface="Calibri" pitchFamily="34" charset="-122"/>
                 <a:cs typeface="Calibri" pitchFamily="34" charset="-120"/>
               </a:rPr>
-              <a:t>Cette typologie sert directement de comparateur dans l'axe A.</a:t>
+              <a:t>Cette base solidement posée, encore une étape avant l'axe A.</a:t>
             </a:r>
             <a:endParaRPr lang="en-US" sz="1200" dirty="0"/>
           </a:p>
@@ -3035,7 +3221,7 @@
       </p:sp>
       <p:sp>
         <p:nvSpPr>
-          <p:cNvPr id="13" name="Text 11"/>
+          <p:cNvPr id="15" name="Text 13"/>
           <p:cNvSpPr/>
           <p:nvPr/>
         </p:nvSpPr>
@@ -3074,7 +3260,7 @@
       </p:sp>
       <p:sp>
         <p:nvSpPr>
-          <p:cNvPr id="14" name="Text 12"/>
+          <p:cNvPr id="16" name="Text 14"/>
           <p:cNvSpPr/>
           <p:nvPr/>
         </p:nvSpPr>
@@ -3170,6 +3356,566 @@
             <a:r>
               <a:rPr lang="en-US" sz="1200" b="1" spc="200" kern="0" dirty="0">
                 <a:solidFill>
+                  <a:srgbClr val="EDA100"/>
+                </a:solidFill>
+                <a:latin typeface="Calibri" pitchFamily="34" charset="0"/>
+                <a:ea typeface="Calibri" pitchFamily="34" charset="-122"/>
+                <a:cs typeface="Calibri" pitchFamily="34" charset="-120"/>
+              </a:rPr>
+              <a:t>COPILOTE FINANCIER — UNE ÉTAPE AVANT L'AXE A</a:t>
+            </a:r>
+            <a:endParaRPr lang="en-US" sz="1200" dirty="0"/>
+          </a:p>
+        </p:txBody>
+      </p:sp>
+      <p:sp>
+        <p:nvSpPr>
+          <p:cNvPr id="3" name="Text 1"/>
+          <p:cNvSpPr/>
+          <p:nvPr/>
+        </p:nvSpPr>
+        <p:spPr>
+          <a:xfrm>
+            <a:off x="548640" y="658368"/>
+            <a:ext cx="10515600" cy="822960"/>
+          </a:xfrm>
+          <a:prstGeom prst="rect">
+            <a:avLst/>
+          </a:prstGeom>
+          <a:noFill/>
+          <a:ln/>
+        </p:spPr>
+        <p:txBody>
+          <a:bodyPr wrap="square" lIns="0" tIns="0" rIns="0" bIns="0" rtlCol="0" anchor="ctr"/>
+          <a:lstStyle/>
+          <a:p>
+            <a:pPr indent="0" marL="0">
+              <a:buNone/>
+            </a:pPr>
+            <a:r>
+              <a:rPr lang="en-US" sz="2800" b="1" dirty="0">
+                <a:solidFill>
+                  <a:srgbClr val="1A1A19"/>
+                </a:solidFill>
+                <a:latin typeface="Cambria" pitchFamily="34" charset="0"/>
+                <a:ea typeface="Cambria" pitchFamily="34" charset="-122"/>
+                <a:cs typeface="Cambria" pitchFamily="34" charset="-120"/>
+              </a:rPr>
+              <a:t>La typologie des opérations</a:t>
+            </a:r>
+            <a:endParaRPr lang="en-US" sz="2800" dirty="0"/>
+          </a:p>
+        </p:txBody>
+      </p:sp>
+      <p:sp>
+        <p:nvSpPr>
+          <p:cNvPr id="4" name="Text 2"/>
+          <p:cNvSpPr/>
+          <p:nvPr/>
+        </p:nvSpPr>
+        <p:spPr>
+          <a:xfrm>
+            <a:off x="548640" y="1517904"/>
+            <a:ext cx="11064240" cy="548640"/>
+          </a:xfrm>
+          <a:prstGeom prst="rect">
+            <a:avLst/>
+          </a:prstGeom>
+          <a:noFill/>
+          <a:ln/>
+        </p:spPr>
+        <p:txBody>
+          <a:bodyPr wrap="square" lIns="0" tIns="0" rIns="0" bIns="0" rtlCol="0" anchor="ctr"/>
+          <a:lstStyle/>
+          <a:p>
+            <a:pPr indent="0" marL="0">
+              <a:buNone/>
+            </a:pPr>
+            <a:r>
+              <a:rPr lang="en-US" sz="1400" i="1" dirty="0">
+                <a:solidFill>
+                  <a:srgbClr val="52514E"/>
+                </a:solidFill>
+                <a:latin typeface="Calibri" pitchFamily="34" charset="0"/>
+                <a:ea typeface="Calibri" pitchFamily="34" charset="-122"/>
+                <a:cs typeface="Calibri" pitchFamily="34" charset="-120"/>
+              </a:rPr>
+              <a:t>Comparer une opération de 2 M€ à une de 50 M€ sur leurs montants bruts n'a pas de sens : c'est la structure du budget qui les distingue.</a:t>
+            </a:r>
+            <a:endParaRPr lang="en-US" sz="1400" dirty="0"/>
+          </a:p>
+        </p:txBody>
+      </p:sp>
+      <p:sp>
+        <p:nvSpPr>
+          <p:cNvPr id="5" name="Text 3"/>
+          <p:cNvSpPr/>
+          <p:nvPr/>
+        </p:nvSpPr>
+        <p:spPr>
+          <a:xfrm>
+            <a:off x="548640" y="2240280"/>
+            <a:ext cx="11064240" cy="1737360"/>
+          </a:xfrm>
+          <a:prstGeom prst="rect">
+            <a:avLst/>
+          </a:prstGeom>
+          <a:noFill/>
+          <a:ln/>
+        </p:spPr>
+        <p:txBody>
+          <a:bodyPr wrap="square" lIns="0" tIns="0" rIns="0" bIns="0" rtlCol="0" anchor="t"/>
+          <a:lstStyle/>
+          <a:p>
+            <a:pPr marL="203200" indent="-203200">
+              <a:lnSpc>
+                <a:spcPct val="106000"/>
+              </a:lnSpc>
+              <a:spcAft>
+                <a:spcPts val="1400"/>
+              </a:spcAft>
+              <a:buSzPct val="100000"/>
+              <a:buChar char="•"/>
+            </a:pPr>
+            <a:r>
+              <a:rPr lang="en-US" sz="1500" dirty="0">
+                <a:solidFill>
+                  <a:srgbClr val="1A1A19"/>
+                </a:solidFill>
+                <a:latin typeface="Calibri" pitchFamily="34" charset="0"/>
+                <a:ea typeface="Calibri" pitchFamily="34" charset="-122"/>
+                <a:cs typeface="Calibri" pitchFamily="34" charset="-120"/>
+              </a:rPr>
+              <a:t>ACP (analyse en composantes principales) : 2 axes résument 61 % de la structure des coûts, vérifié par une seconde méthode indépendante (SVD)</a:t>
+            </a:r>
+            <a:endParaRPr lang="en-US" sz="1500" dirty="0"/>
+          </a:p>
+          <a:p>
+            <a:pPr marL="203200" indent="-203200">
+              <a:lnSpc>
+                <a:spcPct val="106000"/>
+              </a:lnSpc>
+              <a:spcAft>
+                <a:spcPts val="1400"/>
+              </a:spcAft>
+              <a:buSzPct val="100000"/>
+              <a:buChar char="•"/>
+            </a:pPr>
+            <a:r>
+              <a:rPr lang="en-US" sz="1500" dirty="0">
+                <a:solidFill>
+                  <a:srgbClr val="1A1A19"/>
+                </a:solidFill>
+                <a:latin typeface="Calibri" pitchFamily="34" charset="0"/>
+                <a:ea typeface="Calibri" pitchFamily="34" charset="-122"/>
+                <a:cs typeface="Calibri" pitchFamily="34" charset="-120"/>
+              </a:rPr>
+              <a:t>Croisée avec une classification non supervisée : 4 familles d'opérations — résidentiel classique, aménagement foncier, promotion sur foncier allégé, aménagement lourd VRD</a:t>
+            </a:r>
+            <a:endParaRPr lang="en-US" sz="1500" dirty="0"/>
+          </a:p>
+        </p:txBody>
+      </p:sp>
+      <p:sp>
+        <p:nvSpPr>
+          <p:cNvPr id="6" name="Shape 4"/>
+          <p:cNvSpPr/>
+          <p:nvPr/>
+        </p:nvSpPr>
+        <p:spPr>
+          <a:xfrm>
+            <a:off x="548640" y="4206240"/>
+            <a:ext cx="5394960" cy="1737360"/>
+          </a:xfrm>
+          <a:prstGeom prst="roundRect">
+            <a:avLst>
+              <a:gd name="adj" fmla="val 4211"/>
+            </a:avLst>
+          </a:prstGeom>
+          <a:solidFill>
+            <a:srgbClr val="FFFFFF"/>
+          </a:solidFill>
+          <a:ln w="12700">
+            <a:solidFill>
+              <a:srgbClr val="E3E7EE"/>
+            </a:solidFill>
+            <a:prstDash val="solid"/>
+          </a:ln>
+          <a:effectLst>
+            <a:outerShdw sx="100000" sy="100000" kx="0" ky="0" algn="bl" rotWithShape="0" blurRad="76200" dist="25400" dir="5400000">
+              <a:srgbClr val="1A1A19">
+                <a:alpha val="12000"/>
+              </a:srgbClr>
+            </a:outerShdw>
+          </a:effectLst>
+        </p:spPr>
+      </p:sp>
+      <p:sp>
+        <p:nvSpPr>
+          <p:cNvPr id="7" name="Text 5"/>
+          <p:cNvSpPr/>
+          <p:nvPr/>
+        </p:nvSpPr>
+        <p:spPr>
+          <a:xfrm>
+            <a:off x="658368" y="4279392"/>
+            <a:ext cx="5175504" cy="1188720"/>
+          </a:xfrm>
+          <a:prstGeom prst="rect">
+            <a:avLst/>
+          </a:prstGeom>
+          <a:noFill/>
+          <a:ln/>
+        </p:spPr>
+        <p:txBody>
+          <a:bodyPr wrap="square" lIns="0" tIns="0" rIns="0" bIns="0" rtlCol="0" anchor="b"/>
+          <a:lstStyle/>
+          <a:p>
+            <a:pPr algn="l" indent="0" marL="0">
+              <a:buNone/>
+            </a:pPr>
+            <a:r>
+              <a:rPr lang="en-US" sz="2800" b="1" dirty="0">
+                <a:solidFill>
+                  <a:srgbClr val="EDA100"/>
+                </a:solidFill>
+                <a:latin typeface="Cambria" pitchFamily="34" charset="0"/>
+                <a:ea typeface="Cambria" pitchFamily="34" charset="-122"/>
+                <a:cs typeface="Cambria" pitchFamily="34" charset="-120"/>
+              </a:rPr>
+              <a:t>61 %</a:t>
+            </a:r>
+            <a:endParaRPr lang="en-US" sz="2800" dirty="0"/>
+          </a:p>
+        </p:txBody>
+      </p:sp>
+      <p:sp>
+        <p:nvSpPr>
+          <p:cNvPr id="8" name="Text 6"/>
+          <p:cNvSpPr/>
+          <p:nvPr/>
+        </p:nvSpPr>
+        <p:spPr>
+          <a:xfrm>
+            <a:off x="658368" y="5504688"/>
+            <a:ext cx="5175504" cy="384048"/>
+          </a:xfrm>
+          <a:prstGeom prst="rect">
+            <a:avLst/>
+          </a:prstGeom>
+          <a:noFill/>
+          <a:ln/>
+        </p:spPr>
+        <p:txBody>
+          <a:bodyPr wrap="square" lIns="0" tIns="0" rIns="0" bIns="0" rtlCol="0" anchor="t"/>
+          <a:lstStyle/>
+          <a:p>
+            <a:pPr algn="l" indent="0" marL="0">
+              <a:buNone/>
+            </a:pPr>
+            <a:r>
+              <a:rPr lang="en-US" sz="1050" dirty="0">
+                <a:solidFill>
+                  <a:srgbClr val="52514E"/>
+                </a:solidFill>
+                <a:latin typeface="Calibri" pitchFamily="34" charset="0"/>
+                <a:ea typeface="Calibri" pitchFamily="34" charset="-122"/>
+                <a:cs typeface="Calibri" pitchFamily="34" charset="-120"/>
+              </a:rPr>
+              <a:t>de la structure des coûts résumée par 2 axes de l'ACP</a:t>
+            </a:r>
+            <a:endParaRPr lang="en-US" sz="1050" dirty="0"/>
+          </a:p>
+        </p:txBody>
+      </p:sp>
+      <p:sp>
+        <p:nvSpPr>
+          <p:cNvPr id="9" name="Shape 7"/>
+          <p:cNvSpPr/>
+          <p:nvPr/>
+        </p:nvSpPr>
+        <p:spPr>
+          <a:xfrm>
+            <a:off x="6217920" y="4206240"/>
+            <a:ext cx="5394960" cy="1737360"/>
+          </a:xfrm>
+          <a:prstGeom prst="roundRect">
+            <a:avLst>
+              <a:gd name="adj" fmla="val 4211"/>
+            </a:avLst>
+          </a:prstGeom>
+          <a:solidFill>
+            <a:srgbClr val="FFFFFF"/>
+          </a:solidFill>
+          <a:ln w="12700">
+            <a:solidFill>
+              <a:srgbClr val="E3E7EE"/>
+            </a:solidFill>
+            <a:prstDash val="solid"/>
+          </a:ln>
+          <a:effectLst>
+            <a:outerShdw sx="100000" sy="100000" kx="0" ky="0" algn="bl" rotWithShape="0" blurRad="76200" dist="25400" dir="5400000">
+              <a:srgbClr val="1A1A19">
+                <a:alpha val="12000"/>
+              </a:srgbClr>
+            </a:outerShdw>
+          </a:effectLst>
+        </p:spPr>
+      </p:sp>
+      <p:sp>
+        <p:nvSpPr>
+          <p:cNvPr id="10" name="Text 8"/>
+          <p:cNvSpPr/>
+          <p:nvPr/>
+        </p:nvSpPr>
+        <p:spPr>
+          <a:xfrm>
+            <a:off x="6327648" y="4279392"/>
+            <a:ext cx="5175504" cy="1188720"/>
+          </a:xfrm>
+          <a:prstGeom prst="rect">
+            <a:avLst/>
+          </a:prstGeom>
+          <a:noFill/>
+          <a:ln/>
+        </p:spPr>
+        <p:txBody>
+          <a:bodyPr wrap="square" lIns="0" tIns="0" rIns="0" bIns="0" rtlCol="0" anchor="b"/>
+          <a:lstStyle/>
+          <a:p>
+            <a:pPr algn="l" indent="0" marL="0">
+              <a:buNone/>
+            </a:pPr>
+            <a:r>
+              <a:rPr lang="en-US" sz="2200" b="1" dirty="0">
+                <a:solidFill>
+                  <a:srgbClr val="4A3AA7"/>
+                </a:solidFill>
+                <a:latin typeface="Cambria" pitchFamily="34" charset="0"/>
+                <a:ea typeface="Cambria" pitchFamily="34" charset="-122"/>
+                <a:cs typeface="Cambria" pitchFamily="34" charset="-120"/>
+              </a:rPr>
+              <a:t>+7,9 % à +11,3 %</a:t>
+            </a:r>
+            <a:endParaRPr lang="en-US" sz="2200" dirty="0"/>
+          </a:p>
+        </p:txBody>
+      </p:sp>
+      <p:sp>
+        <p:nvSpPr>
+          <p:cNvPr id="11" name="Text 9"/>
+          <p:cNvSpPr/>
+          <p:nvPr/>
+        </p:nvSpPr>
+        <p:spPr>
+          <a:xfrm>
+            <a:off x="6327648" y="5504688"/>
+            <a:ext cx="5175504" cy="384048"/>
+          </a:xfrm>
+          <a:prstGeom prst="rect">
+            <a:avLst/>
+          </a:prstGeom>
+          <a:noFill/>
+          <a:ln/>
+        </p:spPr>
+        <p:txBody>
+          <a:bodyPr wrap="square" lIns="0" tIns="0" rIns="0" bIns="0" rtlCol="0" anchor="t"/>
+          <a:lstStyle/>
+          <a:p>
+            <a:pPr algn="l" indent="0" marL="0">
+              <a:buNone/>
+            </a:pPr>
+            <a:r>
+              <a:rPr lang="en-US" sz="1050" dirty="0">
+                <a:solidFill>
+                  <a:srgbClr val="52514E"/>
+                </a:solidFill>
+                <a:latin typeface="Calibri" pitchFamily="34" charset="0"/>
+                <a:ea typeface="Calibri" pitchFamily="34" charset="-122"/>
+                <a:cs typeface="Calibri" pitchFamily="34" charset="-120"/>
+              </a:rPr>
+              <a:t>marges des 5 voisines du Parc des Cyclades (budget +6,5 %)</a:t>
+            </a:r>
+            <a:endParaRPr lang="en-US" sz="1050" dirty="0"/>
+          </a:p>
+        </p:txBody>
+      </p:sp>
+      <p:sp>
+        <p:nvSpPr>
+          <p:cNvPr id="12" name="Text 10"/>
+          <p:cNvSpPr/>
+          <p:nvPr/>
+        </p:nvSpPr>
+        <p:spPr>
+          <a:xfrm>
+            <a:off x="548640" y="6080760"/>
+            <a:ext cx="11064240" cy="365760"/>
+          </a:xfrm>
+          <a:prstGeom prst="rect">
+            <a:avLst/>
+          </a:prstGeom>
+          <a:noFill/>
+          <a:ln/>
+        </p:spPr>
+        <p:txBody>
+          <a:bodyPr wrap="square" lIns="0" tIns="0" rIns="0" bIns="0" rtlCol="0" anchor="ctr"/>
+          <a:lstStyle/>
+          <a:p>
+            <a:pPr indent="0" marL="0">
+              <a:buNone/>
+            </a:pPr>
+            <a:r>
+              <a:rPr lang="en-US" sz="1200" b="1" i="1" dirty="0">
+                <a:solidFill>
+                  <a:srgbClr val="1A1A19"/>
+                </a:solidFill>
+                <a:latin typeface="Calibri" pitchFamily="34" charset="0"/>
+                <a:ea typeface="Calibri" pitchFamily="34" charset="-122"/>
+                <a:cs typeface="Calibri" pitchFamily="34" charset="-120"/>
+              </a:rPr>
+              <a:t>Cette typologie sert directement de comparateur dans l'axe A.</a:t>
+            </a:r>
+            <a:endParaRPr lang="en-US" sz="1200" dirty="0"/>
+          </a:p>
+        </p:txBody>
+      </p:sp>
+      <p:sp>
+        <p:nvSpPr>
+          <p:cNvPr id="13" name="Text 11"/>
+          <p:cNvSpPr/>
+          <p:nvPr/>
+        </p:nvSpPr>
+        <p:spPr>
+          <a:xfrm>
+            <a:off x="548640" y="6510528"/>
+            <a:ext cx="5486400" cy="274320"/>
+          </a:xfrm>
+          <a:prstGeom prst="rect">
+            <a:avLst/>
+          </a:prstGeom>
+          <a:noFill/>
+          <a:ln/>
+        </p:spPr>
+        <p:txBody>
+          <a:bodyPr wrap="square" lIns="0" tIns="0" rIns="0" bIns="0" rtlCol="0" anchor="ctr"/>
+          <a:lstStyle/>
+          <a:p>
+            <a:pPr indent="0" marL="0">
+              <a:buNone/>
+            </a:pPr>
+            <a:r>
+              <a:rPr lang="en-US" sz="900" dirty="0">
+                <a:solidFill>
+                  <a:srgbClr val="9A9A95"/>
+                </a:solidFill>
+                <a:latin typeface="Calibri" pitchFamily="34" charset="0"/>
+                <a:ea typeface="Calibri" pitchFamily="34" charset="-122"/>
+                <a:cs typeface="Calibri" pitchFamily="34" charset="-120"/>
+              </a:rPr>
+              <a:t>Copilote Financier — Groupe Angelotti</a:t>
+            </a:r>
+            <a:endParaRPr lang="en-US" sz="900" dirty="0"/>
+          </a:p>
+        </p:txBody>
+      </p:sp>
+      <p:sp>
+        <p:nvSpPr>
+          <p:cNvPr id="14" name="Text 12"/>
+          <p:cNvSpPr/>
+          <p:nvPr/>
+        </p:nvSpPr>
+        <p:spPr>
+          <a:xfrm>
+            <a:off x="11430000" y="6510528"/>
+            <a:ext cx="365760" cy="274320"/>
+          </a:xfrm>
+          <a:prstGeom prst="rect">
+            <a:avLst/>
+          </a:prstGeom>
+          <a:noFill/>
+          <a:ln/>
+        </p:spPr>
+        <p:txBody>
+          <a:bodyPr wrap="square" lIns="0" tIns="0" rIns="0" bIns="0" rtlCol="0" anchor="ctr"/>
+          <a:lstStyle/>
+          <a:p>
+            <a:pPr algn="r" indent="0" marL="0">
+              <a:buNone/>
+            </a:pPr>
+            <a:r>
+              <a:rPr lang="en-US" sz="900" dirty="0">
+                <a:solidFill>
+                  <a:srgbClr val="9A9A95"/>
+                </a:solidFill>
+                <a:latin typeface="Calibri" pitchFamily="34" charset="0"/>
+                <a:ea typeface="Calibri" pitchFamily="34" charset="-122"/>
+                <a:cs typeface="Calibri" pitchFamily="34" charset="-120"/>
+              </a:rPr>
+              <a:t>11</a:t>
+            </a:r>
+            <a:endParaRPr lang="en-US" sz="900" dirty="0"/>
+          </a:p>
+        </p:txBody>
+      </p:sp>
+    </p:spTree>
+  </p:cSld>
+  <p:clrMapOvr>
+    <a:masterClrMapping/>
+  </p:clrMapOvr>
+</p:sld>
+</file>
+
+<file path=ppt/slides/slide12.xml><?xml version="1.0" encoding="utf-8"?>
+<p:sld xmlns:a="http://schemas.openxmlformats.org/drawingml/2006/main" xmlns:r="http://schemas.openxmlformats.org/officeDocument/2006/relationships" xmlns:p="http://schemas.openxmlformats.org/presentationml/2006/main">
+  <p:cSld name="Slide 12">
+    <p:bg>
+      <p:bgPr>
+        <a:solidFill>
+          <a:srgbClr val="FFFFFF"/>
+        </a:solidFill>
+      </p:bgPr>
+    </p:bg>
+    <p:spTree>
+      <p:nvGrpSpPr>
+        <p:cNvPr id="1" name=""/>
+        <p:cNvGrpSpPr/>
+        <p:nvPr/>
+      </p:nvGrpSpPr>
+      <p:grpSpPr>
+        <a:xfrm>
+          <a:off x="0" y="0"/>
+          <a:ext cx="0" cy="0"/>
+          <a:chOff x="0" y="0"/>
+          <a:chExt cx="0" cy="0"/>
+        </a:xfrm>
+      </p:grpSpPr>
+      <p:sp>
+        <p:nvSpPr>
+          <p:cNvPr id="2" name="Text 0"/>
+          <p:cNvSpPr/>
+          <p:nvPr/>
+        </p:nvSpPr>
+        <p:spPr>
+          <a:xfrm>
+            <a:off x="548640" y="384048"/>
+            <a:ext cx="8229600" cy="320040"/>
+          </a:xfrm>
+          <a:prstGeom prst="rect">
+            <a:avLst/>
+          </a:prstGeom>
+          <a:noFill/>
+          <a:ln/>
+        </p:spPr>
+        <p:txBody>
+          <a:bodyPr wrap="square" lIns="0" tIns="0" rIns="0" bIns="0" rtlCol="0" anchor="ctr"/>
+          <a:lstStyle/>
+          <a:p>
+            <a:pPr indent="0" marL="0">
+              <a:buNone/>
+            </a:pPr>
+            <a:r>
+              <a:rPr lang="en-US" sz="1200" b="1" spc="200" kern="0" dirty="0">
+                <a:solidFill>
                   <a:srgbClr val="2A78D6"/>
                 </a:solidFill>
                 <a:latin typeface="Calibri" pitchFamily="34" charset="0"/>
@@ -3474,7 +4220,7 @@
       </p:sp>
       <p:graphicFrame>
         <p:nvGraphicFramePr>
-          <p:cNvPr id="12" name="Table 0"/>
+          <p:cNvPr id="13" name="Table 0"/>
           <p:cNvGraphicFramePr>
             <a:graphicFrameLocks noGrp="1"/>
           </p:cNvGraphicFramePr>
@@ -4440,647 +5186,6 @@
                 <a:ea typeface="Calibri" pitchFamily="34" charset="-122"/>
                 <a:cs typeface="Calibri" pitchFamily="34" charset="-120"/>
               </a:rPr>
-              <a:t>11</a:t>
-            </a:r>
-            <a:endParaRPr lang="en-US" sz="900" dirty="0"/>
-          </a:p>
-        </p:txBody>
-      </p:sp>
-    </p:spTree>
-  </p:cSld>
-  <p:clrMapOvr>
-    <a:masterClrMapping/>
-  </p:clrMapOvr>
-</p:sld>
-</file>
-
-<file path=ppt/slides/slide12.xml><?xml version="1.0" encoding="utf-8"?>
-<p:sld xmlns:a="http://schemas.openxmlformats.org/drawingml/2006/main" xmlns:r="http://schemas.openxmlformats.org/officeDocument/2006/relationships" xmlns:p="http://schemas.openxmlformats.org/presentationml/2006/main">
-  <p:cSld name="Slide 12">
-    <p:bg>
-      <p:bgPr>
-        <a:solidFill>
-          <a:srgbClr val="FFFFFF"/>
-        </a:solidFill>
-      </p:bgPr>
-    </p:bg>
-    <p:spTree>
-      <p:nvGrpSpPr>
-        <p:cNvPr id="1" name=""/>
-        <p:cNvGrpSpPr/>
-        <p:nvPr/>
-      </p:nvGrpSpPr>
-      <p:grpSpPr>
-        <a:xfrm>
-          <a:off x="0" y="0"/>
-          <a:ext cx="0" cy="0"/>
-          <a:chOff x="0" y="0"/>
-          <a:chExt cx="0" cy="0"/>
-        </a:xfrm>
-      </p:grpSpPr>
-      <p:sp>
-        <p:nvSpPr>
-          <p:cNvPr id="2" name="Text 0"/>
-          <p:cNvSpPr/>
-          <p:nvPr/>
-        </p:nvSpPr>
-        <p:spPr>
-          <a:xfrm>
-            <a:off x="548640" y="384048"/>
-            <a:ext cx="8229600" cy="320040"/>
-          </a:xfrm>
-          <a:prstGeom prst="rect">
-            <a:avLst/>
-          </a:prstGeom>
-          <a:noFill/>
-          <a:ln/>
-        </p:spPr>
-        <p:txBody>
-          <a:bodyPr wrap="square" lIns="0" tIns="0" rIns="0" bIns="0" rtlCol="0" anchor="ctr"/>
-          <a:lstStyle/>
-          <a:p>
-            <a:pPr indent="0" marL="0">
-              <a:buNone/>
-            </a:pPr>
-            <a:r>
-              <a:rPr lang="en-US" sz="1200" b="1" spc="200" kern="0" dirty="0">
-                <a:solidFill>
-                  <a:srgbClr val="1BAF7A"/>
-                </a:solidFill>
-                <a:latin typeface="Calibri" pitchFamily="34" charset="0"/>
-                <a:ea typeface="Calibri" pitchFamily="34" charset="-122"/>
-                <a:cs typeface="Calibri" pitchFamily="34" charset="-120"/>
-              </a:rPr>
-              <a:t>COPILOTE FINANCIER — AXE B</a:t>
-            </a:r>
-            <a:endParaRPr lang="en-US" sz="1200" dirty="0"/>
-          </a:p>
-        </p:txBody>
-      </p:sp>
-      <p:sp>
-        <p:nvSpPr>
-          <p:cNvPr id="3" name="Text 1"/>
-          <p:cNvSpPr/>
-          <p:nvPr/>
-        </p:nvSpPr>
-        <p:spPr>
-          <a:xfrm>
-            <a:off x="548640" y="658368"/>
-            <a:ext cx="7315200" cy="822960"/>
-          </a:xfrm>
-          <a:prstGeom prst="rect">
-            <a:avLst/>
-          </a:prstGeom>
-          <a:noFill/>
-          <a:ln/>
-        </p:spPr>
-        <p:txBody>
-          <a:bodyPr wrap="square" lIns="0" tIns="0" rIns="0" bIns="0" rtlCol="0" anchor="ctr"/>
-          <a:lstStyle/>
-          <a:p>
-            <a:pPr indent="0" marL="0">
-              <a:buNone/>
-            </a:pPr>
-            <a:r>
-              <a:rPr lang="en-US" sz="2800" b="1" dirty="0">
-                <a:solidFill>
-                  <a:srgbClr val="1A1A19"/>
-                </a:solidFill>
-                <a:latin typeface="Cambria" pitchFamily="34" charset="0"/>
-                <a:ea typeface="Cambria" pitchFamily="34" charset="-122"/>
-                <a:cs typeface="Cambria" pitchFamily="34" charset="-120"/>
-              </a:rPr>
-              <a:t>La vitesse d'écoulement</a:t>
-            </a:r>
-            <a:endParaRPr lang="en-US" sz="2800" dirty="0"/>
-          </a:p>
-        </p:txBody>
-      </p:sp>
-      <p:sp>
-        <p:nvSpPr>
-          <p:cNvPr id="4" name="Text 2"/>
-          <p:cNvSpPr/>
-          <p:nvPr/>
-        </p:nvSpPr>
-        <p:spPr>
-          <a:xfrm>
-            <a:off x="548640" y="1600200"/>
-            <a:ext cx="6309360" cy="3108960"/>
-          </a:xfrm>
-          <a:prstGeom prst="rect">
-            <a:avLst/>
-          </a:prstGeom>
-          <a:noFill/>
-          <a:ln/>
-        </p:spPr>
-        <p:txBody>
-          <a:bodyPr wrap="square" lIns="0" tIns="0" rIns="0" bIns="0" rtlCol="0" anchor="t"/>
-          <a:lstStyle/>
-          <a:p>
-            <a:pPr marL="203200" indent="-203200">
-              <a:lnSpc>
-                <a:spcPct val="106000"/>
-              </a:lnSpc>
-              <a:spcAft>
-                <a:spcPts val="1300"/>
-              </a:spcAft>
-              <a:buSzPct val="100000"/>
-              <a:buChar char="•"/>
-            </a:pPr>
-            <a:r>
-              <a:rPr lang="en-US" sz="1400" dirty="0">
-                <a:solidFill>
-                  <a:srgbClr val="1A1A19"/>
-                </a:solidFill>
-                <a:latin typeface="Calibri" pitchFamily="34" charset="0"/>
-                <a:ea typeface="Calibri" pitchFamily="34" charset="-122"/>
-                <a:cs typeface="Calibri" pitchFamily="34" charset="-120"/>
-              </a:rPr>
-              <a:t>Panel de 3 230 observations (opération × mois) — modèle à effets aléatoires</a:t>
-            </a:r>
-            <a:endParaRPr lang="en-US" sz="1400" dirty="0"/>
-          </a:p>
-          <a:p>
-            <a:pPr marL="203200" indent="-203200">
-              <a:lnSpc>
-                <a:spcPct val="106000"/>
-              </a:lnSpc>
-              <a:spcAft>
-                <a:spcPts val="1300"/>
-              </a:spcAft>
-              <a:buSzPct val="100000"/>
-              <a:buChar char="•"/>
-            </a:pPr>
-            <a:r>
-              <a:rPr lang="en-US" sz="1400" dirty="0">
-                <a:solidFill>
-                  <a:srgbClr val="1A1A19"/>
-                </a:solidFill>
-                <a:latin typeface="Calibri" pitchFamily="34" charset="0"/>
-                <a:ea typeface="Calibri" pitchFamily="34" charset="-122"/>
-                <a:cs typeface="Calibri" pitchFamily="34" charset="-120"/>
-              </a:rPr>
-              <a:t>2/3 de la variance = effet propre à l'opération, 1/3 = conjoncture</a:t>
-            </a:r>
-            <a:endParaRPr lang="en-US" sz="1400" dirty="0"/>
-          </a:p>
-          <a:p>
-            <a:pPr marL="203200" indent="-203200">
-              <a:lnSpc>
-                <a:spcPct val="106000"/>
-              </a:lnSpc>
-              <a:spcAft>
-                <a:spcPts val="1300"/>
-              </a:spcAft>
-              <a:buSzPct val="100000"/>
-              <a:buChar char="•"/>
-            </a:pPr>
-            <a:r>
-              <a:rPr lang="en-US" sz="1400" dirty="0">
-                <a:solidFill>
-                  <a:srgbClr val="1A1A19"/>
-                </a:solidFill>
-                <a:latin typeface="Calibri" pitchFamily="34" charset="0"/>
-                <a:ea typeface="Calibri" pitchFamily="34" charset="-122"/>
-                <a:cs typeface="Calibri" pitchFamily="34" charset="-120"/>
-              </a:rPr>
-              <a:t>Contrôle par série temporelle : effet du taux non identifiable isolément — validation méthodologique, pas un échec</a:t>
-            </a:r>
-            <a:endParaRPr lang="en-US" sz="1400" dirty="0"/>
-          </a:p>
-        </p:txBody>
-      </p:sp>
-      <p:sp>
-        <p:nvSpPr>
-          <p:cNvPr id="5" name="Shape 3"/>
-          <p:cNvSpPr/>
-          <p:nvPr/>
-        </p:nvSpPr>
-        <p:spPr>
-          <a:xfrm>
-            <a:off x="7013448" y="1618488"/>
-            <a:ext cx="4672584" cy="1956816"/>
-          </a:xfrm>
-          <a:prstGeom prst="roundRect">
-            <a:avLst>
-              <a:gd name="adj" fmla="val 2804"/>
-            </a:avLst>
-          </a:prstGeom>
-          <a:solidFill>
-            <a:srgbClr val="FFFFFF"/>
-          </a:solidFill>
-          <a:ln w="12700">
-            <a:solidFill>
-              <a:srgbClr val="E3E7EE"/>
-            </a:solidFill>
-            <a:prstDash val="solid"/>
-          </a:ln>
-          <a:effectLst>
-            <a:outerShdw sx="100000" sy="100000" kx="0" ky="0" algn="bl" rotWithShape="0" blurRad="101600" dist="25400" dir="5400000">
-              <a:srgbClr val="1A1A19">
-                <a:alpha val="15000"/>
-              </a:srgbClr>
-            </a:outerShdw>
-          </a:effectLst>
-        </p:spPr>
-      </p:sp>
-      <p:pic>
-        <p:nvPicPr>
-          <p:cNvPr id="6" name="Image 0" descr="/tmp/claude-0/-home-user-MemoireM2S2/bac073a6-7c4e-552a-9627-815aeb6fe82a/scratchpad/figs/p28-000.png">    </p:cNvPr>
-          <p:cNvPicPr>
-            <a:picLocks noChangeAspect="1"/>
-          </p:cNvPicPr>
-          <p:nvPr/>
-        </p:nvPicPr>
-        <p:blipFill>
-          <a:blip r:embed="rId1"/>
-          <a:srcRect l="0" r="0" t="0" b="0"/>
-          <a:stretch/>
-        </p:blipFill>
-        <p:spPr>
-          <a:xfrm>
-            <a:off x="7086600" y="1691640"/>
-            <a:ext cx="4526280" cy="1810512"/>
-          </a:xfrm>
-          <a:prstGeom prst="rect">
-            <a:avLst/>
-          </a:prstGeom>
-        </p:spPr>
-      </p:pic>
-      <p:sp>
-        <p:nvSpPr>
-          <p:cNvPr id="7" name="Text 4"/>
-          <p:cNvSpPr/>
-          <p:nvPr/>
-        </p:nvSpPr>
-        <p:spPr>
-          <a:xfrm>
-            <a:off x="7086600" y="3529584"/>
-            <a:ext cx="4526280" cy="411480"/>
-          </a:xfrm>
-          <a:prstGeom prst="rect">
-            <a:avLst/>
-          </a:prstGeom>
-          <a:noFill/>
-          <a:ln/>
-        </p:spPr>
-        <p:txBody>
-          <a:bodyPr wrap="square" lIns="0" tIns="0" rIns="0" bIns="0" rtlCol="0" anchor="ctr"/>
-          <a:lstStyle/>
-          <a:p>
-            <a:pPr indent="0" marL="0">
-              <a:buNone/>
-            </a:pPr>
-            <a:r>
-              <a:rPr lang="en-US" sz="950" i="1" dirty="0">
-                <a:solidFill>
-                  <a:srgbClr val="52514E"/>
-                </a:solidFill>
-                <a:latin typeface="Calibri" pitchFamily="34" charset="0"/>
-                <a:ea typeface="Calibri" pitchFamily="34" charset="-122"/>
-                <a:cs typeface="Calibri" pitchFamily="34" charset="-120"/>
-              </a:rPr>
-              <a:t>Fig. — Scénarios de taux 2026 : trajectoire ARIMA combinée à l'élasticité du panel</a:t>
-            </a:r>
-            <a:endParaRPr lang="en-US" sz="950" dirty="0"/>
-          </a:p>
-        </p:txBody>
-      </p:sp>
-      <p:sp>
-        <p:nvSpPr>
-          <p:cNvPr id="8" name="Shape 5"/>
-          <p:cNvSpPr/>
-          <p:nvPr/>
-        </p:nvSpPr>
-        <p:spPr>
-          <a:xfrm>
-            <a:off x="7086600" y="4251960"/>
-            <a:ext cx="2148840" cy="1417320"/>
-          </a:xfrm>
-          <a:prstGeom prst="roundRect">
-            <a:avLst>
-              <a:gd name="adj" fmla="val 5161"/>
-            </a:avLst>
-          </a:prstGeom>
-          <a:solidFill>
-            <a:srgbClr val="FFFFFF"/>
-          </a:solidFill>
-          <a:ln w="12700">
-            <a:solidFill>
-              <a:srgbClr val="E3E7EE"/>
-            </a:solidFill>
-            <a:prstDash val="solid"/>
-          </a:ln>
-          <a:effectLst>
-            <a:outerShdw sx="100000" sy="100000" kx="0" ky="0" algn="bl" rotWithShape="0" blurRad="76200" dist="25400" dir="5400000">
-              <a:srgbClr val="1A1A19">
-                <a:alpha val="12000"/>
-              </a:srgbClr>
-            </a:outerShdw>
-          </a:effectLst>
-        </p:spPr>
-      </p:sp>
-      <p:sp>
-        <p:nvSpPr>
-          <p:cNvPr id="9" name="Text 6"/>
-          <p:cNvSpPr/>
-          <p:nvPr/>
-        </p:nvSpPr>
-        <p:spPr>
-          <a:xfrm>
-            <a:off x="7196328" y="4325112"/>
-            <a:ext cx="1929384" cy="868680"/>
-          </a:xfrm>
-          <a:prstGeom prst="rect">
-            <a:avLst/>
-          </a:prstGeom>
-          <a:noFill/>
-          <a:ln/>
-        </p:spPr>
-        <p:txBody>
-          <a:bodyPr wrap="square" lIns="0" tIns="0" rIns="0" bIns="0" rtlCol="0" anchor="b"/>
-          <a:lstStyle/>
-          <a:p>
-            <a:pPr algn="l" indent="0" marL="0">
-              <a:buNone/>
-            </a:pPr>
-            <a:r>
-              <a:rPr lang="en-US" sz="2800" b="1" dirty="0">
-                <a:solidFill>
-                  <a:srgbClr val="1BAF7A"/>
-                </a:solidFill>
-                <a:latin typeface="Cambria" pitchFamily="34" charset="0"/>
-                <a:ea typeface="Cambria" pitchFamily="34" charset="-122"/>
-                <a:cs typeface="Cambria" pitchFamily="34" charset="-120"/>
-              </a:rPr>
-              <a:t>−19 %</a:t>
-            </a:r>
-            <a:endParaRPr lang="en-US" sz="2800" dirty="0"/>
-          </a:p>
-        </p:txBody>
-      </p:sp>
-      <p:sp>
-        <p:nvSpPr>
-          <p:cNvPr id="10" name="Text 7"/>
-          <p:cNvSpPr/>
-          <p:nvPr/>
-        </p:nvSpPr>
-        <p:spPr>
-          <a:xfrm>
-            <a:off x="7196328" y="5230368"/>
-            <a:ext cx="1929384" cy="384048"/>
-          </a:xfrm>
-          <a:prstGeom prst="rect">
-            <a:avLst/>
-          </a:prstGeom>
-          <a:noFill/>
-          <a:ln/>
-        </p:spPr>
-        <p:txBody>
-          <a:bodyPr wrap="square" lIns="0" tIns="0" rIns="0" bIns="0" rtlCol="0" anchor="t"/>
-          <a:lstStyle/>
-          <a:p>
-            <a:pPr algn="l" indent="0" marL="0">
-              <a:buNone/>
-            </a:pPr>
-            <a:r>
-              <a:rPr lang="en-US" sz="1050" dirty="0">
-                <a:solidFill>
-                  <a:srgbClr val="52514E"/>
-                </a:solidFill>
-                <a:latin typeface="Calibri" pitchFamily="34" charset="0"/>
-                <a:ea typeface="Calibri" pitchFamily="34" charset="-122"/>
-                <a:cs typeface="Calibri" pitchFamily="34" charset="-120"/>
-              </a:rPr>
-              <a:t>de réservations par point de taux en plus</a:t>
-            </a:r>
-            <a:endParaRPr lang="en-US" sz="1050" dirty="0"/>
-          </a:p>
-        </p:txBody>
-      </p:sp>
-      <p:sp>
-        <p:nvSpPr>
-          <p:cNvPr id="11" name="Shape 8"/>
-          <p:cNvSpPr/>
-          <p:nvPr/>
-        </p:nvSpPr>
-        <p:spPr>
-          <a:xfrm>
-            <a:off x="9464040" y="4251960"/>
-            <a:ext cx="2148840" cy="1417320"/>
-          </a:xfrm>
-          <a:prstGeom prst="roundRect">
-            <a:avLst>
-              <a:gd name="adj" fmla="val 5161"/>
-            </a:avLst>
-          </a:prstGeom>
-          <a:solidFill>
-            <a:srgbClr val="FFFFFF"/>
-          </a:solidFill>
-          <a:ln w="12700">
-            <a:solidFill>
-              <a:srgbClr val="E3E7EE"/>
-            </a:solidFill>
-            <a:prstDash val="solid"/>
-          </a:ln>
-          <a:effectLst>
-            <a:outerShdw sx="100000" sy="100000" kx="0" ky="0" algn="bl" rotWithShape="0" blurRad="76200" dist="25400" dir="5400000">
-              <a:srgbClr val="1A1A19">
-                <a:alpha val="12000"/>
-              </a:srgbClr>
-            </a:outerShdw>
-          </a:effectLst>
-        </p:spPr>
-      </p:sp>
-      <p:sp>
-        <p:nvSpPr>
-          <p:cNvPr id="12" name="Text 9"/>
-          <p:cNvSpPr/>
-          <p:nvPr/>
-        </p:nvSpPr>
-        <p:spPr>
-          <a:xfrm>
-            <a:off x="9573768" y="4325112"/>
-            <a:ext cx="1929384" cy="868680"/>
-          </a:xfrm>
-          <a:prstGeom prst="rect">
-            <a:avLst/>
-          </a:prstGeom>
-          <a:noFill/>
-          <a:ln/>
-        </p:spPr>
-        <p:txBody>
-          <a:bodyPr wrap="square" lIns="0" tIns="0" rIns="0" bIns="0" rtlCol="0" anchor="b"/>
-          <a:lstStyle/>
-          <a:p>
-            <a:pPr algn="l" indent="0" marL="0">
-              <a:buNone/>
-            </a:pPr>
-            <a:r>
-              <a:rPr lang="en-US" sz="2800" b="1" dirty="0">
-                <a:solidFill>
-                  <a:srgbClr val="2A78D6"/>
-                </a:solidFill>
-                <a:latin typeface="Cambria" pitchFamily="34" charset="0"/>
-                <a:ea typeface="Cambria" pitchFamily="34" charset="-122"/>
-                <a:cs typeface="Cambria" pitchFamily="34" charset="-120"/>
-              </a:rPr>
-              <a:t>20 mois</a:t>
-            </a:r>
-            <a:endParaRPr lang="en-US" sz="2800" dirty="0"/>
-          </a:p>
-        </p:txBody>
-      </p:sp>
-      <p:sp>
-        <p:nvSpPr>
-          <p:cNvPr id="13" name="Text 10"/>
-          <p:cNvSpPr/>
-          <p:nvPr/>
-        </p:nvSpPr>
-        <p:spPr>
-          <a:xfrm>
-            <a:off x="9573768" y="5230368"/>
-            <a:ext cx="1929384" cy="384048"/>
-          </a:xfrm>
-          <a:prstGeom prst="rect">
-            <a:avLst/>
-          </a:prstGeom>
-          <a:noFill/>
-          <a:ln/>
-        </p:spPr>
-        <p:txBody>
-          <a:bodyPr wrap="square" lIns="0" tIns="0" rIns="0" bIns="0" rtlCol="0" anchor="t"/>
-          <a:lstStyle/>
-          <a:p>
-            <a:pPr algn="l" indent="0" marL="0">
-              <a:buNone/>
-            </a:pPr>
-            <a:r>
-              <a:rPr lang="en-US" sz="1050" dirty="0">
-                <a:solidFill>
-                  <a:srgbClr val="52514E"/>
-                </a:solidFill>
-                <a:latin typeface="Calibri" pitchFamily="34" charset="0"/>
-                <a:ea typeface="Calibri" pitchFamily="34" charset="-122"/>
-                <a:cs typeface="Calibri" pitchFamily="34" charset="-120"/>
-              </a:rPr>
-              <a:t>délai médian pour 90 % du potentiel vendu</a:t>
-            </a:r>
-            <a:endParaRPr lang="en-US" sz="1050" dirty="0"/>
-          </a:p>
-        </p:txBody>
-      </p:sp>
-      <p:sp>
-        <p:nvSpPr>
-          <p:cNvPr id="14" name="Text 11"/>
-          <p:cNvSpPr/>
-          <p:nvPr/>
-        </p:nvSpPr>
-        <p:spPr>
-          <a:xfrm>
-            <a:off x="548640" y="5852160"/>
-            <a:ext cx="6309360" cy="365760"/>
-          </a:xfrm>
-          <a:prstGeom prst="rect">
-            <a:avLst/>
-          </a:prstGeom>
-          <a:noFill/>
-          <a:ln/>
-        </p:spPr>
-        <p:txBody>
-          <a:bodyPr wrap="square" lIns="0" tIns="0" rIns="0" bIns="0" rtlCol="0" anchor="ctr"/>
-          <a:lstStyle/>
-          <a:p>
-            <a:pPr indent="0" marL="0">
-              <a:buNone/>
-            </a:pPr>
-            <a:r>
-              <a:rPr lang="en-US" sz="1200" b="1" i="1" dirty="0">
-                <a:solidFill>
-                  <a:srgbClr val="1BAF7A"/>
-                </a:solidFill>
-                <a:latin typeface="Calibri" pitchFamily="34" charset="0"/>
-                <a:ea typeface="Calibri" pitchFamily="34" charset="-122"/>
-                <a:cs typeface="Calibri" pitchFamily="34" charset="-120"/>
-              </a:rPr>
-              <a:t>Axe le plus solide du projet.</a:t>
-            </a:r>
-            <a:endParaRPr lang="en-US" sz="1200" dirty="0"/>
-          </a:p>
-        </p:txBody>
-      </p:sp>
-      <p:sp>
-        <p:nvSpPr>
-          <p:cNvPr id="15" name="Text 12"/>
-          <p:cNvSpPr/>
-          <p:nvPr/>
-        </p:nvSpPr>
-        <p:spPr>
-          <a:xfrm>
-            <a:off x="548640" y="6510528"/>
-            <a:ext cx="5486400" cy="274320"/>
-          </a:xfrm>
-          <a:prstGeom prst="rect">
-            <a:avLst/>
-          </a:prstGeom>
-          <a:noFill/>
-          <a:ln/>
-        </p:spPr>
-        <p:txBody>
-          <a:bodyPr wrap="square" lIns="0" tIns="0" rIns="0" bIns="0" rtlCol="0" anchor="ctr"/>
-          <a:lstStyle/>
-          <a:p>
-            <a:pPr indent="0" marL="0">
-              <a:buNone/>
-            </a:pPr>
-            <a:r>
-              <a:rPr lang="en-US" sz="900" dirty="0">
-                <a:solidFill>
-                  <a:srgbClr val="9A9A95"/>
-                </a:solidFill>
-                <a:latin typeface="Calibri" pitchFamily="34" charset="0"/>
-                <a:ea typeface="Calibri" pitchFamily="34" charset="-122"/>
-                <a:cs typeface="Calibri" pitchFamily="34" charset="-120"/>
-              </a:rPr>
-              <a:t>Copilote Financier — Groupe Angelotti</a:t>
-            </a:r>
-            <a:endParaRPr lang="en-US" sz="900" dirty="0"/>
-          </a:p>
-        </p:txBody>
-      </p:sp>
-      <p:sp>
-        <p:nvSpPr>
-          <p:cNvPr id="16" name="Text 13"/>
-          <p:cNvSpPr/>
-          <p:nvPr/>
-        </p:nvSpPr>
-        <p:spPr>
-          <a:xfrm>
-            <a:off x="11430000" y="6510528"/>
-            <a:ext cx="365760" cy="274320"/>
-          </a:xfrm>
-          <a:prstGeom prst="rect">
-            <a:avLst/>
-          </a:prstGeom>
-          <a:noFill/>
-          <a:ln/>
-        </p:spPr>
-        <p:txBody>
-          <a:bodyPr wrap="square" lIns="0" tIns="0" rIns="0" bIns="0" rtlCol="0" anchor="ctr"/>
-          <a:lstStyle/>
-          <a:p>
-            <a:pPr algn="r" indent="0" marL="0">
-              <a:buNone/>
-            </a:pPr>
-            <a:r>
-              <a:rPr lang="en-US" sz="900" dirty="0">
-                <a:solidFill>
-                  <a:srgbClr val="9A9A95"/>
-                </a:solidFill>
-                <a:latin typeface="Calibri" pitchFamily="34" charset="0"/>
-                <a:ea typeface="Calibri" pitchFamily="34" charset="-122"/>
-                <a:cs typeface="Calibri" pitchFamily="34" charset="-120"/>
-              </a:rPr>
               <a:t>12</a:t>
             </a:r>
             <a:endParaRPr lang="en-US" sz="900" dirty="0"/>
@@ -5146,13 +5251,13 @@
             <a:r>
               <a:rPr lang="en-US" sz="1200" b="1" spc="200" kern="0" dirty="0">
                 <a:solidFill>
-                  <a:srgbClr val="4A3AA7"/>
-                </a:solidFill>
-                <a:latin typeface="Calibri" pitchFamily="34" charset="0"/>
-                <a:ea typeface="Calibri" pitchFamily="34" charset="-122"/>
-                <a:cs typeface="Calibri" pitchFamily="34" charset="-120"/>
-              </a:rPr>
-              <a:t>COPILOTE FINANCIER — AXE C</a:t>
+                  <a:srgbClr val="1BAF7A"/>
+                </a:solidFill>
+                <a:latin typeface="Calibri" pitchFamily="34" charset="0"/>
+                <a:ea typeface="Calibri" pitchFamily="34" charset="-122"/>
+                <a:cs typeface="Calibri" pitchFamily="34" charset="-120"/>
+              </a:rPr>
+              <a:t>COPILOTE FINANCIER — AXE B</a:t>
             </a:r>
             <a:endParaRPr lang="en-US" sz="1200" dirty="0"/>
           </a:p>
@@ -5167,7 +5272,7 @@
         <p:spPr>
           <a:xfrm>
             <a:off x="548640" y="658368"/>
-            <a:ext cx="10058400" cy="822960"/>
+            <a:ext cx="7315200" cy="822960"/>
           </a:xfrm>
           <a:prstGeom prst="rect">
             <a:avLst/>
@@ -5191,7 +5296,7 @@
                 <a:ea typeface="Cambria" pitchFamily="34" charset="-122"/>
                 <a:cs typeface="Cambria" pitchFamily="34" charset="-120"/>
               </a:rPr>
-              <a:t>L'optimisation des prix</a:t>
+              <a:t>La vitesse d'écoulement</a:t>
             </a:r>
             <a:endParaRPr lang="en-US" sz="2800" dirty="0"/>
           </a:p>
@@ -5205,8 +5310,8 @@
         </p:nvSpPr>
         <p:spPr>
           <a:xfrm>
-            <a:off x="548640" y="1691640"/>
-            <a:ext cx="6492240" cy="4572000"/>
+            <a:off x="548640" y="1600200"/>
+            <a:ext cx="6309360" cy="3108960"/>
           </a:xfrm>
           <a:prstGeom prst="rect">
             <a:avLst/>
@@ -5223,13 +5328,13 @@
                 <a:spcPct val="106000"/>
               </a:lnSpc>
               <a:spcAft>
-                <a:spcPts val="1200"/>
+                <a:spcPts val="1300"/>
               </a:spcAft>
               <a:buSzPct val="100000"/>
               <a:buChar char="•"/>
             </a:pPr>
             <a:r>
-              <a:rPr lang="en-US" sz="1300" dirty="0">
+              <a:rPr lang="en-US" sz="1400" dirty="0">
                 <a:solidFill>
                   <a:srgbClr val="1A1A19"/>
                 </a:solidFill>
@@ -5237,9 +5342,9 @@
                 <a:ea typeface="Calibri" pitchFamily="34" charset="-122"/>
                 <a:cs typeface="Calibri" pitchFamily="34" charset="-120"/>
               </a:rPr>
-              <a:t>Modèle hédonique sur 5 064 appartements vendus depuis 2016 — primes cohérentes (étage +6,0 %, sud +2,6 %, social −62,8 %, millésime +19-21 %)</a:t>
-            </a:r>
-            <a:endParaRPr lang="en-US" sz="1300" dirty="0"/>
+              <a:t>Panel de 3 230 observations (opération × mois) — modèle à effets aléatoires</a:t>
+            </a:r>
+            <a:endParaRPr lang="en-US" sz="1400" dirty="0"/>
           </a:p>
           <a:p>
             <a:pPr marL="203200" indent="-203200">
@@ -5247,13 +5352,13 @@
                 <a:spcPct val="106000"/>
               </a:lnSpc>
               <a:spcAft>
-                <a:spcPts val="1200"/>
+                <a:spcPts val="1300"/>
               </a:spcAft>
               <a:buSzPct val="100000"/>
               <a:buChar char="•"/>
             </a:pPr>
             <a:r>
-              <a:rPr lang="en-US" sz="1300" dirty="0">
+              <a:rPr lang="en-US" sz="1400" dirty="0">
                 <a:solidFill>
                   <a:srgbClr val="1A1A19"/>
                 </a:solidFill>
@@ -5261,9 +5366,9 @@
                 <a:ea typeface="Calibri" pitchFamily="34" charset="-122"/>
                 <a:cs typeface="Calibri" pitchFamily="34" charset="-120"/>
               </a:rPr>
-              <a:t>Élasticité non significative en interne (p = 0,57) → fixée prudemment à −1, documentée plutôt que masquée</a:t>
-            </a:r>
-            <a:endParaRPr lang="en-US" sz="1300" dirty="0"/>
+              <a:t>2/3 de la variance = effet propre à l'opération, 1/3 = conjoncture</a:t>
+            </a:r>
+            <a:endParaRPr lang="en-US" sz="1400" dirty="0"/>
           </a:p>
           <a:p>
             <a:pPr marL="203200" indent="-203200">
@@ -5271,13 +5376,13 @@
                 <a:spcPct val="106000"/>
               </a:lnSpc>
               <a:spcAft>
-                <a:spcPts val="1200"/>
+                <a:spcPts val="1300"/>
               </a:spcAft>
               <a:buSzPct val="100000"/>
               <a:buChar char="•"/>
             </a:pPr>
             <a:r>
-              <a:rPr lang="en-US" sz="1300" dirty="0">
+              <a:rPr lang="en-US" sz="1400" dirty="0">
                 <a:solidFill>
                   <a:srgbClr val="1A1A19"/>
                 </a:solidFill>
@@ -5285,33 +5390,9 @@
                 <a:ea typeface="Calibri" pitchFamily="34" charset="-122"/>
                 <a:cs typeface="Calibri" pitchFamily="34" charset="-120"/>
               </a:rPr>
-              <a:t>Optimisation par multiplicateur de Lagrange, vérifiée par un second solveur indépendant (SLSQP) — convergence à 0,006 près</a:t>
-            </a:r>
-            <a:endParaRPr lang="en-US" sz="1300" dirty="0"/>
-          </a:p>
-          <a:p>
-            <a:pPr marL="203200" indent="-203200">
-              <a:lnSpc>
-                <a:spcPct val="106000"/>
-              </a:lnSpc>
-              <a:spcAft>
-                <a:spcPts val="1200"/>
-              </a:spcAft>
-              <a:buSzPct val="100000"/>
-              <a:buChar char="•"/>
-            </a:pPr>
-            <a:r>
-              <a:rPr lang="en-US" sz="1300" dirty="0">
-                <a:solidFill>
-                  <a:srgbClr val="1A1A19"/>
-                </a:solidFill>
-                <a:latin typeface="Calibri" pitchFamily="34" charset="0"/>
-                <a:ea typeface="Calibri" pitchFamily="34" charset="-122"/>
-                <a:cs typeface="Calibri" pitchFamily="34" charset="-120"/>
-              </a:rPr>
-              <a:t>Résultat contre-intuitif : remise optimale identique en euros sur tous les lots — ex. Arpeggio (18 lots), ajustements de −5 % à −14 % selon le prix</a:t>
-            </a:r>
-            <a:endParaRPr lang="en-US" sz="1300" dirty="0"/>
+              <a:t>Contrôle par série temporelle : effet du taux non identifiable isolément — validation méthodologique, pas un échec</a:t>
+            </a:r>
+            <a:endParaRPr lang="en-US" sz="1400" dirty="0"/>
           </a:p>
         </p:txBody>
       </p:sp>
@@ -5323,12 +5404,108 @@
         </p:nvSpPr>
         <p:spPr>
           <a:xfrm>
-            <a:off x="7315200" y="1691640"/>
-            <a:ext cx="4297680" cy="1371600"/>
+            <a:off x="7013448" y="1618488"/>
+            <a:ext cx="4672584" cy="1956816"/>
           </a:xfrm>
           <a:prstGeom prst="roundRect">
             <a:avLst>
-              <a:gd name="adj" fmla="val 5333"/>
+              <a:gd name="adj" fmla="val 2804"/>
+            </a:avLst>
+          </a:prstGeom>
+          <a:solidFill>
+            <a:srgbClr val="FFFFFF"/>
+          </a:solidFill>
+          <a:ln w="12700">
+            <a:solidFill>
+              <a:srgbClr val="E3E7EE"/>
+            </a:solidFill>
+            <a:prstDash val="solid"/>
+          </a:ln>
+          <a:effectLst>
+            <a:outerShdw sx="100000" sy="100000" kx="0" ky="0" algn="bl" rotWithShape="0" blurRad="101600" dist="25400" dir="5400000">
+              <a:srgbClr val="1A1A19">
+                <a:alpha val="15000"/>
+              </a:srgbClr>
+            </a:outerShdw>
+          </a:effectLst>
+        </p:spPr>
+      </p:sp>
+      <p:pic>
+        <p:nvPicPr>
+          <p:cNvPr id="6" name="Image 0" descr="/tmp/claude-0/-home-user-MemoireM2S2/bac073a6-7c4e-552a-9627-815aeb6fe82a/scratchpad/figs/p28-000.png">    </p:cNvPr>
+          <p:cNvPicPr>
+            <a:picLocks noChangeAspect="1"/>
+          </p:cNvPicPr>
+          <p:nvPr/>
+        </p:nvPicPr>
+        <p:blipFill>
+          <a:blip r:embed="rId1"/>
+          <a:srcRect l="0" r="0" t="0" b="0"/>
+          <a:stretch/>
+        </p:blipFill>
+        <p:spPr>
+          <a:xfrm>
+            <a:off x="7086600" y="1691640"/>
+            <a:ext cx="4526280" cy="1810512"/>
+          </a:xfrm>
+          <a:prstGeom prst="rect">
+            <a:avLst/>
+          </a:prstGeom>
+        </p:spPr>
+      </p:pic>
+      <p:sp>
+        <p:nvSpPr>
+          <p:cNvPr id="7" name="Text 4"/>
+          <p:cNvSpPr/>
+          <p:nvPr/>
+        </p:nvSpPr>
+        <p:spPr>
+          <a:xfrm>
+            <a:off x="7086600" y="3529584"/>
+            <a:ext cx="4526280" cy="411480"/>
+          </a:xfrm>
+          <a:prstGeom prst="rect">
+            <a:avLst/>
+          </a:prstGeom>
+          <a:noFill/>
+          <a:ln/>
+        </p:spPr>
+        <p:txBody>
+          <a:bodyPr wrap="square" lIns="0" tIns="0" rIns="0" bIns="0" rtlCol="0" anchor="ctr"/>
+          <a:lstStyle/>
+          <a:p>
+            <a:pPr indent="0" marL="0">
+              <a:buNone/>
+            </a:pPr>
+            <a:r>
+              <a:rPr lang="en-US" sz="950" i="1" dirty="0">
+                <a:solidFill>
+                  <a:srgbClr val="52514E"/>
+                </a:solidFill>
+                <a:latin typeface="Calibri" pitchFamily="34" charset="0"/>
+                <a:ea typeface="Calibri" pitchFamily="34" charset="-122"/>
+                <a:cs typeface="Calibri" pitchFamily="34" charset="-120"/>
+              </a:rPr>
+              <a:t>Fig. — Scénarios de taux 2026 : trajectoire ARIMA combinée à l'élasticité du panel</a:t>
+            </a:r>
+            <a:endParaRPr lang="en-US" sz="950" dirty="0"/>
+          </a:p>
+        </p:txBody>
+      </p:sp>
+      <p:sp>
+        <p:nvSpPr>
+          <p:cNvPr id="8" name="Shape 5"/>
+          <p:cNvSpPr/>
+          <p:nvPr/>
+        </p:nvSpPr>
+        <p:spPr>
+          <a:xfrm>
+            <a:off x="7086600" y="4251960"/>
+            <a:ext cx="2148840" cy="1417320"/>
+          </a:xfrm>
+          <a:prstGeom prst="roundRect">
+            <a:avLst>
+              <a:gd name="adj" fmla="val 5161"/>
             </a:avLst>
           </a:prstGeom>
           <a:solidFill>
@@ -5351,14 +5528,14 @@
       </p:sp>
       <p:sp>
         <p:nvSpPr>
-          <p:cNvPr id="6" name="Text 4"/>
-          <p:cNvSpPr/>
-          <p:nvPr/>
-        </p:nvSpPr>
-        <p:spPr>
-          <a:xfrm>
-            <a:off x="7424928" y="1764792"/>
-            <a:ext cx="4078224" cy="822960"/>
+          <p:cNvPr id="9" name="Text 6"/>
+          <p:cNvSpPr/>
+          <p:nvPr/>
+        </p:nvSpPr>
+        <p:spPr>
+          <a:xfrm>
+            <a:off x="7196328" y="4325112"/>
+            <a:ext cx="1929384" cy="868680"/>
           </a:xfrm>
           <a:prstGeom prst="rect">
             <a:avLst/>
@@ -5376,13 +5553,13 @@
             <a:r>
               <a:rPr lang="en-US" sz="2800" b="1" dirty="0">
                 <a:solidFill>
-                  <a:srgbClr val="4A3AA7"/>
+                  <a:srgbClr val="1BAF7A"/>
                 </a:solidFill>
                 <a:latin typeface="Cambria" pitchFamily="34" charset="0"/>
                 <a:ea typeface="Cambria" pitchFamily="34" charset="-122"/>
                 <a:cs typeface="Cambria" pitchFamily="34" charset="-120"/>
               </a:rPr>
-              <a:t>R² = 0,886</a:t>
+              <a:t>−19 %</a:t>
             </a:r>
             <a:endParaRPr lang="en-US" sz="2800" dirty="0"/>
           </a:p>
@@ -5390,14 +5567,14 @@
       </p:sp>
       <p:sp>
         <p:nvSpPr>
-          <p:cNvPr id="7" name="Text 5"/>
-          <p:cNvSpPr/>
-          <p:nvPr/>
-        </p:nvSpPr>
-        <p:spPr>
-          <a:xfrm>
-            <a:off x="7424928" y="2624328"/>
-            <a:ext cx="4078224" cy="384048"/>
+          <p:cNvPr id="10" name="Text 7"/>
+          <p:cNvSpPr/>
+          <p:nvPr/>
+        </p:nvSpPr>
+        <p:spPr>
+          <a:xfrm>
+            <a:off x="7196328" y="5230368"/>
+            <a:ext cx="1929384" cy="384048"/>
           </a:xfrm>
           <a:prstGeom prst="rect">
             <a:avLst/>
@@ -5421,7 +5598,7 @@
                 <a:ea typeface="Calibri" pitchFamily="34" charset="-122"/>
                 <a:cs typeface="Calibri" pitchFamily="34" charset="-120"/>
               </a:rPr>
-              <a:t>variance du prix expliquée, erreur type ≈ 11 %</a:t>
+              <a:t>de réservations par point de taux en plus</a:t>
             </a:r>
             <a:endParaRPr lang="en-US" sz="1050" dirty="0"/>
           </a:p>
@@ -5429,18 +5606,18 @@
       </p:sp>
       <p:sp>
         <p:nvSpPr>
-          <p:cNvPr id="8" name="Shape 6"/>
-          <p:cNvSpPr/>
-          <p:nvPr/>
-        </p:nvSpPr>
-        <p:spPr>
-          <a:xfrm>
-            <a:off x="7315200" y="3246120"/>
-            <a:ext cx="4297680" cy="1371600"/>
+          <p:cNvPr id="11" name="Shape 8"/>
+          <p:cNvSpPr/>
+          <p:nvPr/>
+        </p:nvSpPr>
+        <p:spPr>
+          <a:xfrm>
+            <a:off x="9464040" y="4251960"/>
+            <a:ext cx="2148840" cy="1417320"/>
           </a:xfrm>
           <a:prstGeom prst="roundRect">
             <a:avLst>
-              <a:gd name="adj" fmla="val 5333"/>
+              <a:gd name="adj" fmla="val 5161"/>
             </a:avLst>
           </a:prstGeom>
           <a:solidFill>
@@ -5463,14 +5640,14 @@
       </p:sp>
       <p:sp>
         <p:nvSpPr>
-          <p:cNvPr id="9" name="Text 7"/>
-          <p:cNvSpPr/>
-          <p:nvPr/>
-        </p:nvSpPr>
-        <p:spPr>
-          <a:xfrm>
-            <a:off x="7424928" y="3319272"/>
-            <a:ext cx="4078224" cy="822960"/>
+          <p:cNvPr id="12" name="Text 9"/>
+          <p:cNvSpPr/>
+          <p:nvPr/>
+        </p:nvSpPr>
+        <p:spPr>
+          <a:xfrm>
+            <a:off x="9573768" y="4325112"/>
+            <a:ext cx="1929384" cy="868680"/>
           </a:xfrm>
           <a:prstGeom prst="rect">
             <a:avLst/>
@@ -5488,13 +5665,13 @@
             <a:r>
               <a:rPr lang="en-US" sz="2800" b="1" dirty="0">
                 <a:solidFill>
-                  <a:srgbClr val="EDA100"/>
+                  <a:srgbClr val="2A78D6"/>
                 </a:solidFill>
                 <a:latin typeface="Cambria" pitchFamily="34" charset="0"/>
                 <a:ea typeface="Cambria" pitchFamily="34" charset="-122"/>
                 <a:cs typeface="Cambria" pitchFamily="34" charset="-120"/>
               </a:rPr>
-              <a:t>24 / 127</a:t>
+              <a:t>20 mois</a:t>
             </a:r>
             <a:endParaRPr lang="en-US" sz="2800" dirty="0"/>
           </a:p>
@@ -5502,14 +5679,14 @@
       </p:sp>
       <p:sp>
         <p:nvSpPr>
-          <p:cNvPr id="10" name="Text 8"/>
-          <p:cNvSpPr/>
-          <p:nvPr/>
-        </p:nvSpPr>
-        <p:spPr>
-          <a:xfrm>
-            <a:off x="7424928" y="4178808"/>
-            <a:ext cx="4078224" cy="384048"/>
+          <p:cNvPr id="13" name="Text 10"/>
+          <p:cNvSpPr/>
+          <p:nvPr/>
+        </p:nvSpPr>
+        <p:spPr>
+          <a:xfrm>
+            <a:off x="9573768" y="5230368"/>
+            <a:ext cx="1929384" cy="384048"/>
           </a:xfrm>
           <a:prstGeom prst="rect">
             <a:avLst/>
@@ -5533,7 +5710,7 @@
                 <a:ea typeface="Calibri" pitchFamily="34" charset="-122"/>
                 <a:cs typeface="Calibri" pitchFamily="34" charset="-120"/>
               </a:rPr>
-              <a:t>lots du stock signalés hors marché</a:t>
+              <a:t>délai médian pour 90 % du potentiel vendu</a:t>
             </a:r>
             <a:endParaRPr lang="en-US" sz="1050" dirty="0"/>
           </a:p>
@@ -5541,119 +5718,46 @@
       </p:sp>
       <p:sp>
         <p:nvSpPr>
-          <p:cNvPr id="11" name="Shape 9"/>
-          <p:cNvSpPr/>
-          <p:nvPr/>
-        </p:nvSpPr>
-        <p:spPr>
-          <a:xfrm>
-            <a:off x="7315200" y="4800600"/>
-            <a:ext cx="4297680" cy="1371600"/>
-          </a:xfrm>
-          <a:prstGeom prst="roundRect">
-            <a:avLst>
-              <a:gd name="adj" fmla="val 5333"/>
-            </a:avLst>
-          </a:prstGeom>
-          <a:solidFill>
-            <a:srgbClr val="FFFFFF"/>
-          </a:solidFill>
-          <a:ln w="12700">
-            <a:solidFill>
-              <a:srgbClr val="E3E7EE"/>
-            </a:solidFill>
-            <a:prstDash val="solid"/>
-          </a:ln>
-          <a:effectLst>
-            <a:outerShdw sx="100000" sy="100000" kx="0" ky="0" algn="bl" rotWithShape="0" blurRad="76200" dist="25400" dir="5400000">
-              <a:srgbClr val="1A1A19">
-                <a:alpha val="12000"/>
-              </a:srgbClr>
-            </a:outerShdw>
-          </a:effectLst>
-        </p:spPr>
-      </p:sp>
-      <p:sp>
-        <p:nvSpPr>
-          <p:cNvPr id="12" name="Text 10"/>
-          <p:cNvSpPr/>
-          <p:nvPr/>
-        </p:nvSpPr>
-        <p:spPr>
-          <a:xfrm>
-            <a:off x="7424928" y="4873752"/>
-            <a:ext cx="4078224" cy="822960"/>
-          </a:xfrm>
-          <a:prstGeom prst="rect">
-            <a:avLst/>
-          </a:prstGeom>
-          <a:noFill/>
-          <a:ln/>
-        </p:spPr>
-        <p:txBody>
-          <a:bodyPr wrap="square" lIns="0" tIns="0" rIns="0" bIns="0" rtlCol="0" anchor="b"/>
-          <a:lstStyle/>
-          <a:p>
-            <a:pPr algn="l" indent="0" marL="0">
-              <a:buNone/>
-            </a:pPr>
-            <a:r>
-              <a:rPr lang="en-US" sz="2800" b="1" dirty="0">
-                <a:solidFill>
-                  <a:srgbClr val="2A78D6"/>
-                </a:solidFill>
-                <a:latin typeface="Cambria" pitchFamily="34" charset="0"/>
-                <a:ea typeface="Cambria" pitchFamily="34" charset="-122"/>
-                <a:cs typeface="Cambria" pitchFamily="34" charset="-120"/>
-              </a:rPr>
-              <a:t>0,006</a:t>
-            </a:r>
-            <a:endParaRPr lang="en-US" sz="2800" dirty="0"/>
-          </a:p>
-        </p:txBody>
-      </p:sp>
-      <p:sp>
-        <p:nvSpPr>
-          <p:cNvPr id="13" name="Text 11"/>
-          <p:cNvSpPr/>
-          <p:nvPr/>
-        </p:nvSpPr>
-        <p:spPr>
-          <a:xfrm>
-            <a:off x="7424928" y="5733288"/>
-            <a:ext cx="4078224" cy="384048"/>
-          </a:xfrm>
-          <a:prstGeom prst="rect">
-            <a:avLst/>
-          </a:prstGeom>
-          <a:noFill/>
-          <a:ln/>
-        </p:spPr>
-        <p:txBody>
-          <a:bodyPr wrap="square" lIns="0" tIns="0" rIns="0" bIns="0" rtlCol="0" anchor="t"/>
-          <a:lstStyle/>
-          <a:p>
-            <a:pPr algn="l" indent="0" marL="0">
-              <a:buNone/>
-            </a:pPr>
-            <a:r>
-              <a:rPr lang="en-US" sz="1050" dirty="0">
-                <a:solidFill>
-                  <a:srgbClr val="52514E"/>
-                </a:solidFill>
-                <a:latin typeface="Calibri" pitchFamily="34" charset="0"/>
-                <a:ea typeface="Calibri" pitchFamily="34" charset="-122"/>
-                <a:cs typeface="Calibri" pitchFamily="34" charset="-120"/>
-              </a:rPr>
-              <a:t>écart entre les deux solveurs d'optimisation</a:t>
-            </a:r>
-            <a:endParaRPr lang="en-US" sz="1050" dirty="0"/>
-          </a:p>
-        </p:txBody>
-      </p:sp>
-      <p:sp>
-        <p:nvSpPr>
-          <p:cNvPr id="14" name="Text 12"/>
+          <p:cNvPr id="14" name="Text 11"/>
+          <p:cNvSpPr/>
+          <p:nvPr/>
+        </p:nvSpPr>
+        <p:spPr>
+          <a:xfrm>
+            <a:off x="548640" y="5852160"/>
+            <a:ext cx="6309360" cy="365760"/>
+          </a:xfrm>
+          <a:prstGeom prst="rect">
+            <a:avLst/>
+          </a:prstGeom>
+          <a:noFill/>
+          <a:ln/>
+        </p:spPr>
+        <p:txBody>
+          <a:bodyPr wrap="square" lIns="0" tIns="0" rIns="0" bIns="0" rtlCol="0" anchor="ctr"/>
+          <a:lstStyle/>
+          <a:p>
+            <a:pPr indent="0" marL="0">
+              <a:buNone/>
+            </a:pPr>
+            <a:r>
+              <a:rPr lang="en-US" sz="1200" b="1" i="1" dirty="0">
+                <a:solidFill>
+                  <a:srgbClr val="1BAF7A"/>
+                </a:solidFill>
+                <a:latin typeface="Calibri" pitchFamily="34" charset="0"/>
+                <a:ea typeface="Calibri" pitchFamily="34" charset="-122"/>
+                <a:cs typeface="Calibri" pitchFamily="34" charset="-120"/>
+              </a:rPr>
+              <a:t>Axe le plus solide du projet.</a:t>
+            </a:r>
+            <a:endParaRPr lang="en-US" sz="1200" dirty="0"/>
+          </a:p>
+        </p:txBody>
+      </p:sp>
+      <p:sp>
+        <p:nvSpPr>
+          <p:cNvPr id="15" name="Text 12"/>
           <p:cNvSpPr/>
           <p:nvPr/>
         </p:nvSpPr>
@@ -5692,7 +5796,7 @@
       </p:sp>
       <p:sp>
         <p:nvSpPr>
-          <p:cNvPr id="15" name="Text 13"/>
+          <p:cNvPr id="16" name="Text 13"/>
           <p:cNvSpPr/>
           <p:nvPr/>
         </p:nvSpPr>
@@ -5788,13 +5892,13 @@
             <a:r>
               <a:rPr lang="en-US" sz="1200" b="1" spc="200" kern="0" dirty="0">
                 <a:solidFill>
-                  <a:srgbClr val="EDA100"/>
-                </a:solidFill>
-                <a:latin typeface="Calibri" pitchFamily="34" charset="0"/>
-                <a:ea typeface="Calibri" pitchFamily="34" charset="-122"/>
-                <a:cs typeface="Calibri" pitchFamily="34" charset="-120"/>
-              </a:rPr>
-              <a:t>COPILOTE FINANCIER — AXE TRANSVERSE</a:t>
+                  <a:srgbClr val="4A3AA7"/>
+                </a:solidFill>
+                <a:latin typeface="Calibri" pitchFamily="34" charset="0"/>
+                <a:ea typeface="Calibri" pitchFamily="34" charset="-122"/>
+                <a:cs typeface="Calibri" pitchFamily="34" charset="-120"/>
+              </a:rPr>
+              <a:t>COPILOTE FINANCIER — AXE C</a:t>
             </a:r>
             <a:endParaRPr lang="en-US" sz="1200" dirty="0"/>
           </a:p>
@@ -5809,7 +5913,7 @@
         <p:spPr>
           <a:xfrm>
             <a:off x="548640" y="658368"/>
-            <a:ext cx="10515600" cy="822960"/>
+            <a:ext cx="10058400" cy="822960"/>
           </a:xfrm>
           <a:prstGeom prst="rect">
             <a:avLst/>
@@ -5833,7 +5937,7 @@
                 <a:ea typeface="Cambria" pitchFamily="34" charset="-122"/>
                 <a:cs typeface="Cambria" pitchFamily="34" charset="-120"/>
               </a:rPr>
-              <a:t>Signaux faibles : texte et réseau de vente</a:t>
+              <a:t>L'optimisation des prix</a:t>
             </a:r>
             <a:endParaRPr lang="en-US" sz="2800" dirty="0"/>
           </a:p>
@@ -5847,8 +5951,8 @@
         </p:nvSpPr>
         <p:spPr>
           <a:xfrm>
-            <a:off x="548640" y="1600200"/>
-            <a:ext cx="6583680" cy="4663440"/>
+            <a:off x="548640" y="1691640"/>
+            <a:ext cx="6492240" cy="4572000"/>
           </a:xfrm>
           <a:prstGeom prst="rect">
             <a:avLst/>
@@ -5865,7 +5969,7 @@
                 <a:spcPct val="106000"/>
               </a:lnSpc>
               <a:spcAft>
-                <a:spcPts val="1300"/>
+                <a:spcPts val="1200"/>
               </a:spcAft>
               <a:buSzPct val="100000"/>
               <a:buChar char="•"/>
@@ -5879,7 +5983,7 @@
                 <a:ea typeface="Calibri" pitchFamily="34" charset="-122"/>
                 <a:cs typeface="Calibri" pitchFamily="34" charset="-120"/>
               </a:rPr>
-              <a:t>9 688 commentaires libres de vente : moteur de recherche par similarité (TF-IDF + cosinus, corpus de 1 346 documents)</a:t>
+              <a:t>Modèle hédonique sur 5 064 appartements vendus depuis 2016 — primes cohérentes (étage +6,0 %, sud +2,6 %, social −62,8 %, millésime +19-21 %)</a:t>
             </a:r>
             <a:endParaRPr lang="en-US" sz="1300" dirty="0"/>
           </a:p>
@@ -5889,7 +5993,7 @@
                 <a:spcPct val="106000"/>
               </a:lnSpc>
               <a:spcAft>
-                <a:spcPts val="1300"/>
+                <a:spcPts val="1200"/>
               </a:spcAft>
               <a:buSzPct val="100000"/>
               <a:buChar char="•"/>
@@ -5903,7 +6007,7 @@
                 <a:ea typeface="Calibri" pitchFamily="34" charset="-122"/>
                 <a:cs typeface="Calibri" pitchFamily="34" charset="-120"/>
               </a:rPr>
-              <a:t>Prédiction du désistement par le texte, fuite contrôlée (314 commentaires écartés) : Naive Bayes F1 = 0,343, préféré à une régression logistique quasi muette</a:t>
+              <a:t>Élasticité non significative en interne (p = 0,57) → fixée prudemment à −1, documentée plutôt que masquée</a:t>
             </a:r>
             <a:endParaRPr lang="en-US" sz="1300" dirty="0"/>
           </a:p>
@@ -5913,7 +6017,7 @@
                 <a:spcPct val="106000"/>
               </a:lnSpc>
               <a:spcAft>
-                <a:spcPts val="1300"/>
+                <a:spcPts val="1200"/>
               </a:spcAft>
               <a:buSzPct val="100000"/>
               <a:buChar char="•"/>
@@ -5927,7 +6031,7 @@
                 <a:ea typeface="Calibri" pitchFamily="34" charset="-122"/>
                 <a:cs typeface="Calibri" pitchFamily="34" charset="-120"/>
               </a:rPr>
-              <a:t>Divergence de Kullback-Leibler (écart entre distributions) : révèle un défaut de saisie sur une agence (90 % de motifs « autres »), pas un profil client</a:t>
+              <a:t>Optimisation par multiplicateur de Lagrange, vérifiée par un second solveur indépendant (SLSQP) — convergence à 0,006 près</a:t>
             </a:r>
             <a:endParaRPr lang="en-US" sz="1300" dirty="0"/>
           </a:p>
@@ -5937,7 +6041,7 @@
                 <a:spcPct val="106000"/>
               </a:lnSpc>
               <a:spcAft>
-                <a:spcPts val="1300"/>
+                <a:spcPts val="1200"/>
               </a:spcAft>
               <a:buSzPct val="100000"/>
               <a:buChar char="•"/>
@@ -5951,7 +6055,7 @@
                 <a:ea typeface="Calibri" pitchFamily="34" charset="-122"/>
                 <a:cs typeface="Calibri" pitchFamily="34" charset="-120"/>
               </a:rPr>
-              <a:t>Réseau biparti vendeurs-opérations (209 vendeurs, 711 arêtes) : deux pivots concentrent 51,6 % des dossiers, désistement très contrasté (9,0 % vs 29,6 %)</a:t>
+              <a:t>Résultat contre-intuitif : remise optimale identique en euros sur tous les lots — ex. Arpeggio (18 lots), ajustements de −5 % à −14 % selon le prix</a:t>
             </a:r>
             <a:endParaRPr lang="en-US" sz="1300" dirty="0"/>
           </a:p>
@@ -5965,8 +6069,8 @@
         </p:nvSpPr>
         <p:spPr>
           <a:xfrm>
-            <a:off x="7360920" y="1691640"/>
-            <a:ext cx="4251960" cy="1371600"/>
+            <a:off x="7315200" y="1691640"/>
+            <a:ext cx="4297680" cy="1371600"/>
           </a:xfrm>
           <a:prstGeom prst="roundRect">
             <a:avLst>
@@ -5999,8 +6103,8 @@
         </p:nvSpPr>
         <p:spPr>
           <a:xfrm>
-            <a:off x="7470648" y="1764792"/>
-            <a:ext cx="4032504" cy="822960"/>
+            <a:off x="7424928" y="1764792"/>
+            <a:ext cx="4078224" cy="822960"/>
           </a:xfrm>
           <a:prstGeom prst="rect">
             <a:avLst/>
@@ -6018,13 +6122,13 @@
             <a:r>
               <a:rPr lang="en-US" sz="2800" b="1" dirty="0">
                 <a:solidFill>
-                  <a:srgbClr val="EDA100"/>
+                  <a:srgbClr val="4A3AA7"/>
                 </a:solidFill>
                 <a:latin typeface="Cambria" pitchFamily="34" charset="0"/>
                 <a:ea typeface="Cambria" pitchFamily="34" charset="-122"/>
                 <a:cs typeface="Cambria" pitchFamily="34" charset="-120"/>
               </a:rPr>
-              <a:t>F1 = 0,343</a:t>
+              <a:t>R² = 0,886</a:t>
             </a:r>
             <a:endParaRPr lang="en-US" sz="2800" dirty="0"/>
           </a:p>
@@ -6038,8 +6142,8 @@
         </p:nvSpPr>
         <p:spPr>
           <a:xfrm>
-            <a:off x="7470648" y="2624328"/>
-            <a:ext cx="4032504" cy="384048"/>
+            <a:off x="7424928" y="2624328"/>
+            <a:ext cx="4078224" cy="384048"/>
           </a:xfrm>
           <a:prstGeom prst="rect">
             <a:avLst/>
@@ -6063,7 +6167,7 @@
                 <a:ea typeface="Calibri" pitchFamily="34" charset="-122"/>
                 <a:cs typeface="Calibri" pitchFamily="34" charset="-120"/>
               </a:rPr>
-              <a:t>Naive Bayes, désistement prédit par le texte</a:t>
+              <a:t>variance du prix expliquée, erreur type ≈ 11 %</a:t>
             </a:r>
             <a:endParaRPr lang="en-US" sz="1050" dirty="0"/>
           </a:p>
@@ -6077,8 +6181,8 @@
         </p:nvSpPr>
         <p:spPr>
           <a:xfrm>
-            <a:off x="7360920" y="3246120"/>
-            <a:ext cx="4251960" cy="1371600"/>
+            <a:off x="7315200" y="3246120"/>
+            <a:ext cx="4297680" cy="1371600"/>
           </a:xfrm>
           <a:prstGeom prst="roundRect">
             <a:avLst>
@@ -6111,8 +6215,8 @@
         </p:nvSpPr>
         <p:spPr>
           <a:xfrm>
-            <a:off x="7470648" y="3319272"/>
-            <a:ext cx="4032504" cy="822960"/>
+            <a:off x="7424928" y="3319272"/>
+            <a:ext cx="4078224" cy="822960"/>
           </a:xfrm>
           <a:prstGeom prst="rect">
             <a:avLst/>
@@ -6130,13 +6234,13 @@
             <a:r>
               <a:rPr lang="en-US" sz="2800" b="1" dirty="0">
                 <a:solidFill>
-                  <a:srgbClr val="4A3AA7"/>
+                  <a:srgbClr val="EDA100"/>
                 </a:solidFill>
                 <a:latin typeface="Cambria" pitchFamily="34" charset="0"/>
                 <a:ea typeface="Cambria" pitchFamily="34" charset="-122"/>
                 <a:cs typeface="Cambria" pitchFamily="34" charset="-120"/>
               </a:rPr>
-              <a:t>51,6 %</a:t>
+              <a:t>24 / 127</a:t>
             </a:r>
             <a:endParaRPr lang="en-US" sz="2800" dirty="0"/>
           </a:p>
@@ -6150,8 +6254,8 @@
         </p:nvSpPr>
         <p:spPr>
           <a:xfrm>
-            <a:off x="7470648" y="4178808"/>
-            <a:ext cx="4032504" cy="384048"/>
+            <a:off x="7424928" y="4178808"/>
+            <a:ext cx="4078224" cy="384048"/>
           </a:xfrm>
           <a:prstGeom prst="rect">
             <a:avLst/>
@@ -6175,7 +6279,7 @@
                 <a:ea typeface="Calibri" pitchFamily="34" charset="-122"/>
                 <a:cs typeface="Calibri" pitchFamily="34" charset="-120"/>
               </a:rPr>
-              <a:t>des dossiers concentrés sur 2 vendeurs pivots</a:t>
+              <a:t>lots du stock signalés hors marché</a:t>
             </a:r>
             <a:endParaRPr lang="en-US" sz="1050" dirty="0"/>
           </a:p>
@@ -6189,8 +6293,8 @@
         </p:nvSpPr>
         <p:spPr>
           <a:xfrm>
-            <a:off x="7360920" y="4800600"/>
-            <a:ext cx="4251960" cy="1371600"/>
+            <a:off x="7315200" y="4800600"/>
+            <a:ext cx="4297680" cy="1371600"/>
           </a:xfrm>
           <a:prstGeom prst="roundRect">
             <a:avLst>
@@ -6223,8 +6327,8 @@
         </p:nvSpPr>
         <p:spPr>
           <a:xfrm>
-            <a:off x="7470648" y="4873752"/>
-            <a:ext cx="4032504" cy="822960"/>
+            <a:off x="7424928" y="4873752"/>
+            <a:ext cx="4078224" cy="822960"/>
           </a:xfrm>
           <a:prstGeom prst="rect">
             <a:avLst/>
@@ -6240,17 +6344,17 @@
               <a:buNone/>
             </a:pPr>
             <a:r>
-              <a:rPr lang="en-US" sz="2000" b="1" dirty="0">
-                <a:solidFill>
-                  <a:srgbClr val="E34948"/>
+              <a:rPr lang="en-US" sz="2800" b="1" dirty="0">
+                <a:solidFill>
+                  <a:srgbClr val="2A78D6"/>
                 </a:solidFill>
                 <a:latin typeface="Cambria" pitchFamily="34" charset="0"/>
                 <a:ea typeface="Cambria" pitchFamily="34" charset="-122"/>
                 <a:cs typeface="Cambria" pitchFamily="34" charset="-120"/>
               </a:rPr>
-              <a:t>9,0 % / 29,6 %</a:t>
-            </a:r>
-            <a:endParaRPr lang="en-US" sz="2000" dirty="0"/>
+              <a:t>0,006</a:t>
+            </a:r>
+            <a:endParaRPr lang="en-US" sz="2800" dirty="0"/>
           </a:p>
         </p:txBody>
       </p:sp>
@@ -6262,8 +6366,8 @@
         </p:nvSpPr>
         <p:spPr>
           <a:xfrm>
-            <a:off x="7470648" y="5733288"/>
-            <a:ext cx="4032504" cy="384048"/>
+            <a:off x="7424928" y="5733288"/>
+            <a:ext cx="4078224" cy="384048"/>
           </a:xfrm>
           <a:prstGeom prst="rect">
             <a:avLst/>
@@ -6287,7 +6391,7 @@
                 <a:ea typeface="Calibri" pitchFamily="34" charset="-122"/>
                 <a:cs typeface="Calibri" pitchFamily="34" charset="-120"/>
               </a:rPr>
-              <a:t>désistement : pivot interne vs prescripteur externe</a:t>
+              <a:t>écart entre les deux solveurs d'optimisation</a:t>
             </a:r>
             <a:endParaRPr lang="en-US" sz="1050" dirty="0"/>
           </a:p>
@@ -6430,13 +6534,13 @@
             <a:r>
               <a:rPr lang="en-US" sz="1200" b="1" spc="200" kern="0" dirty="0">
                 <a:solidFill>
-                  <a:srgbClr val="2A78D6"/>
-                </a:solidFill>
-                <a:latin typeface="Calibri" pitchFamily="34" charset="0"/>
-                <a:ea typeface="Calibri" pitchFamily="34" charset="-122"/>
-                <a:cs typeface="Calibri" pitchFamily="34" charset="-120"/>
-              </a:rPr>
-              <a:t>LE COPILOTE FINANCIER EN USAGE</a:t>
+                  <a:srgbClr val="EDA100"/>
+                </a:solidFill>
+                <a:latin typeface="Calibri" pitchFamily="34" charset="0"/>
+                <a:ea typeface="Calibri" pitchFamily="34" charset="-122"/>
+                <a:cs typeface="Calibri" pitchFamily="34" charset="-120"/>
+              </a:rPr>
+              <a:t>COPILOTE FINANCIER — AXE TRANSVERSE</a:t>
             </a:r>
             <a:endParaRPr lang="en-US" sz="1200" dirty="0"/>
           </a:p>
@@ -6475,7 +6579,7 @@
                 <a:ea typeface="Cambria" pitchFamily="34" charset="-122"/>
                 <a:cs typeface="Cambria" pitchFamily="34" charset="-120"/>
               </a:rPr>
-              <a:t>La plateforme : cinq pages pour la direction financière</a:t>
+              <a:t>Signaux faibles : texte et réseau de vente</a:t>
             </a:r>
             <a:endParaRPr lang="en-US" sz="2800" dirty="0"/>
           </a:p>
@@ -6489,8 +6593,8 @@
         </p:nvSpPr>
         <p:spPr>
           <a:xfrm>
-            <a:off x="548640" y="1554480"/>
-            <a:ext cx="4160520" cy="4754880"/>
+            <a:off x="548640" y="1600200"/>
+            <a:ext cx="6583680" cy="4663440"/>
           </a:xfrm>
           <a:prstGeom prst="rect">
             <a:avLst/>
@@ -6507,13 +6611,13 @@
                 <a:spcPct val="106000"/>
               </a:lnSpc>
               <a:spcAft>
-                <a:spcPts val="1100"/>
+                <a:spcPts val="1300"/>
               </a:spcAft>
               <a:buSzPct val="100000"/>
               <a:buChar char="•"/>
             </a:pPr>
             <a:r>
-              <a:rPr lang="en-US" sz="1250" dirty="0">
+              <a:rPr lang="en-US" sz="1300" dirty="0">
                 <a:solidFill>
                   <a:srgbClr val="1A1A19"/>
                 </a:solidFill>
@@ -6521,9 +6625,9 @@
                 <a:ea typeface="Calibri" pitchFamily="34" charset="-122"/>
                 <a:cs typeface="Calibri" pitchFamily="34" charset="-120"/>
               </a:rPr>
-              <a:t>Vue d'ensemble : 147 opérations, 421 lots en stock</a:t>
-            </a:r>
-            <a:endParaRPr lang="en-US" sz="1250" dirty="0"/>
+              <a:t>9 688 commentaires libres de vente : moteur de recherche par similarité (TF-IDF + cosinus, corpus de 1 346 documents)</a:t>
+            </a:r>
+            <a:endParaRPr lang="en-US" sz="1300" dirty="0"/>
           </a:p>
           <a:p>
             <a:pPr marL="203200" indent="-203200">
@@ -6531,13 +6635,13 @@
                 <a:spcPct val="106000"/>
               </a:lnSpc>
               <a:spcAft>
-                <a:spcPts val="1100"/>
+                <a:spcPts val="1300"/>
               </a:spcAft>
               <a:buSzPct val="100000"/>
               <a:buChar char="•"/>
             </a:pPr>
             <a:r>
-              <a:rPr lang="en-US" sz="1250" dirty="0">
+              <a:rPr lang="en-US" sz="1300" dirty="0">
                 <a:solidFill>
                   <a:srgbClr val="1A1A19"/>
                 </a:solidFill>
@@ -6545,9 +6649,9 @@
                 <a:ea typeface="Calibri" pitchFamily="34" charset="-122"/>
                 <a:cs typeface="Calibri" pitchFamily="34" charset="-120"/>
               </a:rPr>
-              <a:t>Alertes marge : 10 en alerte sur 68 suffisamment engagées</a:t>
-            </a:r>
-            <a:endParaRPr lang="en-US" sz="1250" dirty="0"/>
+              <a:t>Prédiction du désistement par le texte, fuite contrôlée (314 commentaires écartés) : Naive Bayes F1 = 0,343, préféré à une régression logistique quasi muette</a:t>
+            </a:r>
+            <a:endParaRPr lang="en-US" sz="1300" dirty="0"/>
           </a:p>
           <a:p>
             <a:pPr marL="203200" indent="-203200">
@@ -6555,13 +6659,13 @@
                 <a:spcPct val="106000"/>
               </a:lnSpc>
               <a:spcAft>
-                <a:spcPts val="1100"/>
+                <a:spcPts val="1300"/>
               </a:spcAft>
               <a:buSzPct val="100000"/>
               <a:buChar char="•"/>
             </a:pPr>
             <a:r>
-              <a:rPr lang="en-US" sz="1250" dirty="0">
+              <a:rPr lang="en-US" sz="1300" dirty="0">
                 <a:solidFill>
                   <a:srgbClr val="1A1A19"/>
                 </a:solidFill>
@@ -6569,9 +6673,9 @@
                 <a:ea typeface="Calibri" pitchFamily="34" charset="-122"/>
                 <a:cs typeface="Calibri" pitchFamily="34" charset="-120"/>
               </a:rPr>
-              <a:t>Rythme de vente : simulateur de taux 2026</a:t>
-            </a:r>
-            <a:endParaRPr lang="en-US" sz="1250" dirty="0"/>
+              <a:t>Divergence de Kullback-Leibler (écart entre distributions) : révèle un défaut de saisie sur une agence (90 % de motifs « autres »), pas un profil client</a:t>
+            </a:r>
+            <a:endParaRPr lang="en-US" sz="1300" dirty="0"/>
           </a:p>
           <a:p>
             <a:pPr marL="203200" indent="-203200">
@@ -6579,13 +6683,13 @@
                 <a:spcPct val="106000"/>
               </a:lnSpc>
               <a:spcAft>
-                <a:spcPts val="1100"/>
+                <a:spcPts val="1300"/>
               </a:spcAft>
               <a:buSzPct val="100000"/>
               <a:buChar char="•"/>
             </a:pPr>
             <a:r>
-              <a:rPr lang="en-US" sz="1250" dirty="0">
+              <a:rPr lang="en-US" sz="1300" dirty="0">
                 <a:solidFill>
                   <a:srgbClr val="1A1A19"/>
                 </a:solidFill>
@@ -6593,33 +6697,9 @@
                 <a:ea typeface="Calibri" pitchFamily="34" charset="-122"/>
                 <a:cs typeface="Calibri" pitchFamily="34" charset="-120"/>
               </a:rPr>
-              <a:t>Pilotage des prix : lots hors marché + grille ajustée</a:t>
-            </a:r>
-            <a:endParaRPr lang="en-US" sz="1250" dirty="0"/>
-          </a:p>
-          <a:p>
-            <a:pPr marL="203200" indent="-203200">
-              <a:lnSpc>
-                <a:spcPct val="106000"/>
-              </a:lnSpc>
-              <a:spcAft>
-                <a:spcPts val="1100"/>
-              </a:spcAft>
-              <a:buSzPct val="100000"/>
-              <a:buChar char="•"/>
-            </a:pPr>
-            <a:r>
-              <a:rPr lang="en-US" sz="1250" dirty="0">
-                <a:solidFill>
-                  <a:srgbClr val="1A1A19"/>
-                </a:solidFill>
-                <a:latin typeface="Calibri" pitchFamily="34" charset="0"/>
-                <a:ea typeface="Calibri" pitchFamily="34" charset="-122"/>
-                <a:cs typeface="Calibri" pitchFamily="34" charset="-120"/>
-              </a:rPr>
-              <a:t>Qualité commerciale : alerte de saisie + recherche de dossiers</a:t>
-            </a:r>
-            <a:endParaRPr lang="en-US" sz="1250" dirty="0"/>
+              <a:t>Réseau biparti vendeurs-opérations (209 vendeurs, 711 arêtes) : deux pivots concentrent 51,6 % des dossiers, désistement très contrasté (9,0 % vs 29,6 %)</a:t>
+            </a:r>
+            <a:endParaRPr lang="en-US" sz="1300" dirty="0"/>
           </a:p>
         </p:txBody>
       </p:sp>
@@ -6631,12 +6711,12 @@
         </p:nvSpPr>
         <p:spPr>
           <a:xfrm>
-            <a:off x="4864608" y="1481328"/>
-            <a:ext cx="3529584" cy="2212848"/>
+            <a:off x="7360920" y="1691640"/>
+            <a:ext cx="4251960" cy="1371600"/>
           </a:xfrm>
           <a:prstGeom prst="roundRect">
             <a:avLst>
-              <a:gd name="adj" fmla="val 2479"/>
+              <a:gd name="adj" fmla="val 5333"/>
             </a:avLst>
           </a:prstGeom>
           <a:solidFill>
@@ -6649,51 +6729,106 @@
             <a:prstDash val="solid"/>
           </a:ln>
           <a:effectLst>
-            <a:outerShdw sx="100000" sy="100000" kx="0" ky="0" algn="bl" rotWithShape="0" blurRad="101600" dist="25400" dir="5400000">
+            <a:outerShdw sx="100000" sy="100000" kx="0" ky="0" algn="bl" rotWithShape="0" blurRad="76200" dist="25400" dir="5400000">
               <a:srgbClr val="1A1A19">
-                <a:alpha val="15000"/>
+                <a:alpha val="12000"/>
               </a:srgbClr>
             </a:outerShdw>
           </a:effectLst>
         </p:spPr>
       </p:sp>
-      <p:pic>
-        <p:nvPicPr>
-          <p:cNvPr id="6" name="Image 0" descr="/tmp/claude-0/-home-user-MemoireM2S2/bac073a6-7c4e-552a-9627-815aeb6fe82a/scratchpad/figs/p31-000.png">    </p:cNvPr>
-          <p:cNvPicPr>
-            <a:picLocks noChangeAspect="1"/>
-          </p:cNvPicPr>
-          <p:nvPr/>
-        </p:nvPicPr>
-        <p:blipFill>
-          <a:blip r:embed="rId1"/>
-          <a:srcRect l="0" r="0" t="0" b="0"/>
-          <a:stretch/>
-        </p:blipFill>
-        <p:spPr>
-          <a:xfrm>
-            <a:off x="4937760" y="1554480"/>
-            <a:ext cx="3383280" cy="2066544"/>
-          </a:xfrm>
-          <a:prstGeom prst="rect">
-            <a:avLst/>
-          </a:prstGeom>
-        </p:spPr>
-      </p:pic>
-      <p:sp>
-        <p:nvSpPr>
-          <p:cNvPr id="7" name="Shape 4"/>
-          <p:cNvSpPr/>
-          <p:nvPr/>
-        </p:nvSpPr>
-        <p:spPr>
-          <a:xfrm>
-            <a:off x="8476488" y="1481328"/>
-            <a:ext cx="3255264" cy="2414016"/>
+      <p:sp>
+        <p:nvSpPr>
+          <p:cNvPr id="6" name="Text 4"/>
+          <p:cNvSpPr/>
+          <p:nvPr/>
+        </p:nvSpPr>
+        <p:spPr>
+          <a:xfrm>
+            <a:off x="7470648" y="1764792"/>
+            <a:ext cx="4032504" cy="822960"/>
+          </a:xfrm>
+          <a:prstGeom prst="rect">
+            <a:avLst/>
+          </a:prstGeom>
+          <a:noFill/>
+          <a:ln/>
+        </p:spPr>
+        <p:txBody>
+          <a:bodyPr wrap="square" lIns="0" tIns="0" rIns="0" bIns="0" rtlCol="0" anchor="b"/>
+          <a:lstStyle/>
+          <a:p>
+            <a:pPr algn="l" indent="0" marL="0">
+              <a:buNone/>
+            </a:pPr>
+            <a:r>
+              <a:rPr lang="en-US" sz="2800" b="1" dirty="0">
+                <a:solidFill>
+                  <a:srgbClr val="EDA100"/>
+                </a:solidFill>
+                <a:latin typeface="Cambria" pitchFamily="34" charset="0"/>
+                <a:ea typeface="Cambria" pitchFamily="34" charset="-122"/>
+                <a:cs typeface="Cambria" pitchFamily="34" charset="-120"/>
+              </a:rPr>
+              <a:t>F1 = 0,343</a:t>
+            </a:r>
+            <a:endParaRPr lang="en-US" sz="2800" dirty="0"/>
+          </a:p>
+        </p:txBody>
+      </p:sp>
+      <p:sp>
+        <p:nvSpPr>
+          <p:cNvPr id="7" name="Text 5"/>
+          <p:cNvSpPr/>
+          <p:nvPr/>
+        </p:nvSpPr>
+        <p:spPr>
+          <a:xfrm>
+            <a:off x="7470648" y="2624328"/>
+            <a:ext cx="4032504" cy="384048"/>
+          </a:xfrm>
+          <a:prstGeom prst="rect">
+            <a:avLst/>
+          </a:prstGeom>
+          <a:noFill/>
+          <a:ln/>
+        </p:spPr>
+        <p:txBody>
+          <a:bodyPr wrap="square" lIns="0" tIns="0" rIns="0" bIns="0" rtlCol="0" anchor="t"/>
+          <a:lstStyle/>
+          <a:p>
+            <a:pPr algn="l" indent="0" marL="0">
+              <a:buNone/>
+            </a:pPr>
+            <a:r>
+              <a:rPr lang="en-US" sz="1050" dirty="0">
+                <a:solidFill>
+                  <a:srgbClr val="52514E"/>
+                </a:solidFill>
+                <a:latin typeface="Calibri" pitchFamily="34" charset="0"/>
+                <a:ea typeface="Calibri" pitchFamily="34" charset="-122"/>
+                <a:cs typeface="Calibri" pitchFamily="34" charset="-120"/>
+              </a:rPr>
+              <a:t>Naive Bayes, désistement prédit par le texte</a:t>
+            </a:r>
+            <a:endParaRPr lang="en-US" sz="1050" dirty="0"/>
+          </a:p>
+        </p:txBody>
+      </p:sp>
+      <p:sp>
+        <p:nvSpPr>
+          <p:cNvPr id="8" name="Shape 6"/>
+          <p:cNvSpPr/>
+          <p:nvPr/>
+        </p:nvSpPr>
+        <p:spPr>
+          <a:xfrm>
+            <a:off x="7360920" y="3246120"/>
+            <a:ext cx="4251960" cy="1371600"/>
           </a:xfrm>
           <a:prstGeom prst="roundRect">
             <a:avLst>
-              <a:gd name="adj" fmla="val 2273"/>
+              <a:gd name="adj" fmla="val 5333"/>
             </a:avLst>
           </a:prstGeom>
           <a:solidFill>
@@ -6706,63 +6841,79 @@
             <a:prstDash val="solid"/>
           </a:ln>
           <a:effectLst>
-            <a:outerShdw sx="100000" sy="100000" kx="0" ky="0" algn="bl" rotWithShape="0" blurRad="101600" dist="25400" dir="5400000">
+            <a:outerShdw sx="100000" sy="100000" kx="0" ky="0" algn="bl" rotWithShape="0" blurRad="76200" dist="25400" dir="5400000">
               <a:srgbClr val="1A1A19">
-                <a:alpha val="15000"/>
+                <a:alpha val="12000"/>
               </a:srgbClr>
             </a:outerShdw>
           </a:effectLst>
         </p:spPr>
       </p:sp>
-      <p:pic>
-        <p:nvPicPr>
-          <p:cNvPr id="8" name="Image 1" descr="/tmp/claude-0/-home-user-MemoireM2S2/bac073a6-7c4e-552a-9627-815aeb6fe82a/scratchpad/figs/p31-001.png">    </p:cNvPr>
-          <p:cNvPicPr>
-            <a:picLocks noChangeAspect="1"/>
-          </p:cNvPicPr>
-          <p:nvPr/>
-        </p:nvPicPr>
-        <p:blipFill>
-          <a:blip r:embed="rId2"/>
-          <a:srcRect l="0" r="0" t="0" b="0"/>
-          <a:stretch/>
-        </p:blipFill>
-        <p:spPr>
-          <a:xfrm>
-            <a:off x="8549640" y="1554480"/>
-            <a:ext cx="3108960" cy="2267712"/>
-          </a:xfrm>
-          <a:prstGeom prst="rect">
-            <a:avLst/>
-          </a:prstGeom>
-        </p:spPr>
-      </p:pic>
-      <p:sp>
-        <p:nvSpPr>
-          <p:cNvPr id="9" name="Text 5"/>
-          <p:cNvSpPr/>
-          <p:nvPr/>
-        </p:nvSpPr>
-        <p:spPr>
-          <a:xfrm>
-            <a:off x="4937760" y="3703320"/>
-            <a:ext cx="3383280" cy="274320"/>
-          </a:xfrm>
-          <a:prstGeom prst="rect">
-            <a:avLst/>
-          </a:prstGeom>
-          <a:noFill/>
-          <a:ln/>
-        </p:spPr>
-        <p:txBody>
-          <a:bodyPr wrap="square" lIns="0" tIns="0" rIns="0" bIns="0" rtlCol="0" anchor="ctr"/>
-          <a:lstStyle/>
-          <a:p>
-            <a:pPr algn="ctr" indent="0" marL="0">
-              <a:buNone/>
-            </a:pPr>
-            <a:r>
-              <a:rPr lang="en-US" sz="1000" i="1" dirty="0">
+      <p:sp>
+        <p:nvSpPr>
+          <p:cNvPr id="9" name="Text 7"/>
+          <p:cNvSpPr/>
+          <p:nvPr/>
+        </p:nvSpPr>
+        <p:spPr>
+          <a:xfrm>
+            <a:off x="7470648" y="3319272"/>
+            <a:ext cx="4032504" cy="822960"/>
+          </a:xfrm>
+          <a:prstGeom prst="rect">
+            <a:avLst/>
+          </a:prstGeom>
+          <a:noFill/>
+          <a:ln/>
+        </p:spPr>
+        <p:txBody>
+          <a:bodyPr wrap="square" lIns="0" tIns="0" rIns="0" bIns="0" rtlCol="0" anchor="b"/>
+          <a:lstStyle/>
+          <a:p>
+            <a:pPr algn="l" indent="0" marL="0">
+              <a:buNone/>
+            </a:pPr>
+            <a:r>
+              <a:rPr lang="en-US" sz="2800" b="1" dirty="0">
+                <a:solidFill>
+                  <a:srgbClr val="4A3AA7"/>
+                </a:solidFill>
+                <a:latin typeface="Cambria" pitchFamily="34" charset="0"/>
+                <a:ea typeface="Cambria" pitchFamily="34" charset="-122"/>
+                <a:cs typeface="Cambria" pitchFamily="34" charset="-120"/>
+              </a:rPr>
+              <a:t>51,6 %</a:t>
+            </a:r>
+            <a:endParaRPr lang="en-US" sz="2800" dirty="0"/>
+          </a:p>
+        </p:txBody>
+      </p:sp>
+      <p:sp>
+        <p:nvSpPr>
+          <p:cNvPr id="10" name="Text 8"/>
+          <p:cNvSpPr/>
+          <p:nvPr/>
+        </p:nvSpPr>
+        <p:spPr>
+          <a:xfrm>
+            <a:off x="7470648" y="4178808"/>
+            <a:ext cx="4032504" cy="384048"/>
+          </a:xfrm>
+          <a:prstGeom prst="rect">
+            <a:avLst/>
+          </a:prstGeom>
+          <a:noFill/>
+          <a:ln/>
+        </p:spPr>
+        <p:txBody>
+          <a:bodyPr wrap="square" lIns="0" tIns="0" rIns="0" bIns="0" rtlCol="0" anchor="t"/>
+          <a:lstStyle/>
+          <a:p>
+            <a:pPr algn="l" indent="0" marL="0">
+              <a:buNone/>
+            </a:pPr>
+            <a:r>
+              <a:rPr lang="en-US" sz="1050" dirty="0">
                 <a:solidFill>
                   <a:srgbClr val="52514E"/>
                 </a:solidFill>
@@ -6770,120 +6921,127 @@
                 <a:ea typeface="Calibri" pitchFamily="34" charset="-122"/>
                 <a:cs typeface="Calibri" pitchFamily="34" charset="-120"/>
               </a:rPr>
-              <a:t>Vue d'ensemble</a:t>
-            </a:r>
-            <a:endParaRPr lang="en-US" sz="1000" dirty="0"/>
-          </a:p>
-        </p:txBody>
-      </p:sp>
-      <p:sp>
-        <p:nvSpPr>
-          <p:cNvPr id="10" name="Text 6"/>
-          <p:cNvSpPr/>
-          <p:nvPr/>
-        </p:nvSpPr>
-        <p:spPr>
-          <a:xfrm>
-            <a:off x="8549640" y="3931920"/>
-            <a:ext cx="3108960" cy="274320"/>
-          </a:xfrm>
-          <a:prstGeom prst="rect">
-            <a:avLst/>
-          </a:prstGeom>
-          <a:noFill/>
-          <a:ln/>
-        </p:spPr>
-        <p:txBody>
-          <a:bodyPr wrap="square" lIns="0" tIns="0" rIns="0" bIns="0" rtlCol="0" anchor="ctr"/>
-          <a:lstStyle/>
-          <a:p>
-            <a:pPr algn="ctr" indent="0" marL="0">
-              <a:buNone/>
-            </a:pPr>
-            <a:r>
-              <a:rPr lang="en-US" sz="1000" i="1" dirty="0">
-                <a:solidFill>
-                  <a:srgbClr val="52514E"/>
-                </a:solidFill>
-                <a:latin typeface="Calibri" pitchFamily="34" charset="0"/>
-                <a:ea typeface="Calibri" pitchFamily="34" charset="-122"/>
-                <a:cs typeface="Calibri" pitchFamily="34" charset="-120"/>
-              </a:rPr>
-              <a:t>Alertes marge</a:t>
-            </a:r>
-            <a:endParaRPr lang="en-US" sz="1000" dirty="0"/>
-          </a:p>
-        </p:txBody>
-      </p:sp>
-      <p:sp>
-        <p:nvSpPr>
-          <p:cNvPr id="11" name="Shape 7"/>
-          <p:cNvSpPr/>
-          <p:nvPr/>
-        </p:nvSpPr>
-        <p:spPr>
-          <a:xfrm>
-            <a:off x="4937760" y="4160520"/>
-            <a:ext cx="6720840" cy="1508760"/>
+              <a:t>des dossiers concentrés sur 2 vendeurs pivots</a:t>
+            </a:r>
+            <a:endParaRPr lang="en-US" sz="1050" dirty="0"/>
+          </a:p>
+        </p:txBody>
+      </p:sp>
+      <p:sp>
+        <p:nvSpPr>
+          <p:cNvPr id="11" name="Shape 9"/>
+          <p:cNvSpPr/>
+          <p:nvPr/>
+        </p:nvSpPr>
+        <p:spPr>
+          <a:xfrm>
+            <a:off x="7360920" y="4800600"/>
+            <a:ext cx="4251960" cy="1371600"/>
           </a:xfrm>
           <a:prstGeom prst="roundRect">
             <a:avLst>
-              <a:gd name="adj" fmla="val 4848"/>
+              <a:gd name="adj" fmla="val 5333"/>
             </a:avLst>
           </a:prstGeom>
           <a:solidFill>
-            <a:srgbClr val="F6F8FB"/>
+            <a:srgbClr val="FFFFFF"/>
           </a:solidFill>
           <a:ln w="12700">
             <a:solidFill>
-              <a:srgbClr val="EDA100"/>
+              <a:srgbClr val="E3E7EE"/>
             </a:solidFill>
             <a:prstDash val="solid"/>
           </a:ln>
-        </p:spPr>
-      </p:sp>
-      <p:sp>
-        <p:nvSpPr>
-          <p:cNvPr id="12" name="Text 8"/>
-          <p:cNvSpPr/>
-          <p:nvPr/>
-        </p:nvSpPr>
-        <p:spPr>
-          <a:xfrm>
-            <a:off x="5166360" y="4160520"/>
-            <a:ext cx="6309360" cy="1508760"/>
-          </a:xfrm>
-          <a:prstGeom prst="rect">
-            <a:avLst/>
-          </a:prstGeom>
-          <a:noFill/>
-          <a:ln/>
-        </p:spPr>
-        <p:txBody>
-          <a:bodyPr wrap="square" lIns="0" tIns="0" rIns="0" bIns="0" rtlCol="0" anchor="ctr"/>
-          <a:lstStyle/>
-          <a:p>
-            <a:pPr indent="0" marL="0">
-              <a:buNone/>
-            </a:pPr>
-            <a:r>
-              <a:rPr lang="en-US" sz="1300" i="1" dirty="0">
-                <a:solidFill>
-                  <a:srgbClr val="1A1A19"/>
-                </a:solidFill>
-                <a:latin typeface="Calibri" pitchFamily="34" charset="0"/>
-                <a:ea typeface="Calibri" pitchFamily="34" charset="-122"/>
-                <a:cs typeface="Calibri" pitchFamily="34" charset="-120"/>
-              </a:rPr>
-              <a:t>Leçon de conduite de projet : la première version parlait le vocabulaire des statistiques (F1, R²) — trop technique pour ses utilisateurs. Reconstruite en langage métier.</a:t>
-            </a:r>
-            <a:endParaRPr lang="en-US" sz="1300" dirty="0"/>
-          </a:p>
-        </p:txBody>
-      </p:sp>
-      <p:sp>
-        <p:nvSpPr>
-          <p:cNvPr id="13" name="Text 9"/>
+          <a:effectLst>
+            <a:outerShdw sx="100000" sy="100000" kx="0" ky="0" algn="bl" rotWithShape="0" blurRad="76200" dist="25400" dir="5400000">
+              <a:srgbClr val="1A1A19">
+                <a:alpha val="12000"/>
+              </a:srgbClr>
+            </a:outerShdw>
+          </a:effectLst>
+        </p:spPr>
+      </p:sp>
+      <p:sp>
+        <p:nvSpPr>
+          <p:cNvPr id="12" name="Text 10"/>
+          <p:cNvSpPr/>
+          <p:nvPr/>
+        </p:nvSpPr>
+        <p:spPr>
+          <a:xfrm>
+            <a:off x="7470648" y="4873752"/>
+            <a:ext cx="4032504" cy="822960"/>
+          </a:xfrm>
+          <a:prstGeom prst="rect">
+            <a:avLst/>
+          </a:prstGeom>
+          <a:noFill/>
+          <a:ln/>
+        </p:spPr>
+        <p:txBody>
+          <a:bodyPr wrap="square" lIns="0" tIns="0" rIns="0" bIns="0" rtlCol="0" anchor="b"/>
+          <a:lstStyle/>
+          <a:p>
+            <a:pPr algn="l" indent="0" marL="0">
+              <a:buNone/>
+            </a:pPr>
+            <a:r>
+              <a:rPr lang="en-US" sz="2000" b="1" dirty="0">
+                <a:solidFill>
+                  <a:srgbClr val="E34948"/>
+                </a:solidFill>
+                <a:latin typeface="Cambria" pitchFamily="34" charset="0"/>
+                <a:ea typeface="Cambria" pitchFamily="34" charset="-122"/>
+                <a:cs typeface="Cambria" pitchFamily="34" charset="-120"/>
+              </a:rPr>
+              <a:t>9,0 % / 29,6 %</a:t>
+            </a:r>
+            <a:endParaRPr lang="en-US" sz="2000" dirty="0"/>
+          </a:p>
+        </p:txBody>
+      </p:sp>
+      <p:sp>
+        <p:nvSpPr>
+          <p:cNvPr id="13" name="Text 11"/>
+          <p:cNvSpPr/>
+          <p:nvPr/>
+        </p:nvSpPr>
+        <p:spPr>
+          <a:xfrm>
+            <a:off x="7470648" y="5733288"/>
+            <a:ext cx="4032504" cy="384048"/>
+          </a:xfrm>
+          <a:prstGeom prst="rect">
+            <a:avLst/>
+          </a:prstGeom>
+          <a:noFill/>
+          <a:ln/>
+        </p:spPr>
+        <p:txBody>
+          <a:bodyPr wrap="square" lIns="0" tIns="0" rIns="0" bIns="0" rtlCol="0" anchor="t"/>
+          <a:lstStyle/>
+          <a:p>
+            <a:pPr algn="l" indent="0" marL="0">
+              <a:buNone/>
+            </a:pPr>
+            <a:r>
+              <a:rPr lang="en-US" sz="1050" dirty="0">
+                <a:solidFill>
+                  <a:srgbClr val="52514E"/>
+                </a:solidFill>
+                <a:latin typeface="Calibri" pitchFamily="34" charset="0"/>
+                <a:ea typeface="Calibri" pitchFamily="34" charset="-122"/>
+                <a:cs typeface="Calibri" pitchFamily="34" charset="-120"/>
+              </a:rPr>
+              <a:t>désistement : pivot interne vs prescripteur externe</a:t>
+            </a:r>
+            <a:endParaRPr lang="en-US" sz="1050" dirty="0"/>
+          </a:p>
+        </p:txBody>
+      </p:sp>
+      <p:sp>
+        <p:nvSpPr>
+          <p:cNvPr id="14" name="Text 12"/>
           <p:cNvSpPr/>
           <p:nvPr/>
         </p:nvSpPr>
@@ -6922,7 +7080,7 @@
       </p:sp>
       <p:sp>
         <p:nvSpPr>
-          <p:cNvPr id="14" name="Text 10"/>
+          <p:cNvPr id="15" name="Text 13"/>
           <p:cNvSpPr/>
           <p:nvPr/>
         </p:nvSpPr>
@@ -7024,7 +7182,7 @@
                 <a:ea typeface="Calibri" pitchFamily="34" charset="-122"/>
                 <a:cs typeface="Calibri" pitchFamily="34" charset="-120"/>
               </a:rPr>
-              <a:t>RÉFLEXION TRANSVERSALE</a:t>
+              <a:t>LE COPILOTE FINANCIER EN USAGE</a:t>
             </a:r>
             <a:endParaRPr lang="en-US" sz="1200" dirty="0"/>
           </a:p>
@@ -7063,7 +7221,7 @@
                 <a:ea typeface="Cambria" pitchFamily="34" charset="-122"/>
                 <a:cs typeface="Cambria" pitchFamily="34" charset="-120"/>
               </a:rPr>
-              <a:t>Un traducteur avant d'être un modélisateur</a:t>
+              <a:t>La plateforme : cinq pages pour la direction financière</a:t>
             </a:r>
             <a:endParaRPr lang="en-US" sz="2800" dirty="0"/>
           </a:p>
@@ -7077,24 +7235,31 @@
         </p:nvSpPr>
         <p:spPr>
           <a:xfrm>
-            <a:off x="548640" y="1508760"/>
-            <a:ext cx="11064240" cy="640080"/>
-          </a:xfrm>
-          <a:prstGeom prst="rect">
-            <a:avLst/>
-          </a:prstGeom>
-          <a:noFill/>
-          <a:ln/>
-        </p:spPr>
-        <p:txBody>
-          <a:bodyPr wrap="square" lIns="0" tIns="0" rIns="0" bIns="0" rtlCol="0" anchor="ctr"/>
-          <a:lstStyle/>
-          <a:p>
-            <a:pPr indent="0" marL="0">
-              <a:buNone/>
-            </a:pPr>
-            <a:r>
-              <a:rPr lang="en-US" sz="1500" dirty="0">
+            <a:off x="548640" y="1554480"/>
+            <a:ext cx="4160520" cy="4754880"/>
+          </a:xfrm>
+          <a:prstGeom prst="rect">
+            <a:avLst/>
+          </a:prstGeom>
+          <a:noFill/>
+          <a:ln/>
+        </p:spPr>
+        <p:txBody>
+          <a:bodyPr wrap="square" lIns="0" tIns="0" rIns="0" bIns="0" rtlCol="0" anchor="t"/>
+          <a:lstStyle/>
+          <a:p>
+            <a:pPr marL="203200" indent="-203200">
+              <a:lnSpc>
+                <a:spcPct val="106000"/>
+              </a:lnSpc>
+              <a:spcAft>
+                <a:spcPts val="1100"/>
+              </a:spcAft>
+              <a:buSzPct val="100000"/>
+              <a:buChar char="•"/>
+            </a:pPr>
+            <a:r>
+              <a:rPr lang="en-US" sz="1250" dirty="0">
                 <a:solidFill>
                   <a:srgbClr val="1A1A19"/>
                 </a:solidFill>
@@ -7102,9 +7267,105 @@
                 <a:ea typeface="Calibri" pitchFamily="34" charset="-122"/>
                 <a:cs typeface="Calibri" pitchFamily="34" charset="-120"/>
               </a:rPr>
-              <a:t>Traduire une gêne métier en question calculable, puis un résultat statistique en information sur laquelle décider. Le régime de preuve se déduit de la nature du livrable :</a:t>
-            </a:r>
-            <a:endParaRPr lang="en-US" sz="1500" dirty="0"/>
+              <a:t>Vue d'ensemble : 147 opérations, 421 lots en stock</a:t>
+            </a:r>
+            <a:endParaRPr lang="en-US" sz="1250" dirty="0"/>
+          </a:p>
+          <a:p>
+            <a:pPr marL="203200" indent="-203200">
+              <a:lnSpc>
+                <a:spcPct val="106000"/>
+              </a:lnSpc>
+              <a:spcAft>
+                <a:spcPts val="1100"/>
+              </a:spcAft>
+              <a:buSzPct val="100000"/>
+              <a:buChar char="•"/>
+            </a:pPr>
+            <a:r>
+              <a:rPr lang="en-US" sz="1250" dirty="0">
+                <a:solidFill>
+                  <a:srgbClr val="1A1A19"/>
+                </a:solidFill>
+                <a:latin typeface="Calibri" pitchFamily="34" charset="0"/>
+                <a:ea typeface="Calibri" pitchFamily="34" charset="-122"/>
+                <a:cs typeface="Calibri" pitchFamily="34" charset="-120"/>
+              </a:rPr>
+              <a:t>Alertes marge : 10 en alerte sur 68 suffisamment engagées</a:t>
+            </a:r>
+            <a:endParaRPr lang="en-US" sz="1250" dirty="0"/>
+          </a:p>
+          <a:p>
+            <a:pPr marL="203200" indent="-203200">
+              <a:lnSpc>
+                <a:spcPct val="106000"/>
+              </a:lnSpc>
+              <a:spcAft>
+                <a:spcPts val="1100"/>
+              </a:spcAft>
+              <a:buSzPct val="100000"/>
+              <a:buChar char="•"/>
+            </a:pPr>
+            <a:r>
+              <a:rPr lang="en-US" sz="1250" dirty="0">
+                <a:solidFill>
+                  <a:srgbClr val="1A1A19"/>
+                </a:solidFill>
+                <a:latin typeface="Calibri" pitchFamily="34" charset="0"/>
+                <a:ea typeface="Calibri" pitchFamily="34" charset="-122"/>
+                <a:cs typeface="Calibri" pitchFamily="34" charset="-120"/>
+              </a:rPr>
+              <a:t>Rythme de vente : simulateur de taux 2026</a:t>
+            </a:r>
+            <a:endParaRPr lang="en-US" sz="1250" dirty="0"/>
+          </a:p>
+          <a:p>
+            <a:pPr marL="203200" indent="-203200">
+              <a:lnSpc>
+                <a:spcPct val="106000"/>
+              </a:lnSpc>
+              <a:spcAft>
+                <a:spcPts val="1100"/>
+              </a:spcAft>
+              <a:buSzPct val="100000"/>
+              <a:buChar char="•"/>
+            </a:pPr>
+            <a:r>
+              <a:rPr lang="en-US" sz="1250" dirty="0">
+                <a:solidFill>
+                  <a:srgbClr val="1A1A19"/>
+                </a:solidFill>
+                <a:latin typeface="Calibri" pitchFamily="34" charset="0"/>
+                <a:ea typeface="Calibri" pitchFamily="34" charset="-122"/>
+                <a:cs typeface="Calibri" pitchFamily="34" charset="-120"/>
+              </a:rPr>
+              <a:t>Pilotage des prix : lots hors marché + grille ajustée</a:t>
+            </a:r>
+            <a:endParaRPr lang="en-US" sz="1250" dirty="0"/>
+          </a:p>
+          <a:p>
+            <a:pPr marL="203200" indent="-203200">
+              <a:lnSpc>
+                <a:spcPct val="106000"/>
+              </a:lnSpc>
+              <a:spcAft>
+                <a:spcPts val="1100"/>
+              </a:spcAft>
+              <a:buSzPct val="100000"/>
+              <a:buChar char="•"/>
+            </a:pPr>
+            <a:r>
+              <a:rPr lang="en-US" sz="1250" dirty="0">
+                <a:solidFill>
+                  <a:srgbClr val="1A1A19"/>
+                </a:solidFill>
+                <a:latin typeface="Calibri" pitchFamily="34" charset="0"/>
+                <a:ea typeface="Calibri" pitchFamily="34" charset="-122"/>
+                <a:cs typeface="Calibri" pitchFamily="34" charset="-120"/>
+              </a:rPr>
+              <a:t>Qualité commerciale : alerte de saisie + recherche de dossiers</a:t>
+            </a:r>
+            <a:endParaRPr lang="en-US" sz="1250" dirty="0"/>
           </a:p>
         </p:txBody>
       </p:sp>
@@ -7116,12 +7377,12 @@
         </p:nvSpPr>
         <p:spPr>
           <a:xfrm>
-            <a:off x="1207008" y="2258568"/>
-            <a:ext cx="9747504" cy="4059936"/>
+            <a:off x="4864608" y="1481328"/>
+            <a:ext cx="3529584" cy="2212848"/>
           </a:xfrm>
           <a:prstGeom prst="roundRect">
             <a:avLst>
-              <a:gd name="adj" fmla="val 1351"/>
+              <a:gd name="adj" fmla="val 2479"/>
             </a:avLst>
           </a:prstGeom>
           <a:solidFill>
@@ -7144,7 +7405,7 @@
       </p:sp>
       <p:pic>
         <p:nvPicPr>
-          <p:cNvPr id="6" name="Image 0" descr="/tmp/claude-0/-home-user-MemoireM2S2/bac073a6-7c4e-552a-9627-815aeb6fe82a/scratchpad/figs/p35-000.png">    </p:cNvPr>
+          <p:cNvPr id="6" name="Image 0" descr="/tmp/claude-0/-home-user-MemoireM2S2/bac073a6-7c4e-552a-9627-815aeb6fe82a/scratchpad/figs/p31-000.png">    </p:cNvPr>
           <p:cNvPicPr>
             <a:picLocks noChangeAspect="1"/>
           </p:cNvPicPr>
@@ -7157,8 +7418,8 @@
         </p:blipFill>
         <p:spPr>
           <a:xfrm>
-            <a:off x="1280160" y="2331720"/>
-            <a:ext cx="9601200" cy="3913632"/>
+            <a:off x="4937760" y="1554480"/>
+            <a:ext cx="3383280" cy="2066544"/>
           </a:xfrm>
           <a:prstGeom prst="rect">
             <a:avLst/>
@@ -7167,7 +7428,208 @@
       </p:pic>
       <p:sp>
         <p:nvSpPr>
-          <p:cNvPr id="7" name="Text 4"/>
+          <p:cNvPr id="7" name="Shape 4"/>
+          <p:cNvSpPr/>
+          <p:nvPr/>
+        </p:nvSpPr>
+        <p:spPr>
+          <a:xfrm>
+            <a:off x="8476488" y="1481328"/>
+            <a:ext cx="3255264" cy="2414016"/>
+          </a:xfrm>
+          <a:prstGeom prst="roundRect">
+            <a:avLst>
+              <a:gd name="adj" fmla="val 2273"/>
+            </a:avLst>
+          </a:prstGeom>
+          <a:solidFill>
+            <a:srgbClr val="FFFFFF"/>
+          </a:solidFill>
+          <a:ln w="12700">
+            <a:solidFill>
+              <a:srgbClr val="E3E7EE"/>
+            </a:solidFill>
+            <a:prstDash val="solid"/>
+          </a:ln>
+          <a:effectLst>
+            <a:outerShdw sx="100000" sy="100000" kx="0" ky="0" algn="bl" rotWithShape="0" blurRad="101600" dist="25400" dir="5400000">
+              <a:srgbClr val="1A1A19">
+                <a:alpha val="15000"/>
+              </a:srgbClr>
+            </a:outerShdw>
+          </a:effectLst>
+        </p:spPr>
+      </p:sp>
+      <p:pic>
+        <p:nvPicPr>
+          <p:cNvPr id="8" name="Image 1" descr="/tmp/claude-0/-home-user-MemoireM2S2/bac073a6-7c4e-552a-9627-815aeb6fe82a/scratchpad/figs/p31-001.png">    </p:cNvPr>
+          <p:cNvPicPr>
+            <a:picLocks noChangeAspect="1"/>
+          </p:cNvPicPr>
+          <p:nvPr/>
+        </p:nvPicPr>
+        <p:blipFill>
+          <a:blip r:embed="rId2"/>
+          <a:srcRect l="0" r="0" t="0" b="0"/>
+          <a:stretch/>
+        </p:blipFill>
+        <p:spPr>
+          <a:xfrm>
+            <a:off x="8549640" y="1554480"/>
+            <a:ext cx="3108960" cy="2267712"/>
+          </a:xfrm>
+          <a:prstGeom prst="rect">
+            <a:avLst/>
+          </a:prstGeom>
+        </p:spPr>
+      </p:pic>
+      <p:sp>
+        <p:nvSpPr>
+          <p:cNvPr id="9" name="Text 5"/>
+          <p:cNvSpPr/>
+          <p:nvPr/>
+        </p:nvSpPr>
+        <p:spPr>
+          <a:xfrm>
+            <a:off x="4937760" y="3703320"/>
+            <a:ext cx="3383280" cy="274320"/>
+          </a:xfrm>
+          <a:prstGeom prst="rect">
+            <a:avLst/>
+          </a:prstGeom>
+          <a:noFill/>
+          <a:ln/>
+        </p:spPr>
+        <p:txBody>
+          <a:bodyPr wrap="square" lIns="0" tIns="0" rIns="0" bIns="0" rtlCol="0" anchor="ctr"/>
+          <a:lstStyle/>
+          <a:p>
+            <a:pPr algn="ctr" indent="0" marL="0">
+              <a:buNone/>
+            </a:pPr>
+            <a:r>
+              <a:rPr lang="en-US" sz="1000" i="1" dirty="0">
+                <a:solidFill>
+                  <a:srgbClr val="52514E"/>
+                </a:solidFill>
+                <a:latin typeface="Calibri" pitchFamily="34" charset="0"/>
+                <a:ea typeface="Calibri" pitchFamily="34" charset="-122"/>
+                <a:cs typeface="Calibri" pitchFamily="34" charset="-120"/>
+              </a:rPr>
+              <a:t>Vue d'ensemble</a:t>
+            </a:r>
+            <a:endParaRPr lang="en-US" sz="1000" dirty="0"/>
+          </a:p>
+        </p:txBody>
+      </p:sp>
+      <p:sp>
+        <p:nvSpPr>
+          <p:cNvPr id="10" name="Text 6"/>
+          <p:cNvSpPr/>
+          <p:nvPr/>
+        </p:nvSpPr>
+        <p:spPr>
+          <a:xfrm>
+            <a:off x="8549640" y="3931920"/>
+            <a:ext cx="3108960" cy="274320"/>
+          </a:xfrm>
+          <a:prstGeom prst="rect">
+            <a:avLst/>
+          </a:prstGeom>
+          <a:noFill/>
+          <a:ln/>
+        </p:spPr>
+        <p:txBody>
+          <a:bodyPr wrap="square" lIns="0" tIns="0" rIns="0" bIns="0" rtlCol="0" anchor="ctr"/>
+          <a:lstStyle/>
+          <a:p>
+            <a:pPr algn="ctr" indent="0" marL="0">
+              <a:buNone/>
+            </a:pPr>
+            <a:r>
+              <a:rPr lang="en-US" sz="1000" i="1" dirty="0">
+                <a:solidFill>
+                  <a:srgbClr val="52514E"/>
+                </a:solidFill>
+                <a:latin typeface="Calibri" pitchFamily="34" charset="0"/>
+                <a:ea typeface="Calibri" pitchFamily="34" charset="-122"/>
+                <a:cs typeface="Calibri" pitchFamily="34" charset="-120"/>
+              </a:rPr>
+              <a:t>Alertes marge</a:t>
+            </a:r>
+            <a:endParaRPr lang="en-US" sz="1000" dirty="0"/>
+          </a:p>
+        </p:txBody>
+      </p:sp>
+      <p:sp>
+        <p:nvSpPr>
+          <p:cNvPr id="11" name="Shape 7"/>
+          <p:cNvSpPr/>
+          <p:nvPr/>
+        </p:nvSpPr>
+        <p:spPr>
+          <a:xfrm>
+            <a:off x="4937760" y="4160520"/>
+            <a:ext cx="6720840" cy="1508760"/>
+          </a:xfrm>
+          <a:prstGeom prst="roundRect">
+            <a:avLst>
+              <a:gd name="adj" fmla="val 4848"/>
+            </a:avLst>
+          </a:prstGeom>
+          <a:solidFill>
+            <a:srgbClr val="F6F8FB"/>
+          </a:solidFill>
+          <a:ln w="12700">
+            <a:solidFill>
+              <a:srgbClr val="EDA100"/>
+            </a:solidFill>
+            <a:prstDash val="solid"/>
+          </a:ln>
+        </p:spPr>
+      </p:sp>
+      <p:sp>
+        <p:nvSpPr>
+          <p:cNvPr id="12" name="Text 8"/>
+          <p:cNvSpPr/>
+          <p:nvPr/>
+        </p:nvSpPr>
+        <p:spPr>
+          <a:xfrm>
+            <a:off x="5166360" y="4160520"/>
+            <a:ext cx="6309360" cy="1508760"/>
+          </a:xfrm>
+          <a:prstGeom prst="rect">
+            <a:avLst/>
+          </a:prstGeom>
+          <a:noFill/>
+          <a:ln/>
+        </p:spPr>
+        <p:txBody>
+          <a:bodyPr wrap="square" lIns="0" tIns="0" rIns="0" bIns="0" rtlCol="0" anchor="ctr"/>
+          <a:lstStyle/>
+          <a:p>
+            <a:pPr indent="0" marL="0">
+              <a:buNone/>
+            </a:pPr>
+            <a:r>
+              <a:rPr lang="en-US" sz="1300" i="1" dirty="0">
+                <a:solidFill>
+                  <a:srgbClr val="1A1A19"/>
+                </a:solidFill>
+                <a:latin typeface="Calibri" pitchFamily="34" charset="0"/>
+                <a:ea typeface="Calibri" pitchFamily="34" charset="-122"/>
+                <a:cs typeface="Calibri" pitchFamily="34" charset="-120"/>
+              </a:rPr>
+              <a:t>Leçon de conduite de projet : la première version parlait le vocabulaire des statistiques (F1, R²) — trop technique pour ses utilisateurs. Reconstruite en langage métier.</a:t>
+            </a:r>
+            <a:endParaRPr lang="en-US" sz="1300" dirty="0"/>
+          </a:p>
+        </p:txBody>
+      </p:sp>
+      <p:sp>
+        <p:nvSpPr>
+          <p:cNvPr id="13" name="Text 9"/>
           <p:cNvSpPr/>
           <p:nvPr/>
         </p:nvSpPr>
@@ -7206,7 +7668,7 @@
       </p:sp>
       <p:sp>
         <p:nvSpPr>
-          <p:cNvPr id="8" name="Text 5"/>
+          <p:cNvPr id="14" name="Text 10"/>
           <p:cNvSpPr/>
           <p:nvPr/>
         </p:nvSpPr>
@@ -7308,6 +7770,290 @@
                 <a:ea typeface="Calibri" pitchFamily="34" charset="-122"/>
                 <a:cs typeface="Calibri" pitchFamily="34" charset="-120"/>
               </a:rPr>
+              <a:t>RÉFLEXION TRANSVERSALE</a:t>
+            </a:r>
+            <a:endParaRPr lang="en-US" sz="1200" dirty="0"/>
+          </a:p>
+        </p:txBody>
+      </p:sp>
+      <p:sp>
+        <p:nvSpPr>
+          <p:cNvPr id="3" name="Text 1"/>
+          <p:cNvSpPr/>
+          <p:nvPr/>
+        </p:nvSpPr>
+        <p:spPr>
+          <a:xfrm>
+            <a:off x="548640" y="658368"/>
+            <a:ext cx="10515600" cy="822960"/>
+          </a:xfrm>
+          <a:prstGeom prst="rect">
+            <a:avLst/>
+          </a:prstGeom>
+          <a:noFill/>
+          <a:ln/>
+        </p:spPr>
+        <p:txBody>
+          <a:bodyPr wrap="square" lIns="0" tIns="0" rIns="0" bIns="0" rtlCol="0" anchor="ctr"/>
+          <a:lstStyle/>
+          <a:p>
+            <a:pPr indent="0" marL="0">
+              <a:buNone/>
+            </a:pPr>
+            <a:r>
+              <a:rPr lang="en-US" sz="2800" b="1" dirty="0">
+                <a:solidFill>
+                  <a:srgbClr val="1A1A19"/>
+                </a:solidFill>
+                <a:latin typeface="Cambria" pitchFamily="34" charset="0"/>
+                <a:ea typeface="Cambria" pitchFamily="34" charset="-122"/>
+                <a:cs typeface="Cambria" pitchFamily="34" charset="-120"/>
+              </a:rPr>
+              <a:t>Un traducteur avant d'être un modélisateur</a:t>
+            </a:r>
+            <a:endParaRPr lang="en-US" sz="2800" dirty="0"/>
+          </a:p>
+        </p:txBody>
+      </p:sp>
+      <p:sp>
+        <p:nvSpPr>
+          <p:cNvPr id="4" name="Text 2"/>
+          <p:cNvSpPr/>
+          <p:nvPr/>
+        </p:nvSpPr>
+        <p:spPr>
+          <a:xfrm>
+            <a:off x="548640" y="1508760"/>
+            <a:ext cx="11064240" cy="640080"/>
+          </a:xfrm>
+          <a:prstGeom prst="rect">
+            <a:avLst/>
+          </a:prstGeom>
+          <a:noFill/>
+          <a:ln/>
+        </p:spPr>
+        <p:txBody>
+          <a:bodyPr wrap="square" lIns="0" tIns="0" rIns="0" bIns="0" rtlCol="0" anchor="ctr"/>
+          <a:lstStyle/>
+          <a:p>
+            <a:pPr indent="0" marL="0">
+              <a:buNone/>
+            </a:pPr>
+            <a:r>
+              <a:rPr lang="en-US" sz="1500" dirty="0">
+                <a:solidFill>
+                  <a:srgbClr val="1A1A19"/>
+                </a:solidFill>
+                <a:latin typeface="Calibri" pitchFamily="34" charset="0"/>
+                <a:ea typeface="Calibri" pitchFamily="34" charset="-122"/>
+                <a:cs typeface="Calibri" pitchFamily="34" charset="-120"/>
+              </a:rPr>
+              <a:t>Traduire une gêne métier en question calculable, puis un résultat statistique en information sur laquelle décider. Le régime de preuve se déduit de la nature du livrable :</a:t>
+            </a:r>
+            <a:endParaRPr lang="en-US" sz="1500" dirty="0"/>
+          </a:p>
+        </p:txBody>
+      </p:sp>
+      <p:sp>
+        <p:nvSpPr>
+          <p:cNvPr id="5" name="Shape 3"/>
+          <p:cNvSpPr/>
+          <p:nvPr/>
+        </p:nvSpPr>
+        <p:spPr>
+          <a:xfrm>
+            <a:off x="1207008" y="2258568"/>
+            <a:ext cx="9747504" cy="4059936"/>
+          </a:xfrm>
+          <a:prstGeom prst="roundRect">
+            <a:avLst>
+              <a:gd name="adj" fmla="val 1351"/>
+            </a:avLst>
+          </a:prstGeom>
+          <a:solidFill>
+            <a:srgbClr val="FFFFFF"/>
+          </a:solidFill>
+          <a:ln w="12700">
+            <a:solidFill>
+              <a:srgbClr val="E3E7EE"/>
+            </a:solidFill>
+            <a:prstDash val="solid"/>
+          </a:ln>
+          <a:effectLst>
+            <a:outerShdw sx="100000" sy="100000" kx="0" ky="0" algn="bl" rotWithShape="0" blurRad="101600" dist="25400" dir="5400000">
+              <a:srgbClr val="1A1A19">
+                <a:alpha val="15000"/>
+              </a:srgbClr>
+            </a:outerShdw>
+          </a:effectLst>
+        </p:spPr>
+      </p:sp>
+      <p:pic>
+        <p:nvPicPr>
+          <p:cNvPr id="6" name="Image 0" descr="/tmp/claude-0/-home-user-MemoireM2S2/bac073a6-7c4e-552a-9627-815aeb6fe82a/scratchpad/figs/p35-000.png">    </p:cNvPr>
+          <p:cNvPicPr>
+            <a:picLocks noChangeAspect="1"/>
+          </p:cNvPicPr>
+          <p:nvPr/>
+        </p:nvPicPr>
+        <p:blipFill>
+          <a:blip r:embed="rId1"/>
+          <a:srcRect l="0" r="0" t="0" b="0"/>
+          <a:stretch/>
+        </p:blipFill>
+        <p:spPr>
+          <a:xfrm>
+            <a:off x="1280160" y="2331720"/>
+            <a:ext cx="9601200" cy="3913632"/>
+          </a:xfrm>
+          <a:prstGeom prst="rect">
+            <a:avLst/>
+          </a:prstGeom>
+        </p:spPr>
+      </p:pic>
+      <p:sp>
+        <p:nvSpPr>
+          <p:cNvPr id="7" name="Text 4"/>
+          <p:cNvSpPr/>
+          <p:nvPr/>
+        </p:nvSpPr>
+        <p:spPr>
+          <a:xfrm>
+            <a:off x="548640" y="6510528"/>
+            <a:ext cx="5486400" cy="274320"/>
+          </a:xfrm>
+          <a:prstGeom prst="rect">
+            <a:avLst/>
+          </a:prstGeom>
+          <a:noFill/>
+          <a:ln/>
+        </p:spPr>
+        <p:txBody>
+          <a:bodyPr wrap="square" lIns="0" tIns="0" rIns="0" bIns="0" rtlCol="0" anchor="ctr"/>
+          <a:lstStyle/>
+          <a:p>
+            <a:pPr indent="0" marL="0">
+              <a:buNone/>
+            </a:pPr>
+            <a:r>
+              <a:rPr lang="en-US" sz="900" dirty="0">
+                <a:solidFill>
+                  <a:srgbClr val="9A9A95"/>
+                </a:solidFill>
+                <a:latin typeface="Calibri" pitchFamily="34" charset="0"/>
+                <a:ea typeface="Calibri" pitchFamily="34" charset="-122"/>
+                <a:cs typeface="Calibri" pitchFamily="34" charset="-120"/>
+              </a:rPr>
+              <a:t>Copilote Financier — Groupe Angelotti</a:t>
+            </a:r>
+            <a:endParaRPr lang="en-US" sz="900" dirty="0"/>
+          </a:p>
+        </p:txBody>
+      </p:sp>
+      <p:sp>
+        <p:nvSpPr>
+          <p:cNvPr id="8" name="Text 5"/>
+          <p:cNvSpPr/>
+          <p:nvPr/>
+        </p:nvSpPr>
+        <p:spPr>
+          <a:xfrm>
+            <a:off x="11430000" y="6510528"/>
+            <a:ext cx="365760" cy="274320"/>
+          </a:xfrm>
+          <a:prstGeom prst="rect">
+            <a:avLst/>
+          </a:prstGeom>
+          <a:noFill/>
+          <a:ln/>
+        </p:spPr>
+        <p:txBody>
+          <a:bodyPr wrap="square" lIns="0" tIns="0" rIns="0" bIns="0" rtlCol="0" anchor="ctr"/>
+          <a:lstStyle/>
+          <a:p>
+            <a:pPr algn="r" indent="0" marL="0">
+              <a:buNone/>
+            </a:pPr>
+            <a:r>
+              <a:rPr lang="en-US" sz="900" dirty="0">
+                <a:solidFill>
+                  <a:srgbClr val="9A9A95"/>
+                </a:solidFill>
+                <a:latin typeface="Calibri" pitchFamily="34" charset="0"/>
+                <a:ea typeface="Calibri" pitchFamily="34" charset="-122"/>
+                <a:cs typeface="Calibri" pitchFamily="34" charset="-120"/>
+              </a:rPr>
+              <a:t>17</a:t>
+            </a:r>
+            <a:endParaRPr lang="en-US" sz="900" dirty="0"/>
+          </a:p>
+        </p:txBody>
+      </p:sp>
+    </p:spTree>
+  </p:cSld>
+  <p:clrMapOvr>
+    <a:masterClrMapping/>
+  </p:clrMapOvr>
+</p:sld>
+</file>
+
+<file path=ppt/slides/slide18.xml><?xml version="1.0" encoding="utf-8"?>
+<p:sld xmlns:a="http://schemas.openxmlformats.org/drawingml/2006/main" xmlns:r="http://schemas.openxmlformats.org/officeDocument/2006/relationships" xmlns:p="http://schemas.openxmlformats.org/presentationml/2006/main">
+  <p:cSld name="Slide 18">
+    <p:bg>
+      <p:bgPr>
+        <a:solidFill>
+          <a:srgbClr val="FFFFFF"/>
+        </a:solidFill>
+      </p:bgPr>
+    </p:bg>
+    <p:spTree>
+      <p:nvGrpSpPr>
+        <p:cNvPr id="1" name=""/>
+        <p:cNvGrpSpPr/>
+        <p:nvPr/>
+      </p:nvGrpSpPr>
+      <p:grpSpPr>
+        <a:xfrm>
+          <a:off x="0" y="0"/>
+          <a:ext cx="0" cy="0"/>
+          <a:chOff x="0" y="0"/>
+          <a:chExt cx="0" cy="0"/>
+        </a:xfrm>
+      </p:grpSpPr>
+      <p:sp>
+        <p:nvSpPr>
+          <p:cNvPr id="2" name="Text 0"/>
+          <p:cNvSpPr/>
+          <p:nvPr/>
+        </p:nvSpPr>
+        <p:spPr>
+          <a:xfrm>
+            <a:off x="548640" y="384048"/>
+            <a:ext cx="8229600" cy="320040"/>
+          </a:xfrm>
+          <a:prstGeom prst="rect">
+            <a:avLst/>
+          </a:prstGeom>
+          <a:noFill/>
+          <a:ln/>
+        </p:spPr>
+        <p:txBody>
+          <a:bodyPr wrap="square" lIns="0" tIns="0" rIns="0" bIns="0" rtlCol="0" anchor="ctr"/>
+          <a:lstStyle/>
+          <a:p>
+            <a:pPr indent="0" marL="0">
+              <a:buNone/>
+            </a:pPr>
+            <a:r>
+              <a:rPr lang="en-US" sz="1200" b="1" spc="200" kern="0" dirty="0">
+                <a:solidFill>
+                  <a:srgbClr val="2A78D6"/>
+                </a:solidFill>
+                <a:latin typeface="Calibri" pitchFamily="34" charset="0"/>
+                <a:ea typeface="Calibri" pitchFamily="34" charset="-122"/>
+                <a:cs typeface="Calibri" pitchFamily="34" charset="-120"/>
+              </a:rPr>
               <a:t>PERSPECTIVES</a:t>
             </a:r>
             <a:endParaRPr lang="en-US" sz="1200" dirty="0"/>
@@ -7986,7 +8732,7 @@
                 <a:ea typeface="Calibri" pitchFamily="34" charset="-122"/>
                 <a:cs typeface="Calibri" pitchFamily="34" charset="-120"/>
               </a:rPr>
-              <a:t>17</a:t>
+              <a:t>18</a:t>
             </a:r>
             <a:endParaRPr lang="en-US" sz="900" dirty="0"/>
           </a:p>
@@ -8000,9 +8746,9 @@
 </p:sld>
 </file>
 
-<file path=ppt/slides/slide18.xml><?xml version="1.0" encoding="utf-8"?>
+<file path=ppt/slides/slide19.xml><?xml version="1.0" encoding="utf-8"?>
 <p:sld xmlns:a="http://schemas.openxmlformats.org/drawingml/2006/main" xmlns:r="http://schemas.openxmlformats.org/officeDocument/2006/relationships" xmlns:p="http://schemas.openxmlformats.org/presentationml/2006/main">
-  <p:cSld name="Slide 18">
+  <p:cSld name="Slide 19">
     <p:bg>
       <p:bgPr>
         <a:solidFill>
